--- a/github-strategy-guide.pptx
+++ b/github-strategy-guide.pptx
@@ -16,9 +16,10 @@
     <p:sldId id="264" r:id="rId10"/>
     <p:sldId id="265" r:id="rId11"/>
     <p:sldId id="266" r:id="rId12"/>
+    <p:sldId id="267" r:id="rId13"/>
   </p:sldIdLst>
   <p:notesMasterIdLst>
-    <p:notesMasterId r:id="rId13"/>
+    <p:notesMasterId r:id="rId14"/>
   </p:notesMasterIdLst>
   <p:sldSz cx="12192000" cy="6858000"/>
   <p:notesSz cx="6858000" cy="12192000"/>
@@ -712,6 +713,94 @@
             <a:fld id="{F7021451-1387-4CA6-816F-3879F97B5CBC}" type="slidenum">
               <a:rPr lang="en-US"/>
               <a:t>11</a:t>
+            </a:fld>
+            <a:endParaRPr lang="en-US"/>
+          </a:p>
+        </p:txBody>
+      </p:sp>
+    </p:spTree>
+    <p:extLst>
+      <p:ext uri="{BB962C8B-B14F-4D97-AF65-F5344CB8AC3E}">
+        <p14:creationId xmlns:p14="http://schemas.microsoft.com/office/powerpoint/2010/main" val="1024086991"/>
+      </p:ext>
+    </p:extLst>
+  </p:cSld>
+  <p:clrMapOvr>
+    <a:masterClrMapping/>
+  </p:clrMapOvr>
+</p:notes>
+</file>
+
+<file path=ppt/notesSlides/notesSlide12.xml><?xml version="1.0" encoding="utf-8"?>
+<p:notes xmlns:a="http://schemas.openxmlformats.org/drawingml/2006/main" xmlns:r="http://schemas.openxmlformats.org/officeDocument/2006/relationships" xmlns:p="http://schemas.openxmlformats.org/presentationml/2006/main">
+  <p:cSld>
+    <p:spTree>
+      <p:nvGrpSpPr>
+        <p:cNvPr id="1" name=""/>
+        <p:cNvGrpSpPr/>
+        <p:nvPr/>
+      </p:nvGrpSpPr>
+      <p:grpSpPr>
+        <a:xfrm>
+          <a:off x="0" y="0"/>
+          <a:ext cx="0" cy="0"/>
+          <a:chOff x="0" y="0"/>
+          <a:chExt cx="0" cy="0"/>
+        </a:xfrm>
+      </p:grpSpPr>
+      <p:sp>
+        <p:nvSpPr>
+          <p:cNvPr id="2" name="Slide Image Placeholder 1"/>
+          <p:cNvSpPr>
+            <a:spLocks noGrp="1" noRot="1" noChangeAspect="1"/>
+          </p:cNvSpPr>
+          <p:nvPr>
+            <p:ph type="sldImg"/>
+          </p:nvPr>
+        </p:nvSpPr>
+        <p:spPr/>
+      </p:sp>
+      <p:sp>
+        <p:nvSpPr>
+          <p:cNvPr id="3" name="Notes Placeholder 2"/>
+          <p:cNvSpPr>
+            <a:spLocks noGrp="1"/>
+          </p:cNvSpPr>
+          <p:nvPr>
+            <p:ph type="body" idx="1"/>
+          </p:nvPr>
+        </p:nvSpPr>
+        <p:spPr/>
+        <p:txBody>
+          <a:bodyPr/>
+          <a:lstStyle/>
+          <a:p>
+            <a:r>
+              <a:rPr lang="en-US" dirty="0"/>
+              <a:t/>
+            </a:r>
+            <a:endParaRPr lang="en-US" dirty="0"/>
+          </a:p>
+        </p:txBody>
+      </p:sp>
+      <p:sp>
+        <p:nvSpPr>
+          <p:cNvPr id="4" name="Slide Number Placeholder 3"/>
+          <p:cNvSpPr>
+            <a:spLocks noGrp="1"/>
+          </p:cNvSpPr>
+          <p:nvPr>
+            <p:ph type="sldNum" sz="quarter" idx="10"/>
+          </p:nvPr>
+        </p:nvSpPr>
+        <p:spPr/>
+        <p:txBody>
+          <a:bodyPr/>
+          <a:lstStyle/>
+          <a:p>
+            <a:fld id="{F7021451-1387-4CA6-816F-3879F97B5CBC}" type="slidenum">
+              <a:rPr lang="en-US"/>
+              <a:t>12</a:t>
             </a:fld>
             <a:endParaRPr lang="en-US"/>
           </a:p>
@@ -2030,7 +2119,7 @@
                 <a:ea typeface="Cambria" pitchFamily="34" charset="-122"/>
                 <a:cs typeface="Cambria" pitchFamily="34" charset="-120"/>
               </a:rPr>
-              <a:t>6</a:t>
+              <a:t>5</a:t>
             </a:r>
             <a:endParaRPr lang="en-US" sz="2800" dirty="0"/>
           </a:p>
@@ -2069,7 +2158,7 @@
                 <a:ea typeface="Cambria" pitchFamily="34" charset="-122"/>
                 <a:cs typeface="Cambria" pitchFamily="34" charset="-120"/>
               </a:rPr>
-              <a:t>リポジトリ運用のコツ</a:t>
+              <a:t>実証済み5ステップ(別の実例: npmライブラリ)</a:t>
             </a:r>
             <a:endParaRPr lang="en-US" sz="2600" dirty="0"/>
           </a:p>
@@ -2077,91 +2166,167 @@
       </p:sp>
       <p:sp>
         <p:nvSpPr>
-          <p:cNvPr id="4" name="Shape 2"/>
+          <p:cNvPr id="4" name="Text 2"/>
+          <p:cNvSpPr txBox="1"/>
+          <p:nvPr/>
+        </p:nvSpPr>
+        <p:spPr>
+          <a:xfrm>
+            <a:off x="548640" y="1417320"/>
+            <a:ext cx="10607040" cy="365760"/>
+          </a:xfrm>
+          <a:prstGeom prst="rect">
+            <a:avLst/>
+          </a:prstGeom>
+          <a:noFill/>
+          <a:ln/>
+        </p:spPr>
+        <p:txBody>
+          <a:bodyPr wrap="square" lIns="0" tIns="0" rIns="0" bIns="0" rtlCol="0" anchor="ctr"/>
+          <a:lstStyle/>
+          <a:p>
+            <a:pPr indent="0" marL="0">
+              <a:buNone/>
+            </a:pPr>
+            <a:r>
+              <a:rPr lang="en-US" sz="1250" i="1" dirty="0">
+                <a:solidFill>
+                  <a:srgbClr val="AEB7C4"/>
+                </a:solidFill>
+                <a:latin typeface="Calibri" pitchFamily="34" charset="0"/>
+                <a:ea typeface="Calibri" pitchFamily="34" charset="-122"/>
+                <a:cs typeface="Calibri" pitchFamily="34" charset="-120"/>
+              </a:rPr>
+              <a:t>SNSでの影響力がほぼ無い状態から、Githubスターを50まで伸ばした個人開発者の実例</a:t>
+            </a:r>
+            <a:endParaRPr lang="en-US" sz="1250" dirty="0"/>
+          </a:p>
+        </p:txBody>
+      </p:sp>
+      <p:sp>
+        <p:nvSpPr>
+          <p:cNvPr id="5" name="Shape 3"/>
           <p:cNvSpPr/>
           <p:nvPr/>
         </p:nvSpPr>
         <p:spPr>
           <a:xfrm>
-            <a:off x="548640" y="1737360"/>
-            <a:ext cx="3566160" cy="2377440"/>
-          </a:xfrm>
-          <a:prstGeom prst="roundRect">
-            <a:avLst>
-              <a:gd name="adj" fmla="val 4615"/>
-            </a:avLst>
+            <a:off x="548640" y="1965960"/>
+            <a:ext cx="384048" cy="384048"/>
+          </a:xfrm>
+          <a:prstGeom prst="ellipse">
+            <a:avLst/>
           </a:prstGeom>
           <a:solidFill>
-            <a:srgbClr val="232A34"/>
+            <a:srgbClr val="58D68D"/>
           </a:solidFill>
           <a:ln/>
         </p:spPr>
       </p:sp>
       <p:sp>
         <p:nvSpPr>
-          <p:cNvPr id="5" name="Text 3"/>
-          <p:cNvSpPr txBox="1"/>
-          <p:nvPr/>
-        </p:nvSpPr>
-        <p:spPr>
-          <a:xfrm>
-            <a:off x="822960" y="1965960"/>
-            <a:ext cx="3017520" cy="457200"/>
-          </a:xfrm>
-          <a:prstGeom prst="rect">
-            <a:avLst/>
-          </a:prstGeom>
-          <a:noFill/>
-          <a:ln/>
-        </p:spPr>
-        <p:txBody>
-          <a:bodyPr wrap="square" lIns="0" tIns="0" rIns="0" bIns="0" rtlCol="0" anchor="ctr"/>
-          <a:lstStyle/>
-          <a:p>
-            <a:pPr indent="0" marL="0">
-              <a:buNone/>
-            </a:pPr>
-            <a:r>
-              <a:rPr lang="en-US" sz="1600" b="1" dirty="0">
-                <a:solidFill>
-                  <a:srgbClr val="58D68D"/>
-                </a:solidFill>
-                <a:latin typeface="Calibri" pitchFamily="34" charset="0"/>
-                <a:ea typeface="Calibri" pitchFamily="34" charset="-122"/>
-                <a:cs typeface="Calibri" pitchFamily="34" charset="-120"/>
-              </a:rPr>
-              <a:t>コミット</a:t>
-            </a:r>
-            <a:endParaRPr lang="en-US" sz="1600" dirty="0"/>
-          </a:p>
-        </p:txBody>
-      </p:sp>
-      <p:sp>
-        <p:nvSpPr>
           <p:cNvPr id="6" name="Text 4"/>
           <p:cNvSpPr txBox="1"/>
           <p:nvPr/>
         </p:nvSpPr>
         <p:spPr>
           <a:xfrm>
-            <a:off x="822960" y="2468880"/>
-            <a:ext cx="3017520" cy="1463040"/>
-          </a:xfrm>
-          <a:prstGeom prst="rect">
-            <a:avLst/>
-          </a:prstGeom>
-          <a:noFill/>
-          <a:ln/>
-        </p:spPr>
-        <p:txBody>
-          <a:bodyPr wrap="square" lIns="0" tIns="0" rIns="0" bIns="0" rtlCol="0" anchor="ctr"/>
-          <a:lstStyle/>
-          <a:p>
-            <a:pPr indent="0" marL="0">
-              <a:buNone/>
-            </a:pPr>
-            <a:r>
-              <a:rPr lang="en-US" sz="1250" dirty="0">
+            <a:off x="548640" y="1965960"/>
+            <a:ext cx="384048" cy="384048"/>
+          </a:xfrm>
+          <a:prstGeom prst="rect">
+            <a:avLst/>
+          </a:prstGeom>
+          <a:noFill/>
+          <a:ln/>
+        </p:spPr>
+        <p:txBody>
+          <a:bodyPr wrap="square" lIns="0" tIns="0" rIns="0" bIns="0" rtlCol="0" anchor="ctr"/>
+          <a:lstStyle/>
+          <a:p>
+            <a:pPr algn="ctr" indent="0" marL="0">
+              <a:buNone/>
+            </a:pPr>
+            <a:r>
+              <a:rPr lang="en-US" sz="1300" b="1" dirty="0">
+                <a:solidFill>
+                  <a:srgbClr val="1A1F26"/>
+                </a:solidFill>
+                <a:latin typeface="Calibri" pitchFamily="34" charset="0"/>
+                <a:ea typeface="Calibri" pitchFamily="34" charset="-122"/>
+                <a:cs typeface="Calibri" pitchFamily="34" charset="-120"/>
+              </a:rPr>
+              <a:t>1</a:t>
+            </a:r>
+            <a:endParaRPr lang="en-US" sz="1300" dirty="0"/>
+          </a:p>
+        </p:txBody>
+      </p:sp>
+      <p:sp>
+        <p:nvSpPr>
+          <p:cNvPr id="7" name="Text 5"/>
+          <p:cNvSpPr txBox="1"/>
+          <p:nvPr/>
+        </p:nvSpPr>
+        <p:spPr>
+          <a:xfrm>
+            <a:off x="1097280" y="1920240"/>
+            <a:ext cx="2926080" cy="457200"/>
+          </a:xfrm>
+          <a:prstGeom prst="rect">
+            <a:avLst/>
+          </a:prstGeom>
+          <a:noFill/>
+          <a:ln/>
+        </p:spPr>
+        <p:txBody>
+          <a:bodyPr wrap="square" lIns="0" tIns="0" rIns="0" bIns="0" rtlCol="0" anchor="t"/>
+          <a:lstStyle/>
+          <a:p>
+            <a:pPr indent="0" marL="0">
+              <a:buNone/>
+            </a:pPr>
+            <a:r>
+              <a:rPr lang="en-US" sz="1300" b="1" dirty="0">
+                <a:solidFill>
+                  <a:srgbClr val="FFFFFF"/>
+                </a:solidFill>
+                <a:latin typeface="Calibri" pitchFamily="34" charset="0"/>
+                <a:ea typeface="Calibri" pitchFamily="34" charset="-122"/>
+                <a:cs typeface="Calibri" pitchFamily="34" charset="-120"/>
+              </a:rPr>
+              <a:t>英語で書く</a:t>
+            </a:r>
+            <a:endParaRPr lang="en-US" sz="1300" dirty="0"/>
+          </a:p>
+        </p:txBody>
+      </p:sp>
+      <p:sp>
+        <p:nvSpPr>
+          <p:cNvPr id="8" name="Text 6"/>
+          <p:cNvSpPr txBox="1"/>
+          <p:nvPr/>
+        </p:nvSpPr>
+        <p:spPr>
+          <a:xfrm>
+            <a:off x="4114800" y="1920240"/>
+            <a:ext cx="6858000" cy="777240"/>
+          </a:xfrm>
+          <a:prstGeom prst="rect">
+            <a:avLst/>
+          </a:prstGeom>
+          <a:noFill/>
+          <a:ln/>
+        </p:spPr>
+        <p:txBody>
+          <a:bodyPr wrap="square" lIns="0" tIns="0" rIns="0" bIns="0" rtlCol="0" anchor="ctr"/>
+          <a:lstStyle/>
+          <a:p>
+            <a:pPr indent="0" marL="0">
+              <a:buNone/>
+            </a:pPr>
+            <a:r>
+              <a:rPr lang="en-US" sz="1150" dirty="0">
                 <a:solidFill>
                   <a:srgbClr val="AEB7C4"/>
                 </a:solidFill>
@@ -2169,99 +2334,136 @@
                 <a:ea typeface="Calibri" pitchFamily="34" charset="-122"/>
                 <a:cs typeface="Calibri" pitchFamily="34" charset="-120"/>
               </a:rPr>
-              <a:t>小さく頻繁に。メッセージは「なぜ」を書く</a:t>
-            </a:r>
-            <a:endParaRPr lang="en-US" sz="1250" dirty="0"/>
-          </a:p>
-        </p:txBody>
-      </p:sp>
-      <p:sp>
-        <p:nvSpPr>
-          <p:cNvPr id="7" name="Shape 5"/>
+              <a:t>README・告知文はすべて英語にする。日本語のみだとリーチできる人数が大きく限定される</a:t>
+            </a:r>
+            <a:endParaRPr lang="en-US" sz="1150" dirty="0"/>
+          </a:p>
+        </p:txBody>
+      </p:sp>
+      <p:sp>
+        <p:nvSpPr>
+          <p:cNvPr id="9" name="Shape 7"/>
           <p:cNvSpPr/>
           <p:nvPr/>
         </p:nvSpPr>
         <p:spPr>
           <a:xfrm>
-            <a:off x="4343400" y="1737360"/>
-            <a:ext cx="3566160" cy="2377440"/>
-          </a:xfrm>
-          <a:prstGeom prst="roundRect">
-            <a:avLst>
-              <a:gd name="adj" fmla="val 4615"/>
-            </a:avLst>
+            <a:off x="548640" y="2807208"/>
+            <a:ext cx="384048" cy="384048"/>
+          </a:xfrm>
+          <a:prstGeom prst="ellipse">
+            <a:avLst/>
           </a:prstGeom>
           <a:solidFill>
-            <a:srgbClr val="232A34"/>
+            <a:srgbClr val="58D68D"/>
           </a:solidFill>
           <a:ln/>
         </p:spPr>
       </p:sp>
       <p:sp>
         <p:nvSpPr>
-          <p:cNvPr id="8" name="Text 6"/>
-          <p:cNvSpPr txBox="1"/>
-          <p:nvPr/>
-        </p:nvSpPr>
-        <p:spPr>
-          <a:xfrm>
-            <a:off x="4617720" y="1965960"/>
-            <a:ext cx="3017520" cy="457200"/>
-          </a:xfrm>
-          <a:prstGeom prst="rect">
-            <a:avLst/>
-          </a:prstGeom>
-          <a:noFill/>
-          <a:ln/>
-        </p:spPr>
-        <p:txBody>
-          <a:bodyPr wrap="square" lIns="0" tIns="0" rIns="0" bIns="0" rtlCol="0" anchor="ctr"/>
-          <a:lstStyle/>
-          <a:p>
-            <a:pPr indent="0" marL="0">
-              <a:buNone/>
-            </a:pPr>
-            <a:r>
-              <a:rPr lang="en-US" sz="1600" b="1" dirty="0">
-                <a:solidFill>
-                  <a:srgbClr val="58D68D"/>
-                </a:solidFill>
-                <a:latin typeface="Calibri" pitchFamily="34" charset="0"/>
-                <a:ea typeface="Calibri" pitchFamily="34" charset="-122"/>
-                <a:cs typeface="Calibri" pitchFamily="34" charset="-120"/>
-              </a:rPr>
-              <a:t>Issue/PR</a:t>
-            </a:r>
-            <a:endParaRPr lang="en-US" sz="1600" dirty="0"/>
-          </a:p>
-        </p:txBody>
-      </p:sp>
-      <p:sp>
-        <p:nvSpPr>
-          <p:cNvPr id="9" name="Text 7"/>
-          <p:cNvSpPr txBox="1"/>
-          <p:nvPr/>
-        </p:nvSpPr>
-        <p:spPr>
-          <a:xfrm>
-            <a:off x="4617720" y="2468880"/>
-            <a:ext cx="3017520" cy="1463040"/>
-          </a:xfrm>
-          <a:prstGeom prst="rect">
-            <a:avLst/>
-          </a:prstGeom>
-          <a:noFill/>
-          <a:ln/>
-        </p:spPr>
-        <p:txBody>
-          <a:bodyPr wrap="square" lIns="0" tIns="0" rIns="0" bIns="0" rtlCol="0" anchor="ctr"/>
-          <a:lstStyle/>
-          <a:p>
-            <a:pPr indent="0" marL="0">
-              <a:buNone/>
-            </a:pPr>
-            <a:r>
-              <a:rPr lang="en-US" sz="1250" dirty="0">
+          <p:cNvPr id="10" name="Text 8"/>
+          <p:cNvSpPr txBox="1"/>
+          <p:nvPr/>
+        </p:nvSpPr>
+        <p:spPr>
+          <a:xfrm>
+            <a:off x="548640" y="2807208"/>
+            <a:ext cx="384048" cy="384048"/>
+          </a:xfrm>
+          <a:prstGeom prst="rect">
+            <a:avLst/>
+          </a:prstGeom>
+          <a:noFill/>
+          <a:ln/>
+        </p:spPr>
+        <p:txBody>
+          <a:bodyPr wrap="square" lIns="0" tIns="0" rIns="0" bIns="0" rtlCol="0" anchor="ctr"/>
+          <a:lstStyle/>
+          <a:p>
+            <a:pPr algn="ctr" indent="0" marL="0">
+              <a:buNone/>
+            </a:pPr>
+            <a:r>
+              <a:rPr lang="en-US" sz="1300" b="1" dirty="0">
+                <a:solidFill>
+                  <a:srgbClr val="1A1F26"/>
+                </a:solidFill>
+                <a:latin typeface="Calibri" pitchFamily="34" charset="0"/>
+                <a:ea typeface="Calibri" pitchFamily="34" charset="-122"/>
+                <a:cs typeface="Calibri" pitchFamily="34" charset="-120"/>
+              </a:rPr>
+              <a:t>2</a:t>
+            </a:r>
+            <a:endParaRPr lang="en-US" sz="1300" dirty="0"/>
+          </a:p>
+        </p:txBody>
+      </p:sp>
+      <p:sp>
+        <p:nvSpPr>
+          <p:cNvPr id="11" name="Text 9"/>
+          <p:cNvSpPr txBox="1"/>
+          <p:nvPr/>
+        </p:nvSpPr>
+        <p:spPr>
+          <a:xfrm>
+            <a:off x="1097280" y="2761488"/>
+            <a:ext cx="2926080" cy="457200"/>
+          </a:xfrm>
+          <a:prstGeom prst="rect">
+            <a:avLst/>
+          </a:prstGeom>
+          <a:noFill/>
+          <a:ln/>
+        </p:spPr>
+        <p:txBody>
+          <a:bodyPr wrap="square" lIns="0" tIns="0" rIns="0" bIns="0" rtlCol="0" anchor="t"/>
+          <a:lstStyle/>
+          <a:p>
+            <a:pPr indent="0" marL="0">
+              <a:buNone/>
+            </a:pPr>
+            <a:r>
+              <a:rPr lang="en-US" sz="1300" b="1" dirty="0">
+                <a:solidFill>
+                  <a:srgbClr val="FFFFFF"/>
+                </a:solidFill>
+                <a:latin typeface="Calibri" pitchFamily="34" charset="0"/>
+                <a:ea typeface="Calibri" pitchFamily="34" charset="-122"/>
+                <a:cs typeface="Calibri" pitchFamily="34" charset="-120"/>
+              </a:rPr>
+              <a:t>アイキャッチ画像を作る</a:t>
+            </a:r>
+            <a:endParaRPr lang="en-US" sz="1300" dirty="0"/>
+          </a:p>
+        </p:txBody>
+      </p:sp>
+      <p:sp>
+        <p:nvSpPr>
+          <p:cNvPr id="12" name="Text 10"/>
+          <p:cNvSpPr txBox="1"/>
+          <p:nvPr/>
+        </p:nvSpPr>
+        <p:spPr>
+          <a:xfrm>
+            <a:off x="4114800" y="2761488"/>
+            <a:ext cx="6858000" cy="777240"/>
+          </a:xfrm>
+          <a:prstGeom prst="rect">
+            <a:avLst/>
+          </a:prstGeom>
+          <a:noFill/>
+          <a:ln/>
+        </p:spPr>
+        <p:txBody>
+          <a:bodyPr wrap="square" lIns="0" tIns="0" rIns="0" bIns="0" rtlCol="0" anchor="ctr"/>
+          <a:lstStyle/>
+          <a:p>
+            <a:pPr indent="0" marL="0">
+              <a:buNone/>
+            </a:pPr>
+            <a:r>
+              <a:rPr lang="en-US" sz="1150" dirty="0">
                 <a:solidFill>
                   <a:srgbClr val="AEB7C4"/>
                 </a:solidFill>
@@ -2269,99 +2471,136 @@
                 <a:ea typeface="Calibri" pitchFamily="34" charset="-122"/>
                 <a:cs typeface="Calibri" pitchFamily="34" charset="-120"/>
               </a:rPr>
-              <a:t>作業ログとして活用。後から経緯を追える</a:t>
-            </a:r>
-            <a:endParaRPr lang="en-US" sz="1250" dirty="0"/>
-          </a:p>
-        </p:txBody>
-      </p:sp>
-      <p:sp>
-        <p:nvSpPr>
-          <p:cNvPr id="10" name="Shape 8"/>
+              <a:t>Canva等でOGP画像を作成し、リポジトリのSocial preview設定に登録する(第一印象を左右する)</a:t>
+            </a:r>
+            <a:endParaRPr lang="en-US" sz="1150" dirty="0"/>
+          </a:p>
+        </p:txBody>
+      </p:sp>
+      <p:sp>
+        <p:nvSpPr>
+          <p:cNvPr id="13" name="Shape 11"/>
           <p:cNvSpPr/>
           <p:nvPr/>
         </p:nvSpPr>
         <p:spPr>
           <a:xfrm>
-            <a:off x="8138160" y="1737360"/>
-            <a:ext cx="3566160" cy="2377440"/>
-          </a:xfrm>
-          <a:prstGeom prst="roundRect">
-            <a:avLst>
-              <a:gd name="adj" fmla="val 4615"/>
-            </a:avLst>
+            <a:off x="548640" y="3648456"/>
+            <a:ext cx="384048" cy="384048"/>
+          </a:xfrm>
+          <a:prstGeom prst="ellipse">
+            <a:avLst/>
           </a:prstGeom>
           <a:solidFill>
-            <a:srgbClr val="232A34"/>
+            <a:srgbClr val="58D68D"/>
           </a:solidFill>
           <a:ln/>
         </p:spPr>
       </p:sp>
       <p:sp>
         <p:nvSpPr>
-          <p:cNvPr id="11" name="Text 9"/>
-          <p:cNvSpPr txBox="1"/>
-          <p:nvPr/>
-        </p:nvSpPr>
-        <p:spPr>
-          <a:xfrm>
-            <a:off x="8412480" y="1965960"/>
-            <a:ext cx="3017520" cy="457200"/>
-          </a:xfrm>
-          <a:prstGeom prst="rect">
-            <a:avLst/>
-          </a:prstGeom>
-          <a:noFill/>
-          <a:ln/>
-        </p:spPr>
-        <p:txBody>
-          <a:bodyPr wrap="square" lIns="0" tIns="0" rIns="0" bIns="0" rtlCol="0" anchor="ctr"/>
-          <a:lstStyle/>
-          <a:p>
-            <a:pPr indent="0" marL="0">
-              <a:buNone/>
-            </a:pPr>
-            <a:r>
-              <a:rPr lang="en-US" sz="1600" b="1" dirty="0">
-                <a:solidFill>
-                  <a:srgbClr val="58D68D"/>
-                </a:solidFill>
-                <a:latin typeface="Calibri" pitchFamily="34" charset="0"/>
-                <a:ea typeface="Calibri" pitchFamily="34" charset="-122"/>
-                <a:cs typeface="Calibri" pitchFamily="34" charset="-120"/>
-              </a:rPr>
-              <a:t>ブランチ運用</a:t>
-            </a:r>
-            <a:endParaRPr lang="en-US" sz="1600" dirty="0"/>
-          </a:p>
-        </p:txBody>
-      </p:sp>
-      <p:sp>
-        <p:nvSpPr>
-          <p:cNvPr id="12" name="Text 10"/>
-          <p:cNvSpPr txBox="1"/>
-          <p:nvPr/>
-        </p:nvSpPr>
-        <p:spPr>
-          <a:xfrm>
-            <a:off x="8412480" y="2468880"/>
-            <a:ext cx="3017520" cy="1463040"/>
-          </a:xfrm>
-          <a:prstGeom prst="rect">
-            <a:avLst/>
-          </a:prstGeom>
-          <a:noFill/>
-          <a:ln/>
-        </p:spPr>
-        <p:txBody>
-          <a:bodyPr wrap="square" lIns="0" tIns="0" rIns="0" bIns="0" rtlCol="0" anchor="ctr"/>
-          <a:lstStyle/>
-          <a:p>
-            <a:pPr indent="0" marL="0">
-              <a:buNone/>
-            </a:pPr>
-            <a:r>
-              <a:rPr lang="en-US" sz="1250" dirty="0">
+          <p:cNvPr id="14" name="Text 12"/>
+          <p:cNvSpPr txBox="1"/>
+          <p:nvPr/>
+        </p:nvSpPr>
+        <p:spPr>
+          <a:xfrm>
+            <a:off x="548640" y="3648456"/>
+            <a:ext cx="384048" cy="384048"/>
+          </a:xfrm>
+          <a:prstGeom prst="rect">
+            <a:avLst/>
+          </a:prstGeom>
+          <a:noFill/>
+          <a:ln/>
+        </p:spPr>
+        <p:txBody>
+          <a:bodyPr wrap="square" lIns="0" tIns="0" rIns="0" bIns="0" rtlCol="0" anchor="ctr"/>
+          <a:lstStyle/>
+          <a:p>
+            <a:pPr algn="ctr" indent="0" marL="0">
+              <a:buNone/>
+            </a:pPr>
+            <a:r>
+              <a:rPr lang="en-US" sz="1300" b="1" dirty="0">
+                <a:solidFill>
+                  <a:srgbClr val="1A1F26"/>
+                </a:solidFill>
+                <a:latin typeface="Calibri" pitchFamily="34" charset="0"/>
+                <a:ea typeface="Calibri" pitchFamily="34" charset="-122"/>
+                <a:cs typeface="Calibri" pitchFamily="34" charset="-120"/>
+              </a:rPr>
+              <a:t>3</a:t>
+            </a:r>
+            <a:endParaRPr lang="en-US" sz="1300" dirty="0"/>
+          </a:p>
+        </p:txBody>
+      </p:sp>
+      <p:sp>
+        <p:nvSpPr>
+          <p:cNvPr id="15" name="Text 13"/>
+          <p:cNvSpPr txBox="1"/>
+          <p:nvPr/>
+        </p:nvSpPr>
+        <p:spPr>
+          <a:xfrm>
+            <a:off x="1097280" y="3602736"/>
+            <a:ext cx="2926080" cy="457200"/>
+          </a:xfrm>
+          <a:prstGeom prst="rect">
+            <a:avLst/>
+          </a:prstGeom>
+          <a:noFill/>
+          <a:ln/>
+        </p:spPr>
+        <p:txBody>
+          <a:bodyPr wrap="square" lIns="0" tIns="0" rIns="0" bIns="0" rtlCol="0" anchor="t"/>
+          <a:lstStyle/>
+          <a:p>
+            <a:pPr indent="0" marL="0">
+              <a:buNone/>
+            </a:pPr>
+            <a:r>
+              <a:rPr lang="en-US" sz="1300" b="1" dirty="0">
+                <a:solidFill>
+                  <a:srgbClr val="FFFFFF"/>
+                </a:solidFill>
+                <a:latin typeface="Calibri" pitchFamily="34" charset="0"/>
+                <a:ea typeface="Calibri" pitchFamily="34" charset="-122"/>
+                <a:cs typeface="Calibri" pitchFamily="34" charset="-120"/>
+              </a:rPr>
+              <a:t>README/公式サイトをグラフィカルに</a:t>
+            </a:r>
+            <a:endParaRPr lang="en-US" sz="1300" dirty="0"/>
+          </a:p>
+        </p:txBody>
+      </p:sp>
+      <p:sp>
+        <p:nvSpPr>
+          <p:cNvPr id="16" name="Text 14"/>
+          <p:cNvSpPr txBox="1"/>
+          <p:nvPr/>
+        </p:nvSpPr>
+        <p:spPr>
+          <a:xfrm>
+            <a:off x="4114800" y="3602736"/>
+            <a:ext cx="6858000" cy="777240"/>
+          </a:xfrm>
+          <a:prstGeom prst="rect">
+            <a:avLst/>
+          </a:prstGeom>
+          <a:noFill/>
+          <a:ln/>
+        </p:spPr>
+        <p:txBody>
+          <a:bodyPr wrap="square" lIns="0" tIns="0" rIns="0" bIns="0" rtlCol="0" anchor="ctr"/>
+          <a:lstStyle/>
+          <a:p>
+            <a:pPr indent="0" marL="0">
+              <a:buNone/>
+            </a:pPr>
+            <a:r>
+              <a:rPr lang="en-US" sz="1150" dirty="0">
                 <a:solidFill>
                   <a:srgbClr val="AEB7C4"/>
                 </a:solidFill>
@@ -2369,15 +2608,328 @@
                 <a:ea typeface="Calibri" pitchFamily="34" charset="-122"/>
                 <a:cs typeface="Calibri" pitchFamily="34" charset="-120"/>
               </a:rPr>
-              <a:t>featureブランチを切り、mainは常に安定させる</a:t>
-            </a:r>
-            <a:endParaRPr lang="en-US" sz="1250" dirty="0"/>
-          </a:p>
-        </p:txBody>
-      </p:sp>
-      <p:sp>
-        <p:nvSpPr>
-          <p:cNvPr id="13" name="Text 11"/>
+              <a:t>デモ・使い方が伝わるREADMEにする。GitHub Pages等で簡易な公式サイトを作るのも有効</a:t>
+            </a:r>
+            <a:endParaRPr lang="en-US" sz="1150" dirty="0"/>
+          </a:p>
+        </p:txBody>
+      </p:sp>
+      <p:sp>
+        <p:nvSpPr>
+          <p:cNvPr id="17" name="Shape 15"/>
+          <p:cNvSpPr/>
+          <p:nvPr/>
+        </p:nvSpPr>
+        <p:spPr>
+          <a:xfrm>
+            <a:off x="548640" y="4489704"/>
+            <a:ext cx="384048" cy="384048"/>
+          </a:xfrm>
+          <a:prstGeom prst="ellipse">
+            <a:avLst/>
+          </a:prstGeom>
+          <a:solidFill>
+            <a:srgbClr val="58D68D"/>
+          </a:solidFill>
+          <a:ln/>
+        </p:spPr>
+      </p:sp>
+      <p:sp>
+        <p:nvSpPr>
+          <p:cNvPr id="18" name="Text 16"/>
+          <p:cNvSpPr txBox="1"/>
+          <p:nvPr/>
+        </p:nvSpPr>
+        <p:spPr>
+          <a:xfrm>
+            <a:off x="548640" y="4489704"/>
+            <a:ext cx="384048" cy="384048"/>
+          </a:xfrm>
+          <a:prstGeom prst="rect">
+            <a:avLst/>
+          </a:prstGeom>
+          <a:noFill/>
+          <a:ln/>
+        </p:spPr>
+        <p:txBody>
+          <a:bodyPr wrap="square" lIns="0" tIns="0" rIns="0" bIns="0" rtlCol="0" anchor="ctr"/>
+          <a:lstStyle/>
+          <a:p>
+            <a:pPr algn="ctr" indent="0" marL="0">
+              <a:buNone/>
+            </a:pPr>
+            <a:r>
+              <a:rPr lang="en-US" sz="1300" b="1" dirty="0">
+                <a:solidFill>
+                  <a:srgbClr val="1A1F26"/>
+                </a:solidFill>
+                <a:latin typeface="Calibri" pitchFamily="34" charset="0"/>
+                <a:ea typeface="Calibri" pitchFamily="34" charset="-122"/>
+                <a:cs typeface="Calibri" pitchFamily="34" charset="-120"/>
+              </a:rPr>
+              <a:t>4</a:t>
+            </a:r>
+            <a:endParaRPr lang="en-US" sz="1300" dirty="0"/>
+          </a:p>
+        </p:txBody>
+      </p:sp>
+      <p:sp>
+        <p:nvSpPr>
+          <p:cNvPr id="19" name="Text 17"/>
+          <p:cNvSpPr txBox="1"/>
+          <p:nvPr/>
+        </p:nvSpPr>
+        <p:spPr>
+          <a:xfrm>
+            <a:off x="1097280" y="4443984"/>
+            <a:ext cx="2926080" cy="457200"/>
+          </a:xfrm>
+          <a:prstGeom prst="rect">
+            <a:avLst/>
+          </a:prstGeom>
+          <a:noFill/>
+          <a:ln/>
+        </p:spPr>
+        <p:txBody>
+          <a:bodyPr wrap="square" lIns="0" tIns="0" rIns="0" bIns="0" rtlCol="0" anchor="t"/>
+          <a:lstStyle/>
+          <a:p>
+            <a:pPr indent="0" marL="0">
+              <a:buNone/>
+            </a:pPr>
+            <a:r>
+              <a:rPr lang="en-US" sz="1300" b="1" dirty="0">
+                <a:solidFill>
+                  <a:srgbClr val="FFFFFF"/>
+                </a:solidFill>
+                <a:latin typeface="Calibri" pitchFamily="34" charset="0"/>
+                <a:ea typeface="Calibri" pitchFamily="34" charset="-122"/>
+                <a:cs typeface="Calibri" pitchFamily="34" charset="-120"/>
+              </a:rPr>
+              <a:t>告知する</a:t>
+            </a:r>
+            <a:endParaRPr lang="en-US" sz="1300" dirty="0"/>
+          </a:p>
+        </p:txBody>
+      </p:sp>
+      <p:sp>
+        <p:nvSpPr>
+          <p:cNvPr id="20" name="Text 18"/>
+          <p:cNvSpPr txBox="1"/>
+          <p:nvPr/>
+        </p:nvSpPr>
+        <p:spPr>
+          <a:xfrm>
+            <a:off x="4114800" y="4443984"/>
+            <a:ext cx="6858000" cy="777240"/>
+          </a:xfrm>
+          <a:prstGeom prst="rect">
+            <a:avLst/>
+          </a:prstGeom>
+          <a:noFill/>
+          <a:ln/>
+        </p:spPr>
+        <p:txBody>
+          <a:bodyPr wrap="square" lIns="0" tIns="0" rIns="0" bIns="0" rtlCol="0" anchor="ctr"/>
+          <a:lstStyle/>
+          <a:p>
+            <a:pPr indent="0" marL="0">
+              <a:buNone/>
+            </a:pPr>
+            <a:r>
+              <a:rPr lang="en-US" sz="1150" dirty="0">
+                <a:solidFill>
+                  <a:srgbClr val="AEB7C4"/>
+                </a:solidFill>
+                <a:latin typeface="Calibri" pitchFamily="34" charset="0"/>
+                <a:ea typeface="Calibri" pitchFamily="34" charset="-122"/>
+                <a:cs typeface="Calibri" pitchFamily="34" charset="-120"/>
+              </a:rPr>
+              <a:t>Product Hunt・Zenn・Qiita・Dev.to等で公開を告知する。ただし効果は一時的(数日)</a:t>
+            </a:r>
+            <a:endParaRPr lang="en-US" sz="1150" dirty="0"/>
+          </a:p>
+        </p:txBody>
+      </p:sp>
+      <p:sp>
+        <p:nvSpPr>
+          <p:cNvPr id="21" name="Shape 19"/>
+          <p:cNvSpPr/>
+          <p:nvPr/>
+        </p:nvSpPr>
+        <p:spPr>
+          <a:xfrm>
+            <a:off x="548640" y="5330952"/>
+            <a:ext cx="384048" cy="384048"/>
+          </a:xfrm>
+          <a:prstGeom prst="ellipse">
+            <a:avLst/>
+          </a:prstGeom>
+          <a:solidFill>
+            <a:srgbClr val="58D68D"/>
+          </a:solidFill>
+          <a:ln/>
+        </p:spPr>
+      </p:sp>
+      <p:sp>
+        <p:nvSpPr>
+          <p:cNvPr id="22" name="Text 20"/>
+          <p:cNvSpPr txBox="1"/>
+          <p:nvPr/>
+        </p:nvSpPr>
+        <p:spPr>
+          <a:xfrm>
+            <a:off x="548640" y="5330952"/>
+            <a:ext cx="384048" cy="384048"/>
+          </a:xfrm>
+          <a:prstGeom prst="rect">
+            <a:avLst/>
+          </a:prstGeom>
+          <a:noFill/>
+          <a:ln/>
+        </p:spPr>
+        <p:txBody>
+          <a:bodyPr wrap="square" lIns="0" tIns="0" rIns="0" bIns="0" rtlCol="0" anchor="ctr"/>
+          <a:lstStyle/>
+          <a:p>
+            <a:pPr algn="ctr" indent="0" marL="0">
+              <a:buNone/>
+            </a:pPr>
+            <a:r>
+              <a:rPr lang="en-US" sz="1300" b="1" dirty="0">
+                <a:solidFill>
+                  <a:srgbClr val="1A1F26"/>
+                </a:solidFill>
+                <a:latin typeface="Calibri" pitchFamily="34" charset="0"/>
+                <a:ea typeface="Calibri" pitchFamily="34" charset="-122"/>
+                <a:cs typeface="Calibri" pitchFamily="34" charset="-120"/>
+              </a:rPr>
+              <a:t>5</a:t>
+            </a:r>
+            <a:endParaRPr lang="en-US" sz="1300" dirty="0"/>
+          </a:p>
+        </p:txBody>
+      </p:sp>
+      <p:sp>
+        <p:nvSpPr>
+          <p:cNvPr id="23" name="Text 21"/>
+          <p:cNvSpPr txBox="1"/>
+          <p:nvPr/>
+        </p:nvSpPr>
+        <p:spPr>
+          <a:xfrm>
+            <a:off x="1097280" y="5285232"/>
+            <a:ext cx="2926080" cy="457200"/>
+          </a:xfrm>
+          <a:prstGeom prst="rect">
+            <a:avLst/>
+          </a:prstGeom>
+          <a:noFill/>
+          <a:ln/>
+        </p:spPr>
+        <p:txBody>
+          <a:bodyPr wrap="square" lIns="0" tIns="0" rIns="0" bIns="0" rtlCol="0" anchor="t"/>
+          <a:lstStyle/>
+          <a:p>
+            <a:pPr indent="0" marL="0">
+              <a:buNone/>
+            </a:pPr>
+            <a:r>
+              <a:rPr lang="en-US" sz="1300" b="1" dirty="0">
+                <a:solidFill>
+                  <a:srgbClr val="FFFFFF"/>
+                </a:solidFill>
+                <a:latin typeface="Calibri" pitchFamily="34" charset="0"/>
+                <a:ea typeface="Calibri" pitchFamily="34" charset="-122"/>
+                <a:cs typeface="Calibri" pitchFamily="34" charset="-120"/>
+              </a:rPr>
+              <a:t>検索される記事を作る</a:t>
+            </a:r>
+            <a:endParaRPr lang="en-US" sz="1300" dirty="0"/>
+          </a:p>
+        </p:txBody>
+      </p:sp>
+      <p:sp>
+        <p:nvSpPr>
+          <p:cNvPr id="24" name="Text 22"/>
+          <p:cNvSpPr txBox="1"/>
+          <p:nvPr/>
+        </p:nvSpPr>
+        <p:spPr>
+          <a:xfrm>
+            <a:off x="4114800" y="5285232"/>
+            <a:ext cx="6858000" cy="777240"/>
+          </a:xfrm>
+          <a:prstGeom prst="rect">
+            <a:avLst/>
+          </a:prstGeom>
+          <a:noFill/>
+          <a:ln/>
+        </p:spPr>
+        <p:txBody>
+          <a:bodyPr wrap="square" lIns="0" tIns="0" rIns="0" bIns="0" rtlCol="0" anchor="ctr"/>
+          <a:lstStyle/>
+          <a:p>
+            <a:pPr indent="0" marL="0">
+              <a:buNone/>
+            </a:pPr>
+            <a:r>
+              <a:rPr lang="en-US" sz="1150" dirty="0">
+                <a:solidFill>
+                  <a:srgbClr val="AEB7C4"/>
+                </a:solidFill>
+                <a:latin typeface="Calibri" pitchFamily="34" charset="0"/>
+                <a:ea typeface="Calibri" pitchFamily="34" charset="-122"/>
+                <a:cs typeface="Calibri" pitchFamily="34" charset="-120"/>
+              </a:rPr>
+              <a:t>想定ユーザーが検索するキーワードでブログ記事を書く。即効性は無いが継続的な流入源になる</a:t>
+            </a:r>
+            <a:endParaRPr lang="en-US" sz="1150" dirty="0"/>
+          </a:p>
+        </p:txBody>
+      </p:sp>
+      <p:sp>
+        <p:nvSpPr>
+          <p:cNvPr id="25" name="Text 23"/>
+          <p:cNvSpPr txBox="1"/>
+          <p:nvPr/>
+        </p:nvSpPr>
+        <p:spPr>
+          <a:xfrm>
+            <a:off x="548640" y="6400800"/>
+            <a:ext cx="10424160" cy="320040"/>
+          </a:xfrm>
+          <a:prstGeom prst="rect">
+            <a:avLst/>
+          </a:prstGeom>
+          <a:noFill/>
+          <a:ln/>
+        </p:spPr>
+        <p:txBody>
+          <a:bodyPr wrap="square" lIns="0" tIns="0" rIns="0" bIns="0" rtlCol="0" anchor="ctr"/>
+          <a:lstStyle/>
+          <a:p>
+            <a:pPr indent="0" marL="0">
+              <a:buNone/>
+            </a:pPr>
+            <a:r>
+              <a:rPr lang="en-US" sz="1000" i="1" dirty="0">
+                <a:solidFill>
+                  <a:srgbClr val="AEB7C4"/>
+                </a:solidFill>
+                <a:latin typeface="Calibri" pitchFamily="34" charset="0"/>
+                <a:ea typeface="Calibri" pitchFamily="34" charset="-122"/>
+                <a:cs typeface="Calibri" pitchFamily="34" charset="-120"/>
+              </a:rPr>
+              <a:t>出典: npmのPDF作成ライブラリ(labelmake)の開発者によるブログ記事(1事例の実体験)</a:t>
+            </a:r>
+            <a:endParaRPr lang="en-US" sz="1000" dirty="0"/>
+          </a:p>
+        </p:txBody>
+      </p:sp>
+      <p:sp>
+        <p:nvSpPr>
+          <p:cNvPr id="26" name="Text 24"/>
           <p:cNvSpPr txBox="1"/>
           <p:nvPr/>
         </p:nvSpPr>
@@ -2425,6 +2977,455 @@
 <file path=ppt/slides/slide11.xml><?xml version="1.0" encoding="utf-8"?>
 <p:sld xmlns:a="http://schemas.openxmlformats.org/drawingml/2006/main" xmlns:r="http://schemas.openxmlformats.org/officeDocument/2006/relationships" xmlns:p="http://schemas.openxmlformats.org/presentationml/2006/main">
   <p:cSld name="Slide 11">
+    <p:bg>
+      <p:bgPr>
+        <a:solidFill>
+          <a:srgbClr val="1A1F26"/>
+        </a:solidFill>
+      </p:bgPr>
+    </p:bg>
+    <p:spTree>
+      <p:nvGrpSpPr>
+        <p:cNvPr id="1" name=""/>
+        <p:cNvGrpSpPr/>
+        <p:nvPr/>
+      </p:nvGrpSpPr>
+      <p:grpSpPr>
+        <a:xfrm>
+          <a:off x="0" y="0"/>
+          <a:ext cx="0" cy="0"/>
+          <a:chOff x="0" y="0"/>
+          <a:chExt cx="0" cy="0"/>
+        </a:xfrm>
+      </p:grpSpPr>
+      <p:sp>
+        <p:nvSpPr>
+          <p:cNvPr id="2" name="Text 0"/>
+          <p:cNvSpPr txBox="1"/>
+          <p:nvPr/>
+        </p:nvSpPr>
+        <p:spPr>
+          <a:xfrm>
+            <a:off x="548640" y="457200"/>
+            <a:ext cx="731520" cy="731520"/>
+          </a:xfrm>
+          <a:prstGeom prst="rect">
+            <a:avLst/>
+          </a:prstGeom>
+          <a:noFill/>
+          <a:ln/>
+        </p:spPr>
+        <p:txBody>
+          <a:bodyPr wrap="square" lIns="0" tIns="0" rIns="0" bIns="0" rtlCol="0" anchor="ctr"/>
+          <a:lstStyle/>
+          <a:p>
+            <a:pPr indent="0" marL="0">
+              <a:buNone/>
+            </a:pPr>
+            <a:r>
+              <a:rPr lang="en-US" sz="2800" b="1" dirty="0">
+                <a:solidFill>
+                  <a:srgbClr val="58D68D"/>
+                </a:solidFill>
+                <a:latin typeface="Cambria" pitchFamily="34" charset="0"/>
+                <a:ea typeface="Cambria" pitchFamily="34" charset="-122"/>
+                <a:cs typeface="Cambria" pitchFamily="34" charset="-120"/>
+              </a:rPr>
+              <a:t>6</a:t>
+            </a:r>
+            <a:endParaRPr lang="en-US" sz="2800" dirty="0"/>
+          </a:p>
+        </p:txBody>
+      </p:sp>
+      <p:sp>
+        <p:nvSpPr>
+          <p:cNvPr id="3" name="Text 1"/>
+          <p:cNvSpPr txBox="1"/>
+          <p:nvPr/>
+        </p:nvSpPr>
+        <p:spPr>
+          <a:xfrm>
+            <a:off x="1280160" y="502920"/>
+            <a:ext cx="9784080" cy="640080"/>
+          </a:xfrm>
+          <a:prstGeom prst="rect">
+            <a:avLst/>
+          </a:prstGeom>
+          <a:noFill/>
+          <a:ln/>
+        </p:spPr>
+        <p:txBody>
+          <a:bodyPr wrap="square" lIns="0" tIns="0" rIns="0" bIns="0" rtlCol="0" anchor="ctr"/>
+          <a:lstStyle/>
+          <a:p>
+            <a:pPr indent="0" marL="0">
+              <a:buNone/>
+            </a:pPr>
+            <a:r>
+              <a:rPr lang="en-US" sz="2600" b="1" dirty="0">
+                <a:solidFill>
+                  <a:srgbClr val="FFFFFF"/>
+                </a:solidFill>
+                <a:latin typeface="Cambria" pitchFamily="34" charset="0"/>
+                <a:ea typeface="Cambria" pitchFamily="34" charset="-122"/>
+                <a:cs typeface="Cambria" pitchFamily="34" charset="-120"/>
+              </a:rPr>
+              <a:t>リポジトリ運用のコツ</a:t>
+            </a:r>
+            <a:endParaRPr lang="en-US" sz="2600" dirty="0"/>
+          </a:p>
+        </p:txBody>
+      </p:sp>
+      <p:sp>
+        <p:nvSpPr>
+          <p:cNvPr id="4" name="Shape 2"/>
+          <p:cNvSpPr/>
+          <p:nvPr/>
+        </p:nvSpPr>
+        <p:spPr>
+          <a:xfrm>
+            <a:off x="548640" y="1737360"/>
+            <a:ext cx="3566160" cy="2377440"/>
+          </a:xfrm>
+          <a:prstGeom prst="roundRect">
+            <a:avLst>
+              <a:gd name="adj" fmla="val 4615"/>
+            </a:avLst>
+          </a:prstGeom>
+          <a:solidFill>
+            <a:srgbClr val="232A34"/>
+          </a:solidFill>
+          <a:ln/>
+        </p:spPr>
+      </p:sp>
+      <p:sp>
+        <p:nvSpPr>
+          <p:cNvPr id="5" name="Text 3"/>
+          <p:cNvSpPr txBox="1"/>
+          <p:nvPr/>
+        </p:nvSpPr>
+        <p:spPr>
+          <a:xfrm>
+            <a:off x="822960" y="1965960"/>
+            <a:ext cx="3017520" cy="457200"/>
+          </a:xfrm>
+          <a:prstGeom prst="rect">
+            <a:avLst/>
+          </a:prstGeom>
+          <a:noFill/>
+          <a:ln/>
+        </p:spPr>
+        <p:txBody>
+          <a:bodyPr wrap="square" lIns="0" tIns="0" rIns="0" bIns="0" rtlCol="0" anchor="ctr"/>
+          <a:lstStyle/>
+          <a:p>
+            <a:pPr indent="0" marL="0">
+              <a:buNone/>
+            </a:pPr>
+            <a:r>
+              <a:rPr lang="en-US" sz="1600" b="1" dirty="0">
+                <a:solidFill>
+                  <a:srgbClr val="58D68D"/>
+                </a:solidFill>
+                <a:latin typeface="Calibri" pitchFamily="34" charset="0"/>
+                <a:ea typeface="Calibri" pitchFamily="34" charset="-122"/>
+                <a:cs typeface="Calibri" pitchFamily="34" charset="-120"/>
+              </a:rPr>
+              <a:t>コミット</a:t>
+            </a:r>
+            <a:endParaRPr lang="en-US" sz="1600" dirty="0"/>
+          </a:p>
+        </p:txBody>
+      </p:sp>
+      <p:sp>
+        <p:nvSpPr>
+          <p:cNvPr id="6" name="Text 4"/>
+          <p:cNvSpPr txBox="1"/>
+          <p:nvPr/>
+        </p:nvSpPr>
+        <p:spPr>
+          <a:xfrm>
+            <a:off x="822960" y="2468880"/>
+            <a:ext cx="3017520" cy="1463040"/>
+          </a:xfrm>
+          <a:prstGeom prst="rect">
+            <a:avLst/>
+          </a:prstGeom>
+          <a:noFill/>
+          <a:ln/>
+        </p:spPr>
+        <p:txBody>
+          <a:bodyPr wrap="square" lIns="0" tIns="0" rIns="0" bIns="0" rtlCol="0" anchor="ctr"/>
+          <a:lstStyle/>
+          <a:p>
+            <a:pPr indent="0" marL="0">
+              <a:buNone/>
+            </a:pPr>
+            <a:r>
+              <a:rPr lang="en-US" sz="1250" dirty="0">
+                <a:solidFill>
+                  <a:srgbClr val="AEB7C4"/>
+                </a:solidFill>
+                <a:latin typeface="Calibri" pitchFamily="34" charset="0"/>
+                <a:ea typeface="Calibri" pitchFamily="34" charset="-122"/>
+                <a:cs typeface="Calibri" pitchFamily="34" charset="-120"/>
+              </a:rPr>
+              <a:t>小さく頻繁に。メッセージは「なぜ」を書く</a:t>
+            </a:r>
+            <a:endParaRPr lang="en-US" sz="1250" dirty="0"/>
+          </a:p>
+        </p:txBody>
+      </p:sp>
+      <p:sp>
+        <p:nvSpPr>
+          <p:cNvPr id="7" name="Shape 5"/>
+          <p:cNvSpPr/>
+          <p:nvPr/>
+        </p:nvSpPr>
+        <p:spPr>
+          <a:xfrm>
+            <a:off x="4343400" y="1737360"/>
+            <a:ext cx="3566160" cy="2377440"/>
+          </a:xfrm>
+          <a:prstGeom prst="roundRect">
+            <a:avLst>
+              <a:gd name="adj" fmla="val 4615"/>
+            </a:avLst>
+          </a:prstGeom>
+          <a:solidFill>
+            <a:srgbClr val="232A34"/>
+          </a:solidFill>
+          <a:ln/>
+        </p:spPr>
+      </p:sp>
+      <p:sp>
+        <p:nvSpPr>
+          <p:cNvPr id="8" name="Text 6"/>
+          <p:cNvSpPr txBox="1"/>
+          <p:nvPr/>
+        </p:nvSpPr>
+        <p:spPr>
+          <a:xfrm>
+            <a:off x="4617720" y="1965960"/>
+            <a:ext cx="3017520" cy="457200"/>
+          </a:xfrm>
+          <a:prstGeom prst="rect">
+            <a:avLst/>
+          </a:prstGeom>
+          <a:noFill/>
+          <a:ln/>
+        </p:spPr>
+        <p:txBody>
+          <a:bodyPr wrap="square" lIns="0" tIns="0" rIns="0" bIns="0" rtlCol="0" anchor="ctr"/>
+          <a:lstStyle/>
+          <a:p>
+            <a:pPr indent="0" marL="0">
+              <a:buNone/>
+            </a:pPr>
+            <a:r>
+              <a:rPr lang="en-US" sz="1600" b="1" dirty="0">
+                <a:solidFill>
+                  <a:srgbClr val="58D68D"/>
+                </a:solidFill>
+                <a:latin typeface="Calibri" pitchFamily="34" charset="0"/>
+                <a:ea typeface="Calibri" pitchFamily="34" charset="-122"/>
+                <a:cs typeface="Calibri" pitchFamily="34" charset="-120"/>
+              </a:rPr>
+              <a:t>Issue/PR</a:t>
+            </a:r>
+            <a:endParaRPr lang="en-US" sz="1600" dirty="0"/>
+          </a:p>
+        </p:txBody>
+      </p:sp>
+      <p:sp>
+        <p:nvSpPr>
+          <p:cNvPr id="9" name="Text 7"/>
+          <p:cNvSpPr txBox="1"/>
+          <p:nvPr/>
+        </p:nvSpPr>
+        <p:spPr>
+          <a:xfrm>
+            <a:off x="4617720" y="2468880"/>
+            <a:ext cx="3017520" cy="1463040"/>
+          </a:xfrm>
+          <a:prstGeom prst="rect">
+            <a:avLst/>
+          </a:prstGeom>
+          <a:noFill/>
+          <a:ln/>
+        </p:spPr>
+        <p:txBody>
+          <a:bodyPr wrap="square" lIns="0" tIns="0" rIns="0" bIns="0" rtlCol="0" anchor="ctr"/>
+          <a:lstStyle/>
+          <a:p>
+            <a:pPr indent="0" marL="0">
+              <a:buNone/>
+            </a:pPr>
+            <a:r>
+              <a:rPr lang="en-US" sz="1250" dirty="0">
+                <a:solidFill>
+                  <a:srgbClr val="AEB7C4"/>
+                </a:solidFill>
+                <a:latin typeface="Calibri" pitchFamily="34" charset="0"/>
+                <a:ea typeface="Calibri" pitchFamily="34" charset="-122"/>
+                <a:cs typeface="Calibri" pitchFamily="34" charset="-120"/>
+              </a:rPr>
+              <a:t>作業ログとして活用。後から経緯を追える</a:t>
+            </a:r>
+            <a:endParaRPr lang="en-US" sz="1250" dirty="0"/>
+          </a:p>
+        </p:txBody>
+      </p:sp>
+      <p:sp>
+        <p:nvSpPr>
+          <p:cNvPr id="10" name="Shape 8"/>
+          <p:cNvSpPr/>
+          <p:nvPr/>
+        </p:nvSpPr>
+        <p:spPr>
+          <a:xfrm>
+            <a:off x="8138160" y="1737360"/>
+            <a:ext cx="3566160" cy="2377440"/>
+          </a:xfrm>
+          <a:prstGeom prst="roundRect">
+            <a:avLst>
+              <a:gd name="adj" fmla="val 4615"/>
+            </a:avLst>
+          </a:prstGeom>
+          <a:solidFill>
+            <a:srgbClr val="232A34"/>
+          </a:solidFill>
+          <a:ln/>
+        </p:spPr>
+      </p:sp>
+      <p:sp>
+        <p:nvSpPr>
+          <p:cNvPr id="11" name="Text 9"/>
+          <p:cNvSpPr txBox="1"/>
+          <p:nvPr/>
+        </p:nvSpPr>
+        <p:spPr>
+          <a:xfrm>
+            <a:off x="8412480" y="1965960"/>
+            <a:ext cx="3017520" cy="457200"/>
+          </a:xfrm>
+          <a:prstGeom prst="rect">
+            <a:avLst/>
+          </a:prstGeom>
+          <a:noFill/>
+          <a:ln/>
+        </p:spPr>
+        <p:txBody>
+          <a:bodyPr wrap="square" lIns="0" tIns="0" rIns="0" bIns="0" rtlCol="0" anchor="ctr"/>
+          <a:lstStyle/>
+          <a:p>
+            <a:pPr indent="0" marL="0">
+              <a:buNone/>
+            </a:pPr>
+            <a:r>
+              <a:rPr lang="en-US" sz="1600" b="1" dirty="0">
+                <a:solidFill>
+                  <a:srgbClr val="58D68D"/>
+                </a:solidFill>
+                <a:latin typeface="Calibri" pitchFamily="34" charset="0"/>
+                <a:ea typeface="Calibri" pitchFamily="34" charset="-122"/>
+                <a:cs typeface="Calibri" pitchFamily="34" charset="-120"/>
+              </a:rPr>
+              <a:t>ブランチ運用</a:t>
+            </a:r>
+            <a:endParaRPr lang="en-US" sz="1600" dirty="0"/>
+          </a:p>
+        </p:txBody>
+      </p:sp>
+      <p:sp>
+        <p:nvSpPr>
+          <p:cNvPr id="12" name="Text 10"/>
+          <p:cNvSpPr txBox="1"/>
+          <p:nvPr/>
+        </p:nvSpPr>
+        <p:spPr>
+          <a:xfrm>
+            <a:off x="8412480" y="2468880"/>
+            <a:ext cx="3017520" cy="1463040"/>
+          </a:xfrm>
+          <a:prstGeom prst="rect">
+            <a:avLst/>
+          </a:prstGeom>
+          <a:noFill/>
+          <a:ln/>
+        </p:spPr>
+        <p:txBody>
+          <a:bodyPr wrap="square" lIns="0" tIns="0" rIns="0" bIns="0" rtlCol="0" anchor="ctr"/>
+          <a:lstStyle/>
+          <a:p>
+            <a:pPr indent="0" marL="0">
+              <a:buNone/>
+            </a:pPr>
+            <a:r>
+              <a:rPr lang="en-US" sz="1250" dirty="0">
+                <a:solidFill>
+                  <a:srgbClr val="AEB7C4"/>
+                </a:solidFill>
+                <a:latin typeface="Calibri" pitchFamily="34" charset="0"/>
+                <a:ea typeface="Calibri" pitchFamily="34" charset="-122"/>
+                <a:cs typeface="Calibri" pitchFamily="34" charset="-120"/>
+              </a:rPr>
+              <a:t>featureブランチを切り、mainは常に安定させる</a:t>
+            </a:r>
+            <a:endParaRPr lang="en-US" sz="1250" dirty="0"/>
+          </a:p>
+        </p:txBody>
+      </p:sp>
+      <p:sp>
+        <p:nvSpPr>
+          <p:cNvPr id="13" name="Text 11"/>
+          <p:cNvSpPr txBox="1"/>
+          <p:nvPr/>
+        </p:nvSpPr>
+        <p:spPr>
+          <a:xfrm>
+            <a:off x="11521440" y="6492240"/>
+            <a:ext cx="457200" cy="274320"/>
+          </a:xfrm>
+          <a:prstGeom prst="rect">
+            <a:avLst/>
+          </a:prstGeom>
+          <a:noFill/>
+          <a:ln/>
+        </p:spPr>
+        <p:txBody>
+          <a:bodyPr wrap="square" lIns="0" tIns="0" rIns="0" bIns="0" rtlCol="0" anchor="ctr"/>
+          <a:lstStyle/>
+          <a:p>
+            <a:pPr algn="r" indent="0" marL="0">
+              <a:buNone/>
+            </a:pPr>
+            <a:r>
+              <a:rPr lang="en-US" sz="1000" dirty="0">
+                <a:solidFill>
+                  <a:srgbClr val="5B6472"/>
+                </a:solidFill>
+                <a:latin typeface="Calibri" pitchFamily="34" charset="0"/>
+                <a:ea typeface="Calibri" pitchFamily="34" charset="-122"/>
+                <a:cs typeface="Calibri" pitchFamily="34" charset="-120"/>
+              </a:rPr>
+              <a:t>11</a:t>
+            </a:r>
+            <a:endParaRPr lang="en-US" sz="1000" dirty="0"/>
+          </a:p>
+        </p:txBody>
+      </p:sp>
+    </p:spTree>
+  </p:cSld>
+  <p:clrMapOvr>
+    <a:masterClrMapping/>
+  </p:clrMapOvr>
+</p:sld>
+</file>
+
+<file path=ppt/slides/slide12.xml><?xml version="1.0" encoding="utf-8"?>
+<p:sld xmlns:a="http://schemas.openxmlformats.org/drawingml/2006/main" xmlns:r="http://schemas.openxmlformats.org/officeDocument/2006/relationships" xmlns:p="http://schemas.openxmlformats.org/presentationml/2006/main">
+  <p:cSld name="Slide 12">
     <p:bg>
       <p:bgPr>
         <a:solidFill>
@@ -2903,7 +3904,7 @@
                 <a:ea typeface="Calibri" pitchFamily="34" charset="-122"/>
                 <a:cs typeface="Calibri" pitchFamily="34" charset="-120"/>
               </a:rPr>
-              <a:t>11</a:t>
+              <a:t>12</a:t>
             </a:r>
             <a:endParaRPr lang="en-US" sz="1000" dirty="0"/>
           </a:p>
@@ -3522,7 +4523,7 @@
                 <a:ea typeface="Calibri" pitchFamily="34" charset="-122"/>
                 <a:cs typeface="Calibri" pitchFamily="34" charset="-120"/>
               </a:rPr>
-              <a:t>Issue/PR・good first issue・コミュニティの実感</a:t>
+              <a:t>Issue/PR・good first issue・shields.io実例・コミュニティの実感</a:t>
             </a:r>
             <a:endParaRPr lang="en-US" sz="1100" dirty="0"/>
           </a:p>
@@ -6974,7 +7975,7 @@
                 <a:ea typeface="Cambria" pitchFamily="34" charset="-122"/>
                 <a:cs typeface="Cambria" pitchFamily="34" charset="-120"/>
               </a:rPr>
-              <a:t>5</a:t>
+              <a:t>4</a:t>
             </a:r>
             <a:endParaRPr lang="en-US" sz="2800" dirty="0"/>
           </a:p>
@@ -7013,7 +8014,7 @@
                 <a:ea typeface="Cambria" pitchFamily="34" charset="-122"/>
                 <a:cs typeface="Cambria" pitchFamily="34" charset="-120"/>
               </a:rPr>
-              <a:t>宣伝チャネルの効果(実例ケーススタディ)</a:t>
+              <a:t>貢献先の実例: badges/shields (shields.io)</a:t>
             </a:r>
             <a:endParaRPr lang="en-US" sz="2600" dirty="0"/>
           </a:p>
@@ -7052,7 +8053,7 @@
                 <a:ea typeface="Calibri" pitchFamily="34" charset="-122"/>
                 <a:cs typeface="Calibri" pitchFamily="34" charset="-120"/>
               </a:rPr>
-              <a:t>個人OSS開発者が、公開後数ヶ月で400+スターを集めた際の実測データ(1事例)</a:t>
+              <a:t>READMEでよく見るバッジサービス「shields.io」も、実は誰でも貢献できるOSS</a:t>
             </a:r>
             <a:endParaRPr lang="en-US" sz="1250" dirty="0"/>
           </a:p>
@@ -7067,11 +8068,11 @@
         <p:spPr>
           <a:xfrm>
             <a:off x="548640" y="1920240"/>
-            <a:ext cx="5212080" cy="3931920"/>
+            <a:ext cx="3429000" cy="1371600"/>
           </a:xfrm>
           <a:prstGeom prst="roundRect">
             <a:avLst>
-              <a:gd name="adj" fmla="val 2326"/>
+              <a:gd name="adj" fmla="val 6667"/>
             </a:avLst>
           </a:prstGeom>
           <a:solidFill>
@@ -7083,6 +8084,13 @@
             </a:solidFill>
             <a:prstDash val="solid"/>
           </a:ln>
+          <a:effectLst>
+            <a:outerShdw sx="100000" sy="100000" kx="0" ky="0" algn="bl" rotWithShape="0" blurRad="76200" dist="25400" dir="5400000">
+              <a:srgbClr val="000000">
+                <a:alpha val="10000"/>
+              </a:srgbClr>
+            </a:outerShdw>
+          </a:effectLst>
         </p:spPr>
       </p:sp>
       <p:sp>
@@ -7093,34 +8101,34 @@
         </p:nvSpPr>
         <p:spPr>
           <a:xfrm>
-            <a:off x="822960" y="2103120"/>
-            <a:ext cx="4754880" cy="365760"/>
-          </a:xfrm>
-          <a:prstGeom prst="rect">
-            <a:avLst/>
-          </a:prstGeom>
-          <a:noFill/>
-          <a:ln/>
-        </p:spPr>
-        <p:txBody>
-          <a:bodyPr wrap="square" lIns="0" tIns="0" rIns="0" bIns="0" rtlCol="0" anchor="ctr"/>
-          <a:lstStyle/>
-          <a:p>
-            <a:pPr indent="0" marL="0">
-              <a:buNone/>
-            </a:pPr>
-            <a:r>
-              <a:rPr lang="en-US" sz="1400" b="1" dirty="0">
-                <a:solidFill>
-                  <a:srgbClr val="58D68D"/>
-                </a:solidFill>
-                <a:latin typeface="Calibri" pitchFamily="34" charset="0"/>
-                <a:ea typeface="Calibri" pitchFamily="34" charset="-122"/>
-                <a:cs typeface="Calibri" pitchFamily="34" charset="-120"/>
-              </a:rPr>
-              <a:t>🚀 効果があったチャネル</a:t>
-            </a:r>
-            <a:endParaRPr lang="en-US" sz="1400" dirty="0"/>
+            <a:off x="731520" y="2057400"/>
+            <a:ext cx="3063240" cy="594360"/>
+          </a:xfrm>
+          <a:prstGeom prst="rect">
+            <a:avLst/>
+          </a:prstGeom>
+          <a:noFill/>
+          <a:ln/>
+        </p:spPr>
+        <p:txBody>
+          <a:bodyPr wrap="square" lIns="0" tIns="0" rIns="0" bIns="0" rtlCol="0" anchor="ctr"/>
+          <a:lstStyle/>
+          <a:p>
+            <a:pPr indent="0" marL="0">
+              <a:buNone/>
+            </a:pPr>
+            <a:r>
+              <a:rPr lang="en-US" sz="2400" b="1" dirty="0">
+                <a:solidFill>
+                  <a:srgbClr val="B084F5"/>
+                </a:solidFill>
+                <a:latin typeface="Calibri" pitchFamily="34" charset="0"/>
+                <a:ea typeface="Calibri" pitchFamily="34" charset="-122"/>
+                <a:cs typeface="Calibri" pitchFamily="34" charset="-120"/>
+              </a:rPr>
+              <a:t>27.2k</a:t>
+            </a:r>
+            <a:endParaRPr lang="en-US" sz="2400" dirty="0"/>
           </a:p>
         </p:txBody>
       </p:sp>
@@ -7132,63 +8140,24 @@
         </p:nvSpPr>
         <p:spPr>
           <a:xfrm>
-            <a:off x="822960" y="2560320"/>
-            <a:ext cx="4663440" cy="274320"/>
-          </a:xfrm>
-          <a:prstGeom prst="rect">
-            <a:avLst/>
-          </a:prstGeom>
-          <a:noFill/>
-          <a:ln/>
-        </p:spPr>
-        <p:txBody>
-          <a:bodyPr wrap="square" lIns="0" tIns="0" rIns="0" bIns="0" rtlCol="0" anchor="ctr"/>
-          <a:lstStyle/>
-          <a:p>
-            <a:pPr indent="0" marL="0">
-              <a:buNone/>
-            </a:pPr>
-            <a:r>
-              <a:rPr lang="en-US" sz="1250" b="1" dirty="0">
-                <a:solidFill>
-                  <a:srgbClr val="1A1F26"/>
-                </a:solidFill>
-                <a:latin typeface="Calibri" pitchFamily="34" charset="0"/>
-                <a:ea typeface="Calibri" pitchFamily="34" charset="-122"/>
-                <a:cs typeface="Calibri" pitchFamily="34" charset="-120"/>
-              </a:rPr>
-              <a:t>Hacker News</a:t>
-            </a:r>
-            <a:endParaRPr lang="en-US" sz="1250" dirty="0"/>
-          </a:p>
-        </p:txBody>
-      </p:sp>
-      <p:sp>
-        <p:nvSpPr>
-          <p:cNvPr id="8" name="Text 6"/>
-          <p:cNvSpPr txBox="1"/>
-          <p:nvPr/>
-        </p:nvSpPr>
-        <p:spPr>
-          <a:xfrm>
-            <a:off x="822960" y="2834640"/>
-            <a:ext cx="4663440" cy="640080"/>
-          </a:xfrm>
-          <a:prstGeom prst="rect">
-            <a:avLst/>
-          </a:prstGeom>
-          <a:noFill/>
-          <a:ln/>
-        </p:spPr>
-        <p:txBody>
-          <a:bodyPr wrap="square" lIns="0" tIns="0" rIns="0" bIns="0" rtlCol="0" anchor="ctr"/>
-          <a:lstStyle/>
-          <a:p>
-            <a:pPr indent="0" marL="0">
-              <a:buNone/>
-            </a:pPr>
-            <a:r>
-              <a:rPr lang="en-US" sz="1050" dirty="0">
+            <a:off x="731520" y="2697480"/>
+            <a:ext cx="3063240" cy="457200"/>
+          </a:xfrm>
+          <a:prstGeom prst="rect">
+            <a:avLst/>
+          </a:prstGeom>
+          <a:noFill/>
+          <a:ln/>
+        </p:spPr>
+        <p:txBody>
+          <a:bodyPr wrap="square" lIns="0" tIns="0" rIns="0" bIns="0" rtlCol="0" anchor="ctr"/>
+          <a:lstStyle/>
+          <a:p>
+            <a:pPr indent="0" marL="0">
+              <a:buNone/>
+            </a:pPr>
+            <a:r>
+              <a:rPr lang="en-US" sz="1150" dirty="0">
                 <a:solidFill>
                   <a:srgbClr val="5B6472"/>
                 </a:solidFill>
@@ -7196,260 +8165,26 @@
                 <a:ea typeface="Calibri" pitchFamily="34" charset="-122"/>
                 <a:cs typeface="Calibri" pitchFamily="34" charset="-120"/>
               </a:rPr>
-              <a:t>「Show HN:」プレフィックスを付けて投稿する文化があり、Showタブ・トップページに掲載。最も効果大</a:t>
-            </a:r>
-            <a:endParaRPr lang="en-US" sz="1050" dirty="0"/>
-          </a:p>
-        </p:txBody>
-      </p:sp>
-      <p:sp>
-        <p:nvSpPr>
-          <p:cNvPr id="9" name="Text 7"/>
-          <p:cNvSpPr txBox="1"/>
-          <p:nvPr/>
-        </p:nvSpPr>
-        <p:spPr>
-          <a:xfrm>
-            <a:off x="822960" y="3383280"/>
-            <a:ext cx="4663440" cy="274320"/>
-          </a:xfrm>
-          <a:prstGeom prst="rect">
-            <a:avLst/>
-          </a:prstGeom>
-          <a:noFill/>
-          <a:ln/>
-        </p:spPr>
-        <p:txBody>
-          <a:bodyPr wrap="square" lIns="0" tIns="0" rIns="0" bIns="0" rtlCol="0" anchor="ctr"/>
-          <a:lstStyle/>
-          <a:p>
-            <a:pPr indent="0" marL="0">
-              <a:buNone/>
-            </a:pPr>
-            <a:r>
-              <a:rPr lang="en-US" sz="1250" b="1" dirty="0">
-                <a:solidFill>
-                  <a:srgbClr val="1A1F26"/>
-                </a:solidFill>
-                <a:latin typeface="Calibri" pitchFamily="34" charset="0"/>
-                <a:ea typeface="Calibri" pitchFamily="34" charset="-122"/>
-                <a:cs typeface="Calibri" pitchFamily="34" charset="-120"/>
-              </a:rPr>
-              <a:t>Twitter/X</a:t>
-            </a:r>
-            <a:endParaRPr lang="en-US" sz="1250" dirty="0"/>
-          </a:p>
-        </p:txBody>
-      </p:sp>
-      <p:sp>
-        <p:nvSpPr>
-          <p:cNvPr id="10" name="Text 8"/>
-          <p:cNvSpPr txBox="1"/>
-          <p:nvPr/>
-        </p:nvSpPr>
-        <p:spPr>
-          <a:xfrm>
-            <a:off x="822960" y="3657600"/>
-            <a:ext cx="4663440" cy="640080"/>
-          </a:xfrm>
-          <a:prstGeom prst="rect">
-            <a:avLst/>
-          </a:prstGeom>
-          <a:noFill/>
-          <a:ln/>
-        </p:spPr>
-        <p:txBody>
-          <a:bodyPr wrap="square" lIns="0" tIns="0" rIns="0" bIns="0" rtlCol="0" anchor="ctr"/>
-          <a:lstStyle/>
-          <a:p>
-            <a:pPr indent="0" marL="0">
-              <a:buNone/>
-            </a:pPr>
-            <a:r>
-              <a:rPr lang="en-US" sz="1050" dirty="0">
-                <a:solidFill>
-                  <a:srgbClr val="5B6472"/>
-                </a:solidFill>
-                <a:latin typeface="Calibri" pitchFamily="34" charset="0"/>
-                <a:ea typeface="Calibri" pitchFamily="34" charset="-122"/>
-                <a:cs typeface="Calibri" pitchFamily="34" charset="-120"/>
-              </a:rPr>
-              <a:t>自分の発信単独では弱いが、フォロワーの多いインフルエンサーが拡散すると効果大</a:t>
-            </a:r>
-            <a:endParaRPr lang="en-US" sz="1050" dirty="0"/>
-          </a:p>
-        </p:txBody>
-      </p:sp>
-      <p:sp>
-        <p:nvSpPr>
-          <p:cNvPr id="11" name="Text 9"/>
-          <p:cNvSpPr txBox="1"/>
-          <p:nvPr/>
-        </p:nvSpPr>
-        <p:spPr>
-          <a:xfrm>
-            <a:off x="822960" y="4206240"/>
-            <a:ext cx="4663440" cy="274320"/>
-          </a:xfrm>
-          <a:prstGeom prst="rect">
-            <a:avLst/>
-          </a:prstGeom>
-          <a:noFill/>
-          <a:ln/>
-        </p:spPr>
-        <p:txBody>
-          <a:bodyPr wrap="square" lIns="0" tIns="0" rIns="0" bIns="0" rtlCol="0" anchor="ctr"/>
-          <a:lstStyle/>
-          <a:p>
-            <a:pPr indent="0" marL="0">
-              <a:buNone/>
-            </a:pPr>
-            <a:r>
-              <a:rPr lang="en-US" sz="1250" b="1" dirty="0">
-                <a:solidFill>
-                  <a:srgbClr val="1A1F26"/>
-                </a:solidFill>
-                <a:latin typeface="Calibri" pitchFamily="34" charset="0"/>
-                <a:ea typeface="Calibri" pitchFamily="34" charset="-122"/>
-                <a:cs typeface="Calibri" pitchFamily="34" charset="-120"/>
-              </a:rPr>
-              <a:t>GitHub内の連鎖</a:t>
-            </a:r>
-            <a:endParaRPr lang="en-US" sz="1250" dirty="0"/>
-          </a:p>
-        </p:txBody>
-      </p:sp>
-      <p:sp>
-        <p:nvSpPr>
-          <p:cNvPr id="12" name="Text 10"/>
-          <p:cNvSpPr txBox="1"/>
-          <p:nvPr/>
-        </p:nvSpPr>
-        <p:spPr>
-          <a:xfrm>
-            <a:off x="822960" y="4480560"/>
-            <a:ext cx="4663440" cy="640080"/>
-          </a:xfrm>
-          <a:prstGeom prst="rect">
-            <a:avLst/>
-          </a:prstGeom>
-          <a:noFill/>
-          <a:ln/>
-        </p:spPr>
-        <p:txBody>
-          <a:bodyPr wrap="square" lIns="0" tIns="0" rIns="0" bIns="0" rtlCol="0" anchor="ctr"/>
-          <a:lstStyle/>
-          <a:p>
-            <a:pPr indent="0" marL="0">
-              <a:buNone/>
-            </a:pPr>
-            <a:r>
-              <a:rPr lang="en-US" sz="1050" dirty="0">
-                <a:solidFill>
-                  <a:srgbClr val="5B6472"/>
-                </a:solidFill>
-                <a:latin typeface="Calibri" pitchFamily="34" charset="0"/>
-                <a:ea typeface="Calibri" pitchFamily="34" charset="-122"/>
-                <a:cs typeface="Calibri" pitchFamily="34" charset="-120"/>
-              </a:rPr>
-              <a:t>フォロー中ユーザーがStarしたリポジトリがフィードに流れる仕組みがあり、フォロワーの多い人がStarすると連鎖的に増える</a:t>
-            </a:r>
-            <a:endParaRPr lang="en-US" sz="1050" dirty="0"/>
-          </a:p>
-        </p:txBody>
-      </p:sp>
-      <p:sp>
-        <p:nvSpPr>
-          <p:cNvPr id="13" name="Text 11"/>
-          <p:cNvSpPr txBox="1"/>
-          <p:nvPr/>
-        </p:nvSpPr>
-        <p:spPr>
-          <a:xfrm>
-            <a:off x="822960" y="5029200"/>
-            <a:ext cx="4663440" cy="274320"/>
-          </a:xfrm>
-          <a:prstGeom prst="rect">
-            <a:avLst/>
-          </a:prstGeom>
-          <a:noFill/>
-          <a:ln/>
-        </p:spPr>
-        <p:txBody>
-          <a:bodyPr wrap="square" lIns="0" tIns="0" rIns="0" bIns="0" rtlCol="0" anchor="ctr"/>
-          <a:lstStyle/>
-          <a:p>
-            <a:pPr indent="0" marL="0">
-              <a:buNone/>
-            </a:pPr>
-            <a:r>
-              <a:rPr lang="en-US" sz="1250" b="1" dirty="0">
-                <a:solidFill>
-                  <a:srgbClr val="1A1F26"/>
-                </a:solidFill>
-                <a:latin typeface="Calibri" pitchFamily="34" charset="0"/>
-                <a:ea typeface="Calibri" pitchFamily="34" charset="-122"/>
-                <a:cs typeface="Calibri" pitchFamily="34" charset="-120"/>
-              </a:rPr>
-              <a:t>韓国版HN(news.hada.io)</a:t>
-            </a:r>
-            <a:endParaRPr lang="en-US" sz="1250" dirty="0"/>
-          </a:p>
-        </p:txBody>
-      </p:sp>
-      <p:sp>
-        <p:nvSpPr>
-          <p:cNvPr id="14" name="Text 12"/>
-          <p:cNvSpPr txBox="1"/>
-          <p:nvPr/>
-        </p:nvSpPr>
-        <p:spPr>
-          <a:xfrm>
-            <a:off x="822960" y="5303520"/>
-            <a:ext cx="4663440" cy="640080"/>
-          </a:xfrm>
-          <a:prstGeom prst="rect">
-            <a:avLst/>
-          </a:prstGeom>
-          <a:noFill/>
-          <a:ln/>
-        </p:spPr>
-        <p:txBody>
-          <a:bodyPr wrap="square" lIns="0" tIns="0" rIns="0" bIns="0" rtlCol="0" anchor="ctr"/>
-          <a:lstStyle/>
-          <a:p>
-            <a:pPr indent="0" marL="0">
-              <a:buNone/>
-            </a:pPr>
-            <a:r>
-              <a:rPr lang="en-US" sz="1050" dirty="0">
-                <a:solidFill>
-                  <a:srgbClr val="5B6472"/>
-                </a:solidFill>
-                <a:latin typeface="Calibri" pitchFamily="34" charset="0"/>
-                <a:ea typeface="Calibri" pitchFamily="34" charset="-122"/>
-                <a:cs typeface="Calibri" pitchFamily="34" charset="-120"/>
-              </a:rPr>
-              <a:t>現地の誰かが投稿したことで、そこから約40スターが集まった</a:t>
-            </a:r>
-            <a:endParaRPr lang="en-US" sz="1050" dirty="0"/>
-          </a:p>
-        </p:txBody>
-      </p:sp>
-      <p:sp>
-        <p:nvSpPr>
-          <p:cNvPr id="15" name="Shape 13"/>
+              <a:t>GitHub Stars</a:t>
+            </a:r>
+            <a:endParaRPr lang="en-US" sz="1150" dirty="0"/>
+          </a:p>
+        </p:txBody>
+      </p:sp>
+      <p:sp>
+        <p:nvSpPr>
+          <p:cNvPr id="8" name="Shape 6"/>
           <p:cNvSpPr/>
           <p:nvPr/>
         </p:nvSpPr>
         <p:spPr>
           <a:xfrm>
-            <a:off x="6035040" y="1920240"/>
-            <a:ext cx="5212080" cy="3931920"/>
+            <a:off x="4206240" y="1920240"/>
+            <a:ext cx="3429000" cy="1371600"/>
           </a:xfrm>
           <a:prstGeom prst="roundRect">
             <a:avLst>
-              <a:gd name="adj" fmla="val 2326"/>
+              <a:gd name="adj" fmla="val 6667"/>
             </a:avLst>
           </a:prstGeom>
           <a:solidFill>
@@ -7461,362 +8196,353 @@
             </a:solidFill>
             <a:prstDash val="solid"/>
           </a:ln>
-        </p:spPr>
+          <a:effectLst>
+            <a:outerShdw sx="100000" sy="100000" kx="0" ky="0" algn="bl" rotWithShape="0" blurRad="76200" dist="25400" dir="5400000">
+              <a:srgbClr val="000000">
+                <a:alpha val="10000"/>
+              </a:srgbClr>
+            </a:outerShdw>
+          </a:effectLst>
+        </p:spPr>
+      </p:sp>
+      <p:sp>
+        <p:nvSpPr>
+          <p:cNvPr id="9" name="Text 7"/>
+          <p:cNvSpPr txBox="1"/>
+          <p:nvPr/>
+        </p:nvSpPr>
+        <p:spPr>
+          <a:xfrm>
+            <a:off x="4389120" y="2057400"/>
+            <a:ext cx="3063240" cy="594360"/>
+          </a:xfrm>
+          <a:prstGeom prst="rect">
+            <a:avLst/>
+          </a:prstGeom>
+          <a:noFill/>
+          <a:ln/>
+        </p:spPr>
+        <p:txBody>
+          <a:bodyPr wrap="square" lIns="0" tIns="0" rIns="0" bIns="0" rtlCol="0" anchor="ctr"/>
+          <a:lstStyle/>
+          <a:p>
+            <a:pPr indent="0" marL="0">
+              <a:buNone/>
+            </a:pPr>
+            <a:r>
+              <a:rPr lang="en-US" sz="2400" b="1" dirty="0">
+                <a:solidFill>
+                  <a:srgbClr val="B084F5"/>
+                </a:solidFill>
+                <a:latin typeface="Calibri" pitchFamily="34" charset="0"/>
+                <a:ea typeface="Calibri" pitchFamily="34" charset="-122"/>
+                <a:cs typeface="Calibri" pitchFamily="34" charset="-120"/>
+              </a:rPr>
+              <a:t>1.6B+/月</a:t>
+            </a:r>
+            <a:endParaRPr lang="en-US" sz="2400" dirty="0"/>
+          </a:p>
+        </p:txBody>
+      </p:sp>
+      <p:sp>
+        <p:nvSpPr>
+          <p:cNvPr id="10" name="Text 8"/>
+          <p:cNvSpPr txBox="1"/>
+          <p:nvPr/>
+        </p:nvSpPr>
+        <p:spPr>
+          <a:xfrm>
+            <a:off x="4389120" y="2697480"/>
+            <a:ext cx="3063240" cy="457200"/>
+          </a:xfrm>
+          <a:prstGeom prst="rect">
+            <a:avLst/>
+          </a:prstGeom>
+          <a:noFill/>
+          <a:ln/>
+        </p:spPr>
+        <p:txBody>
+          <a:bodyPr wrap="square" lIns="0" tIns="0" rIns="0" bIns="0" rtlCol="0" anchor="ctr"/>
+          <a:lstStyle/>
+          <a:p>
+            <a:pPr indent="0" marL="0">
+              <a:buNone/>
+            </a:pPr>
+            <a:r>
+              <a:rPr lang="en-US" sz="1150" dirty="0">
+                <a:solidFill>
+                  <a:srgbClr val="5B6472"/>
+                </a:solidFill>
+                <a:latin typeface="Calibri" pitchFamily="34" charset="0"/>
+                <a:ea typeface="Calibri" pitchFamily="34" charset="-122"/>
+                <a:cs typeface="Calibri" pitchFamily="34" charset="-120"/>
+              </a:rPr>
+              <a:t>配信バッジ画像数</a:t>
+            </a:r>
+            <a:endParaRPr lang="en-US" sz="1150" dirty="0"/>
+          </a:p>
+        </p:txBody>
+      </p:sp>
+      <p:sp>
+        <p:nvSpPr>
+          <p:cNvPr id="11" name="Shape 9"/>
+          <p:cNvSpPr/>
+          <p:nvPr/>
+        </p:nvSpPr>
+        <p:spPr>
+          <a:xfrm>
+            <a:off x="7863840" y="1920240"/>
+            <a:ext cx="3429000" cy="1371600"/>
+          </a:xfrm>
+          <a:prstGeom prst="roundRect">
+            <a:avLst>
+              <a:gd name="adj" fmla="val 6667"/>
+            </a:avLst>
+          </a:prstGeom>
+          <a:solidFill>
+            <a:srgbClr val="FFFFFF"/>
+          </a:solidFill>
+          <a:ln w="12700">
+            <a:solidFill>
+              <a:srgbClr val="E3E6EA"/>
+            </a:solidFill>
+            <a:prstDash val="solid"/>
+          </a:ln>
+          <a:effectLst>
+            <a:outerShdw sx="100000" sy="100000" kx="0" ky="0" algn="bl" rotWithShape="0" blurRad="76200" dist="25400" dir="5400000">
+              <a:srgbClr val="000000">
+                <a:alpha val="10000"/>
+              </a:srgbClr>
+            </a:outerShdw>
+          </a:effectLst>
+        </p:spPr>
+      </p:sp>
+      <p:sp>
+        <p:nvSpPr>
+          <p:cNvPr id="12" name="Text 10"/>
+          <p:cNvSpPr txBox="1"/>
+          <p:nvPr/>
+        </p:nvSpPr>
+        <p:spPr>
+          <a:xfrm>
+            <a:off x="8046720" y="2057400"/>
+            <a:ext cx="3063240" cy="594360"/>
+          </a:xfrm>
+          <a:prstGeom prst="rect">
+            <a:avLst/>
+          </a:prstGeom>
+          <a:noFill/>
+          <a:ln/>
+        </p:spPr>
+        <p:txBody>
+          <a:bodyPr wrap="square" lIns="0" tIns="0" rIns="0" bIns="0" rtlCol="0" anchor="ctr"/>
+          <a:lstStyle/>
+          <a:p>
+            <a:pPr indent="0" marL="0">
+              <a:buNone/>
+            </a:pPr>
+            <a:r>
+              <a:rPr lang="en-US" sz="2400" b="1" dirty="0">
+                <a:solidFill>
+                  <a:srgbClr val="B084F5"/>
+                </a:solidFill>
+                <a:latin typeface="Calibri" pitchFamily="34" charset="0"/>
+                <a:ea typeface="Calibri" pitchFamily="34" charset="-122"/>
+                <a:cs typeface="Calibri" pitchFamily="34" charset="-120"/>
+              </a:rPr>
+              <a:t>MIT / Apache 2.0</a:t>
+            </a:r>
+            <a:endParaRPr lang="en-US" sz="2400" dirty="0"/>
+          </a:p>
+        </p:txBody>
+      </p:sp>
+      <p:sp>
+        <p:nvSpPr>
+          <p:cNvPr id="13" name="Text 11"/>
+          <p:cNvSpPr txBox="1"/>
+          <p:nvPr/>
+        </p:nvSpPr>
+        <p:spPr>
+          <a:xfrm>
+            <a:off x="8046720" y="2697480"/>
+            <a:ext cx="3063240" cy="457200"/>
+          </a:xfrm>
+          <a:prstGeom prst="rect">
+            <a:avLst/>
+          </a:prstGeom>
+          <a:noFill/>
+          <a:ln/>
+        </p:spPr>
+        <p:txBody>
+          <a:bodyPr wrap="square" lIns="0" tIns="0" rIns="0" bIns="0" rtlCol="0" anchor="ctr"/>
+          <a:lstStyle/>
+          <a:p>
+            <a:pPr indent="0" marL="0">
+              <a:buNone/>
+            </a:pPr>
+            <a:r>
+              <a:rPr lang="en-US" sz="1150" dirty="0">
+                <a:solidFill>
+                  <a:srgbClr val="5B6472"/>
+                </a:solidFill>
+                <a:latin typeface="Calibri" pitchFamily="34" charset="0"/>
+                <a:ea typeface="Calibri" pitchFamily="34" charset="-122"/>
+                <a:cs typeface="Calibri" pitchFamily="34" charset="-120"/>
+              </a:rPr>
+              <a:t>デュアルライセンス</a:t>
+            </a:r>
+            <a:endParaRPr lang="en-US" sz="1150" dirty="0"/>
+          </a:p>
+        </p:txBody>
+      </p:sp>
+      <p:sp>
+        <p:nvSpPr>
+          <p:cNvPr id="14" name="Text 12"/>
+          <p:cNvSpPr txBox="1"/>
+          <p:nvPr/>
+        </p:nvSpPr>
+        <p:spPr>
+          <a:xfrm>
+            <a:off x="548640" y="3566160"/>
+            <a:ext cx="10607040" cy="365760"/>
+          </a:xfrm>
+          <a:prstGeom prst="rect">
+            <a:avLst/>
+          </a:prstGeom>
+          <a:noFill/>
+          <a:ln/>
+        </p:spPr>
+        <p:txBody>
+          <a:bodyPr wrap="square" lIns="0" tIns="0" rIns="0" bIns="0" rtlCol="0" anchor="ctr"/>
+          <a:lstStyle/>
+          <a:p>
+            <a:pPr indent="0" marL="0">
+              <a:buNone/>
+            </a:pPr>
+            <a:r>
+              <a:rPr lang="en-US" sz="1400" b="1" dirty="0">
+                <a:solidFill>
+                  <a:srgbClr val="1A1F26"/>
+                </a:solidFill>
+                <a:latin typeface="Calibri" pitchFamily="34" charset="0"/>
+                <a:ea typeface="Calibri" pitchFamily="34" charset="-122"/>
+                <a:cs typeface="Calibri" pitchFamily="34" charset="-120"/>
+              </a:rPr>
+              <a:t>貢献のしやすさ(実際に確認できる情報)</a:t>
+            </a:r>
+            <a:endParaRPr lang="en-US" sz="1400" dirty="0"/>
+          </a:p>
+        </p:txBody>
+      </p:sp>
+      <p:sp>
+        <p:nvSpPr>
+          <p:cNvPr id="15" name="Text 13"/>
+          <p:cNvSpPr txBox="1"/>
+          <p:nvPr/>
+        </p:nvSpPr>
+        <p:spPr>
+          <a:xfrm>
+            <a:off x="548640" y="3977640"/>
+            <a:ext cx="10607040" cy="1737360"/>
+          </a:xfrm>
+          <a:prstGeom prst="rect">
+            <a:avLst/>
+          </a:prstGeom>
+          <a:noFill/>
+          <a:ln/>
+        </p:spPr>
+        <p:txBody>
+          <a:bodyPr wrap="square" lIns="0" tIns="0" rIns="0" bIns="0" rtlCol="0" anchor="ctr"/>
+          <a:lstStyle/>
+          <a:p>
+            <a:pPr marL="342900" indent="-342900">
+              <a:spcAft>
+                <a:spcPts val="600"/>
+              </a:spcAft>
+              <a:buSzPct val="100000"/>
+              <a:buChar char="•"/>
+            </a:pPr>
+            <a:r>
+              <a:rPr lang="en-US" sz="1250" dirty="0">
+                <a:solidFill>
+                  <a:srgbClr val="5B6472"/>
+                </a:solidFill>
+                <a:latin typeface="Calibri" pitchFamily="34" charset="0"/>
+                <a:ea typeface="Calibri" pitchFamily="34" charset="-122"/>
+                <a:cs typeface="Calibri" pitchFamily="34" charset="-120"/>
+              </a:rPr>
+              <a:t>CONTRIBUTING.md に貢献ガイドラインが整備されている</a:t>
+            </a:r>
+            <a:endParaRPr lang="en-US" sz="1250" dirty="0"/>
+          </a:p>
+          <a:p>
+            <a:pPr marL="342900" indent="-342900">
+              <a:spcAft>
+                <a:spcPts val="600"/>
+              </a:spcAft>
+              <a:buSzPct val="100000"/>
+              <a:buChar char="•"/>
+            </a:pPr>
+            <a:r>
+              <a:rPr lang="en-US" sz="1250" dirty="0">
+                <a:solidFill>
+                  <a:srgbClr val="5B6472"/>
+                </a:solidFill>
+                <a:latin typeface="Calibri" pitchFamily="34" charset="0"/>
+                <a:ea typeface="Calibri" pitchFamily="34" charset="-122"/>
+                <a:cs typeface="Calibri" pitchFamily="34" charset="-120"/>
+              </a:rPr>
+              <a:t>good-first-issue ラベルの付いた初心者向けタスクがある</a:t>
+            </a:r>
+            <a:endParaRPr lang="en-US" sz="1250" dirty="0"/>
+          </a:p>
+          <a:p>
+            <a:pPr marL="342900" indent="-342900">
+              <a:spcAft>
+                <a:spcPts val="600"/>
+              </a:spcAft>
+              <a:buSzPct val="100000"/>
+              <a:buChar char="•"/>
+            </a:pPr>
+            <a:r>
+              <a:rPr lang="en-US" sz="1250" dirty="0">
+                <a:solidFill>
+                  <a:srgbClr val="5B6472"/>
+                </a:solidFill>
+                <a:latin typeface="Calibri" pitchFamily="34" charset="0"/>
+                <a:ea typeface="Calibri" pitchFamily="34" charset="-122"/>
+                <a:cs typeface="Calibri" pitchFamily="34" charset="-120"/>
+              </a:rPr>
+              <a:t>新しいバッジ追加のチュートリアルも用意されている(VS Code・Vue.js・Bootstrap等の著名プロジェクトも利用)</a:t>
+            </a:r>
+            <a:endParaRPr lang="en-US" sz="1250" dirty="0"/>
+          </a:p>
+          <a:p>
+            <a:pPr marL="342900" indent="-342900">
+              <a:spcAft>
+                <a:spcPts val="600"/>
+              </a:spcAft>
+              <a:buSzPct val="100000"/>
+              <a:buChar char="•"/>
+            </a:pPr>
+            <a:r>
+              <a:rPr lang="en-US" sz="1250" dirty="0">
+                <a:solidFill>
+                  <a:srgbClr val="5B6472"/>
+                </a:solidFill>
+                <a:latin typeface="Calibri" pitchFamily="34" charset="0"/>
+                <a:ea typeface="Calibri" pitchFamily="34" charset="-122"/>
+                <a:cs typeface="Calibri" pitchFamily="34" charset="-120"/>
+              </a:rPr>
+              <a:t>SECURITY.md による脆弱性報告ポリシーも整備済み(セキュリティ関連の貢献も歓迎)</a:t>
+            </a:r>
+            <a:endParaRPr lang="en-US" sz="1250" dirty="0"/>
+          </a:p>
+        </p:txBody>
       </p:sp>
       <p:sp>
         <p:nvSpPr>
           <p:cNvPr id="16" name="Text 14"/>
-          <p:cNvSpPr txBox="1"/>
-          <p:nvPr/>
-        </p:nvSpPr>
-        <p:spPr>
-          <a:xfrm>
-            <a:off x="6309360" y="2103120"/>
-            <a:ext cx="4754880" cy="365760"/>
-          </a:xfrm>
-          <a:prstGeom prst="rect">
-            <a:avLst/>
-          </a:prstGeom>
-          <a:noFill/>
-          <a:ln/>
-        </p:spPr>
-        <p:txBody>
-          <a:bodyPr wrap="square" lIns="0" tIns="0" rIns="0" bIns="0" rtlCol="0" anchor="ctr"/>
-          <a:lstStyle/>
-          <a:p>
-            <a:pPr indent="0" marL="0">
-              <a:buNone/>
-            </a:pPr>
-            <a:r>
-              <a:rPr lang="en-US" sz="1400" b="1" dirty="0">
-                <a:solidFill>
-                  <a:srgbClr val="6B7280"/>
-                </a:solidFill>
-                <a:latin typeface="Calibri" pitchFamily="34" charset="0"/>
-                <a:ea typeface="Calibri" pitchFamily="34" charset="-122"/>
-                <a:cs typeface="Calibri" pitchFamily="34" charset="-120"/>
-              </a:rPr>
-              <a:t>🪦 効果が薄かったチャネル</a:t>
-            </a:r>
-            <a:endParaRPr lang="en-US" sz="1400" dirty="0"/>
-          </a:p>
-        </p:txBody>
-      </p:sp>
-      <p:sp>
-        <p:nvSpPr>
-          <p:cNvPr id="17" name="Text 15"/>
-          <p:cNvSpPr txBox="1"/>
-          <p:nvPr/>
-        </p:nvSpPr>
-        <p:spPr>
-          <a:xfrm>
-            <a:off x="6309360" y="2560320"/>
-            <a:ext cx="4663440" cy="274320"/>
-          </a:xfrm>
-          <a:prstGeom prst="rect">
-            <a:avLst/>
-          </a:prstGeom>
-          <a:noFill/>
-          <a:ln/>
-        </p:spPr>
-        <p:txBody>
-          <a:bodyPr wrap="square" lIns="0" tIns="0" rIns="0" bIns="0" rtlCol="0" anchor="ctr"/>
-          <a:lstStyle/>
-          <a:p>
-            <a:pPr indent="0" marL="0">
-              <a:buNone/>
-            </a:pPr>
-            <a:r>
-              <a:rPr lang="en-US" sz="1250" b="1" dirty="0">
-                <a:solidFill>
-                  <a:srgbClr val="1A1F26"/>
-                </a:solidFill>
-                <a:latin typeface="Calibri" pitchFamily="34" charset="0"/>
-                <a:ea typeface="Calibri" pitchFamily="34" charset="-122"/>
-                <a:cs typeface="Calibri" pitchFamily="34" charset="-120"/>
-              </a:rPr>
-              <a:t>Reddit</a:t>
-            </a:r>
-            <a:endParaRPr lang="en-US" sz="1250" dirty="0"/>
-          </a:p>
-        </p:txBody>
-      </p:sp>
-      <p:sp>
-        <p:nvSpPr>
-          <p:cNvPr id="18" name="Text 16"/>
-          <p:cNvSpPr txBox="1"/>
-          <p:nvPr/>
-        </p:nvSpPr>
-        <p:spPr>
-          <a:xfrm>
-            <a:off x="6309360" y="2834640"/>
-            <a:ext cx="4663440" cy="640080"/>
-          </a:xfrm>
-          <a:prstGeom prst="rect">
-            <a:avLst/>
-          </a:prstGeom>
-          <a:noFill/>
-          <a:ln/>
-        </p:spPr>
-        <p:txBody>
-          <a:bodyPr wrap="square" lIns="0" tIns="0" rIns="0" bIns="0" rtlCol="0" anchor="ctr"/>
-          <a:lstStyle/>
-          <a:p>
-            <a:pPr indent="0" marL="0">
-              <a:buNone/>
-            </a:pPr>
-            <a:r>
-              <a:rPr lang="en-US" sz="1050" dirty="0">
-                <a:solidFill>
-                  <a:srgbClr val="5B6472"/>
-                </a:solidFill>
-                <a:latin typeface="Calibri" pitchFamily="34" charset="0"/>
-                <a:ea typeface="Calibri" pitchFamily="34" charset="-122"/>
-                <a:cs typeface="Calibri" pitchFamily="34" charset="-120"/>
-              </a:rPr>
-              <a:t>投稿は伸びにくいことが多い(閲覧2.4kでUpvote6等)。ただしやり方次第で化ける可能性はある</a:t>
-            </a:r>
-            <a:endParaRPr lang="en-US" sz="1050" dirty="0"/>
-          </a:p>
-        </p:txBody>
-      </p:sp>
-      <p:sp>
-        <p:nvSpPr>
-          <p:cNvPr id="19" name="Text 17"/>
-          <p:cNvSpPr txBox="1"/>
-          <p:nvPr/>
-        </p:nvSpPr>
-        <p:spPr>
-          <a:xfrm>
-            <a:off x="6309360" y="3383280"/>
-            <a:ext cx="4663440" cy="274320"/>
-          </a:xfrm>
-          <a:prstGeom prst="rect">
-            <a:avLst/>
-          </a:prstGeom>
-          <a:noFill/>
-          <a:ln/>
-        </p:spPr>
-        <p:txBody>
-          <a:bodyPr wrap="square" lIns="0" tIns="0" rIns="0" bIns="0" rtlCol="0" anchor="ctr"/>
-          <a:lstStyle/>
-          <a:p>
-            <a:pPr indent="0" marL="0">
-              <a:buNone/>
-            </a:pPr>
-            <a:r>
-              <a:rPr lang="en-US" sz="1250" b="1" dirty="0">
-                <a:solidFill>
-                  <a:srgbClr val="1A1F26"/>
-                </a:solidFill>
-                <a:latin typeface="Calibri" pitchFamily="34" charset="0"/>
-                <a:ea typeface="Calibri" pitchFamily="34" charset="-122"/>
-                <a:cs typeface="Calibri" pitchFamily="34" charset="-120"/>
-              </a:rPr>
-              <a:t>Product Hunt</a:t>
-            </a:r>
-            <a:endParaRPr lang="en-US" sz="1250" dirty="0"/>
-          </a:p>
-        </p:txBody>
-      </p:sp>
-      <p:sp>
-        <p:nvSpPr>
-          <p:cNvPr id="20" name="Text 18"/>
-          <p:cNvSpPr txBox="1"/>
-          <p:nvPr/>
-        </p:nvSpPr>
-        <p:spPr>
-          <a:xfrm>
-            <a:off x="6309360" y="3657600"/>
-            <a:ext cx="4663440" cy="640080"/>
-          </a:xfrm>
-          <a:prstGeom prst="rect">
-            <a:avLst/>
-          </a:prstGeom>
-          <a:noFill/>
-          <a:ln/>
-        </p:spPr>
-        <p:txBody>
-          <a:bodyPr wrap="square" lIns="0" tIns="0" rIns="0" bIns="0" rtlCol="0" anchor="ctr"/>
-          <a:lstStyle/>
-          <a:p>
-            <a:pPr indent="0" marL="0">
-              <a:buNone/>
-            </a:pPr>
-            <a:r>
-              <a:rPr lang="en-US" sz="1050" dirty="0">
-                <a:solidFill>
-                  <a:srgbClr val="5B6472"/>
-                </a:solidFill>
-                <a:latin typeface="Calibri" pitchFamily="34" charset="0"/>
-                <a:ea typeface="Calibri" pitchFamily="34" charset="-122"/>
-                <a:cs typeface="Calibri" pitchFamily="34" charset="-120"/>
-              </a:rPr>
-              <a:t>AI関連プロダクトが多く、その他のプロダクトは埋もれやすい</a:t>
-            </a:r>
-            <a:endParaRPr lang="en-US" sz="1050" dirty="0"/>
-          </a:p>
-        </p:txBody>
-      </p:sp>
-      <p:sp>
-        <p:nvSpPr>
-          <p:cNvPr id="21" name="Text 19"/>
-          <p:cNvSpPr txBox="1"/>
-          <p:nvPr/>
-        </p:nvSpPr>
-        <p:spPr>
-          <a:xfrm>
-            <a:off x="6309360" y="4206240"/>
-            <a:ext cx="4663440" cy="274320"/>
-          </a:xfrm>
-          <a:prstGeom prst="rect">
-            <a:avLst/>
-          </a:prstGeom>
-          <a:noFill/>
-          <a:ln/>
-        </p:spPr>
-        <p:txBody>
-          <a:bodyPr wrap="square" lIns="0" tIns="0" rIns="0" bIns="0" rtlCol="0" anchor="ctr"/>
-          <a:lstStyle/>
-          <a:p>
-            <a:pPr indent="0" marL="0">
-              <a:buNone/>
-            </a:pPr>
-            <a:r>
-              <a:rPr lang="en-US" sz="1250" b="1" dirty="0">
-                <a:solidFill>
-                  <a:srgbClr val="1A1F26"/>
-                </a:solidFill>
-                <a:latin typeface="Calibri" pitchFamily="34" charset="0"/>
-                <a:ea typeface="Calibri" pitchFamily="34" charset="-122"/>
-                <a:cs typeface="Calibri" pitchFamily="34" charset="-120"/>
-              </a:rPr>
-              <a:t>Awesomeリストへの追加PR</a:t>
-            </a:r>
-            <a:endParaRPr lang="en-US" sz="1250" dirty="0"/>
-          </a:p>
-        </p:txBody>
-      </p:sp>
-      <p:sp>
-        <p:nvSpPr>
-          <p:cNvPr id="22" name="Text 20"/>
-          <p:cNvSpPr txBox="1"/>
-          <p:nvPr/>
-        </p:nvSpPr>
-        <p:spPr>
-          <a:xfrm>
-            <a:off x="6309360" y="4480560"/>
-            <a:ext cx="4663440" cy="640080"/>
-          </a:xfrm>
-          <a:prstGeom prst="rect">
-            <a:avLst/>
-          </a:prstGeom>
-          <a:noFill/>
-          <a:ln/>
-        </p:spPr>
-        <p:txBody>
-          <a:bodyPr wrap="square" lIns="0" tIns="0" rIns="0" bIns="0" rtlCol="0" anchor="ctr"/>
-          <a:lstStyle/>
-          <a:p>
-            <a:pPr indent="0" marL="0">
-              <a:buNone/>
-            </a:pPr>
-            <a:r>
-              <a:rPr lang="en-US" sz="1050" dirty="0">
-                <a:solidFill>
-                  <a:srgbClr val="5B6472"/>
-                </a:solidFill>
-                <a:latin typeface="Calibri" pitchFamily="34" charset="0"/>
-                <a:ea typeface="Calibri" pitchFamily="34" charset="-122"/>
-                <a:cs typeface="Calibri" pitchFamily="34" charset="-120"/>
-              </a:rPr>
-              <a:t>掲載されても閲覧者自体が少ない</a:t>
-            </a:r>
-            <a:endParaRPr lang="en-US" sz="1050" dirty="0"/>
-          </a:p>
-        </p:txBody>
-      </p:sp>
-      <p:sp>
-        <p:nvSpPr>
-          <p:cNvPr id="23" name="Text 21"/>
-          <p:cNvSpPr txBox="1"/>
-          <p:nvPr/>
-        </p:nvSpPr>
-        <p:spPr>
-          <a:xfrm>
-            <a:off x="6309360" y="5029200"/>
-            <a:ext cx="4663440" cy="274320"/>
-          </a:xfrm>
-          <a:prstGeom prst="rect">
-            <a:avLst/>
-          </a:prstGeom>
-          <a:noFill/>
-          <a:ln/>
-        </p:spPr>
-        <p:txBody>
-          <a:bodyPr wrap="square" lIns="0" tIns="0" rIns="0" bIns="0" rtlCol="0" anchor="ctr"/>
-          <a:lstStyle/>
-          <a:p>
-            <a:pPr indent="0" marL="0">
-              <a:buNone/>
-            </a:pPr>
-            <a:r>
-              <a:rPr lang="en-US" sz="1250" b="1" dirty="0">
-                <a:solidFill>
-                  <a:srgbClr val="1A1F26"/>
-                </a:solidFill>
-                <a:latin typeface="Calibri" pitchFamily="34" charset="0"/>
-                <a:ea typeface="Calibri" pitchFamily="34" charset="-122"/>
-                <a:cs typeface="Calibri" pitchFamily="34" charset="-120"/>
-              </a:rPr>
-              <a:t>個人ブログ</a:t>
-            </a:r>
-            <a:endParaRPr lang="en-US" sz="1250" dirty="0"/>
-          </a:p>
-        </p:txBody>
-      </p:sp>
-      <p:sp>
-        <p:nvSpPr>
-          <p:cNvPr id="24" name="Text 22"/>
-          <p:cNvSpPr txBox="1"/>
-          <p:nvPr/>
-        </p:nvSpPr>
-        <p:spPr>
-          <a:xfrm>
-            <a:off x="6309360" y="5303520"/>
-            <a:ext cx="4663440" cy="640080"/>
-          </a:xfrm>
-          <a:prstGeom prst="rect">
-            <a:avLst/>
-          </a:prstGeom>
-          <a:noFill/>
-          <a:ln/>
-        </p:spPr>
-        <p:txBody>
-          <a:bodyPr wrap="square" lIns="0" tIns="0" rIns="0" bIns="0" rtlCol="0" anchor="ctr"/>
-          <a:lstStyle/>
-          <a:p>
-            <a:pPr indent="0" marL="0">
-              <a:buNone/>
-            </a:pPr>
-            <a:r>
-              <a:rPr lang="en-US" sz="1050" dirty="0">
-                <a:solidFill>
-                  <a:srgbClr val="5B6472"/>
-                </a:solidFill>
-                <a:latin typeface="Calibri" pitchFamily="34" charset="0"/>
-                <a:ea typeface="Calibri" pitchFamily="34" charset="-122"/>
-                <a:cs typeface="Calibri" pitchFamily="34" charset="-120"/>
-              </a:rPr>
-              <a:t>Qiita/Zenn等の媒体力があるプラットフォームでないと、Twitter投稿とあまり変わらない手応え</a:t>
-            </a:r>
-            <a:endParaRPr lang="en-US" sz="1050" dirty="0"/>
-          </a:p>
-        </p:txBody>
-      </p:sp>
-      <p:sp>
-        <p:nvSpPr>
-          <p:cNvPr id="25" name="Text 23"/>
           <p:cNvSpPr txBox="1"/>
           <p:nvPr/>
         </p:nvSpPr>
@@ -7847,7 +8573,7 @@
                 <a:ea typeface="Calibri" pitchFamily="34" charset="-122"/>
                 <a:cs typeface="Calibri" pitchFamily="34" charset="-120"/>
               </a:rPr>
-              <a:t>出典: 個人開発者によるOSSプロジェクト「Ephe」のブログ記事(1事例の実測値。分野・タイミングにより結果は変動しうる)</a:t>
+              <a:t>出典: github.com/badges/shields(取得時点のスター数。日々変動するため参考値)</a:t>
             </a:r>
             <a:endParaRPr lang="en-US" sz="1000" dirty="0"/>
           </a:p>
@@ -7855,7 +8581,7 @@
       </p:sp>
       <p:sp>
         <p:nvSpPr>
-          <p:cNvPr id="26" name="Text 24"/>
+          <p:cNvPr id="17" name="Text 15"/>
           <p:cNvSpPr txBox="1"/>
           <p:nvPr/>
         </p:nvSpPr>
@@ -7906,7 +8632,7 @@
     <p:bg>
       <p:bgPr>
         <a:solidFill>
-          <a:srgbClr val="1A1F26"/>
+          <a:srgbClr val="F5F6F8"/>
         </a:solidFill>
       </p:bgPr>
     </p:bg>
@@ -7951,7 +8677,7 @@
             <a:r>
               <a:rPr lang="en-US" sz="2800" b="1" dirty="0">
                 <a:solidFill>
-                  <a:srgbClr val="58D68D"/>
+                  <a:srgbClr val="B084F5"/>
                 </a:solidFill>
                 <a:latin typeface="Cambria" pitchFamily="34" charset="0"/>
                 <a:ea typeface="Cambria" pitchFamily="34" charset="-122"/>
@@ -7990,13 +8716,13 @@
             <a:r>
               <a:rPr lang="en-US" sz="2600" b="1" dirty="0">
                 <a:solidFill>
-                  <a:srgbClr val="FFFFFF"/>
+                  <a:srgbClr val="1A1F26"/>
                 </a:solidFill>
                 <a:latin typeface="Cambria" pitchFamily="34" charset="0"/>
                 <a:ea typeface="Cambria" pitchFamily="34" charset="-122"/>
                 <a:cs typeface="Cambria" pitchFamily="34" charset="-120"/>
               </a:rPr>
-              <a:t>実証済み5ステップ(別の実例: npmライブラリ)</a:t>
+              <a:t>宣伝チャネルの効果(実例ケーススタディ)</a:t>
             </a:r>
             <a:endParaRPr lang="en-US" sz="2600" dirty="0"/>
           </a:p>
@@ -8029,13 +8755,13 @@
             <a:r>
               <a:rPr lang="en-US" sz="1250" i="1" dirty="0">
                 <a:solidFill>
-                  <a:srgbClr val="AEB7C4"/>
-                </a:solidFill>
-                <a:latin typeface="Calibri" pitchFamily="34" charset="0"/>
-                <a:ea typeface="Calibri" pitchFamily="34" charset="-122"/>
-                <a:cs typeface="Calibri" pitchFamily="34" charset="-120"/>
-              </a:rPr>
-              <a:t>SNSでの影響力がほぼ無い状態から、Githubスターを50まで伸ばした個人開発者の実例</a:t>
+                  <a:srgbClr val="5B6472"/>
+                </a:solidFill>
+                <a:latin typeface="Calibri" pitchFamily="34" charset="0"/>
+                <a:ea typeface="Calibri" pitchFamily="34" charset="-122"/>
+                <a:cs typeface="Calibri" pitchFamily="34" charset="-120"/>
+              </a:rPr>
+              <a:t>個人OSS開発者が、公開後数ヶ月で400+スターを集めた際の実測データ(1事例)</a:t>
             </a:r>
             <a:endParaRPr lang="en-US" sz="1250" dirty="0"/>
           </a:p>
@@ -8049,16 +8775,23 @@
         </p:nvSpPr>
         <p:spPr>
           <a:xfrm>
-            <a:off x="548640" y="1965960"/>
-            <a:ext cx="384048" cy="384048"/>
-          </a:xfrm>
-          <a:prstGeom prst="ellipse">
-            <a:avLst/>
+            <a:off x="548640" y="1920240"/>
+            <a:ext cx="5212080" cy="3931920"/>
+          </a:xfrm>
+          <a:prstGeom prst="roundRect">
+            <a:avLst>
+              <a:gd name="adj" fmla="val 2326"/>
+            </a:avLst>
           </a:prstGeom>
           <a:solidFill>
-            <a:srgbClr val="58D68D"/>
+            <a:srgbClr val="FFFFFF"/>
           </a:solidFill>
-          <a:ln/>
+          <a:ln w="12700">
+            <a:solidFill>
+              <a:srgbClr val="E3E6EA"/>
+            </a:solidFill>
+            <a:prstDash val="solid"/>
+          </a:ln>
         </p:spPr>
       </p:sp>
       <p:sp>
@@ -8069,24 +8802,63 @@
         </p:nvSpPr>
         <p:spPr>
           <a:xfrm>
-            <a:off x="548640" y="1965960"/>
-            <a:ext cx="384048" cy="384048"/>
-          </a:xfrm>
-          <a:prstGeom prst="rect">
-            <a:avLst/>
-          </a:prstGeom>
-          <a:noFill/>
-          <a:ln/>
-        </p:spPr>
-        <p:txBody>
-          <a:bodyPr wrap="square" lIns="0" tIns="0" rIns="0" bIns="0" rtlCol="0" anchor="ctr"/>
-          <a:lstStyle/>
-          <a:p>
-            <a:pPr algn="ctr" indent="0" marL="0">
-              <a:buNone/>
-            </a:pPr>
-            <a:r>
-              <a:rPr lang="en-US" sz="1300" b="1" dirty="0">
+            <a:off x="822960" y="2103120"/>
+            <a:ext cx="4754880" cy="365760"/>
+          </a:xfrm>
+          <a:prstGeom prst="rect">
+            <a:avLst/>
+          </a:prstGeom>
+          <a:noFill/>
+          <a:ln/>
+        </p:spPr>
+        <p:txBody>
+          <a:bodyPr wrap="square" lIns="0" tIns="0" rIns="0" bIns="0" rtlCol="0" anchor="ctr"/>
+          <a:lstStyle/>
+          <a:p>
+            <a:pPr indent="0" marL="0">
+              <a:buNone/>
+            </a:pPr>
+            <a:r>
+              <a:rPr lang="en-US" sz="1400" b="1" dirty="0">
+                <a:solidFill>
+                  <a:srgbClr val="58D68D"/>
+                </a:solidFill>
+                <a:latin typeface="Calibri" pitchFamily="34" charset="0"/>
+                <a:ea typeface="Calibri" pitchFamily="34" charset="-122"/>
+                <a:cs typeface="Calibri" pitchFamily="34" charset="-120"/>
+              </a:rPr>
+              <a:t>🚀 効果があったチャネル</a:t>
+            </a:r>
+            <a:endParaRPr lang="en-US" sz="1400" dirty="0"/>
+          </a:p>
+        </p:txBody>
+      </p:sp>
+      <p:sp>
+        <p:nvSpPr>
+          <p:cNvPr id="7" name="Text 5"/>
+          <p:cNvSpPr txBox="1"/>
+          <p:nvPr/>
+        </p:nvSpPr>
+        <p:spPr>
+          <a:xfrm>
+            <a:off x="822960" y="2560320"/>
+            <a:ext cx="4663440" cy="274320"/>
+          </a:xfrm>
+          <a:prstGeom prst="rect">
+            <a:avLst/>
+          </a:prstGeom>
+          <a:noFill/>
+          <a:ln/>
+        </p:spPr>
+        <p:txBody>
+          <a:bodyPr wrap="square" lIns="0" tIns="0" rIns="0" bIns="0" rtlCol="0" anchor="ctr"/>
+          <a:lstStyle/>
+          <a:p>
+            <a:pPr indent="0" marL="0">
+              <a:buNone/>
+            </a:pPr>
+            <a:r>
+              <a:rPr lang="en-US" sz="1250" b="1" dirty="0">
                 <a:solidFill>
                   <a:srgbClr val="1A1F26"/>
                 </a:solidFill>
@@ -8094,48 +8866,9 @@
                 <a:ea typeface="Calibri" pitchFamily="34" charset="-122"/>
                 <a:cs typeface="Calibri" pitchFamily="34" charset="-120"/>
               </a:rPr>
-              <a:t>1</a:t>
-            </a:r>
-            <a:endParaRPr lang="en-US" sz="1300" dirty="0"/>
-          </a:p>
-        </p:txBody>
-      </p:sp>
-      <p:sp>
-        <p:nvSpPr>
-          <p:cNvPr id="7" name="Text 5"/>
-          <p:cNvSpPr txBox="1"/>
-          <p:nvPr/>
-        </p:nvSpPr>
-        <p:spPr>
-          <a:xfrm>
-            <a:off x="1097280" y="1920240"/>
-            <a:ext cx="2926080" cy="457200"/>
-          </a:xfrm>
-          <a:prstGeom prst="rect">
-            <a:avLst/>
-          </a:prstGeom>
-          <a:noFill/>
-          <a:ln/>
-        </p:spPr>
-        <p:txBody>
-          <a:bodyPr wrap="square" lIns="0" tIns="0" rIns="0" bIns="0" rtlCol="0" anchor="t"/>
-          <a:lstStyle/>
-          <a:p>
-            <a:pPr indent="0" marL="0">
-              <a:buNone/>
-            </a:pPr>
-            <a:r>
-              <a:rPr lang="en-US" sz="1300" b="1" dirty="0">
-                <a:solidFill>
-                  <a:srgbClr val="FFFFFF"/>
-                </a:solidFill>
-                <a:latin typeface="Calibri" pitchFamily="34" charset="0"/>
-                <a:ea typeface="Calibri" pitchFamily="34" charset="-122"/>
-                <a:cs typeface="Calibri" pitchFamily="34" charset="-120"/>
-              </a:rPr>
-              <a:t>英語で書く</a:t>
-            </a:r>
-            <a:endParaRPr lang="en-US" sz="1300" dirty="0"/>
+              <a:t>Hacker News</a:t>
+            </a:r>
+            <a:endParaRPr lang="en-US" sz="1250" dirty="0"/>
           </a:p>
         </p:txBody>
       </p:sp>
@@ -8147,83 +8880,363 @@
         </p:nvSpPr>
         <p:spPr>
           <a:xfrm>
-            <a:off x="4114800" y="1920240"/>
-            <a:ext cx="6858000" cy="777240"/>
-          </a:xfrm>
-          <a:prstGeom prst="rect">
-            <a:avLst/>
-          </a:prstGeom>
-          <a:noFill/>
-          <a:ln/>
-        </p:spPr>
-        <p:txBody>
-          <a:bodyPr wrap="square" lIns="0" tIns="0" rIns="0" bIns="0" rtlCol="0" anchor="ctr"/>
-          <a:lstStyle/>
-          <a:p>
-            <a:pPr indent="0" marL="0">
-              <a:buNone/>
-            </a:pPr>
-            <a:r>
-              <a:rPr lang="en-US" sz="1150" dirty="0">
-                <a:solidFill>
-                  <a:srgbClr val="AEB7C4"/>
-                </a:solidFill>
-                <a:latin typeface="Calibri" pitchFamily="34" charset="0"/>
-                <a:ea typeface="Calibri" pitchFamily="34" charset="-122"/>
-                <a:cs typeface="Calibri" pitchFamily="34" charset="-120"/>
-              </a:rPr>
-              <a:t>README・告知文はすべて英語にする。日本語のみだとリーチできる人数が大きく限定される</a:t>
-            </a:r>
-            <a:endParaRPr lang="en-US" sz="1150" dirty="0"/>
-          </a:p>
-        </p:txBody>
-      </p:sp>
-      <p:sp>
-        <p:nvSpPr>
-          <p:cNvPr id="9" name="Shape 7"/>
+            <a:off x="822960" y="2834640"/>
+            <a:ext cx="4663440" cy="640080"/>
+          </a:xfrm>
+          <a:prstGeom prst="rect">
+            <a:avLst/>
+          </a:prstGeom>
+          <a:noFill/>
+          <a:ln/>
+        </p:spPr>
+        <p:txBody>
+          <a:bodyPr wrap="square" lIns="0" tIns="0" rIns="0" bIns="0" rtlCol="0" anchor="ctr"/>
+          <a:lstStyle/>
+          <a:p>
+            <a:pPr indent="0" marL="0">
+              <a:buNone/>
+            </a:pPr>
+            <a:r>
+              <a:rPr lang="en-US" sz="1050" dirty="0">
+                <a:solidFill>
+                  <a:srgbClr val="5B6472"/>
+                </a:solidFill>
+                <a:latin typeface="Calibri" pitchFamily="34" charset="0"/>
+                <a:ea typeface="Calibri" pitchFamily="34" charset="-122"/>
+                <a:cs typeface="Calibri" pitchFamily="34" charset="-120"/>
+              </a:rPr>
+              <a:t>「Show HN:」プレフィックスを付けて投稿する文化があり、Showタブ・トップページに掲載。最も効果大</a:t>
+            </a:r>
+            <a:endParaRPr lang="en-US" sz="1050" dirty="0"/>
+          </a:p>
+        </p:txBody>
+      </p:sp>
+      <p:sp>
+        <p:nvSpPr>
+          <p:cNvPr id="9" name="Text 7"/>
+          <p:cNvSpPr txBox="1"/>
+          <p:nvPr/>
+        </p:nvSpPr>
+        <p:spPr>
+          <a:xfrm>
+            <a:off x="822960" y="3383280"/>
+            <a:ext cx="4663440" cy="274320"/>
+          </a:xfrm>
+          <a:prstGeom prst="rect">
+            <a:avLst/>
+          </a:prstGeom>
+          <a:noFill/>
+          <a:ln/>
+        </p:spPr>
+        <p:txBody>
+          <a:bodyPr wrap="square" lIns="0" tIns="0" rIns="0" bIns="0" rtlCol="0" anchor="ctr"/>
+          <a:lstStyle/>
+          <a:p>
+            <a:pPr indent="0" marL="0">
+              <a:buNone/>
+            </a:pPr>
+            <a:r>
+              <a:rPr lang="en-US" sz="1250" b="1" dirty="0">
+                <a:solidFill>
+                  <a:srgbClr val="1A1F26"/>
+                </a:solidFill>
+                <a:latin typeface="Calibri" pitchFamily="34" charset="0"/>
+                <a:ea typeface="Calibri" pitchFamily="34" charset="-122"/>
+                <a:cs typeface="Calibri" pitchFamily="34" charset="-120"/>
+              </a:rPr>
+              <a:t>Twitter/X</a:t>
+            </a:r>
+            <a:endParaRPr lang="en-US" sz="1250" dirty="0"/>
+          </a:p>
+        </p:txBody>
+      </p:sp>
+      <p:sp>
+        <p:nvSpPr>
+          <p:cNvPr id="10" name="Text 8"/>
+          <p:cNvSpPr txBox="1"/>
+          <p:nvPr/>
+        </p:nvSpPr>
+        <p:spPr>
+          <a:xfrm>
+            <a:off x="822960" y="3657600"/>
+            <a:ext cx="4663440" cy="640080"/>
+          </a:xfrm>
+          <a:prstGeom prst="rect">
+            <a:avLst/>
+          </a:prstGeom>
+          <a:noFill/>
+          <a:ln/>
+        </p:spPr>
+        <p:txBody>
+          <a:bodyPr wrap="square" lIns="0" tIns="0" rIns="0" bIns="0" rtlCol="0" anchor="ctr"/>
+          <a:lstStyle/>
+          <a:p>
+            <a:pPr indent="0" marL="0">
+              <a:buNone/>
+            </a:pPr>
+            <a:r>
+              <a:rPr lang="en-US" sz="1050" dirty="0">
+                <a:solidFill>
+                  <a:srgbClr val="5B6472"/>
+                </a:solidFill>
+                <a:latin typeface="Calibri" pitchFamily="34" charset="0"/>
+                <a:ea typeface="Calibri" pitchFamily="34" charset="-122"/>
+                <a:cs typeface="Calibri" pitchFamily="34" charset="-120"/>
+              </a:rPr>
+              <a:t>自分の発信単独では弱いが、フォロワーの多いインフルエンサーが拡散すると効果大</a:t>
+            </a:r>
+            <a:endParaRPr lang="en-US" sz="1050" dirty="0"/>
+          </a:p>
+        </p:txBody>
+      </p:sp>
+      <p:sp>
+        <p:nvSpPr>
+          <p:cNvPr id="11" name="Text 9"/>
+          <p:cNvSpPr txBox="1"/>
+          <p:nvPr/>
+        </p:nvSpPr>
+        <p:spPr>
+          <a:xfrm>
+            <a:off x="822960" y="4206240"/>
+            <a:ext cx="4663440" cy="274320"/>
+          </a:xfrm>
+          <a:prstGeom prst="rect">
+            <a:avLst/>
+          </a:prstGeom>
+          <a:noFill/>
+          <a:ln/>
+        </p:spPr>
+        <p:txBody>
+          <a:bodyPr wrap="square" lIns="0" tIns="0" rIns="0" bIns="0" rtlCol="0" anchor="ctr"/>
+          <a:lstStyle/>
+          <a:p>
+            <a:pPr indent="0" marL="0">
+              <a:buNone/>
+            </a:pPr>
+            <a:r>
+              <a:rPr lang="en-US" sz="1250" b="1" dirty="0">
+                <a:solidFill>
+                  <a:srgbClr val="1A1F26"/>
+                </a:solidFill>
+                <a:latin typeface="Calibri" pitchFamily="34" charset="0"/>
+                <a:ea typeface="Calibri" pitchFamily="34" charset="-122"/>
+                <a:cs typeface="Calibri" pitchFamily="34" charset="-120"/>
+              </a:rPr>
+              <a:t>GitHub内の連鎖</a:t>
+            </a:r>
+            <a:endParaRPr lang="en-US" sz="1250" dirty="0"/>
+          </a:p>
+        </p:txBody>
+      </p:sp>
+      <p:sp>
+        <p:nvSpPr>
+          <p:cNvPr id="12" name="Text 10"/>
+          <p:cNvSpPr txBox="1"/>
+          <p:nvPr/>
+        </p:nvSpPr>
+        <p:spPr>
+          <a:xfrm>
+            <a:off x="822960" y="4480560"/>
+            <a:ext cx="4663440" cy="640080"/>
+          </a:xfrm>
+          <a:prstGeom prst="rect">
+            <a:avLst/>
+          </a:prstGeom>
+          <a:noFill/>
+          <a:ln/>
+        </p:spPr>
+        <p:txBody>
+          <a:bodyPr wrap="square" lIns="0" tIns="0" rIns="0" bIns="0" rtlCol="0" anchor="ctr"/>
+          <a:lstStyle/>
+          <a:p>
+            <a:pPr indent="0" marL="0">
+              <a:buNone/>
+            </a:pPr>
+            <a:r>
+              <a:rPr lang="en-US" sz="1050" dirty="0">
+                <a:solidFill>
+                  <a:srgbClr val="5B6472"/>
+                </a:solidFill>
+                <a:latin typeface="Calibri" pitchFamily="34" charset="0"/>
+                <a:ea typeface="Calibri" pitchFamily="34" charset="-122"/>
+                <a:cs typeface="Calibri" pitchFamily="34" charset="-120"/>
+              </a:rPr>
+              <a:t>フォロー中ユーザーがStarしたリポジトリがフィードに流れる仕組みがあり、フォロワーの多い人がStarすると連鎖的に増える</a:t>
+            </a:r>
+            <a:endParaRPr lang="en-US" sz="1050" dirty="0"/>
+          </a:p>
+        </p:txBody>
+      </p:sp>
+      <p:sp>
+        <p:nvSpPr>
+          <p:cNvPr id="13" name="Text 11"/>
+          <p:cNvSpPr txBox="1"/>
+          <p:nvPr/>
+        </p:nvSpPr>
+        <p:spPr>
+          <a:xfrm>
+            <a:off x="822960" y="5029200"/>
+            <a:ext cx="4663440" cy="274320"/>
+          </a:xfrm>
+          <a:prstGeom prst="rect">
+            <a:avLst/>
+          </a:prstGeom>
+          <a:noFill/>
+          <a:ln/>
+        </p:spPr>
+        <p:txBody>
+          <a:bodyPr wrap="square" lIns="0" tIns="0" rIns="0" bIns="0" rtlCol="0" anchor="ctr"/>
+          <a:lstStyle/>
+          <a:p>
+            <a:pPr indent="0" marL="0">
+              <a:buNone/>
+            </a:pPr>
+            <a:r>
+              <a:rPr lang="en-US" sz="1250" b="1" dirty="0">
+                <a:solidFill>
+                  <a:srgbClr val="1A1F26"/>
+                </a:solidFill>
+                <a:latin typeface="Calibri" pitchFamily="34" charset="0"/>
+                <a:ea typeface="Calibri" pitchFamily="34" charset="-122"/>
+                <a:cs typeface="Calibri" pitchFamily="34" charset="-120"/>
+              </a:rPr>
+              <a:t>韓国版HN(news.hada.io)</a:t>
+            </a:r>
+            <a:endParaRPr lang="en-US" sz="1250" dirty="0"/>
+          </a:p>
+        </p:txBody>
+      </p:sp>
+      <p:sp>
+        <p:nvSpPr>
+          <p:cNvPr id="14" name="Text 12"/>
+          <p:cNvSpPr txBox="1"/>
+          <p:nvPr/>
+        </p:nvSpPr>
+        <p:spPr>
+          <a:xfrm>
+            <a:off x="822960" y="5303520"/>
+            <a:ext cx="4663440" cy="640080"/>
+          </a:xfrm>
+          <a:prstGeom prst="rect">
+            <a:avLst/>
+          </a:prstGeom>
+          <a:noFill/>
+          <a:ln/>
+        </p:spPr>
+        <p:txBody>
+          <a:bodyPr wrap="square" lIns="0" tIns="0" rIns="0" bIns="0" rtlCol="0" anchor="ctr"/>
+          <a:lstStyle/>
+          <a:p>
+            <a:pPr indent="0" marL="0">
+              <a:buNone/>
+            </a:pPr>
+            <a:r>
+              <a:rPr lang="en-US" sz="1050" dirty="0">
+                <a:solidFill>
+                  <a:srgbClr val="5B6472"/>
+                </a:solidFill>
+                <a:latin typeface="Calibri" pitchFamily="34" charset="0"/>
+                <a:ea typeface="Calibri" pitchFamily="34" charset="-122"/>
+                <a:cs typeface="Calibri" pitchFamily="34" charset="-120"/>
+              </a:rPr>
+              <a:t>現地の誰かが投稿したことで、そこから約40スターが集まった</a:t>
+            </a:r>
+            <a:endParaRPr lang="en-US" sz="1050" dirty="0"/>
+          </a:p>
+        </p:txBody>
+      </p:sp>
+      <p:sp>
+        <p:nvSpPr>
+          <p:cNvPr id="15" name="Shape 13"/>
           <p:cNvSpPr/>
           <p:nvPr/>
         </p:nvSpPr>
         <p:spPr>
           <a:xfrm>
-            <a:off x="548640" y="2807208"/>
-            <a:ext cx="384048" cy="384048"/>
-          </a:xfrm>
-          <a:prstGeom prst="ellipse">
-            <a:avLst/>
+            <a:off x="6035040" y="1920240"/>
+            <a:ext cx="5212080" cy="3931920"/>
+          </a:xfrm>
+          <a:prstGeom prst="roundRect">
+            <a:avLst>
+              <a:gd name="adj" fmla="val 2326"/>
+            </a:avLst>
           </a:prstGeom>
           <a:solidFill>
-            <a:srgbClr val="58D68D"/>
+            <a:srgbClr val="FFFFFF"/>
           </a:solidFill>
-          <a:ln/>
-        </p:spPr>
-      </p:sp>
-      <p:sp>
-        <p:nvSpPr>
-          <p:cNvPr id="10" name="Text 8"/>
-          <p:cNvSpPr txBox="1"/>
-          <p:nvPr/>
-        </p:nvSpPr>
-        <p:spPr>
-          <a:xfrm>
-            <a:off x="548640" y="2807208"/>
-            <a:ext cx="384048" cy="384048"/>
-          </a:xfrm>
-          <a:prstGeom prst="rect">
-            <a:avLst/>
-          </a:prstGeom>
-          <a:noFill/>
-          <a:ln/>
-        </p:spPr>
-        <p:txBody>
-          <a:bodyPr wrap="square" lIns="0" tIns="0" rIns="0" bIns="0" rtlCol="0" anchor="ctr"/>
-          <a:lstStyle/>
-          <a:p>
-            <a:pPr algn="ctr" indent="0" marL="0">
-              <a:buNone/>
-            </a:pPr>
-            <a:r>
-              <a:rPr lang="en-US" sz="1300" b="1" dirty="0">
+          <a:ln w="12700">
+            <a:solidFill>
+              <a:srgbClr val="E3E6EA"/>
+            </a:solidFill>
+            <a:prstDash val="solid"/>
+          </a:ln>
+        </p:spPr>
+      </p:sp>
+      <p:sp>
+        <p:nvSpPr>
+          <p:cNvPr id="16" name="Text 14"/>
+          <p:cNvSpPr txBox="1"/>
+          <p:nvPr/>
+        </p:nvSpPr>
+        <p:spPr>
+          <a:xfrm>
+            <a:off x="6309360" y="2103120"/>
+            <a:ext cx="4754880" cy="365760"/>
+          </a:xfrm>
+          <a:prstGeom prst="rect">
+            <a:avLst/>
+          </a:prstGeom>
+          <a:noFill/>
+          <a:ln/>
+        </p:spPr>
+        <p:txBody>
+          <a:bodyPr wrap="square" lIns="0" tIns="0" rIns="0" bIns="0" rtlCol="0" anchor="ctr"/>
+          <a:lstStyle/>
+          <a:p>
+            <a:pPr indent="0" marL="0">
+              <a:buNone/>
+            </a:pPr>
+            <a:r>
+              <a:rPr lang="en-US" sz="1400" b="1" dirty="0">
+                <a:solidFill>
+                  <a:srgbClr val="6B7280"/>
+                </a:solidFill>
+                <a:latin typeface="Calibri" pitchFamily="34" charset="0"/>
+                <a:ea typeface="Calibri" pitchFamily="34" charset="-122"/>
+                <a:cs typeface="Calibri" pitchFamily="34" charset="-120"/>
+              </a:rPr>
+              <a:t>🪦 効果が薄かったチャネル</a:t>
+            </a:r>
+            <a:endParaRPr lang="en-US" sz="1400" dirty="0"/>
+          </a:p>
+        </p:txBody>
+      </p:sp>
+      <p:sp>
+        <p:nvSpPr>
+          <p:cNvPr id="17" name="Text 15"/>
+          <p:cNvSpPr txBox="1"/>
+          <p:nvPr/>
+        </p:nvSpPr>
+        <p:spPr>
+          <a:xfrm>
+            <a:off x="6309360" y="2560320"/>
+            <a:ext cx="4663440" cy="274320"/>
+          </a:xfrm>
+          <a:prstGeom prst="rect">
+            <a:avLst/>
+          </a:prstGeom>
+          <a:noFill/>
+          <a:ln/>
+        </p:spPr>
+        <p:txBody>
+          <a:bodyPr wrap="square" lIns="0" tIns="0" rIns="0" bIns="0" rtlCol="0" anchor="ctr"/>
+          <a:lstStyle/>
+          <a:p>
+            <a:pPr indent="0" marL="0">
+              <a:buNone/>
+            </a:pPr>
+            <a:r>
+              <a:rPr lang="en-US" sz="1250" b="1" dirty="0">
                 <a:solidFill>
                   <a:srgbClr val="1A1F26"/>
                 </a:solidFill>
@@ -8231,136 +9244,77 @@
                 <a:ea typeface="Calibri" pitchFamily="34" charset="-122"/>
                 <a:cs typeface="Calibri" pitchFamily="34" charset="-120"/>
               </a:rPr>
-              <a:t>2</a:t>
-            </a:r>
-            <a:endParaRPr lang="en-US" sz="1300" dirty="0"/>
-          </a:p>
-        </p:txBody>
-      </p:sp>
-      <p:sp>
-        <p:nvSpPr>
-          <p:cNvPr id="11" name="Text 9"/>
-          <p:cNvSpPr txBox="1"/>
-          <p:nvPr/>
-        </p:nvSpPr>
-        <p:spPr>
-          <a:xfrm>
-            <a:off x="1097280" y="2761488"/>
-            <a:ext cx="2926080" cy="457200"/>
-          </a:xfrm>
-          <a:prstGeom prst="rect">
-            <a:avLst/>
-          </a:prstGeom>
-          <a:noFill/>
-          <a:ln/>
-        </p:spPr>
-        <p:txBody>
-          <a:bodyPr wrap="square" lIns="0" tIns="0" rIns="0" bIns="0" rtlCol="0" anchor="t"/>
-          <a:lstStyle/>
-          <a:p>
-            <a:pPr indent="0" marL="0">
-              <a:buNone/>
-            </a:pPr>
-            <a:r>
-              <a:rPr lang="en-US" sz="1300" b="1" dirty="0">
-                <a:solidFill>
-                  <a:srgbClr val="FFFFFF"/>
-                </a:solidFill>
-                <a:latin typeface="Calibri" pitchFamily="34" charset="0"/>
-                <a:ea typeface="Calibri" pitchFamily="34" charset="-122"/>
-                <a:cs typeface="Calibri" pitchFamily="34" charset="-120"/>
-              </a:rPr>
-              <a:t>アイキャッチ画像を作る</a:t>
-            </a:r>
-            <a:endParaRPr lang="en-US" sz="1300" dirty="0"/>
-          </a:p>
-        </p:txBody>
-      </p:sp>
-      <p:sp>
-        <p:nvSpPr>
-          <p:cNvPr id="12" name="Text 10"/>
-          <p:cNvSpPr txBox="1"/>
-          <p:nvPr/>
-        </p:nvSpPr>
-        <p:spPr>
-          <a:xfrm>
-            <a:off x="4114800" y="2761488"/>
-            <a:ext cx="6858000" cy="777240"/>
-          </a:xfrm>
-          <a:prstGeom prst="rect">
-            <a:avLst/>
-          </a:prstGeom>
-          <a:noFill/>
-          <a:ln/>
-        </p:spPr>
-        <p:txBody>
-          <a:bodyPr wrap="square" lIns="0" tIns="0" rIns="0" bIns="0" rtlCol="0" anchor="ctr"/>
-          <a:lstStyle/>
-          <a:p>
-            <a:pPr indent="0" marL="0">
-              <a:buNone/>
-            </a:pPr>
-            <a:r>
-              <a:rPr lang="en-US" sz="1150" dirty="0">
-                <a:solidFill>
-                  <a:srgbClr val="AEB7C4"/>
-                </a:solidFill>
-                <a:latin typeface="Calibri" pitchFamily="34" charset="0"/>
-                <a:ea typeface="Calibri" pitchFamily="34" charset="-122"/>
-                <a:cs typeface="Calibri" pitchFamily="34" charset="-120"/>
-              </a:rPr>
-              <a:t>Canva等でOGP画像を作成し、リポジトリのSocial preview設定に登録する(第一印象を左右する)</a:t>
-            </a:r>
-            <a:endParaRPr lang="en-US" sz="1150" dirty="0"/>
-          </a:p>
-        </p:txBody>
-      </p:sp>
-      <p:sp>
-        <p:nvSpPr>
-          <p:cNvPr id="13" name="Shape 11"/>
-          <p:cNvSpPr/>
-          <p:nvPr/>
-        </p:nvSpPr>
-        <p:spPr>
-          <a:xfrm>
-            <a:off x="548640" y="3648456"/>
-            <a:ext cx="384048" cy="384048"/>
-          </a:xfrm>
-          <a:prstGeom prst="ellipse">
-            <a:avLst/>
-          </a:prstGeom>
-          <a:solidFill>
-            <a:srgbClr val="58D68D"/>
-          </a:solidFill>
-          <a:ln/>
-        </p:spPr>
-      </p:sp>
-      <p:sp>
-        <p:nvSpPr>
-          <p:cNvPr id="14" name="Text 12"/>
-          <p:cNvSpPr txBox="1"/>
-          <p:nvPr/>
-        </p:nvSpPr>
-        <p:spPr>
-          <a:xfrm>
-            <a:off x="548640" y="3648456"/>
-            <a:ext cx="384048" cy="384048"/>
-          </a:xfrm>
-          <a:prstGeom prst="rect">
-            <a:avLst/>
-          </a:prstGeom>
-          <a:noFill/>
-          <a:ln/>
-        </p:spPr>
-        <p:txBody>
-          <a:bodyPr wrap="square" lIns="0" tIns="0" rIns="0" bIns="0" rtlCol="0" anchor="ctr"/>
-          <a:lstStyle/>
-          <a:p>
-            <a:pPr algn="ctr" indent="0" marL="0">
-              <a:buNone/>
-            </a:pPr>
-            <a:r>
-              <a:rPr lang="en-US" sz="1300" b="1" dirty="0">
+              <a:t>Reddit</a:t>
+            </a:r>
+            <a:endParaRPr lang="en-US" sz="1250" dirty="0"/>
+          </a:p>
+        </p:txBody>
+      </p:sp>
+      <p:sp>
+        <p:nvSpPr>
+          <p:cNvPr id="18" name="Text 16"/>
+          <p:cNvSpPr txBox="1"/>
+          <p:nvPr/>
+        </p:nvSpPr>
+        <p:spPr>
+          <a:xfrm>
+            <a:off x="6309360" y="2834640"/>
+            <a:ext cx="4663440" cy="640080"/>
+          </a:xfrm>
+          <a:prstGeom prst="rect">
+            <a:avLst/>
+          </a:prstGeom>
+          <a:noFill/>
+          <a:ln/>
+        </p:spPr>
+        <p:txBody>
+          <a:bodyPr wrap="square" lIns="0" tIns="0" rIns="0" bIns="0" rtlCol="0" anchor="ctr"/>
+          <a:lstStyle/>
+          <a:p>
+            <a:pPr indent="0" marL="0">
+              <a:buNone/>
+            </a:pPr>
+            <a:r>
+              <a:rPr lang="en-US" sz="1050" dirty="0">
+                <a:solidFill>
+                  <a:srgbClr val="5B6472"/>
+                </a:solidFill>
+                <a:latin typeface="Calibri" pitchFamily="34" charset="0"/>
+                <a:ea typeface="Calibri" pitchFamily="34" charset="-122"/>
+                <a:cs typeface="Calibri" pitchFamily="34" charset="-120"/>
+              </a:rPr>
+              <a:t>投稿は伸びにくいことが多い(閲覧2.4kでUpvote6等)。ただしやり方次第で化ける可能性はある</a:t>
+            </a:r>
+            <a:endParaRPr lang="en-US" sz="1050" dirty="0"/>
+          </a:p>
+        </p:txBody>
+      </p:sp>
+      <p:sp>
+        <p:nvSpPr>
+          <p:cNvPr id="19" name="Text 17"/>
+          <p:cNvSpPr txBox="1"/>
+          <p:nvPr/>
+        </p:nvSpPr>
+        <p:spPr>
+          <a:xfrm>
+            <a:off x="6309360" y="3383280"/>
+            <a:ext cx="4663440" cy="274320"/>
+          </a:xfrm>
+          <a:prstGeom prst="rect">
+            <a:avLst/>
+          </a:prstGeom>
+          <a:noFill/>
+          <a:ln/>
+        </p:spPr>
+        <p:txBody>
+          <a:bodyPr wrap="square" lIns="0" tIns="0" rIns="0" bIns="0" rtlCol="0" anchor="ctr"/>
+          <a:lstStyle/>
+          <a:p>
+            <a:pPr indent="0" marL="0">
+              <a:buNone/>
+            </a:pPr>
+            <a:r>
+              <a:rPr lang="en-US" sz="1250" b="1" dirty="0">
                 <a:solidFill>
                   <a:srgbClr val="1A1F26"/>
                 </a:solidFill>
@@ -8368,136 +9322,77 @@
                 <a:ea typeface="Calibri" pitchFamily="34" charset="-122"/>
                 <a:cs typeface="Calibri" pitchFamily="34" charset="-120"/>
               </a:rPr>
-              <a:t>3</a:t>
-            </a:r>
-            <a:endParaRPr lang="en-US" sz="1300" dirty="0"/>
-          </a:p>
-        </p:txBody>
-      </p:sp>
-      <p:sp>
-        <p:nvSpPr>
-          <p:cNvPr id="15" name="Text 13"/>
-          <p:cNvSpPr txBox="1"/>
-          <p:nvPr/>
-        </p:nvSpPr>
-        <p:spPr>
-          <a:xfrm>
-            <a:off x="1097280" y="3602736"/>
-            <a:ext cx="2926080" cy="457200"/>
-          </a:xfrm>
-          <a:prstGeom prst="rect">
-            <a:avLst/>
-          </a:prstGeom>
-          <a:noFill/>
-          <a:ln/>
-        </p:spPr>
-        <p:txBody>
-          <a:bodyPr wrap="square" lIns="0" tIns="0" rIns="0" bIns="0" rtlCol="0" anchor="t"/>
-          <a:lstStyle/>
-          <a:p>
-            <a:pPr indent="0" marL="0">
-              <a:buNone/>
-            </a:pPr>
-            <a:r>
-              <a:rPr lang="en-US" sz="1300" b="1" dirty="0">
-                <a:solidFill>
-                  <a:srgbClr val="FFFFFF"/>
-                </a:solidFill>
-                <a:latin typeface="Calibri" pitchFamily="34" charset="0"/>
-                <a:ea typeface="Calibri" pitchFamily="34" charset="-122"/>
-                <a:cs typeface="Calibri" pitchFamily="34" charset="-120"/>
-              </a:rPr>
-              <a:t>README/公式サイトをグラフィカルに</a:t>
-            </a:r>
-            <a:endParaRPr lang="en-US" sz="1300" dirty="0"/>
-          </a:p>
-        </p:txBody>
-      </p:sp>
-      <p:sp>
-        <p:nvSpPr>
-          <p:cNvPr id="16" name="Text 14"/>
-          <p:cNvSpPr txBox="1"/>
-          <p:nvPr/>
-        </p:nvSpPr>
-        <p:spPr>
-          <a:xfrm>
-            <a:off x="4114800" y="3602736"/>
-            <a:ext cx="6858000" cy="777240"/>
-          </a:xfrm>
-          <a:prstGeom prst="rect">
-            <a:avLst/>
-          </a:prstGeom>
-          <a:noFill/>
-          <a:ln/>
-        </p:spPr>
-        <p:txBody>
-          <a:bodyPr wrap="square" lIns="0" tIns="0" rIns="0" bIns="0" rtlCol="0" anchor="ctr"/>
-          <a:lstStyle/>
-          <a:p>
-            <a:pPr indent="0" marL="0">
-              <a:buNone/>
-            </a:pPr>
-            <a:r>
-              <a:rPr lang="en-US" sz="1150" dirty="0">
-                <a:solidFill>
-                  <a:srgbClr val="AEB7C4"/>
-                </a:solidFill>
-                <a:latin typeface="Calibri" pitchFamily="34" charset="0"/>
-                <a:ea typeface="Calibri" pitchFamily="34" charset="-122"/>
-                <a:cs typeface="Calibri" pitchFamily="34" charset="-120"/>
-              </a:rPr>
-              <a:t>デモ・使い方が伝わるREADMEにする。GitHub Pages等で簡易な公式サイトを作るのも有効</a:t>
-            </a:r>
-            <a:endParaRPr lang="en-US" sz="1150" dirty="0"/>
-          </a:p>
-        </p:txBody>
-      </p:sp>
-      <p:sp>
-        <p:nvSpPr>
-          <p:cNvPr id="17" name="Shape 15"/>
-          <p:cNvSpPr/>
-          <p:nvPr/>
-        </p:nvSpPr>
-        <p:spPr>
-          <a:xfrm>
-            <a:off x="548640" y="4489704"/>
-            <a:ext cx="384048" cy="384048"/>
-          </a:xfrm>
-          <a:prstGeom prst="ellipse">
-            <a:avLst/>
-          </a:prstGeom>
-          <a:solidFill>
-            <a:srgbClr val="58D68D"/>
-          </a:solidFill>
-          <a:ln/>
-        </p:spPr>
-      </p:sp>
-      <p:sp>
-        <p:nvSpPr>
-          <p:cNvPr id="18" name="Text 16"/>
-          <p:cNvSpPr txBox="1"/>
-          <p:nvPr/>
-        </p:nvSpPr>
-        <p:spPr>
-          <a:xfrm>
-            <a:off x="548640" y="4489704"/>
-            <a:ext cx="384048" cy="384048"/>
-          </a:xfrm>
-          <a:prstGeom prst="rect">
-            <a:avLst/>
-          </a:prstGeom>
-          <a:noFill/>
-          <a:ln/>
-        </p:spPr>
-        <p:txBody>
-          <a:bodyPr wrap="square" lIns="0" tIns="0" rIns="0" bIns="0" rtlCol="0" anchor="ctr"/>
-          <a:lstStyle/>
-          <a:p>
-            <a:pPr algn="ctr" indent="0" marL="0">
-              <a:buNone/>
-            </a:pPr>
-            <a:r>
-              <a:rPr lang="en-US" sz="1300" b="1" dirty="0">
+              <a:t>Product Hunt</a:t>
+            </a:r>
+            <a:endParaRPr lang="en-US" sz="1250" dirty="0"/>
+          </a:p>
+        </p:txBody>
+      </p:sp>
+      <p:sp>
+        <p:nvSpPr>
+          <p:cNvPr id="20" name="Text 18"/>
+          <p:cNvSpPr txBox="1"/>
+          <p:nvPr/>
+        </p:nvSpPr>
+        <p:spPr>
+          <a:xfrm>
+            <a:off x="6309360" y="3657600"/>
+            <a:ext cx="4663440" cy="640080"/>
+          </a:xfrm>
+          <a:prstGeom prst="rect">
+            <a:avLst/>
+          </a:prstGeom>
+          <a:noFill/>
+          <a:ln/>
+        </p:spPr>
+        <p:txBody>
+          <a:bodyPr wrap="square" lIns="0" tIns="0" rIns="0" bIns="0" rtlCol="0" anchor="ctr"/>
+          <a:lstStyle/>
+          <a:p>
+            <a:pPr indent="0" marL="0">
+              <a:buNone/>
+            </a:pPr>
+            <a:r>
+              <a:rPr lang="en-US" sz="1050" dirty="0">
+                <a:solidFill>
+                  <a:srgbClr val="5B6472"/>
+                </a:solidFill>
+                <a:latin typeface="Calibri" pitchFamily="34" charset="0"/>
+                <a:ea typeface="Calibri" pitchFamily="34" charset="-122"/>
+                <a:cs typeface="Calibri" pitchFamily="34" charset="-120"/>
+              </a:rPr>
+              <a:t>AI関連プロダクトが多く、その他のプロダクトは埋もれやすい</a:t>
+            </a:r>
+            <a:endParaRPr lang="en-US" sz="1050" dirty="0"/>
+          </a:p>
+        </p:txBody>
+      </p:sp>
+      <p:sp>
+        <p:nvSpPr>
+          <p:cNvPr id="21" name="Text 19"/>
+          <p:cNvSpPr txBox="1"/>
+          <p:nvPr/>
+        </p:nvSpPr>
+        <p:spPr>
+          <a:xfrm>
+            <a:off x="6309360" y="4206240"/>
+            <a:ext cx="4663440" cy="274320"/>
+          </a:xfrm>
+          <a:prstGeom prst="rect">
+            <a:avLst/>
+          </a:prstGeom>
+          <a:noFill/>
+          <a:ln/>
+        </p:spPr>
+        <p:txBody>
+          <a:bodyPr wrap="square" lIns="0" tIns="0" rIns="0" bIns="0" rtlCol="0" anchor="ctr"/>
+          <a:lstStyle/>
+          <a:p>
+            <a:pPr indent="0" marL="0">
+              <a:buNone/>
+            </a:pPr>
+            <a:r>
+              <a:rPr lang="en-US" sz="1250" b="1" dirty="0">
                 <a:solidFill>
                   <a:srgbClr val="1A1F26"/>
                 </a:solidFill>
@@ -8505,109 +9400,11 @@
                 <a:ea typeface="Calibri" pitchFamily="34" charset="-122"/>
                 <a:cs typeface="Calibri" pitchFamily="34" charset="-120"/>
               </a:rPr>
-              <a:t>4</a:t>
-            </a:r>
-            <a:endParaRPr lang="en-US" sz="1300" dirty="0"/>
-          </a:p>
-        </p:txBody>
-      </p:sp>
-      <p:sp>
-        <p:nvSpPr>
-          <p:cNvPr id="19" name="Text 17"/>
-          <p:cNvSpPr txBox="1"/>
-          <p:nvPr/>
-        </p:nvSpPr>
-        <p:spPr>
-          <a:xfrm>
-            <a:off x="1097280" y="4443984"/>
-            <a:ext cx="2926080" cy="457200"/>
-          </a:xfrm>
-          <a:prstGeom prst="rect">
-            <a:avLst/>
-          </a:prstGeom>
-          <a:noFill/>
-          <a:ln/>
-        </p:spPr>
-        <p:txBody>
-          <a:bodyPr wrap="square" lIns="0" tIns="0" rIns="0" bIns="0" rtlCol="0" anchor="t"/>
-          <a:lstStyle/>
-          <a:p>
-            <a:pPr indent="0" marL="0">
-              <a:buNone/>
-            </a:pPr>
-            <a:r>
-              <a:rPr lang="en-US" sz="1300" b="1" dirty="0">
-                <a:solidFill>
-                  <a:srgbClr val="FFFFFF"/>
-                </a:solidFill>
-                <a:latin typeface="Calibri" pitchFamily="34" charset="0"/>
-                <a:ea typeface="Calibri" pitchFamily="34" charset="-122"/>
-                <a:cs typeface="Calibri" pitchFamily="34" charset="-120"/>
-              </a:rPr>
-              <a:t>告知する</a:t>
-            </a:r>
-            <a:endParaRPr lang="en-US" sz="1300" dirty="0"/>
-          </a:p>
-        </p:txBody>
-      </p:sp>
-      <p:sp>
-        <p:nvSpPr>
-          <p:cNvPr id="20" name="Text 18"/>
-          <p:cNvSpPr txBox="1"/>
-          <p:nvPr/>
-        </p:nvSpPr>
-        <p:spPr>
-          <a:xfrm>
-            <a:off x="4114800" y="4443984"/>
-            <a:ext cx="6858000" cy="777240"/>
-          </a:xfrm>
-          <a:prstGeom prst="rect">
-            <a:avLst/>
-          </a:prstGeom>
-          <a:noFill/>
-          <a:ln/>
-        </p:spPr>
-        <p:txBody>
-          <a:bodyPr wrap="square" lIns="0" tIns="0" rIns="0" bIns="0" rtlCol="0" anchor="ctr"/>
-          <a:lstStyle/>
-          <a:p>
-            <a:pPr indent="0" marL="0">
-              <a:buNone/>
-            </a:pPr>
-            <a:r>
-              <a:rPr lang="en-US" sz="1150" dirty="0">
-                <a:solidFill>
-                  <a:srgbClr val="AEB7C4"/>
-                </a:solidFill>
-                <a:latin typeface="Calibri" pitchFamily="34" charset="0"/>
-                <a:ea typeface="Calibri" pitchFamily="34" charset="-122"/>
-                <a:cs typeface="Calibri" pitchFamily="34" charset="-120"/>
-              </a:rPr>
-              <a:t>Product Hunt・Zenn・Qiita・Dev.to等で公開を告知する。ただし効果は一時的(数日)</a:t>
-            </a:r>
-            <a:endParaRPr lang="en-US" sz="1150" dirty="0"/>
-          </a:p>
-        </p:txBody>
-      </p:sp>
-      <p:sp>
-        <p:nvSpPr>
-          <p:cNvPr id="21" name="Shape 19"/>
-          <p:cNvSpPr/>
-          <p:nvPr/>
-        </p:nvSpPr>
-        <p:spPr>
-          <a:xfrm>
-            <a:off x="548640" y="5330952"/>
-            <a:ext cx="384048" cy="384048"/>
-          </a:xfrm>
-          <a:prstGeom prst="ellipse">
-            <a:avLst/>
-          </a:prstGeom>
-          <a:solidFill>
-            <a:srgbClr val="58D68D"/>
-          </a:solidFill>
-          <a:ln/>
-        </p:spPr>
+              <a:t>Awesomeリストへの追加PR</a:t>
+            </a:r>
+            <a:endParaRPr lang="en-US" sz="1250" dirty="0"/>
+          </a:p>
+        </p:txBody>
       </p:sp>
       <p:sp>
         <p:nvSpPr>
@@ -8617,24 +9414,63 @@
         </p:nvSpPr>
         <p:spPr>
           <a:xfrm>
-            <a:off x="548640" y="5330952"/>
-            <a:ext cx="384048" cy="384048"/>
-          </a:xfrm>
-          <a:prstGeom prst="rect">
-            <a:avLst/>
-          </a:prstGeom>
-          <a:noFill/>
-          <a:ln/>
-        </p:spPr>
-        <p:txBody>
-          <a:bodyPr wrap="square" lIns="0" tIns="0" rIns="0" bIns="0" rtlCol="0" anchor="ctr"/>
-          <a:lstStyle/>
-          <a:p>
-            <a:pPr algn="ctr" indent="0" marL="0">
-              <a:buNone/>
-            </a:pPr>
-            <a:r>
-              <a:rPr lang="en-US" sz="1300" b="1" dirty="0">
+            <a:off x="6309360" y="4480560"/>
+            <a:ext cx="4663440" cy="640080"/>
+          </a:xfrm>
+          <a:prstGeom prst="rect">
+            <a:avLst/>
+          </a:prstGeom>
+          <a:noFill/>
+          <a:ln/>
+        </p:spPr>
+        <p:txBody>
+          <a:bodyPr wrap="square" lIns="0" tIns="0" rIns="0" bIns="0" rtlCol="0" anchor="ctr"/>
+          <a:lstStyle/>
+          <a:p>
+            <a:pPr indent="0" marL="0">
+              <a:buNone/>
+            </a:pPr>
+            <a:r>
+              <a:rPr lang="en-US" sz="1050" dirty="0">
+                <a:solidFill>
+                  <a:srgbClr val="5B6472"/>
+                </a:solidFill>
+                <a:latin typeface="Calibri" pitchFamily="34" charset="0"/>
+                <a:ea typeface="Calibri" pitchFamily="34" charset="-122"/>
+                <a:cs typeface="Calibri" pitchFamily="34" charset="-120"/>
+              </a:rPr>
+              <a:t>掲載されても閲覧者自体が少ない</a:t>
+            </a:r>
+            <a:endParaRPr lang="en-US" sz="1050" dirty="0"/>
+          </a:p>
+        </p:txBody>
+      </p:sp>
+      <p:sp>
+        <p:nvSpPr>
+          <p:cNvPr id="23" name="Text 21"/>
+          <p:cNvSpPr txBox="1"/>
+          <p:nvPr/>
+        </p:nvSpPr>
+        <p:spPr>
+          <a:xfrm>
+            <a:off x="6309360" y="5029200"/>
+            <a:ext cx="4663440" cy="274320"/>
+          </a:xfrm>
+          <a:prstGeom prst="rect">
+            <a:avLst/>
+          </a:prstGeom>
+          <a:noFill/>
+          <a:ln/>
+        </p:spPr>
+        <p:txBody>
+          <a:bodyPr wrap="square" lIns="0" tIns="0" rIns="0" bIns="0" rtlCol="0" anchor="ctr"/>
+          <a:lstStyle/>
+          <a:p>
+            <a:pPr indent="0" marL="0">
+              <a:buNone/>
+            </a:pPr>
+            <a:r>
+              <a:rPr lang="en-US" sz="1250" b="1" dirty="0">
                 <a:solidFill>
                   <a:srgbClr val="1A1F26"/>
                 </a:solidFill>
@@ -8642,48 +9478,9 @@
                 <a:ea typeface="Calibri" pitchFamily="34" charset="-122"/>
                 <a:cs typeface="Calibri" pitchFamily="34" charset="-120"/>
               </a:rPr>
-              <a:t>5</a:t>
-            </a:r>
-            <a:endParaRPr lang="en-US" sz="1300" dirty="0"/>
-          </a:p>
-        </p:txBody>
-      </p:sp>
-      <p:sp>
-        <p:nvSpPr>
-          <p:cNvPr id="23" name="Text 21"/>
-          <p:cNvSpPr txBox="1"/>
-          <p:nvPr/>
-        </p:nvSpPr>
-        <p:spPr>
-          <a:xfrm>
-            <a:off x="1097280" y="5285232"/>
-            <a:ext cx="2926080" cy="457200"/>
-          </a:xfrm>
-          <a:prstGeom prst="rect">
-            <a:avLst/>
-          </a:prstGeom>
-          <a:noFill/>
-          <a:ln/>
-        </p:spPr>
-        <p:txBody>
-          <a:bodyPr wrap="square" lIns="0" tIns="0" rIns="0" bIns="0" rtlCol="0" anchor="t"/>
-          <a:lstStyle/>
-          <a:p>
-            <a:pPr indent="0" marL="0">
-              <a:buNone/>
-            </a:pPr>
-            <a:r>
-              <a:rPr lang="en-US" sz="1300" b="1" dirty="0">
-                <a:solidFill>
-                  <a:srgbClr val="FFFFFF"/>
-                </a:solidFill>
-                <a:latin typeface="Calibri" pitchFamily="34" charset="0"/>
-                <a:ea typeface="Calibri" pitchFamily="34" charset="-122"/>
-                <a:cs typeface="Calibri" pitchFamily="34" charset="-120"/>
-              </a:rPr>
-              <a:t>検索される記事を作る</a:t>
-            </a:r>
-            <a:endParaRPr lang="en-US" sz="1300" dirty="0"/>
+              <a:t>個人ブログ</a:t>
+            </a:r>
+            <a:endParaRPr lang="en-US" sz="1250" dirty="0"/>
           </a:p>
         </p:txBody>
       </p:sp>
@@ -8695,34 +9492,34 @@
         </p:nvSpPr>
         <p:spPr>
           <a:xfrm>
-            <a:off x="4114800" y="5285232"/>
-            <a:ext cx="6858000" cy="777240"/>
-          </a:xfrm>
-          <a:prstGeom prst="rect">
-            <a:avLst/>
-          </a:prstGeom>
-          <a:noFill/>
-          <a:ln/>
-        </p:spPr>
-        <p:txBody>
-          <a:bodyPr wrap="square" lIns="0" tIns="0" rIns="0" bIns="0" rtlCol="0" anchor="ctr"/>
-          <a:lstStyle/>
-          <a:p>
-            <a:pPr indent="0" marL="0">
-              <a:buNone/>
-            </a:pPr>
-            <a:r>
-              <a:rPr lang="en-US" sz="1150" dirty="0">
-                <a:solidFill>
-                  <a:srgbClr val="AEB7C4"/>
-                </a:solidFill>
-                <a:latin typeface="Calibri" pitchFamily="34" charset="0"/>
-                <a:ea typeface="Calibri" pitchFamily="34" charset="-122"/>
-                <a:cs typeface="Calibri" pitchFamily="34" charset="-120"/>
-              </a:rPr>
-              <a:t>想定ユーザーが検索するキーワードでブログ記事を書く。即効性は無いが継続的な流入源になる</a:t>
-            </a:r>
-            <a:endParaRPr lang="en-US" sz="1150" dirty="0"/>
+            <a:off x="6309360" y="5303520"/>
+            <a:ext cx="4663440" cy="640080"/>
+          </a:xfrm>
+          <a:prstGeom prst="rect">
+            <a:avLst/>
+          </a:prstGeom>
+          <a:noFill/>
+          <a:ln/>
+        </p:spPr>
+        <p:txBody>
+          <a:bodyPr wrap="square" lIns="0" tIns="0" rIns="0" bIns="0" rtlCol="0" anchor="ctr"/>
+          <a:lstStyle/>
+          <a:p>
+            <a:pPr indent="0" marL="0">
+              <a:buNone/>
+            </a:pPr>
+            <a:r>
+              <a:rPr lang="en-US" sz="1050" dirty="0">
+                <a:solidFill>
+                  <a:srgbClr val="5B6472"/>
+                </a:solidFill>
+                <a:latin typeface="Calibri" pitchFamily="34" charset="0"/>
+                <a:ea typeface="Calibri" pitchFamily="34" charset="-122"/>
+                <a:cs typeface="Calibri" pitchFamily="34" charset="-120"/>
+              </a:rPr>
+              <a:t>Qiita/Zenn等の媒体力があるプラットフォームでないと、Twitter投稿とあまり変わらない手応え</a:t>
+            </a:r>
+            <a:endParaRPr lang="en-US" sz="1050" dirty="0"/>
           </a:p>
         </p:txBody>
       </p:sp>
@@ -8753,13 +9550,13 @@
             <a:r>
               <a:rPr lang="en-US" sz="1000" i="1" dirty="0">
                 <a:solidFill>
-                  <a:srgbClr val="AEB7C4"/>
-                </a:solidFill>
-                <a:latin typeface="Calibri" pitchFamily="34" charset="0"/>
-                <a:ea typeface="Calibri" pitchFamily="34" charset="-122"/>
-                <a:cs typeface="Calibri" pitchFamily="34" charset="-120"/>
-              </a:rPr>
-              <a:t>出典: npmのPDF作成ライブラリ(labelmake)の開発者によるブログ記事(1事例の実体験)</a:t>
+                  <a:srgbClr val="5B6472"/>
+                </a:solidFill>
+                <a:latin typeface="Calibri" pitchFamily="34" charset="0"/>
+                <a:ea typeface="Calibri" pitchFamily="34" charset="-122"/>
+                <a:cs typeface="Calibri" pitchFamily="34" charset="-120"/>
+              </a:rPr>
+              <a:t>出典: 個人開発者によるOSSプロジェクト「Ephe」のブログ記事(1事例の実測値。分野・タイミングにより結果は変動しうる)</a:t>
             </a:r>
             <a:endParaRPr lang="en-US" sz="1000" dirty="0"/>
           </a:p>

--- a/github-strategy-guide.pptx
+++ b/github-strategy-guide.pptx
@@ -17,9 +17,10 @@
     <p:sldId id="265" r:id="rId11"/>
     <p:sldId id="266" r:id="rId12"/>
     <p:sldId id="267" r:id="rId13"/>
+    <p:sldId id="268" r:id="rId14"/>
   </p:sldIdLst>
   <p:notesMasterIdLst>
-    <p:notesMasterId r:id="rId14"/>
+    <p:notesMasterId r:id="rId15"/>
   </p:notesMasterIdLst>
   <p:sldSz cx="12192000" cy="6858000"/>
   <p:notesSz cx="6858000" cy="12192000"/>
@@ -801,6 +802,94 @@
             <a:fld id="{F7021451-1387-4CA6-816F-3879F97B5CBC}" type="slidenum">
               <a:rPr lang="en-US"/>
               <a:t>12</a:t>
+            </a:fld>
+            <a:endParaRPr lang="en-US"/>
+          </a:p>
+        </p:txBody>
+      </p:sp>
+    </p:spTree>
+    <p:extLst>
+      <p:ext uri="{BB962C8B-B14F-4D97-AF65-F5344CB8AC3E}">
+        <p14:creationId xmlns:p14="http://schemas.microsoft.com/office/powerpoint/2010/main" val="1024086991"/>
+      </p:ext>
+    </p:extLst>
+  </p:cSld>
+  <p:clrMapOvr>
+    <a:masterClrMapping/>
+  </p:clrMapOvr>
+</p:notes>
+</file>
+
+<file path=ppt/notesSlides/notesSlide13.xml><?xml version="1.0" encoding="utf-8"?>
+<p:notes xmlns:a="http://schemas.openxmlformats.org/drawingml/2006/main" xmlns:r="http://schemas.openxmlformats.org/officeDocument/2006/relationships" xmlns:p="http://schemas.openxmlformats.org/presentationml/2006/main">
+  <p:cSld>
+    <p:spTree>
+      <p:nvGrpSpPr>
+        <p:cNvPr id="1" name=""/>
+        <p:cNvGrpSpPr/>
+        <p:nvPr/>
+      </p:nvGrpSpPr>
+      <p:grpSpPr>
+        <a:xfrm>
+          <a:off x="0" y="0"/>
+          <a:ext cx="0" cy="0"/>
+          <a:chOff x="0" y="0"/>
+          <a:chExt cx="0" cy="0"/>
+        </a:xfrm>
+      </p:grpSpPr>
+      <p:sp>
+        <p:nvSpPr>
+          <p:cNvPr id="2" name="Slide Image Placeholder 1"/>
+          <p:cNvSpPr>
+            <a:spLocks noGrp="1" noRot="1" noChangeAspect="1"/>
+          </p:cNvSpPr>
+          <p:nvPr>
+            <p:ph type="sldImg"/>
+          </p:nvPr>
+        </p:nvSpPr>
+        <p:spPr/>
+      </p:sp>
+      <p:sp>
+        <p:nvSpPr>
+          <p:cNvPr id="3" name="Notes Placeholder 2"/>
+          <p:cNvSpPr>
+            <a:spLocks noGrp="1"/>
+          </p:cNvSpPr>
+          <p:nvPr>
+            <p:ph type="body" idx="1"/>
+          </p:nvPr>
+        </p:nvSpPr>
+        <p:spPr/>
+        <p:txBody>
+          <a:bodyPr/>
+          <a:lstStyle/>
+          <a:p>
+            <a:r>
+              <a:rPr lang="en-US" dirty="0"/>
+              <a:t/>
+            </a:r>
+            <a:endParaRPr lang="en-US" dirty="0"/>
+          </a:p>
+        </p:txBody>
+      </p:sp>
+      <p:sp>
+        <p:nvSpPr>
+          <p:cNvPr id="4" name="Slide Number Placeholder 3"/>
+          <p:cNvSpPr>
+            <a:spLocks noGrp="1"/>
+          </p:cNvSpPr>
+          <p:nvPr>
+            <p:ph type="sldNum" sz="quarter" idx="10"/>
+          </p:nvPr>
+        </p:nvSpPr>
+        <p:spPr/>
+        <p:txBody>
+          <a:bodyPr/>
+          <a:lstStyle/>
+          <a:p>
+            <a:fld id="{F7021451-1387-4CA6-816F-3879F97B5CBC}" type="slidenum">
+              <a:rPr lang="en-US"/>
+              <a:t>13</a:t>
             </a:fld>
             <a:endParaRPr lang="en-US"/>
           </a:p>
@@ -2980,6 +3069,692 @@
     <p:bg>
       <p:bgPr>
         <a:solidFill>
+          <a:srgbClr val="F5F6F8"/>
+        </a:solidFill>
+      </p:bgPr>
+    </p:bg>
+    <p:spTree>
+      <p:nvGrpSpPr>
+        <p:cNvPr id="1" name=""/>
+        <p:cNvGrpSpPr/>
+        <p:nvPr/>
+      </p:nvGrpSpPr>
+      <p:grpSpPr>
+        <a:xfrm>
+          <a:off x="0" y="0"/>
+          <a:ext cx="0" cy="0"/>
+          <a:chOff x="0" y="0"/>
+          <a:chExt cx="0" cy="0"/>
+        </a:xfrm>
+      </p:grpSpPr>
+      <p:sp>
+        <p:nvSpPr>
+          <p:cNvPr id="2" name="Text 0"/>
+          <p:cNvSpPr txBox="1"/>
+          <p:nvPr/>
+        </p:nvSpPr>
+        <p:spPr>
+          <a:xfrm>
+            <a:off x="548640" y="457200"/>
+            <a:ext cx="731520" cy="731520"/>
+          </a:xfrm>
+          <a:prstGeom prst="rect">
+            <a:avLst/>
+          </a:prstGeom>
+          <a:noFill/>
+          <a:ln/>
+        </p:spPr>
+        <p:txBody>
+          <a:bodyPr wrap="square" lIns="0" tIns="0" rIns="0" bIns="0" rtlCol="0" anchor="ctr"/>
+          <a:lstStyle/>
+          <a:p>
+            <a:pPr indent="0" marL="0">
+              <a:buNone/>
+            </a:pPr>
+            <a:r>
+              <a:rPr lang="en-US" sz="2800" b="1" dirty="0">
+                <a:solidFill>
+                  <a:srgbClr val="B084F5"/>
+                </a:solidFill>
+                <a:latin typeface="Cambria" pitchFamily="34" charset="0"/>
+                <a:ea typeface="Cambria" pitchFamily="34" charset="-122"/>
+                <a:cs typeface="Cambria" pitchFamily="34" charset="-120"/>
+              </a:rPr>
+              <a:t>5</a:t>
+            </a:r>
+            <a:endParaRPr lang="en-US" sz="2800" dirty="0"/>
+          </a:p>
+        </p:txBody>
+      </p:sp>
+      <p:sp>
+        <p:nvSpPr>
+          <p:cNvPr id="3" name="Text 1"/>
+          <p:cNvSpPr txBox="1"/>
+          <p:nvPr/>
+        </p:nvSpPr>
+        <p:spPr>
+          <a:xfrm>
+            <a:off x="1280160" y="502920"/>
+            <a:ext cx="9784080" cy="640080"/>
+          </a:xfrm>
+          <a:prstGeom prst="rect">
+            <a:avLst/>
+          </a:prstGeom>
+          <a:noFill/>
+          <a:ln/>
+        </p:spPr>
+        <p:txBody>
+          <a:bodyPr wrap="square" lIns="0" tIns="0" rIns="0" bIns="0" rtlCol="0" anchor="ctr"/>
+          <a:lstStyle/>
+          <a:p>
+            <a:pPr indent="0" marL="0">
+              <a:buNone/>
+            </a:pPr>
+            <a:r>
+              <a:rPr lang="en-US" sz="2600" b="1" dirty="0">
+                <a:solidFill>
+                  <a:srgbClr val="1A1F26"/>
+                </a:solidFill>
+                <a:latin typeface="Cambria" pitchFamily="34" charset="0"/>
+                <a:ea typeface="Cambria" pitchFamily="34" charset="-122"/>
+                <a:cs typeface="Cambria" pitchFamily="34" charset="-120"/>
+              </a:rPr>
+              <a:t>実践手順: Hacker Newsの使い方</a:t>
+            </a:r>
+            <a:endParaRPr lang="en-US" sz="2600" dirty="0"/>
+          </a:p>
+        </p:txBody>
+      </p:sp>
+      <p:sp>
+        <p:nvSpPr>
+          <p:cNvPr id="4" name="Text 2"/>
+          <p:cNvSpPr txBox="1"/>
+          <p:nvPr/>
+        </p:nvSpPr>
+        <p:spPr>
+          <a:xfrm>
+            <a:off x="548640" y="1417320"/>
+            <a:ext cx="10607040" cy="365760"/>
+          </a:xfrm>
+          <a:prstGeom prst="rect">
+            <a:avLst/>
+          </a:prstGeom>
+          <a:noFill/>
+          <a:ln/>
+        </p:spPr>
+        <p:txBody>
+          <a:bodyPr wrap="square" lIns="0" tIns="0" rIns="0" bIns="0" rtlCol="0" anchor="ctr"/>
+          <a:lstStyle/>
+          <a:p>
+            <a:pPr indent="0" marL="0">
+              <a:buNone/>
+            </a:pPr>
+            <a:r>
+              <a:rPr lang="en-US" sz="1250" i="1" dirty="0">
+                <a:solidFill>
+                  <a:srgbClr val="5B6472"/>
+                </a:solidFill>
+                <a:latin typeface="Calibri" pitchFamily="34" charset="0"/>
+                <a:ea typeface="Calibri" pitchFamily="34" charset="-122"/>
+                <a:cs typeface="Calibri" pitchFamily="34" charset="-120"/>
+              </a:rPr>
+              <a:t>最も効果があったチャネル(HN)を、実際にどう使うか</a:t>
+            </a:r>
+            <a:endParaRPr lang="en-US" sz="1250" dirty="0"/>
+          </a:p>
+        </p:txBody>
+      </p:sp>
+      <p:sp>
+        <p:nvSpPr>
+          <p:cNvPr id="5" name="Shape 3"/>
+          <p:cNvSpPr/>
+          <p:nvPr/>
+        </p:nvSpPr>
+        <p:spPr>
+          <a:xfrm>
+            <a:off x="548640" y="1920240"/>
+            <a:ext cx="10607040" cy="914400"/>
+          </a:xfrm>
+          <a:prstGeom prst="roundRect">
+            <a:avLst>
+              <a:gd name="adj" fmla="val 8000"/>
+            </a:avLst>
+          </a:prstGeom>
+          <a:solidFill>
+            <a:srgbClr val="FFFFFF"/>
+          </a:solidFill>
+          <a:ln w="12700">
+            <a:solidFill>
+              <a:srgbClr val="E3E6EA"/>
+            </a:solidFill>
+            <a:prstDash val="solid"/>
+          </a:ln>
+        </p:spPr>
+      </p:sp>
+      <p:sp>
+        <p:nvSpPr>
+          <p:cNvPr id="6" name="Text 4"/>
+          <p:cNvSpPr txBox="1"/>
+          <p:nvPr/>
+        </p:nvSpPr>
+        <p:spPr>
+          <a:xfrm>
+            <a:off x="822960" y="2039112"/>
+            <a:ext cx="2834640" cy="640080"/>
+          </a:xfrm>
+          <a:prstGeom prst="rect">
+            <a:avLst/>
+          </a:prstGeom>
+          <a:noFill/>
+          <a:ln/>
+        </p:spPr>
+        <p:txBody>
+          <a:bodyPr wrap="square" lIns="0" tIns="0" rIns="0" bIns="0" rtlCol="0" anchor="t"/>
+          <a:lstStyle/>
+          <a:p>
+            <a:pPr indent="0" marL="0">
+              <a:buNone/>
+            </a:pPr>
+            <a:r>
+              <a:rPr lang="en-US" sz="1350" b="1" dirty="0">
+                <a:solidFill>
+                  <a:srgbClr val="B084F5"/>
+                </a:solidFill>
+                <a:latin typeface="Calibri" pitchFamily="34" charset="0"/>
+                <a:ea typeface="Calibri" pitchFamily="34" charset="-122"/>
+                <a:cs typeface="Calibri" pitchFamily="34" charset="-120"/>
+              </a:rPr>
+              <a:t>① アカウント作成</a:t>
+            </a:r>
+            <a:endParaRPr lang="en-US" sz="1350" dirty="0"/>
+          </a:p>
+        </p:txBody>
+      </p:sp>
+      <p:sp>
+        <p:nvSpPr>
+          <p:cNvPr id="7" name="Text 5"/>
+          <p:cNvSpPr txBox="1"/>
+          <p:nvPr/>
+        </p:nvSpPr>
+        <p:spPr>
+          <a:xfrm>
+            <a:off x="3749040" y="2039112"/>
+            <a:ext cx="7315200" cy="685800"/>
+          </a:xfrm>
+          <a:prstGeom prst="rect">
+            <a:avLst/>
+          </a:prstGeom>
+          <a:noFill/>
+          <a:ln/>
+        </p:spPr>
+        <p:txBody>
+          <a:bodyPr wrap="square" lIns="0" tIns="0" rIns="0" bIns="0" rtlCol="0" anchor="ctr"/>
+          <a:lstStyle/>
+          <a:p>
+            <a:pPr indent="0" marL="0">
+              <a:buNone/>
+            </a:pPr>
+            <a:r>
+              <a:rPr lang="en-US" sz="1150" dirty="0">
+                <a:solidFill>
+                  <a:srgbClr val="5B6472"/>
+                </a:solidFill>
+                <a:latin typeface="Calibri" pitchFamily="34" charset="0"/>
+                <a:ea typeface="Calibri" pitchFamily="34" charset="-122"/>
+                <a:cs typeface="Calibri" pitchFamily="34" charset="-120"/>
+              </a:rPr>
+              <a:t>news.ycombinator.com/login → 「Create Account」。ユーザー名とパスワードのみ、メール登録不要</a:t>
+            </a:r>
+            <a:endParaRPr lang="en-US" sz="1150" dirty="0"/>
+          </a:p>
+        </p:txBody>
+      </p:sp>
+      <p:sp>
+        <p:nvSpPr>
+          <p:cNvPr id="8" name="Shape 6"/>
+          <p:cNvSpPr/>
+          <p:nvPr/>
+        </p:nvSpPr>
+        <p:spPr>
+          <a:xfrm>
+            <a:off x="548640" y="2971800"/>
+            <a:ext cx="10607040" cy="914400"/>
+          </a:xfrm>
+          <a:prstGeom prst="roundRect">
+            <a:avLst>
+              <a:gd name="adj" fmla="val 8000"/>
+            </a:avLst>
+          </a:prstGeom>
+          <a:solidFill>
+            <a:srgbClr val="FFFFFF"/>
+          </a:solidFill>
+          <a:ln w="12700">
+            <a:solidFill>
+              <a:srgbClr val="E3E6EA"/>
+            </a:solidFill>
+            <a:prstDash val="solid"/>
+          </a:ln>
+        </p:spPr>
+      </p:sp>
+      <p:sp>
+        <p:nvSpPr>
+          <p:cNvPr id="9" name="Text 7"/>
+          <p:cNvSpPr txBox="1"/>
+          <p:nvPr/>
+        </p:nvSpPr>
+        <p:spPr>
+          <a:xfrm>
+            <a:off x="822960" y="3090672"/>
+            <a:ext cx="2834640" cy="640080"/>
+          </a:xfrm>
+          <a:prstGeom prst="rect">
+            <a:avLst/>
+          </a:prstGeom>
+          <a:noFill/>
+          <a:ln/>
+        </p:spPr>
+        <p:txBody>
+          <a:bodyPr wrap="square" lIns="0" tIns="0" rIns="0" bIns="0" rtlCol="0" anchor="t"/>
+          <a:lstStyle/>
+          <a:p>
+            <a:pPr indent="0" marL="0">
+              <a:buNone/>
+            </a:pPr>
+            <a:r>
+              <a:rPr lang="en-US" sz="1350" b="1" dirty="0">
+                <a:solidFill>
+                  <a:srgbClr val="B084F5"/>
+                </a:solidFill>
+                <a:latin typeface="Calibri" pitchFamily="34" charset="0"/>
+                <a:ea typeface="Calibri" pitchFamily="34" charset="-122"/>
+                <a:cs typeface="Calibri" pitchFamily="34" charset="-120"/>
+              </a:rPr>
+              <a:t>② /newest を理解する</a:t>
+            </a:r>
+            <a:endParaRPr lang="en-US" sz="1350" dirty="0"/>
+          </a:p>
+        </p:txBody>
+      </p:sp>
+      <p:sp>
+        <p:nvSpPr>
+          <p:cNvPr id="10" name="Text 8"/>
+          <p:cNvSpPr txBox="1"/>
+          <p:nvPr/>
+        </p:nvSpPr>
+        <p:spPr>
+          <a:xfrm>
+            <a:off x="3749040" y="3090672"/>
+            <a:ext cx="7315200" cy="685800"/>
+          </a:xfrm>
+          <a:prstGeom prst="rect">
+            <a:avLst/>
+          </a:prstGeom>
+          <a:noFill/>
+          <a:ln/>
+        </p:spPr>
+        <p:txBody>
+          <a:bodyPr wrap="square" lIns="0" tIns="0" rIns="0" bIns="0" rtlCol="0" anchor="ctr"/>
+          <a:lstStyle/>
+          <a:p>
+            <a:pPr indent="0" marL="0">
+              <a:buNone/>
+            </a:pPr>
+            <a:r>
+              <a:rPr lang="en-US" sz="1150" dirty="0">
+                <a:solidFill>
+                  <a:srgbClr val="5B6472"/>
+                </a:solidFill>
+                <a:latin typeface="Calibri" pitchFamily="34" charset="0"/>
+                <a:ea typeface="Calibri" pitchFamily="34" charset="-122"/>
+                <a:cs typeface="Calibri" pitchFamily="34" charset="-120"/>
+              </a:rPr>
+              <a:t>news.ycombinator.com/newest は投稿順の新着一覧。ここでUpvoteを集めるとアルゴリズムでトップページ側へ浮上する</a:t>
+            </a:r>
+            <a:endParaRPr lang="en-US" sz="1150" dirty="0"/>
+          </a:p>
+        </p:txBody>
+      </p:sp>
+      <p:sp>
+        <p:nvSpPr>
+          <p:cNvPr id="11" name="Shape 9"/>
+          <p:cNvSpPr/>
+          <p:nvPr/>
+        </p:nvSpPr>
+        <p:spPr>
+          <a:xfrm>
+            <a:off x="548640" y="4023360"/>
+            <a:ext cx="10607040" cy="914400"/>
+          </a:xfrm>
+          <a:prstGeom prst="roundRect">
+            <a:avLst>
+              <a:gd name="adj" fmla="val 8000"/>
+            </a:avLst>
+          </a:prstGeom>
+          <a:solidFill>
+            <a:srgbClr val="FFFFFF"/>
+          </a:solidFill>
+          <a:ln w="12700">
+            <a:solidFill>
+              <a:srgbClr val="E3E6EA"/>
+            </a:solidFill>
+            <a:prstDash val="solid"/>
+          </a:ln>
+        </p:spPr>
+      </p:sp>
+      <p:sp>
+        <p:nvSpPr>
+          <p:cNvPr id="12" name="Text 10"/>
+          <p:cNvSpPr txBox="1"/>
+          <p:nvPr/>
+        </p:nvSpPr>
+        <p:spPr>
+          <a:xfrm>
+            <a:off x="822960" y="4142232"/>
+            <a:ext cx="2834640" cy="640080"/>
+          </a:xfrm>
+          <a:prstGeom prst="rect">
+            <a:avLst/>
+          </a:prstGeom>
+          <a:noFill/>
+          <a:ln/>
+        </p:spPr>
+        <p:txBody>
+          <a:bodyPr wrap="square" lIns="0" tIns="0" rIns="0" bIns="0" rtlCol="0" anchor="t"/>
+          <a:lstStyle/>
+          <a:p>
+            <a:pPr indent="0" marL="0">
+              <a:buNone/>
+            </a:pPr>
+            <a:r>
+              <a:rPr lang="en-US" sz="1350" b="1" dirty="0">
+                <a:solidFill>
+                  <a:srgbClr val="B084F5"/>
+                </a:solidFill>
+                <a:latin typeface="Calibri" pitchFamily="34" charset="0"/>
+                <a:ea typeface="Calibri" pitchFamily="34" charset="-122"/>
+                <a:cs typeface="Calibri" pitchFamily="34" charset="-120"/>
+              </a:rPr>
+              <a:t>③ Show HN: で投稿する</a:t>
+            </a:r>
+            <a:endParaRPr lang="en-US" sz="1350" dirty="0"/>
+          </a:p>
+        </p:txBody>
+      </p:sp>
+      <p:sp>
+        <p:nvSpPr>
+          <p:cNvPr id="13" name="Text 11"/>
+          <p:cNvSpPr txBox="1"/>
+          <p:nvPr/>
+        </p:nvSpPr>
+        <p:spPr>
+          <a:xfrm>
+            <a:off x="3749040" y="4142232"/>
+            <a:ext cx="7315200" cy="685800"/>
+          </a:xfrm>
+          <a:prstGeom prst="rect">
+            <a:avLst/>
+          </a:prstGeom>
+          <a:noFill/>
+          <a:ln/>
+        </p:spPr>
+        <p:txBody>
+          <a:bodyPr wrap="square" lIns="0" tIns="0" rIns="0" bIns="0" rtlCol="0" anchor="ctr"/>
+          <a:lstStyle/>
+          <a:p>
+            <a:pPr indent="0" marL="0">
+              <a:buNone/>
+            </a:pPr>
+            <a:r>
+              <a:rPr lang="en-US" sz="1150" dirty="0">
+                <a:solidFill>
+                  <a:srgbClr val="5B6472"/>
+                </a:solidFill>
+                <a:latin typeface="Calibri" pitchFamily="34" charset="0"/>
+                <a:ea typeface="Calibri" pitchFamily="34" charset="-122"/>
+                <a:cs typeface="Calibri" pitchFamily="34" charset="-120"/>
+              </a:rPr>
+              <a:t>submitページでタイトル先頭に「Show HN: 」を付けると、自作ツール専用の Show タブにも掲載される</a:t>
+            </a:r>
+            <a:endParaRPr lang="en-US" sz="1150" dirty="0"/>
+          </a:p>
+        </p:txBody>
+      </p:sp>
+      <p:sp>
+        <p:nvSpPr>
+          <p:cNvPr id="14" name="Shape 12"/>
+          <p:cNvSpPr/>
+          <p:nvPr/>
+        </p:nvSpPr>
+        <p:spPr>
+          <a:xfrm>
+            <a:off x="548640" y="5074920"/>
+            <a:ext cx="10607040" cy="914400"/>
+          </a:xfrm>
+          <a:prstGeom prst="roundRect">
+            <a:avLst>
+              <a:gd name="adj" fmla="val 8000"/>
+            </a:avLst>
+          </a:prstGeom>
+          <a:solidFill>
+            <a:srgbClr val="FFFFFF"/>
+          </a:solidFill>
+          <a:ln w="12700">
+            <a:solidFill>
+              <a:srgbClr val="E3E6EA"/>
+            </a:solidFill>
+            <a:prstDash val="solid"/>
+          </a:ln>
+        </p:spPr>
+      </p:sp>
+      <p:sp>
+        <p:nvSpPr>
+          <p:cNvPr id="15" name="Text 13"/>
+          <p:cNvSpPr txBox="1"/>
+          <p:nvPr/>
+        </p:nvSpPr>
+        <p:spPr>
+          <a:xfrm>
+            <a:off x="822960" y="5193792"/>
+            <a:ext cx="2834640" cy="640080"/>
+          </a:xfrm>
+          <a:prstGeom prst="rect">
+            <a:avLst/>
+          </a:prstGeom>
+          <a:noFill/>
+          <a:ln/>
+        </p:spPr>
+        <p:txBody>
+          <a:bodyPr wrap="square" lIns="0" tIns="0" rIns="0" bIns="0" rtlCol="0" anchor="t"/>
+          <a:lstStyle/>
+          <a:p>
+            <a:pPr indent="0" marL="0">
+              <a:buNone/>
+            </a:pPr>
+            <a:r>
+              <a:rPr lang="en-US" sz="1350" b="1" dirty="0">
+                <a:solidFill>
+                  <a:srgbClr val="B084F5"/>
+                </a:solidFill>
+                <a:latin typeface="Calibri" pitchFamily="34" charset="0"/>
+                <a:ea typeface="Calibri" pitchFamily="34" charset="-122"/>
+                <a:cs typeface="Calibri" pitchFamily="34" charset="-120"/>
+              </a:rPr>
+              <a:t>④ Karma(信頼度)を意識</a:t>
+            </a:r>
+            <a:endParaRPr lang="en-US" sz="1350" dirty="0"/>
+          </a:p>
+        </p:txBody>
+      </p:sp>
+      <p:sp>
+        <p:nvSpPr>
+          <p:cNvPr id="16" name="Text 14"/>
+          <p:cNvSpPr txBox="1"/>
+          <p:nvPr/>
+        </p:nvSpPr>
+        <p:spPr>
+          <a:xfrm>
+            <a:off x="3749040" y="5193792"/>
+            <a:ext cx="7315200" cy="685800"/>
+          </a:xfrm>
+          <a:prstGeom prst="rect">
+            <a:avLst/>
+          </a:prstGeom>
+          <a:noFill/>
+          <a:ln/>
+        </p:spPr>
+        <p:txBody>
+          <a:bodyPr wrap="square" lIns="0" tIns="0" rIns="0" bIns="0" rtlCol="0" anchor="ctr"/>
+          <a:lstStyle/>
+          <a:p>
+            <a:pPr indent="0" marL="0">
+              <a:buNone/>
+            </a:pPr>
+            <a:r>
+              <a:rPr lang="en-US" sz="1150" dirty="0">
+                <a:solidFill>
+                  <a:srgbClr val="5B6472"/>
+                </a:solidFill>
+                <a:latin typeface="Calibri" pitchFamily="34" charset="0"/>
+                <a:ea typeface="Calibri" pitchFamily="34" charset="-122"/>
+                <a:cs typeface="Calibri" pitchFamily="34" charset="-120"/>
+              </a:rPr>
+              <a:t>他人の投稿へのコメント・Upvoteで蓄積されるポイント制度。低いと表示・投稿頻度で不利になることがある</a:t>
+            </a:r>
+            <a:endParaRPr lang="en-US" sz="1150" dirty="0"/>
+          </a:p>
+        </p:txBody>
+      </p:sp>
+      <p:sp>
+        <p:nvSpPr>
+          <p:cNvPr id="17" name="Text 15"/>
+          <p:cNvSpPr txBox="1"/>
+          <p:nvPr/>
+        </p:nvSpPr>
+        <p:spPr>
+          <a:xfrm>
+            <a:off x="548640" y="5989320"/>
+            <a:ext cx="10607040" cy="365760"/>
+          </a:xfrm>
+          <a:prstGeom prst="rect">
+            <a:avLst/>
+          </a:prstGeom>
+          <a:noFill/>
+          <a:ln/>
+        </p:spPr>
+        <p:txBody>
+          <a:bodyPr wrap="square" lIns="0" tIns="0" rIns="0" bIns="0" rtlCol="0" anchor="ctr"/>
+          <a:lstStyle/>
+          <a:p>
+            <a:pPr indent="0" marL="0">
+              <a:buNone/>
+            </a:pPr>
+            <a:r>
+              <a:rPr lang="en-US" sz="1100" dirty="0">
+                <a:solidFill>
+                  <a:srgbClr val="5B6472"/>
+                </a:solidFill>
+                <a:latin typeface="Calibri" pitchFamily="34" charset="0"/>
+                <a:ea typeface="Calibri" pitchFamily="34" charset="-122"/>
+                <a:cs typeface="Calibri" pitchFamily="34" charset="-120"/>
+              </a:rPr>
+              <a:t>注意点: 短時間の連続投稿はスパム扱いされやすい。投稿タイミング(米国の朝〜昼にあたる時間帯)も反応に影響しやすいと言われる</a:t>
+            </a:r>
+            <a:endParaRPr lang="en-US" sz="1100" dirty="0"/>
+          </a:p>
+        </p:txBody>
+      </p:sp>
+      <p:sp>
+        <p:nvSpPr>
+          <p:cNvPr id="18" name="Text 16"/>
+          <p:cNvSpPr txBox="1"/>
+          <p:nvPr/>
+        </p:nvSpPr>
+        <p:spPr>
+          <a:xfrm>
+            <a:off x="548640" y="6400800"/>
+            <a:ext cx="10424160" cy="320040"/>
+          </a:xfrm>
+          <a:prstGeom prst="rect">
+            <a:avLst/>
+          </a:prstGeom>
+          <a:noFill/>
+          <a:ln/>
+        </p:spPr>
+        <p:txBody>
+          <a:bodyPr wrap="square" lIns="0" tIns="0" rIns="0" bIns="0" rtlCol="0" anchor="ctr"/>
+          <a:lstStyle/>
+          <a:p>
+            <a:pPr indent="0" marL="0">
+              <a:buNone/>
+            </a:pPr>
+            <a:r>
+              <a:rPr lang="en-US" sz="1000" i="1" dirty="0">
+                <a:solidFill>
+                  <a:srgbClr val="5B6472"/>
+                </a:solidFill>
+                <a:latin typeface="Calibri" pitchFamily="34" charset="0"/>
+                <a:ea typeface="Calibri" pitchFamily="34" charset="-122"/>
+                <a:cs typeface="Calibri" pitchFamily="34" charset="-120"/>
+              </a:rPr>
+              <a:t>出典: Hacker News公式の投稿・利用フロー、および個人開発者(Ephe)の実体験</a:t>
+            </a:r>
+            <a:endParaRPr lang="en-US" sz="1000" dirty="0"/>
+          </a:p>
+        </p:txBody>
+      </p:sp>
+      <p:sp>
+        <p:nvSpPr>
+          <p:cNvPr id="19" name="Text 17"/>
+          <p:cNvSpPr txBox="1"/>
+          <p:nvPr/>
+        </p:nvSpPr>
+        <p:spPr>
+          <a:xfrm>
+            <a:off x="11521440" y="6492240"/>
+            <a:ext cx="457200" cy="274320"/>
+          </a:xfrm>
+          <a:prstGeom prst="rect">
+            <a:avLst/>
+          </a:prstGeom>
+          <a:noFill/>
+          <a:ln/>
+        </p:spPr>
+        <p:txBody>
+          <a:bodyPr wrap="square" lIns="0" tIns="0" rIns="0" bIns="0" rtlCol="0" anchor="ctr"/>
+          <a:lstStyle/>
+          <a:p>
+            <a:pPr algn="r" indent="0" marL="0">
+              <a:buNone/>
+            </a:pPr>
+            <a:r>
+              <a:rPr lang="en-US" sz="1000" dirty="0">
+                <a:solidFill>
+                  <a:srgbClr val="5B6472"/>
+                </a:solidFill>
+                <a:latin typeface="Calibri" pitchFamily="34" charset="0"/>
+                <a:ea typeface="Calibri" pitchFamily="34" charset="-122"/>
+                <a:cs typeface="Calibri" pitchFamily="34" charset="-120"/>
+              </a:rPr>
+              <a:t>11</a:t>
+            </a:r>
+            <a:endParaRPr lang="en-US" sz="1000" dirty="0"/>
+          </a:p>
+        </p:txBody>
+      </p:sp>
+    </p:spTree>
+  </p:cSld>
+  <p:clrMapOvr>
+    <a:masterClrMapping/>
+  </p:clrMapOvr>
+</p:sld>
+</file>
+
+<file path=ppt/slides/slide12.xml><?xml version="1.0" encoding="utf-8"?>
+<p:sld xmlns:a="http://schemas.openxmlformats.org/drawingml/2006/main" xmlns:r="http://schemas.openxmlformats.org/officeDocument/2006/relationships" xmlns:p="http://schemas.openxmlformats.org/presentationml/2006/main">
+  <p:cSld name="Slide 12">
+    <p:bg>
+      <p:bgPr>
+        <a:solidFill>
           <a:srgbClr val="1A1F26"/>
         </a:solidFill>
       </p:bgPr>
@@ -3409,7 +4184,7 @@
                 <a:ea typeface="Calibri" pitchFamily="34" charset="-122"/>
                 <a:cs typeface="Calibri" pitchFamily="34" charset="-120"/>
               </a:rPr>
-              <a:t>11</a:t>
+              <a:t>12</a:t>
             </a:r>
             <a:endParaRPr lang="en-US" sz="1000" dirty="0"/>
           </a:p>
@@ -3423,9 +4198,9 @@
 </p:sld>
 </file>
 
-<file path=ppt/slides/slide12.xml><?xml version="1.0" encoding="utf-8"?>
+<file path=ppt/slides/slide13.xml><?xml version="1.0" encoding="utf-8"?>
 <p:sld xmlns:a="http://schemas.openxmlformats.org/drawingml/2006/main" xmlns:r="http://schemas.openxmlformats.org/officeDocument/2006/relationships" xmlns:p="http://schemas.openxmlformats.org/presentationml/2006/main">
-  <p:cSld name="Slide 12">
+  <p:cSld name="Slide 13">
     <p:bg>
       <p:bgPr>
         <a:solidFill>
@@ -3904,7 +4679,7 @@
                 <a:ea typeface="Calibri" pitchFamily="34" charset="-122"/>
                 <a:cs typeface="Calibri" pitchFamily="34" charset="-120"/>
               </a:rPr>
-              <a:t>12</a:t>
+              <a:t>13</a:t>
             </a:r>
             <a:endParaRPr lang="en-US" sz="1000" dirty="0"/>
           </a:p>

--- a/github-strategy-guide.pptx
+++ b/github-strategy-guide.pptx
@@ -3213,11 +3213,11 @@
         <p:spPr>
           <a:xfrm>
             <a:off x="548640" y="1920240"/>
-            <a:ext cx="10607040" cy="914400"/>
+            <a:ext cx="10607040" cy="777240"/>
           </a:xfrm>
           <a:prstGeom prst="roundRect">
             <a:avLst>
-              <a:gd name="adj" fmla="val 8000"/>
+              <a:gd name="adj" fmla="val 9412"/>
             </a:avLst>
           </a:prstGeom>
           <a:solidFill>
@@ -3239,8 +3239,8 @@
         </p:nvSpPr>
         <p:spPr>
           <a:xfrm>
-            <a:off x="822960" y="2039112"/>
-            <a:ext cx="2834640" cy="640080"/>
+            <a:off x="822960" y="2011680"/>
+            <a:ext cx="2834640" cy="594360"/>
           </a:xfrm>
           <a:prstGeom prst="rect">
             <a:avLst/>
@@ -3256,7 +3256,7 @@
               <a:buNone/>
             </a:pPr>
             <a:r>
-              <a:rPr lang="en-US" sz="1350" b="1" dirty="0">
+              <a:rPr lang="en-US" sz="1300" b="1" dirty="0">
                 <a:solidFill>
                   <a:srgbClr val="B084F5"/>
                 </a:solidFill>
@@ -3266,7 +3266,7 @@
               </a:rPr>
               <a:t>① アカウント作成</a:t>
             </a:r>
-            <a:endParaRPr lang="en-US" sz="1350" dirty="0"/>
+            <a:endParaRPr lang="en-US" sz="1300" dirty="0"/>
           </a:p>
         </p:txBody>
       </p:sp>
@@ -3278,24 +3278,24 @@
         </p:nvSpPr>
         <p:spPr>
           <a:xfrm>
-            <a:off x="3749040" y="2039112"/>
-            <a:ext cx="7315200" cy="685800"/>
-          </a:xfrm>
-          <a:prstGeom prst="rect">
-            <a:avLst/>
-          </a:prstGeom>
-          <a:noFill/>
-          <a:ln/>
-        </p:spPr>
-        <p:txBody>
-          <a:bodyPr wrap="square" lIns="0" tIns="0" rIns="0" bIns="0" rtlCol="0" anchor="ctr"/>
-          <a:lstStyle/>
-          <a:p>
-            <a:pPr indent="0" marL="0">
-              <a:buNone/>
-            </a:pPr>
-            <a:r>
-              <a:rPr lang="en-US" sz="1150" dirty="0">
+            <a:off x="3749040" y="2011680"/>
+            <a:ext cx="7315200" cy="594360"/>
+          </a:xfrm>
+          <a:prstGeom prst="rect">
+            <a:avLst/>
+          </a:prstGeom>
+          <a:noFill/>
+          <a:ln/>
+        </p:spPr>
+        <p:txBody>
+          <a:bodyPr wrap="square" lIns="0" tIns="0" rIns="0" bIns="0" rtlCol="0" anchor="ctr"/>
+          <a:lstStyle/>
+          <a:p>
+            <a:pPr indent="0" marL="0">
+              <a:buNone/>
+            </a:pPr>
+            <a:r>
+              <a:rPr lang="en-US" sz="1050" dirty="0">
                 <a:solidFill>
                   <a:srgbClr val="5B6472"/>
                 </a:solidFill>
@@ -3305,7 +3305,7 @@
               </a:rPr>
               <a:t>news.ycombinator.com/login → 「Create Account」。ユーザー名とパスワードのみ、メール登録不要</a:t>
             </a:r>
-            <a:endParaRPr lang="en-US" sz="1150" dirty="0"/>
+            <a:endParaRPr lang="en-US" sz="1050" dirty="0"/>
           </a:p>
         </p:txBody>
       </p:sp>
@@ -3317,12 +3317,12 @@
         </p:nvSpPr>
         <p:spPr>
           <a:xfrm>
-            <a:off x="548640" y="2971800"/>
-            <a:ext cx="10607040" cy="914400"/>
+            <a:off x="548640" y="2834640"/>
+            <a:ext cx="10607040" cy="777240"/>
           </a:xfrm>
           <a:prstGeom prst="roundRect">
             <a:avLst>
-              <a:gd name="adj" fmla="val 8000"/>
+              <a:gd name="adj" fmla="val 9412"/>
             </a:avLst>
           </a:prstGeom>
           <a:solidFill>
@@ -3344,8 +3344,8 @@
         </p:nvSpPr>
         <p:spPr>
           <a:xfrm>
-            <a:off x="822960" y="3090672"/>
-            <a:ext cx="2834640" cy="640080"/>
+            <a:off x="822960" y="2926080"/>
+            <a:ext cx="2834640" cy="594360"/>
           </a:xfrm>
           <a:prstGeom prst="rect">
             <a:avLst/>
@@ -3361,7 +3361,7 @@
               <a:buNone/>
             </a:pPr>
             <a:r>
-              <a:rPr lang="en-US" sz="1350" b="1" dirty="0">
+              <a:rPr lang="en-US" sz="1300" b="1" dirty="0">
                 <a:solidFill>
                   <a:srgbClr val="B084F5"/>
                 </a:solidFill>
@@ -3371,7 +3371,7 @@
               </a:rPr>
               <a:t>② /newest を理解する</a:t>
             </a:r>
-            <a:endParaRPr lang="en-US" sz="1350" dirty="0"/>
+            <a:endParaRPr lang="en-US" sz="1300" dirty="0"/>
           </a:p>
         </p:txBody>
       </p:sp>
@@ -3383,24 +3383,24 @@
         </p:nvSpPr>
         <p:spPr>
           <a:xfrm>
-            <a:off x="3749040" y="3090672"/>
-            <a:ext cx="7315200" cy="685800"/>
-          </a:xfrm>
-          <a:prstGeom prst="rect">
-            <a:avLst/>
-          </a:prstGeom>
-          <a:noFill/>
-          <a:ln/>
-        </p:spPr>
-        <p:txBody>
-          <a:bodyPr wrap="square" lIns="0" tIns="0" rIns="0" bIns="0" rtlCol="0" anchor="ctr"/>
-          <a:lstStyle/>
-          <a:p>
-            <a:pPr indent="0" marL="0">
-              <a:buNone/>
-            </a:pPr>
-            <a:r>
-              <a:rPr lang="en-US" sz="1150" dirty="0">
+            <a:off x="3749040" y="2926080"/>
+            <a:ext cx="7315200" cy="594360"/>
+          </a:xfrm>
+          <a:prstGeom prst="rect">
+            <a:avLst/>
+          </a:prstGeom>
+          <a:noFill/>
+          <a:ln/>
+        </p:spPr>
+        <p:txBody>
+          <a:bodyPr wrap="square" lIns="0" tIns="0" rIns="0" bIns="0" rtlCol="0" anchor="ctr"/>
+          <a:lstStyle/>
+          <a:p>
+            <a:pPr indent="0" marL="0">
+              <a:buNone/>
+            </a:pPr>
+            <a:r>
+              <a:rPr lang="en-US" sz="1050" dirty="0">
                 <a:solidFill>
                   <a:srgbClr val="5B6472"/>
                 </a:solidFill>
@@ -3410,7 +3410,7 @@
               </a:rPr>
               <a:t>news.ycombinator.com/newest は投稿順の新着一覧。ここでUpvoteを集めるとアルゴリズムでトップページ側へ浮上する</a:t>
             </a:r>
-            <a:endParaRPr lang="en-US" sz="1150" dirty="0"/>
+            <a:endParaRPr lang="en-US" sz="1050" dirty="0"/>
           </a:p>
         </p:txBody>
       </p:sp>
@@ -3422,12 +3422,12 @@
         </p:nvSpPr>
         <p:spPr>
           <a:xfrm>
-            <a:off x="548640" y="4023360"/>
-            <a:ext cx="10607040" cy="914400"/>
+            <a:off x="548640" y="3749040"/>
+            <a:ext cx="10607040" cy="777240"/>
           </a:xfrm>
           <a:prstGeom prst="roundRect">
             <a:avLst>
-              <a:gd name="adj" fmla="val 8000"/>
+              <a:gd name="adj" fmla="val 9412"/>
             </a:avLst>
           </a:prstGeom>
           <a:solidFill>
@@ -3449,8 +3449,8 @@
         </p:nvSpPr>
         <p:spPr>
           <a:xfrm>
-            <a:off x="822960" y="4142232"/>
-            <a:ext cx="2834640" cy="640080"/>
+            <a:off x="822960" y="3840480"/>
+            <a:ext cx="2834640" cy="594360"/>
           </a:xfrm>
           <a:prstGeom prst="rect">
             <a:avLst/>
@@ -3466,7 +3466,7 @@
               <a:buNone/>
             </a:pPr>
             <a:r>
-              <a:rPr lang="en-US" sz="1350" b="1" dirty="0">
+              <a:rPr lang="en-US" sz="1300" b="1" dirty="0">
                 <a:solidFill>
                   <a:srgbClr val="B084F5"/>
                 </a:solidFill>
@@ -3474,9 +3474,9 @@
                 <a:ea typeface="Calibri" pitchFamily="34" charset="-122"/>
                 <a:cs typeface="Calibri" pitchFamily="34" charset="-120"/>
               </a:rPr>
-              <a:t>③ Show HN: で投稿する</a:t>
-            </a:r>
-            <a:endParaRPr lang="en-US" sz="1350" dirty="0"/>
+              <a:t>③ URLをそのまま貼って投稿</a:t>
+            </a:r>
+            <a:endParaRPr lang="en-US" sz="1300" dirty="0"/>
           </a:p>
         </p:txBody>
       </p:sp>
@@ -3488,24 +3488,24 @@
         </p:nvSpPr>
         <p:spPr>
           <a:xfrm>
-            <a:off x="3749040" y="4142232"/>
-            <a:ext cx="7315200" cy="685800"/>
-          </a:xfrm>
-          <a:prstGeom prst="rect">
-            <a:avLst/>
-          </a:prstGeom>
-          <a:noFill/>
-          <a:ln/>
-        </p:spPr>
-        <p:txBody>
-          <a:bodyPr wrap="square" lIns="0" tIns="0" rIns="0" bIns="0" rtlCol="0" anchor="ctr"/>
-          <a:lstStyle/>
-          <a:p>
-            <a:pPr indent="0" marL="0">
-              <a:buNone/>
-            </a:pPr>
-            <a:r>
-              <a:rPr lang="en-US" sz="1150" dirty="0">
+            <a:off x="3749040" y="3840480"/>
+            <a:ext cx="7315200" cy="594360"/>
+          </a:xfrm>
+          <a:prstGeom prst="rect">
+            <a:avLst/>
+          </a:prstGeom>
+          <a:noFill/>
+          <a:ln/>
+        </p:spPr>
+        <p:txBody>
+          <a:bodyPr wrap="square" lIns="0" tIns="0" rIns="0" bIns="0" rtlCol="0" anchor="ctr"/>
+          <a:lstStyle/>
+          <a:p>
+            <a:pPr indent="0" marL="0">
+              <a:buNone/>
+            </a:pPr>
+            <a:r>
+              <a:rPr lang="en-US" sz="1050" dirty="0">
                 <a:solidFill>
                   <a:srgbClr val="5B6472"/>
                 </a:solidFill>
@@ -3513,9 +3513,9 @@
                 <a:ea typeface="Calibri" pitchFamily="34" charset="-122"/>
                 <a:cs typeface="Calibri" pitchFamily="34" charset="-120"/>
               </a:rPr>
-              <a:t>submitページでタイトル先頭に「Show HN: 」を付けると、自作ツール専用の Show タブにも掲載される</a:t>
-            </a:r>
-            <a:endParaRPr lang="en-US" sz="1150" dirty="0"/>
+              <a:t>submitページの「URL」欄にGitHubリポジトリのURLをそのまま貼るだけでよい(特別な連携・認証設定は不要)。Titleは先頭に「Show HN: 」を付けると自作ツール専用のShowタブにも掲載される</a:t>
+            </a:r>
+            <a:endParaRPr lang="en-US" sz="1050" dirty="0"/>
           </a:p>
         </p:txBody>
       </p:sp>
@@ -3527,12 +3527,12 @@
         </p:nvSpPr>
         <p:spPr>
           <a:xfrm>
-            <a:off x="548640" y="5074920"/>
-            <a:ext cx="10607040" cy="914400"/>
+            <a:off x="548640" y="4663440"/>
+            <a:ext cx="10607040" cy="777240"/>
           </a:xfrm>
           <a:prstGeom prst="roundRect">
             <a:avLst>
-              <a:gd name="adj" fmla="val 8000"/>
+              <a:gd name="adj" fmla="val 9412"/>
             </a:avLst>
           </a:prstGeom>
           <a:solidFill>
@@ -3554,8 +3554,8 @@
         </p:nvSpPr>
         <p:spPr>
           <a:xfrm>
-            <a:off x="822960" y="5193792"/>
-            <a:ext cx="2834640" cy="640080"/>
+            <a:off x="822960" y="4754880"/>
+            <a:ext cx="2834640" cy="594360"/>
           </a:xfrm>
           <a:prstGeom prst="rect">
             <a:avLst/>
@@ -3571,7 +3571,7 @@
               <a:buNone/>
             </a:pPr>
             <a:r>
-              <a:rPr lang="en-US" sz="1350" b="1" dirty="0">
+              <a:rPr lang="en-US" sz="1300" b="1" dirty="0">
                 <a:solidFill>
                   <a:srgbClr val="B084F5"/>
                 </a:solidFill>
@@ -3581,7 +3581,7 @@
               </a:rPr>
               <a:t>④ Karma(信頼度)を意識</a:t>
             </a:r>
-            <a:endParaRPr lang="en-US" sz="1350" dirty="0"/>
+            <a:endParaRPr lang="en-US" sz="1300" dirty="0"/>
           </a:p>
         </p:txBody>
       </p:sp>
@@ -3593,24 +3593,24 @@
         </p:nvSpPr>
         <p:spPr>
           <a:xfrm>
-            <a:off x="3749040" y="5193792"/>
-            <a:ext cx="7315200" cy="685800"/>
-          </a:xfrm>
-          <a:prstGeom prst="rect">
-            <a:avLst/>
-          </a:prstGeom>
-          <a:noFill/>
-          <a:ln/>
-        </p:spPr>
-        <p:txBody>
-          <a:bodyPr wrap="square" lIns="0" tIns="0" rIns="0" bIns="0" rtlCol="0" anchor="ctr"/>
-          <a:lstStyle/>
-          <a:p>
-            <a:pPr indent="0" marL="0">
-              <a:buNone/>
-            </a:pPr>
-            <a:r>
-              <a:rPr lang="en-US" sz="1150" dirty="0">
+            <a:off x="3749040" y="4754880"/>
+            <a:ext cx="7315200" cy="594360"/>
+          </a:xfrm>
+          <a:prstGeom prst="rect">
+            <a:avLst/>
+          </a:prstGeom>
+          <a:noFill/>
+          <a:ln/>
+        </p:spPr>
+        <p:txBody>
+          <a:bodyPr wrap="square" lIns="0" tIns="0" rIns="0" bIns="0" rtlCol="0" anchor="ctr"/>
+          <a:lstStyle/>
+          <a:p>
+            <a:pPr indent="0" marL="0">
+              <a:buNone/>
+            </a:pPr>
+            <a:r>
+              <a:rPr lang="en-US" sz="1050" dirty="0">
                 <a:solidFill>
                   <a:srgbClr val="5B6472"/>
                 </a:solidFill>
@@ -3620,44 +3620,68 @@
               </a:rPr>
               <a:t>他人の投稿へのコメント・Upvoteで蓄積されるポイント制度。低いと表示・投稿頻度で不利になることがある</a:t>
             </a:r>
-            <a:endParaRPr lang="en-US" sz="1150" dirty="0"/>
-          </a:p>
-        </p:txBody>
-      </p:sp>
-      <p:sp>
-        <p:nvSpPr>
-          <p:cNvPr id="17" name="Text 15"/>
-          <p:cNvSpPr txBox="1"/>
-          <p:nvPr/>
-        </p:nvSpPr>
-        <p:spPr>
-          <a:xfrm>
-            <a:off x="548640" y="5989320"/>
-            <a:ext cx="10607040" cy="365760"/>
-          </a:xfrm>
-          <a:prstGeom prst="rect">
-            <a:avLst/>
-          </a:prstGeom>
-          <a:noFill/>
-          <a:ln/>
-        </p:spPr>
-        <p:txBody>
-          <a:bodyPr wrap="square" lIns="0" tIns="0" rIns="0" bIns="0" rtlCol="0" anchor="ctr"/>
-          <a:lstStyle/>
-          <a:p>
-            <a:pPr indent="0" marL="0">
-              <a:buNone/>
-            </a:pPr>
-            <a:r>
-              <a:rPr lang="en-US" sz="1100" dirty="0">
-                <a:solidFill>
-                  <a:srgbClr val="5B6472"/>
-                </a:solidFill>
-                <a:latin typeface="Calibri" pitchFamily="34" charset="0"/>
-                <a:ea typeface="Calibri" pitchFamily="34" charset="-122"/>
-                <a:cs typeface="Calibri" pitchFamily="34" charset="-120"/>
-              </a:rPr>
-              <a:t>注意点: 短時間の連続投稿はスパム扱いされやすい。投稿タイミング(米国の朝〜昼にあたる時間帯)も反応に影響しやすいと言われる</a:t>
+            <a:endParaRPr lang="en-US" sz="1050" dirty="0"/>
+          </a:p>
+        </p:txBody>
+      </p:sp>
+      <p:sp>
+        <p:nvSpPr>
+          <p:cNvPr id="17" name="Shape 15"/>
+          <p:cNvSpPr/>
+          <p:nvPr/>
+        </p:nvSpPr>
+        <p:spPr>
+          <a:xfrm>
+            <a:off x="548640" y="5623560"/>
+            <a:ext cx="10607040" cy="594360"/>
+          </a:xfrm>
+          <a:prstGeom prst="roundRect">
+            <a:avLst>
+              <a:gd name="adj" fmla="val 12308"/>
+            </a:avLst>
+          </a:prstGeom>
+          <a:solidFill>
+            <a:srgbClr val="B084F5">
+              <a:alpha val="12000"/>
+            </a:srgbClr>
+          </a:solidFill>
+          <a:ln/>
+        </p:spPr>
+      </p:sp>
+      <p:sp>
+        <p:nvSpPr>
+          <p:cNvPr id="18" name="Text 16"/>
+          <p:cNvSpPr txBox="1"/>
+          <p:nvPr/>
+        </p:nvSpPr>
+        <p:spPr>
+          <a:xfrm>
+            <a:off x="822960" y="5696712"/>
+            <a:ext cx="10058400" cy="457200"/>
+          </a:xfrm>
+          <a:prstGeom prst="rect">
+            <a:avLst/>
+          </a:prstGeom>
+          <a:noFill/>
+          <a:ln/>
+        </p:spPr>
+        <p:txBody>
+          <a:bodyPr wrap="square" lIns="0" tIns="0" rIns="0" bIns="0" rtlCol="0" anchor="ctr"/>
+          <a:lstStyle/>
+          <a:p>
+            <a:pPr indent="0" marL="0">
+              <a:buNone/>
+            </a:pPr>
+            <a:r>
+              <a:rPr lang="en-US" sz="1100" b="1" dirty="0">
+                <a:solidFill>
+                  <a:srgbClr val="1A1F26"/>
+                </a:solidFill>
+                <a:latin typeface="Calibri" pitchFamily="34" charset="0"/>
+                <a:ea typeface="Calibri" pitchFamily="34" charset="-122"/>
+                <a:cs typeface="Calibri" pitchFamily="34" charset="-120"/>
+              </a:rPr>
+              <a:t>手動投稿は簡単/自動投稿は非対応: URLを貼るだけの手動投稿にハードルは無い。一方、GitHub Actions等からのAPI経由の自動投稿はHNが公式提供しておらず、規約上も推奨されない</a:t>
             </a:r>
             <a:endParaRPr lang="en-US" sz="1100" dirty="0"/>
           </a:p>
@@ -3665,7 +3689,7 @@
       </p:sp>
       <p:sp>
         <p:nvSpPr>
-          <p:cNvPr id="18" name="Text 16"/>
+          <p:cNvPr id="19" name="Text 17"/>
           <p:cNvSpPr txBox="1"/>
           <p:nvPr/>
         </p:nvSpPr>
@@ -3704,7 +3728,7 @@
       </p:sp>
       <p:sp>
         <p:nvSpPr>
-          <p:cNvPr id="19" name="Text 17"/>
+          <p:cNvPr id="20" name="Text 18"/>
           <p:cNvSpPr txBox="1"/>
           <p:nvPr/>
         </p:nvSpPr>

--- a/github-strategy-guide.pptx
+++ b/github-strategy-guide.pptx
@@ -18,9 +18,10 @@
     <p:sldId id="266" r:id="rId12"/>
     <p:sldId id="267" r:id="rId13"/>
     <p:sldId id="268" r:id="rId14"/>
+    <p:sldId id="269" r:id="rId15"/>
   </p:sldIdLst>
   <p:notesMasterIdLst>
-    <p:notesMasterId r:id="rId15"/>
+    <p:notesMasterId r:id="rId16"/>
   </p:notesMasterIdLst>
   <p:sldSz cx="12192000" cy="6858000"/>
   <p:notesSz cx="6858000" cy="12192000"/>
@@ -890,6 +891,94 @@
             <a:fld id="{F7021451-1387-4CA6-816F-3879F97B5CBC}" type="slidenum">
               <a:rPr lang="en-US"/>
               <a:t>13</a:t>
+            </a:fld>
+            <a:endParaRPr lang="en-US"/>
+          </a:p>
+        </p:txBody>
+      </p:sp>
+    </p:spTree>
+    <p:extLst>
+      <p:ext uri="{BB962C8B-B14F-4D97-AF65-F5344CB8AC3E}">
+        <p14:creationId xmlns:p14="http://schemas.microsoft.com/office/powerpoint/2010/main" val="1024086991"/>
+      </p:ext>
+    </p:extLst>
+  </p:cSld>
+  <p:clrMapOvr>
+    <a:masterClrMapping/>
+  </p:clrMapOvr>
+</p:notes>
+</file>
+
+<file path=ppt/notesSlides/notesSlide14.xml><?xml version="1.0" encoding="utf-8"?>
+<p:notes xmlns:a="http://schemas.openxmlformats.org/drawingml/2006/main" xmlns:r="http://schemas.openxmlformats.org/officeDocument/2006/relationships" xmlns:p="http://schemas.openxmlformats.org/presentationml/2006/main">
+  <p:cSld>
+    <p:spTree>
+      <p:nvGrpSpPr>
+        <p:cNvPr id="1" name=""/>
+        <p:cNvGrpSpPr/>
+        <p:nvPr/>
+      </p:nvGrpSpPr>
+      <p:grpSpPr>
+        <a:xfrm>
+          <a:off x="0" y="0"/>
+          <a:ext cx="0" cy="0"/>
+          <a:chOff x="0" y="0"/>
+          <a:chExt cx="0" cy="0"/>
+        </a:xfrm>
+      </p:grpSpPr>
+      <p:sp>
+        <p:nvSpPr>
+          <p:cNvPr id="2" name="Slide Image Placeholder 1"/>
+          <p:cNvSpPr>
+            <a:spLocks noGrp="1" noRot="1" noChangeAspect="1"/>
+          </p:cNvSpPr>
+          <p:nvPr>
+            <p:ph type="sldImg"/>
+          </p:nvPr>
+        </p:nvSpPr>
+        <p:spPr/>
+      </p:sp>
+      <p:sp>
+        <p:nvSpPr>
+          <p:cNvPr id="3" name="Notes Placeholder 2"/>
+          <p:cNvSpPr>
+            <a:spLocks noGrp="1"/>
+          </p:cNvSpPr>
+          <p:nvPr>
+            <p:ph type="body" idx="1"/>
+          </p:nvPr>
+        </p:nvSpPr>
+        <p:spPr/>
+        <p:txBody>
+          <a:bodyPr/>
+          <a:lstStyle/>
+          <a:p>
+            <a:r>
+              <a:rPr lang="en-US" dirty="0"/>
+              <a:t/>
+            </a:r>
+            <a:endParaRPr lang="en-US" dirty="0"/>
+          </a:p>
+        </p:txBody>
+      </p:sp>
+      <p:sp>
+        <p:nvSpPr>
+          <p:cNvPr id="4" name="Slide Number Placeholder 3"/>
+          <p:cNvSpPr>
+            <a:spLocks noGrp="1"/>
+          </p:cNvSpPr>
+          <p:nvPr>
+            <p:ph type="sldNum" sz="quarter" idx="10"/>
+          </p:nvPr>
+        </p:nvSpPr>
+        <p:spPr/>
+        <p:txBody>
+          <a:bodyPr/>
+          <a:lstStyle/>
+          <a:p>
+            <a:fld id="{F7021451-1387-4CA6-816F-3879F97B5CBC}" type="slidenum">
+              <a:rPr lang="en-US"/>
+              <a:t>14</a:t>
             </a:fld>
             <a:endParaRPr lang="en-US"/>
           </a:p>
@@ -2157,6 +2246,989 @@
     <p:bg>
       <p:bgPr>
         <a:solidFill>
+          <a:srgbClr val="F5F6F8"/>
+        </a:solidFill>
+      </p:bgPr>
+    </p:bg>
+    <p:spTree>
+      <p:nvGrpSpPr>
+        <p:cNvPr id="1" name=""/>
+        <p:cNvGrpSpPr/>
+        <p:nvPr/>
+      </p:nvGrpSpPr>
+      <p:grpSpPr>
+        <a:xfrm>
+          <a:off x="0" y="0"/>
+          <a:ext cx="0" cy="0"/>
+          <a:chOff x="0" y="0"/>
+          <a:chExt cx="0" cy="0"/>
+        </a:xfrm>
+      </p:grpSpPr>
+      <p:sp>
+        <p:nvSpPr>
+          <p:cNvPr id="2" name="Text 0"/>
+          <p:cNvSpPr txBox="1"/>
+          <p:nvPr/>
+        </p:nvSpPr>
+        <p:spPr>
+          <a:xfrm>
+            <a:off x="548640" y="457200"/>
+            <a:ext cx="731520" cy="731520"/>
+          </a:xfrm>
+          <a:prstGeom prst="rect">
+            <a:avLst/>
+          </a:prstGeom>
+          <a:noFill/>
+          <a:ln/>
+        </p:spPr>
+        <p:txBody>
+          <a:bodyPr wrap="square" lIns="0" tIns="0" rIns="0" bIns="0" rtlCol="0" anchor="ctr"/>
+          <a:lstStyle/>
+          <a:p>
+            <a:pPr indent="0" marL="0">
+              <a:buNone/>
+            </a:pPr>
+            <a:r>
+              <a:rPr lang="en-US" sz="2800" b="1" dirty="0">
+                <a:solidFill>
+                  <a:srgbClr val="B084F5"/>
+                </a:solidFill>
+                <a:latin typeface="Cambria" pitchFamily="34" charset="0"/>
+                <a:ea typeface="Cambria" pitchFamily="34" charset="-122"/>
+                <a:cs typeface="Cambria" pitchFamily="34" charset="-120"/>
+              </a:rPr>
+              <a:t>5</a:t>
+            </a:r>
+            <a:endParaRPr lang="en-US" sz="2800" dirty="0"/>
+          </a:p>
+        </p:txBody>
+      </p:sp>
+      <p:sp>
+        <p:nvSpPr>
+          <p:cNvPr id="3" name="Text 1"/>
+          <p:cNvSpPr txBox="1"/>
+          <p:nvPr/>
+        </p:nvSpPr>
+        <p:spPr>
+          <a:xfrm>
+            <a:off x="1280160" y="502920"/>
+            <a:ext cx="9784080" cy="640080"/>
+          </a:xfrm>
+          <a:prstGeom prst="rect">
+            <a:avLst/>
+          </a:prstGeom>
+          <a:noFill/>
+          <a:ln/>
+        </p:spPr>
+        <p:txBody>
+          <a:bodyPr wrap="square" lIns="0" tIns="0" rIns="0" bIns="0" rtlCol="0" anchor="ctr"/>
+          <a:lstStyle/>
+          <a:p>
+            <a:pPr indent="0" marL="0">
+              <a:buNone/>
+            </a:pPr>
+            <a:r>
+              <a:rPr lang="en-US" sz="2600" b="1" dirty="0">
+                <a:solidFill>
+                  <a:srgbClr val="1A1F26"/>
+                </a:solidFill>
+                <a:latin typeface="Cambria" pitchFamily="34" charset="0"/>
+                <a:ea typeface="Cambria" pitchFamily="34" charset="-122"/>
+                <a:cs typeface="Cambria" pitchFamily="34" charset="-120"/>
+              </a:rPr>
+              <a:t>宣伝チャネルの効果(実例ケーススタディ)</a:t>
+            </a:r>
+            <a:endParaRPr lang="en-US" sz="2600" dirty="0"/>
+          </a:p>
+        </p:txBody>
+      </p:sp>
+      <p:sp>
+        <p:nvSpPr>
+          <p:cNvPr id="4" name="Text 2"/>
+          <p:cNvSpPr txBox="1"/>
+          <p:nvPr/>
+        </p:nvSpPr>
+        <p:spPr>
+          <a:xfrm>
+            <a:off x="548640" y="1417320"/>
+            <a:ext cx="10607040" cy="365760"/>
+          </a:xfrm>
+          <a:prstGeom prst="rect">
+            <a:avLst/>
+          </a:prstGeom>
+          <a:noFill/>
+          <a:ln/>
+        </p:spPr>
+        <p:txBody>
+          <a:bodyPr wrap="square" lIns="0" tIns="0" rIns="0" bIns="0" rtlCol="0" anchor="ctr"/>
+          <a:lstStyle/>
+          <a:p>
+            <a:pPr indent="0" marL="0">
+              <a:buNone/>
+            </a:pPr>
+            <a:r>
+              <a:rPr lang="en-US" sz="1250" i="1" dirty="0">
+                <a:solidFill>
+                  <a:srgbClr val="5B6472"/>
+                </a:solidFill>
+                <a:latin typeface="Calibri" pitchFamily="34" charset="0"/>
+                <a:ea typeface="Calibri" pitchFamily="34" charset="-122"/>
+                <a:cs typeface="Calibri" pitchFamily="34" charset="-120"/>
+              </a:rPr>
+              <a:t>個人OSS開発者が、公開後数ヶ月で400+スターを集めた際の実測データ(1事例)</a:t>
+            </a:r>
+            <a:endParaRPr lang="en-US" sz="1250" dirty="0"/>
+          </a:p>
+        </p:txBody>
+      </p:sp>
+      <p:sp>
+        <p:nvSpPr>
+          <p:cNvPr id="5" name="Shape 3"/>
+          <p:cNvSpPr/>
+          <p:nvPr/>
+        </p:nvSpPr>
+        <p:spPr>
+          <a:xfrm>
+            <a:off x="548640" y="1920240"/>
+            <a:ext cx="5212080" cy="3931920"/>
+          </a:xfrm>
+          <a:prstGeom prst="roundRect">
+            <a:avLst>
+              <a:gd name="adj" fmla="val 2326"/>
+            </a:avLst>
+          </a:prstGeom>
+          <a:solidFill>
+            <a:srgbClr val="FFFFFF"/>
+          </a:solidFill>
+          <a:ln w="12700">
+            <a:solidFill>
+              <a:srgbClr val="E3E6EA"/>
+            </a:solidFill>
+            <a:prstDash val="solid"/>
+          </a:ln>
+        </p:spPr>
+      </p:sp>
+      <p:sp>
+        <p:nvSpPr>
+          <p:cNvPr id="6" name="Text 4"/>
+          <p:cNvSpPr txBox="1"/>
+          <p:nvPr/>
+        </p:nvSpPr>
+        <p:spPr>
+          <a:xfrm>
+            <a:off x="822960" y="2103120"/>
+            <a:ext cx="4754880" cy="365760"/>
+          </a:xfrm>
+          <a:prstGeom prst="rect">
+            <a:avLst/>
+          </a:prstGeom>
+          <a:noFill/>
+          <a:ln/>
+        </p:spPr>
+        <p:txBody>
+          <a:bodyPr wrap="square" lIns="0" tIns="0" rIns="0" bIns="0" rtlCol="0" anchor="ctr"/>
+          <a:lstStyle/>
+          <a:p>
+            <a:pPr indent="0" marL="0">
+              <a:buNone/>
+            </a:pPr>
+            <a:r>
+              <a:rPr lang="en-US" sz="1400" b="1" dirty="0">
+                <a:solidFill>
+                  <a:srgbClr val="58D68D"/>
+                </a:solidFill>
+                <a:latin typeface="Calibri" pitchFamily="34" charset="0"/>
+                <a:ea typeface="Calibri" pitchFamily="34" charset="-122"/>
+                <a:cs typeface="Calibri" pitchFamily="34" charset="-120"/>
+              </a:rPr>
+              <a:t>🚀 効果があったチャネル</a:t>
+            </a:r>
+            <a:endParaRPr lang="en-US" sz="1400" dirty="0"/>
+          </a:p>
+        </p:txBody>
+      </p:sp>
+      <p:sp>
+        <p:nvSpPr>
+          <p:cNvPr id="7" name="Text 5"/>
+          <p:cNvSpPr txBox="1"/>
+          <p:nvPr/>
+        </p:nvSpPr>
+        <p:spPr>
+          <a:xfrm>
+            <a:off x="822960" y="2560320"/>
+            <a:ext cx="4663440" cy="274320"/>
+          </a:xfrm>
+          <a:prstGeom prst="rect">
+            <a:avLst/>
+          </a:prstGeom>
+          <a:noFill/>
+          <a:ln/>
+        </p:spPr>
+        <p:txBody>
+          <a:bodyPr wrap="square" lIns="0" tIns="0" rIns="0" bIns="0" rtlCol="0" anchor="ctr"/>
+          <a:lstStyle/>
+          <a:p>
+            <a:pPr indent="0" marL="0">
+              <a:buNone/>
+            </a:pPr>
+            <a:r>
+              <a:rPr lang="en-US" sz="1250" b="1" dirty="0">
+                <a:solidFill>
+                  <a:srgbClr val="1A1F26"/>
+                </a:solidFill>
+                <a:latin typeface="Calibri" pitchFamily="34" charset="0"/>
+                <a:ea typeface="Calibri" pitchFamily="34" charset="-122"/>
+                <a:cs typeface="Calibri" pitchFamily="34" charset="-120"/>
+              </a:rPr>
+              <a:t>Hacker News</a:t>
+            </a:r>
+            <a:endParaRPr lang="en-US" sz="1250" dirty="0"/>
+          </a:p>
+        </p:txBody>
+      </p:sp>
+      <p:sp>
+        <p:nvSpPr>
+          <p:cNvPr id="8" name="Text 6"/>
+          <p:cNvSpPr txBox="1"/>
+          <p:nvPr/>
+        </p:nvSpPr>
+        <p:spPr>
+          <a:xfrm>
+            <a:off x="822960" y="2834640"/>
+            <a:ext cx="4663440" cy="640080"/>
+          </a:xfrm>
+          <a:prstGeom prst="rect">
+            <a:avLst/>
+          </a:prstGeom>
+          <a:noFill/>
+          <a:ln/>
+        </p:spPr>
+        <p:txBody>
+          <a:bodyPr wrap="square" lIns="0" tIns="0" rIns="0" bIns="0" rtlCol="0" anchor="ctr"/>
+          <a:lstStyle/>
+          <a:p>
+            <a:pPr indent="0" marL="0">
+              <a:buNone/>
+            </a:pPr>
+            <a:r>
+              <a:rPr lang="en-US" sz="1050" dirty="0">
+                <a:solidFill>
+                  <a:srgbClr val="5B6472"/>
+                </a:solidFill>
+                <a:latin typeface="Calibri" pitchFamily="34" charset="0"/>
+                <a:ea typeface="Calibri" pitchFamily="34" charset="-122"/>
+                <a:cs typeface="Calibri" pitchFamily="34" charset="-120"/>
+              </a:rPr>
+              <a:t>「Show HN:」プレフィックスを付けて投稿する文化があり、Showタブ・トップページに掲載。最も効果大</a:t>
+            </a:r>
+            <a:endParaRPr lang="en-US" sz="1050" dirty="0"/>
+          </a:p>
+        </p:txBody>
+      </p:sp>
+      <p:sp>
+        <p:nvSpPr>
+          <p:cNvPr id="9" name="Text 7"/>
+          <p:cNvSpPr txBox="1"/>
+          <p:nvPr/>
+        </p:nvSpPr>
+        <p:spPr>
+          <a:xfrm>
+            <a:off x="822960" y="3383280"/>
+            <a:ext cx="4663440" cy="274320"/>
+          </a:xfrm>
+          <a:prstGeom prst="rect">
+            <a:avLst/>
+          </a:prstGeom>
+          <a:noFill/>
+          <a:ln/>
+        </p:spPr>
+        <p:txBody>
+          <a:bodyPr wrap="square" lIns="0" tIns="0" rIns="0" bIns="0" rtlCol="0" anchor="ctr"/>
+          <a:lstStyle/>
+          <a:p>
+            <a:pPr indent="0" marL="0">
+              <a:buNone/>
+            </a:pPr>
+            <a:r>
+              <a:rPr lang="en-US" sz="1250" b="1" dirty="0">
+                <a:solidFill>
+                  <a:srgbClr val="1A1F26"/>
+                </a:solidFill>
+                <a:latin typeface="Calibri" pitchFamily="34" charset="0"/>
+                <a:ea typeface="Calibri" pitchFamily="34" charset="-122"/>
+                <a:cs typeface="Calibri" pitchFamily="34" charset="-120"/>
+              </a:rPr>
+              <a:t>Twitter/X</a:t>
+            </a:r>
+            <a:endParaRPr lang="en-US" sz="1250" dirty="0"/>
+          </a:p>
+        </p:txBody>
+      </p:sp>
+      <p:sp>
+        <p:nvSpPr>
+          <p:cNvPr id="10" name="Text 8"/>
+          <p:cNvSpPr txBox="1"/>
+          <p:nvPr/>
+        </p:nvSpPr>
+        <p:spPr>
+          <a:xfrm>
+            <a:off x="822960" y="3657600"/>
+            <a:ext cx="4663440" cy="640080"/>
+          </a:xfrm>
+          <a:prstGeom prst="rect">
+            <a:avLst/>
+          </a:prstGeom>
+          <a:noFill/>
+          <a:ln/>
+        </p:spPr>
+        <p:txBody>
+          <a:bodyPr wrap="square" lIns="0" tIns="0" rIns="0" bIns="0" rtlCol="0" anchor="ctr"/>
+          <a:lstStyle/>
+          <a:p>
+            <a:pPr indent="0" marL="0">
+              <a:buNone/>
+            </a:pPr>
+            <a:r>
+              <a:rPr lang="en-US" sz="1050" dirty="0">
+                <a:solidFill>
+                  <a:srgbClr val="5B6472"/>
+                </a:solidFill>
+                <a:latin typeface="Calibri" pitchFamily="34" charset="0"/>
+                <a:ea typeface="Calibri" pitchFamily="34" charset="-122"/>
+                <a:cs typeface="Calibri" pitchFamily="34" charset="-120"/>
+              </a:rPr>
+              <a:t>自分の発信単独では弱いが、フォロワーの多いインフルエンサーが拡散すると効果大</a:t>
+            </a:r>
+            <a:endParaRPr lang="en-US" sz="1050" dirty="0"/>
+          </a:p>
+        </p:txBody>
+      </p:sp>
+      <p:sp>
+        <p:nvSpPr>
+          <p:cNvPr id="11" name="Text 9"/>
+          <p:cNvSpPr txBox="1"/>
+          <p:nvPr/>
+        </p:nvSpPr>
+        <p:spPr>
+          <a:xfrm>
+            <a:off x="822960" y="4206240"/>
+            <a:ext cx="4663440" cy="274320"/>
+          </a:xfrm>
+          <a:prstGeom prst="rect">
+            <a:avLst/>
+          </a:prstGeom>
+          <a:noFill/>
+          <a:ln/>
+        </p:spPr>
+        <p:txBody>
+          <a:bodyPr wrap="square" lIns="0" tIns="0" rIns="0" bIns="0" rtlCol="0" anchor="ctr"/>
+          <a:lstStyle/>
+          <a:p>
+            <a:pPr indent="0" marL="0">
+              <a:buNone/>
+            </a:pPr>
+            <a:r>
+              <a:rPr lang="en-US" sz="1250" b="1" dirty="0">
+                <a:solidFill>
+                  <a:srgbClr val="1A1F26"/>
+                </a:solidFill>
+                <a:latin typeface="Calibri" pitchFamily="34" charset="0"/>
+                <a:ea typeface="Calibri" pitchFamily="34" charset="-122"/>
+                <a:cs typeface="Calibri" pitchFamily="34" charset="-120"/>
+              </a:rPr>
+              <a:t>GitHub内の連鎖</a:t>
+            </a:r>
+            <a:endParaRPr lang="en-US" sz="1250" dirty="0"/>
+          </a:p>
+        </p:txBody>
+      </p:sp>
+      <p:sp>
+        <p:nvSpPr>
+          <p:cNvPr id="12" name="Text 10"/>
+          <p:cNvSpPr txBox="1"/>
+          <p:nvPr/>
+        </p:nvSpPr>
+        <p:spPr>
+          <a:xfrm>
+            <a:off x="822960" y="4480560"/>
+            <a:ext cx="4663440" cy="640080"/>
+          </a:xfrm>
+          <a:prstGeom prst="rect">
+            <a:avLst/>
+          </a:prstGeom>
+          <a:noFill/>
+          <a:ln/>
+        </p:spPr>
+        <p:txBody>
+          <a:bodyPr wrap="square" lIns="0" tIns="0" rIns="0" bIns="0" rtlCol="0" anchor="ctr"/>
+          <a:lstStyle/>
+          <a:p>
+            <a:pPr indent="0" marL="0">
+              <a:buNone/>
+            </a:pPr>
+            <a:r>
+              <a:rPr lang="en-US" sz="1050" dirty="0">
+                <a:solidFill>
+                  <a:srgbClr val="5B6472"/>
+                </a:solidFill>
+                <a:latin typeface="Calibri" pitchFamily="34" charset="0"/>
+                <a:ea typeface="Calibri" pitchFamily="34" charset="-122"/>
+                <a:cs typeface="Calibri" pitchFamily="34" charset="-120"/>
+              </a:rPr>
+              <a:t>フォロー中ユーザーがStarしたリポジトリがフィードに流れる仕組みがあり、フォロワーの多い人がStarすると連鎖的に増える</a:t>
+            </a:r>
+            <a:endParaRPr lang="en-US" sz="1050" dirty="0"/>
+          </a:p>
+        </p:txBody>
+      </p:sp>
+      <p:sp>
+        <p:nvSpPr>
+          <p:cNvPr id="13" name="Text 11"/>
+          <p:cNvSpPr txBox="1"/>
+          <p:nvPr/>
+        </p:nvSpPr>
+        <p:spPr>
+          <a:xfrm>
+            <a:off x="822960" y="5029200"/>
+            <a:ext cx="4663440" cy="274320"/>
+          </a:xfrm>
+          <a:prstGeom prst="rect">
+            <a:avLst/>
+          </a:prstGeom>
+          <a:noFill/>
+          <a:ln/>
+        </p:spPr>
+        <p:txBody>
+          <a:bodyPr wrap="square" lIns="0" tIns="0" rIns="0" bIns="0" rtlCol="0" anchor="ctr"/>
+          <a:lstStyle/>
+          <a:p>
+            <a:pPr indent="0" marL="0">
+              <a:buNone/>
+            </a:pPr>
+            <a:r>
+              <a:rPr lang="en-US" sz="1250" b="1" dirty="0">
+                <a:solidFill>
+                  <a:srgbClr val="1A1F26"/>
+                </a:solidFill>
+                <a:latin typeface="Calibri" pitchFamily="34" charset="0"/>
+                <a:ea typeface="Calibri" pitchFamily="34" charset="-122"/>
+                <a:cs typeface="Calibri" pitchFamily="34" charset="-120"/>
+              </a:rPr>
+              <a:t>韓国版HN(news.hada.io)</a:t>
+            </a:r>
+            <a:endParaRPr lang="en-US" sz="1250" dirty="0"/>
+          </a:p>
+        </p:txBody>
+      </p:sp>
+      <p:sp>
+        <p:nvSpPr>
+          <p:cNvPr id="14" name="Text 12"/>
+          <p:cNvSpPr txBox="1"/>
+          <p:nvPr/>
+        </p:nvSpPr>
+        <p:spPr>
+          <a:xfrm>
+            <a:off x="822960" y="5303520"/>
+            <a:ext cx="4663440" cy="640080"/>
+          </a:xfrm>
+          <a:prstGeom prst="rect">
+            <a:avLst/>
+          </a:prstGeom>
+          <a:noFill/>
+          <a:ln/>
+        </p:spPr>
+        <p:txBody>
+          <a:bodyPr wrap="square" lIns="0" tIns="0" rIns="0" bIns="0" rtlCol="0" anchor="ctr"/>
+          <a:lstStyle/>
+          <a:p>
+            <a:pPr indent="0" marL="0">
+              <a:buNone/>
+            </a:pPr>
+            <a:r>
+              <a:rPr lang="en-US" sz="1050" dirty="0">
+                <a:solidFill>
+                  <a:srgbClr val="5B6472"/>
+                </a:solidFill>
+                <a:latin typeface="Calibri" pitchFamily="34" charset="0"/>
+                <a:ea typeface="Calibri" pitchFamily="34" charset="-122"/>
+                <a:cs typeface="Calibri" pitchFamily="34" charset="-120"/>
+              </a:rPr>
+              <a:t>現地の誰かが投稿したことで、そこから約40スターが集まった</a:t>
+            </a:r>
+            <a:endParaRPr lang="en-US" sz="1050" dirty="0"/>
+          </a:p>
+        </p:txBody>
+      </p:sp>
+      <p:sp>
+        <p:nvSpPr>
+          <p:cNvPr id="15" name="Shape 13"/>
+          <p:cNvSpPr/>
+          <p:nvPr/>
+        </p:nvSpPr>
+        <p:spPr>
+          <a:xfrm>
+            <a:off x="6035040" y="1920240"/>
+            <a:ext cx="5212080" cy="3931920"/>
+          </a:xfrm>
+          <a:prstGeom prst="roundRect">
+            <a:avLst>
+              <a:gd name="adj" fmla="val 2326"/>
+            </a:avLst>
+          </a:prstGeom>
+          <a:solidFill>
+            <a:srgbClr val="FFFFFF"/>
+          </a:solidFill>
+          <a:ln w="12700">
+            <a:solidFill>
+              <a:srgbClr val="E3E6EA"/>
+            </a:solidFill>
+            <a:prstDash val="solid"/>
+          </a:ln>
+        </p:spPr>
+      </p:sp>
+      <p:sp>
+        <p:nvSpPr>
+          <p:cNvPr id="16" name="Text 14"/>
+          <p:cNvSpPr txBox="1"/>
+          <p:nvPr/>
+        </p:nvSpPr>
+        <p:spPr>
+          <a:xfrm>
+            <a:off x="6309360" y="2103120"/>
+            <a:ext cx="4754880" cy="365760"/>
+          </a:xfrm>
+          <a:prstGeom prst="rect">
+            <a:avLst/>
+          </a:prstGeom>
+          <a:noFill/>
+          <a:ln/>
+        </p:spPr>
+        <p:txBody>
+          <a:bodyPr wrap="square" lIns="0" tIns="0" rIns="0" bIns="0" rtlCol="0" anchor="ctr"/>
+          <a:lstStyle/>
+          <a:p>
+            <a:pPr indent="0" marL="0">
+              <a:buNone/>
+            </a:pPr>
+            <a:r>
+              <a:rPr lang="en-US" sz="1400" b="1" dirty="0">
+                <a:solidFill>
+                  <a:srgbClr val="6B7280"/>
+                </a:solidFill>
+                <a:latin typeface="Calibri" pitchFamily="34" charset="0"/>
+                <a:ea typeface="Calibri" pitchFamily="34" charset="-122"/>
+                <a:cs typeface="Calibri" pitchFamily="34" charset="-120"/>
+              </a:rPr>
+              <a:t>🪦 効果が薄かったチャネル</a:t>
+            </a:r>
+            <a:endParaRPr lang="en-US" sz="1400" dirty="0"/>
+          </a:p>
+        </p:txBody>
+      </p:sp>
+      <p:sp>
+        <p:nvSpPr>
+          <p:cNvPr id="17" name="Text 15"/>
+          <p:cNvSpPr txBox="1"/>
+          <p:nvPr/>
+        </p:nvSpPr>
+        <p:spPr>
+          <a:xfrm>
+            <a:off x="6309360" y="2560320"/>
+            <a:ext cx="4663440" cy="274320"/>
+          </a:xfrm>
+          <a:prstGeom prst="rect">
+            <a:avLst/>
+          </a:prstGeom>
+          <a:noFill/>
+          <a:ln/>
+        </p:spPr>
+        <p:txBody>
+          <a:bodyPr wrap="square" lIns="0" tIns="0" rIns="0" bIns="0" rtlCol="0" anchor="ctr"/>
+          <a:lstStyle/>
+          <a:p>
+            <a:pPr indent="0" marL="0">
+              <a:buNone/>
+            </a:pPr>
+            <a:r>
+              <a:rPr lang="en-US" sz="1250" b="1" dirty="0">
+                <a:solidFill>
+                  <a:srgbClr val="1A1F26"/>
+                </a:solidFill>
+                <a:latin typeface="Calibri" pitchFamily="34" charset="0"/>
+                <a:ea typeface="Calibri" pitchFamily="34" charset="-122"/>
+                <a:cs typeface="Calibri" pitchFamily="34" charset="-120"/>
+              </a:rPr>
+              <a:t>Reddit</a:t>
+            </a:r>
+            <a:endParaRPr lang="en-US" sz="1250" dirty="0"/>
+          </a:p>
+        </p:txBody>
+      </p:sp>
+      <p:sp>
+        <p:nvSpPr>
+          <p:cNvPr id="18" name="Text 16"/>
+          <p:cNvSpPr txBox="1"/>
+          <p:nvPr/>
+        </p:nvSpPr>
+        <p:spPr>
+          <a:xfrm>
+            <a:off x="6309360" y="2834640"/>
+            <a:ext cx="4663440" cy="640080"/>
+          </a:xfrm>
+          <a:prstGeom prst="rect">
+            <a:avLst/>
+          </a:prstGeom>
+          <a:noFill/>
+          <a:ln/>
+        </p:spPr>
+        <p:txBody>
+          <a:bodyPr wrap="square" lIns="0" tIns="0" rIns="0" bIns="0" rtlCol="0" anchor="ctr"/>
+          <a:lstStyle/>
+          <a:p>
+            <a:pPr indent="0" marL="0">
+              <a:buNone/>
+            </a:pPr>
+            <a:r>
+              <a:rPr lang="en-US" sz="1050" dirty="0">
+                <a:solidFill>
+                  <a:srgbClr val="5B6472"/>
+                </a:solidFill>
+                <a:latin typeface="Calibri" pitchFamily="34" charset="0"/>
+                <a:ea typeface="Calibri" pitchFamily="34" charset="-122"/>
+                <a:cs typeface="Calibri" pitchFamily="34" charset="-120"/>
+              </a:rPr>
+              <a:t>投稿は伸びにくいことが多い(閲覧2.4kでUpvote6等)。ただしやり方次第で化ける可能性はある</a:t>
+            </a:r>
+            <a:endParaRPr lang="en-US" sz="1050" dirty="0"/>
+          </a:p>
+        </p:txBody>
+      </p:sp>
+      <p:sp>
+        <p:nvSpPr>
+          <p:cNvPr id="19" name="Text 17"/>
+          <p:cNvSpPr txBox="1"/>
+          <p:nvPr/>
+        </p:nvSpPr>
+        <p:spPr>
+          <a:xfrm>
+            <a:off x="6309360" y="3383280"/>
+            <a:ext cx="4663440" cy="274320"/>
+          </a:xfrm>
+          <a:prstGeom prst="rect">
+            <a:avLst/>
+          </a:prstGeom>
+          <a:noFill/>
+          <a:ln/>
+        </p:spPr>
+        <p:txBody>
+          <a:bodyPr wrap="square" lIns="0" tIns="0" rIns="0" bIns="0" rtlCol="0" anchor="ctr"/>
+          <a:lstStyle/>
+          <a:p>
+            <a:pPr indent="0" marL="0">
+              <a:buNone/>
+            </a:pPr>
+            <a:r>
+              <a:rPr lang="en-US" sz="1250" b="1" dirty="0">
+                <a:solidFill>
+                  <a:srgbClr val="1A1F26"/>
+                </a:solidFill>
+                <a:latin typeface="Calibri" pitchFamily="34" charset="0"/>
+                <a:ea typeface="Calibri" pitchFamily="34" charset="-122"/>
+                <a:cs typeface="Calibri" pitchFamily="34" charset="-120"/>
+              </a:rPr>
+              <a:t>Product Hunt</a:t>
+            </a:r>
+            <a:endParaRPr lang="en-US" sz="1250" dirty="0"/>
+          </a:p>
+        </p:txBody>
+      </p:sp>
+      <p:sp>
+        <p:nvSpPr>
+          <p:cNvPr id="20" name="Text 18"/>
+          <p:cNvSpPr txBox="1"/>
+          <p:nvPr/>
+        </p:nvSpPr>
+        <p:spPr>
+          <a:xfrm>
+            <a:off x="6309360" y="3657600"/>
+            <a:ext cx="4663440" cy="640080"/>
+          </a:xfrm>
+          <a:prstGeom prst="rect">
+            <a:avLst/>
+          </a:prstGeom>
+          <a:noFill/>
+          <a:ln/>
+        </p:spPr>
+        <p:txBody>
+          <a:bodyPr wrap="square" lIns="0" tIns="0" rIns="0" bIns="0" rtlCol="0" anchor="ctr"/>
+          <a:lstStyle/>
+          <a:p>
+            <a:pPr indent="0" marL="0">
+              <a:buNone/>
+            </a:pPr>
+            <a:r>
+              <a:rPr lang="en-US" sz="1050" dirty="0">
+                <a:solidFill>
+                  <a:srgbClr val="5B6472"/>
+                </a:solidFill>
+                <a:latin typeface="Calibri" pitchFamily="34" charset="0"/>
+                <a:ea typeface="Calibri" pitchFamily="34" charset="-122"/>
+                <a:cs typeface="Calibri" pitchFamily="34" charset="-120"/>
+              </a:rPr>
+              <a:t>AI関連プロダクトが多く、その他のプロダクトは埋もれやすい</a:t>
+            </a:r>
+            <a:endParaRPr lang="en-US" sz="1050" dirty="0"/>
+          </a:p>
+        </p:txBody>
+      </p:sp>
+      <p:sp>
+        <p:nvSpPr>
+          <p:cNvPr id="21" name="Text 19"/>
+          <p:cNvSpPr txBox="1"/>
+          <p:nvPr/>
+        </p:nvSpPr>
+        <p:spPr>
+          <a:xfrm>
+            <a:off x="6309360" y="4206240"/>
+            <a:ext cx="4663440" cy="274320"/>
+          </a:xfrm>
+          <a:prstGeom prst="rect">
+            <a:avLst/>
+          </a:prstGeom>
+          <a:noFill/>
+          <a:ln/>
+        </p:spPr>
+        <p:txBody>
+          <a:bodyPr wrap="square" lIns="0" tIns="0" rIns="0" bIns="0" rtlCol="0" anchor="ctr"/>
+          <a:lstStyle/>
+          <a:p>
+            <a:pPr indent="0" marL="0">
+              <a:buNone/>
+            </a:pPr>
+            <a:r>
+              <a:rPr lang="en-US" sz="1250" b="1" dirty="0">
+                <a:solidFill>
+                  <a:srgbClr val="1A1F26"/>
+                </a:solidFill>
+                <a:latin typeface="Calibri" pitchFamily="34" charset="0"/>
+                <a:ea typeface="Calibri" pitchFamily="34" charset="-122"/>
+                <a:cs typeface="Calibri" pitchFamily="34" charset="-120"/>
+              </a:rPr>
+              <a:t>Awesomeリストへの追加PR</a:t>
+            </a:r>
+            <a:endParaRPr lang="en-US" sz="1250" dirty="0"/>
+          </a:p>
+        </p:txBody>
+      </p:sp>
+      <p:sp>
+        <p:nvSpPr>
+          <p:cNvPr id="22" name="Text 20"/>
+          <p:cNvSpPr txBox="1"/>
+          <p:nvPr/>
+        </p:nvSpPr>
+        <p:spPr>
+          <a:xfrm>
+            <a:off x="6309360" y="4480560"/>
+            <a:ext cx="4663440" cy="640080"/>
+          </a:xfrm>
+          <a:prstGeom prst="rect">
+            <a:avLst/>
+          </a:prstGeom>
+          <a:noFill/>
+          <a:ln/>
+        </p:spPr>
+        <p:txBody>
+          <a:bodyPr wrap="square" lIns="0" tIns="0" rIns="0" bIns="0" rtlCol="0" anchor="ctr"/>
+          <a:lstStyle/>
+          <a:p>
+            <a:pPr indent="0" marL="0">
+              <a:buNone/>
+            </a:pPr>
+            <a:r>
+              <a:rPr lang="en-US" sz="1050" dirty="0">
+                <a:solidFill>
+                  <a:srgbClr val="5B6472"/>
+                </a:solidFill>
+                <a:latin typeface="Calibri" pitchFamily="34" charset="0"/>
+                <a:ea typeface="Calibri" pitchFamily="34" charset="-122"/>
+                <a:cs typeface="Calibri" pitchFamily="34" charset="-120"/>
+              </a:rPr>
+              <a:t>掲載されても閲覧者自体が少ない</a:t>
+            </a:r>
+            <a:endParaRPr lang="en-US" sz="1050" dirty="0"/>
+          </a:p>
+        </p:txBody>
+      </p:sp>
+      <p:sp>
+        <p:nvSpPr>
+          <p:cNvPr id="23" name="Text 21"/>
+          <p:cNvSpPr txBox="1"/>
+          <p:nvPr/>
+        </p:nvSpPr>
+        <p:spPr>
+          <a:xfrm>
+            <a:off x="6309360" y="5029200"/>
+            <a:ext cx="4663440" cy="274320"/>
+          </a:xfrm>
+          <a:prstGeom prst="rect">
+            <a:avLst/>
+          </a:prstGeom>
+          <a:noFill/>
+          <a:ln/>
+        </p:spPr>
+        <p:txBody>
+          <a:bodyPr wrap="square" lIns="0" tIns="0" rIns="0" bIns="0" rtlCol="0" anchor="ctr"/>
+          <a:lstStyle/>
+          <a:p>
+            <a:pPr indent="0" marL="0">
+              <a:buNone/>
+            </a:pPr>
+            <a:r>
+              <a:rPr lang="en-US" sz="1250" b="1" dirty="0">
+                <a:solidFill>
+                  <a:srgbClr val="1A1F26"/>
+                </a:solidFill>
+                <a:latin typeface="Calibri" pitchFamily="34" charset="0"/>
+                <a:ea typeface="Calibri" pitchFamily="34" charset="-122"/>
+                <a:cs typeface="Calibri" pitchFamily="34" charset="-120"/>
+              </a:rPr>
+              <a:t>個人ブログ</a:t>
+            </a:r>
+            <a:endParaRPr lang="en-US" sz="1250" dirty="0"/>
+          </a:p>
+        </p:txBody>
+      </p:sp>
+      <p:sp>
+        <p:nvSpPr>
+          <p:cNvPr id="24" name="Text 22"/>
+          <p:cNvSpPr txBox="1"/>
+          <p:nvPr/>
+        </p:nvSpPr>
+        <p:spPr>
+          <a:xfrm>
+            <a:off x="6309360" y="5303520"/>
+            <a:ext cx="4663440" cy="640080"/>
+          </a:xfrm>
+          <a:prstGeom prst="rect">
+            <a:avLst/>
+          </a:prstGeom>
+          <a:noFill/>
+          <a:ln/>
+        </p:spPr>
+        <p:txBody>
+          <a:bodyPr wrap="square" lIns="0" tIns="0" rIns="0" bIns="0" rtlCol="0" anchor="ctr"/>
+          <a:lstStyle/>
+          <a:p>
+            <a:pPr indent="0" marL="0">
+              <a:buNone/>
+            </a:pPr>
+            <a:r>
+              <a:rPr lang="en-US" sz="1050" dirty="0">
+                <a:solidFill>
+                  <a:srgbClr val="5B6472"/>
+                </a:solidFill>
+                <a:latin typeface="Calibri" pitchFamily="34" charset="0"/>
+                <a:ea typeface="Calibri" pitchFamily="34" charset="-122"/>
+                <a:cs typeface="Calibri" pitchFamily="34" charset="-120"/>
+              </a:rPr>
+              <a:t>Qiita/Zenn等の媒体力があるプラットフォームでないと、Twitter投稿とあまり変わらない手応え</a:t>
+            </a:r>
+            <a:endParaRPr lang="en-US" sz="1050" dirty="0"/>
+          </a:p>
+        </p:txBody>
+      </p:sp>
+      <p:sp>
+        <p:nvSpPr>
+          <p:cNvPr id="25" name="Text 23"/>
+          <p:cNvSpPr txBox="1"/>
+          <p:nvPr/>
+        </p:nvSpPr>
+        <p:spPr>
+          <a:xfrm>
+            <a:off x="548640" y="6400800"/>
+            <a:ext cx="10424160" cy="320040"/>
+          </a:xfrm>
+          <a:prstGeom prst="rect">
+            <a:avLst/>
+          </a:prstGeom>
+          <a:noFill/>
+          <a:ln/>
+        </p:spPr>
+        <p:txBody>
+          <a:bodyPr wrap="square" lIns="0" tIns="0" rIns="0" bIns="0" rtlCol="0" anchor="ctr"/>
+          <a:lstStyle/>
+          <a:p>
+            <a:pPr indent="0" marL="0">
+              <a:buNone/>
+            </a:pPr>
+            <a:r>
+              <a:rPr lang="en-US" sz="1000" i="1" dirty="0">
+                <a:solidFill>
+                  <a:srgbClr val="5B6472"/>
+                </a:solidFill>
+                <a:latin typeface="Calibri" pitchFamily="34" charset="0"/>
+                <a:ea typeface="Calibri" pitchFamily="34" charset="-122"/>
+                <a:cs typeface="Calibri" pitchFamily="34" charset="-120"/>
+              </a:rPr>
+              <a:t>出典: 個人開発者によるOSSプロジェクト「Ephe」のブログ記事(1事例の実測値。分野・タイミングにより結果は変動しうる)</a:t>
+            </a:r>
+            <a:endParaRPr lang="en-US" sz="1000" dirty="0"/>
+          </a:p>
+        </p:txBody>
+      </p:sp>
+      <p:sp>
+        <p:nvSpPr>
+          <p:cNvPr id="26" name="Text 24"/>
+          <p:cNvSpPr txBox="1"/>
+          <p:nvPr/>
+        </p:nvSpPr>
+        <p:spPr>
+          <a:xfrm>
+            <a:off x="11521440" y="6492240"/>
+            <a:ext cx="457200" cy="274320"/>
+          </a:xfrm>
+          <a:prstGeom prst="rect">
+            <a:avLst/>
+          </a:prstGeom>
+          <a:noFill/>
+          <a:ln/>
+        </p:spPr>
+        <p:txBody>
+          <a:bodyPr wrap="square" lIns="0" tIns="0" rIns="0" bIns="0" rtlCol="0" anchor="ctr"/>
+          <a:lstStyle/>
+          <a:p>
+            <a:pPr algn="r" indent="0" marL="0">
+              <a:buNone/>
+            </a:pPr>
+            <a:r>
+              <a:rPr lang="en-US" sz="1000" dirty="0">
+                <a:solidFill>
+                  <a:srgbClr val="5B6472"/>
+                </a:solidFill>
+                <a:latin typeface="Calibri" pitchFamily="34" charset="0"/>
+                <a:ea typeface="Calibri" pitchFamily="34" charset="-122"/>
+                <a:cs typeface="Calibri" pitchFamily="34" charset="-120"/>
+              </a:rPr>
+              <a:t>10</a:t>
+            </a:r>
+            <a:endParaRPr lang="en-US" sz="1000" dirty="0"/>
+          </a:p>
+        </p:txBody>
+      </p:sp>
+    </p:spTree>
+  </p:cSld>
+  <p:clrMapOvr>
+    <a:masterClrMapping/>
+  </p:clrMapOvr>
+</p:sld>
+</file>
+
+<file path=ppt/slides/slide11.xml><?xml version="1.0" encoding="utf-8"?>
+<p:sld xmlns:a="http://schemas.openxmlformats.org/drawingml/2006/main" xmlns:r="http://schemas.openxmlformats.org/officeDocument/2006/relationships" xmlns:p="http://schemas.openxmlformats.org/presentationml/2006/main">
+  <p:cSld name="Slide 11">
+    <p:bg>
+      <p:bgPr>
+        <a:solidFill>
           <a:srgbClr val="1A1F26"/>
         </a:solidFill>
       </p:bgPr>
@@ -3049,7 +4121,7 @@
                 <a:ea typeface="Calibri" pitchFamily="34" charset="-122"/>
                 <a:cs typeface="Calibri" pitchFamily="34" charset="-120"/>
               </a:rPr>
-              <a:t>10</a:t>
+              <a:t>11</a:t>
             </a:r>
             <a:endParaRPr lang="en-US" sz="1000" dirty="0"/>
           </a:p>
@@ -3063,9 +4135,9 @@
 </p:sld>
 </file>
 
-<file path=ppt/slides/slide11.xml><?xml version="1.0" encoding="utf-8"?>
+<file path=ppt/slides/slide12.xml><?xml version="1.0" encoding="utf-8"?>
 <p:sld xmlns:a="http://schemas.openxmlformats.org/drawingml/2006/main" xmlns:r="http://schemas.openxmlformats.org/officeDocument/2006/relationships" xmlns:p="http://schemas.openxmlformats.org/presentationml/2006/main">
-  <p:cSld name="Slide 11">
+  <p:cSld name="Slide 12">
     <p:bg>
       <p:bgPr>
         <a:solidFill>
@@ -3759,7 +4831,7 @@
                 <a:ea typeface="Calibri" pitchFamily="34" charset="-122"/>
                 <a:cs typeface="Calibri" pitchFamily="34" charset="-120"/>
               </a:rPr>
-              <a:t>11</a:t>
+              <a:t>12</a:t>
             </a:r>
             <a:endParaRPr lang="en-US" sz="1000" dirty="0"/>
           </a:p>
@@ -3773,9 +4845,9 @@
 </p:sld>
 </file>
 
-<file path=ppt/slides/slide12.xml><?xml version="1.0" encoding="utf-8"?>
+<file path=ppt/slides/slide13.xml><?xml version="1.0" encoding="utf-8"?>
 <p:sld xmlns:a="http://schemas.openxmlformats.org/drawingml/2006/main" xmlns:r="http://schemas.openxmlformats.org/officeDocument/2006/relationships" xmlns:p="http://schemas.openxmlformats.org/presentationml/2006/main">
-  <p:cSld name="Slide 12">
+  <p:cSld name="Slide 13">
     <p:bg>
       <p:bgPr>
         <a:solidFill>
@@ -4208,7 +5280,7 @@
                 <a:ea typeface="Calibri" pitchFamily="34" charset="-122"/>
                 <a:cs typeface="Calibri" pitchFamily="34" charset="-120"/>
               </a:rPr>
-              <a:t>12</a:t>
+              <a:t>13</a:t>
             </a:r>
             <a:endParaRPr lang="en-US" sz="1000" dirty="0"/>
           </a:p>
@@ -4222,9 +5294,9 @@
 </p:sld>
 </file>
 
-<file path=ppt/slides/slide13.xml><?xml version="1.0" encoding="utf-8"?>
+<file path=ppt/slides/slide14.xml><?xml version="1.0" encoding="utf-8"?>
 <p:sld xmlns:a="http://schemas.openxmlformats.org/drawingml/2006/main" xmlns:r="http://schemas.openxmlformats.org/officeDocument/2006/relationships" xmlns:p="http://schemas.openxmlformats.org/presentationml/2006/main">
-  <p:cSld name="Slide 13">
+  <p:cSld name="Slide 14">
     <p:bg>
       <p:bgPr>
         <a:solidFill>
@@ -4703,7 +5775,7 @@
                 <a:ea typeface="Calibri" pitchFamily="34" charset="-122"/>
                 <a:cs typeface="Calibri" pitchFamily="34" charset="-120"/>
               </a:rPr>
-              <a:t>13</a:t>
+              <a:t>14</a:t>
             </a:r>
             <a:endParaRPr lang="en-US" sz="1000" dirty="0"/>
           </a:p>
@@ -5792,7 +6864,7 @@
     <p:bg>
       <p:bgPr>
         <a:solidFill>
-          <a:srgbClr val="F5F6F8"/>
+          <a:srgbClr val="1A1F26"/>
         </a:solidFill>
       </p:bgPr>
     </p:bg>
@@ -5819,33 +6891,33 @@
         <p:spPr>
           <a:xfrm>
             <a:off x="548640" y="457200"/>
-            <a:ext cx="731520" cy="731520"/>
-          </a:xfrm>
-          <a:prstGeom prst="rect">
-            <a:avLst/>
-          </a:prstGeom>
-          <a:noFill/>
-          <a:ln/>
-        </p:spPr>
-        <p:txBody>
-          <a:bodyPr wrap="square" lIns="0" tIns="0" rIns="0" bIns="0" rtlCol="0" anchor="ctr"/>
-          <a:lstStyle/>
-          <a:p>
-            <a:pPr indent="0" marL="0">
-              <a:buNone/>
-            </a:pPr>
-            <a:r>
-              <a:rPr lang="en-US" sz="2800" b="1" dirty="0">
-                <a:solidFill>
-                  <a:srgbClr val="B084F5"/>
+            <a:ext cx="10607040" cy="640080"/>
+          </a:xfrm>
+          <a:prstGeom prst="rect">
+            <a:avLst/>
+          </a:prstGeom>
+          <a:noFill/>
+          <a:ln/>
+        </p:spPr>
+        <p:txBody>
+          <a:bodyPr wrap="square" lIns="0" tIns="0" rIns="0" bIns="0" rtlCol="0" anchor="ctr"/>
+          <a:lstStyle/>
+          <a:p>
+            <a:pPr indent="0" marL="0">
+              <a:buNone/>
+            </a:pPr>
+            <a:r>
+              <a:rPr lang="en-US" sz="2700" b="1" dirty="0">
+                <a:solidFill>
+                  <a:srgbClr val="FFFFFF"/>
                 </a:solidFill>
                 <a:latin typeface="Cambria" pitchFamily="34" charset="0"/>
                 <a:ea typeface="Cambria" pitchFamily="34" charset="-122"/>
                 <a:cs typeface="Cambria" pitchFamily="34" charset="-120"/>
               </a:rPr>
-              <a:t>1</a:t>
-            </a:r>
-            <a:endParaRPr lang="en-US" sz="2800" dirty="0"/>
+              <a:t>GitHubで成功するプロジェクトの4つの共通パターン</a:t>
+            </a:r>
+            <a:endParaRPr lang="en-US" sz="2700" dirty="0"/>
           </a:p>
         </p:txBody>
       </p:sp>
@@ -5857,34 +6929,34 @@
         </p:nvSpPr>
         <p:spPr>
           <a:xfrm>
-            <a:off x="1280160" y="502920"/>
-            <a:ext cx="9784080" cy="640080"/>
-          </a:xfrm>
-          <a:prstGeom prst="rect">
-            <a:avLst/>
-          </a:prstGeom>
-          <a:noFill/>
-          <a:ln/>
-        </p:spPr>
-        <p:txBody>
-          <a:bodyPr wrap="square" lIns="0" tIns="0" rIns="0" bIns="0" rtlCol="0" anchor="ctr"/>
-          <a:lstStyle/>
-          <a:p>
-            <a:pPr indent="0" marL="0">
-              <a:buNone/>
-            </a:pPr>
-            <a:r>
-              <a:rPr lang="en-US" sz="2600" b="1" dirty="0">
-                <a:solidFill>
-                  <a:srgbClr val="1A1F26"/>
-                </a:solidFill>
-                <a:latin typeface="Cambria" pitchFamily="34" charset="0"/>
-                <a:ea typeface="Cambria" pitchFamily="34" charset="-122"/>
-                <a:cs typeface="Cambria" pitchFamily="34" charset="-120"/>
-              </a:rPr>
-              <a:t>なぜGitHubで“育てる”のか</a:t>
-            </a:r>
-            <a:endParaRPr lang="en-US" sz="2600" dirty="0"/>
+            <a:off x="548640" y="1097280"/>
+            <a:ext cx="10607040" cy="365760"/>
+          </a:xfrm>
+          <a:prstGeom prst="rect">
+            <a:avLst/>
+          </a:prstGeom>
+          <a:noFill/>
+          <a:ln/>
+        </p:spPr>
+        <p:txBody>
+          <a:bodyPr wrap="square" lIns="0" tIns="0" rIns="0" bIns="0" rtlCol="0" anchor="ctr"/>
+          <a:lstStyle/>
+          <a:p>
+            <a:pPr indent="0" marL="0">
+              <a:buNone/>
+            </a:pPr>
+            <a:r>
+              <a:rPr lang="en-US" sz="1300" i="1" dirty="0">
+                <a:solidFill>
+                  <a:srgbClr val="AEB7C4"/>
+                </a:solidFill>
+                <a:latin typeface="Calibri" pitchFamily="34" charset="0"/>
+                <a:ea typeface="Calibri" pitchFamily="34" charset="-122"/>
+                <a:cs typeface="Calibri" pitchFamily="34" charset="-120"/>
+              </a:rPr>
+              <a:t>Ephe・labelmake・r/githubの実例を横断して見えてきた要点(全体のまとめ)</a:t>
+            </a:r>
+            <a:endParaRPr lang="en-US" sz="1300" dirty="0"/>
           </a:p>
         </p:txBody>
       </p:sp>
@@ -5896,30 +6968,18 @@
         </p:nvSpPr>
         <p:spPr>
           <a:xfrm>
-            <a:off x="548640" y="1554480"/>
-            <a:ext cx="3566160" cy="2468880"/>
+            <a:off x="548640" y="1600200"/>
+            <a:ext cx="10607040" cy="914400"/>
           </a:xfrm>
           <a:prstGeom prst="roundRect">
             <a:avLst>
-              <a:gd name="adj" fmla="val 4444"/>
+              <a:gd name="adj" fmla="val 10000"/>
             </a:avLst>
           </a:prstGeom>
           <a:solidFill>
-            <a:srgbClr val="FFFFFF"/>
+            <a:srgbClr val="232A34"/>
           </a:solidFill>
-          <a:ln w="12700">
-            <a:solidFill>
-              <a:srgbClr val="E3E6EA"/>
-            </a:solidFill>
-            <a:prstDash val="solid"/>
-          </a:ln>
-          <a:effectLst>
-            <a:outerShdw sx="100000" sy="100000" kx="0" ky="0" algn="bl" rotWithShape="0" blurRad="101600" dist="38100" dir="5400000">
-              <a:srgbClr val="000000">
-                <a:alpha val="12000"/>
-              </a:srgbClr>
-            </a:outerShdw>
-          </a:effectLst>
+          <a:ln/>
         </p:spPr>
       </p:sp>
       <p:sp>
@@ -5931,12 +6991,10 @@
         <p:spPr>
           <a:xfrm>
             <a:off x="822960" y="1828800"/>
-            <a:ext cx="548640" cy="548640"/>
-          </a:xfrm>
-          <a:prstGeom prst="roundRect">
-            <a:avLst>
-              <a:gd name="adj" fmla="val 50000"/>
-            </a:avLst>
+            <a:ext cx="457200" cy="457200"/>
+          </a:xfrm>
+          <a:prstGeom prst="ellipse">
+            <a:avLst/>
           </a:prstGeom>
           <a:solidFill>
             <a:srgbClr val="B084F5"/>
@@ -5952,24 +7010,24 @@
         </p:nvSpPr>
         <p:spPr>
           <a:xfrm>
-            <a:off x="822960" y="2560320"/>
-            <a:ext cx="3017520" cy="548640"/>
-          </a:xfrm>
-          <a:prstGeom prst="rect">
-            <a:avLst/>
-          </a:prstGeom>
-          <a:noFill/>
-          <a:ln/>
-        </p:spPr>
-        <p:txBody>
-          <a:bodyPr wrap="square" lIns="0" tIns="0" rIns="0" bIns="0" rtlCol="0" anchor="ctr"/>
-          <a:lstStyle/>
-          <a:p>
-            <a:pPr indent="0" marL="0">
-              <a:buNone/>
-            </a:pPr>
-            <a:r>
-              <a:rPr lang="en-US" sz="1500" b="1" dirty="0">
+            <a:off x="822960" y="1828800"/>
+            <a:ext cx="457200" cy="457200"/>
+          </a:xfrm>
+          <a:prstGeom prst="rect">
+            <a:avLst/>
+          </a:prstGeom>
+          <a:noFill/>
+          <a:ln/>
+        </p:spPr>
+        <p:txBody>
+          <a:bodyPr wrap="square" lIns="0" tIns="0" rIns="0" bIns="0" rtlCol="0" anchor="ctr"/>
+          <a:lstStyle/>
+          <a:p>
+            <a:pPr algn="ctr" indent="0" marL="0">
+              <a:buNone/>
+            </a:pPr>
+            <a:r>
+              <a:rPr lang="en-US" sz="1600" b="1" dirty="0">
                 <a:solidFill>
                   <a:srgbClr val="1A1F26"/>
                 </a:solidFill>
@@ -5977,9 +7035,9 @@
                 <a:ea typeface="Calibri" pitchFamily="34" charset="-122"/>
                 <a:cs typeface="Calibri" pitchFamily="34" charset="-120"/>
               </a:rPr>
-              <a:t>学習ログの可視化</a:t>
-            </a:r>
-            <a:endParaRPr lang="en-US" sz="1500" dirty="0"/>
+              <a:t>1</a:t>
+            </a:r>
+            <a:endParaRPr lang="en-US" sz="1600" dirty="0"/>
           </a:p>
         </p:txBody>
       </p:sp>
@@ -5991,86 +7049,429 @@
         </p:nvSpPr>
         <p:spPr>
           <a:xfrm>
-            <a:off x="822960" y="3063240"/>
-            <a:ext cx="3017520" cy="914400"/>
-          </a:xfrm>
-          <a:prstGeom prst="rect">
-            <a:avLst/>
-          </a:prstGeom>
-          <a:noFill/>
-          <a:ln/>
-        </p:spPr>
-        <p:txBody>
-          <a:bodyPr wrap="square" lIns="0" tIns="0" rIns="0" bIns="0" rtlCol="0" anchor="ctr"/>
-          <a:lstStyle/>
-          <a:p>
-            <a:pPr indent="0" marL="0">
-              <a:buNone/>
-            </a:pPr>
-            <a:r>
-              <a:rPr lang="en-US" sz="1150" dirty="0">
-                <a:solidFill>
-                  <a:srgbClr val="5B6472"/>
-                </a:solidFill>
-                <a:latin typeface="Calibri" pitchFamily="34" charset="0"/>
-                <a:ea typeface="Calibri" pitchFamily="34" charset="-122"/>
-                <a:cs typeface="Calibri" pitchFamily="34" charset="-120"/>
-              </a:rPr>
-              <a:t>資格勉強・技術メモをMarkdown/パワポで公開し、進捗を後から振り返れる形にする</a:t>
-            </a:r>
-            <a:endParaRPr lang="en-US" sz="1150" dirty="0"/>
-          </a:p>
-        </p:txBody>
-      </p:sp>
-      <p:sp>
-        <p:nvSpPr>
-          <p:cNvPr id="8" name="Shape 6"/>
+            <a:off x="1508760" y="1691640"/>
+            <a:ext cx="3291840" cy="731520"/>
+          </a:xfrm>
+          <a:prstGeom prst="rect">
+            <a:avLst/>
+          </a:prstGeom>
+          <a:noFill/>
+          <a:ln/>
+        </p:spPr>
+        <p:txBody>
+          <a:bodyPr wrap="square" lIns="0" tIns="0" rIns="0" bIns="0" rtlCol="0" anchor="t"/>
+          <a:lstStyle/>
+          <a:p>
+            <a:pPr indent="0" marL="0">
+              <a:buNone/>
+            </a:pPr>
+            <a:r>
+              <a:rPr lang="en-US" sz="1350" b="1" dirty="0">
+                <a:solidFill>
+                  <a:srgbClr val="FFFFFF"/>
+                </a:solidFill>
+                <a:latin typeface="Calibri" pitchFamily="34" charset="0"/>
+                <a:ea typeface="Calibri" pitchFamily="34" charset="-122"/>
+                <a:cs typeface="Calibri" pitchFamily="34" charset="-120"/>
+              </a:rPr>
+              <a:t>誰かの困りごとを解決している</a:t>
+            </a:r>
+            <a:endParaRPr lang="en-US" sz="1350" dirty="0"/>
+          </a:p>
+        </p:txBody>
+      </p:sp>
+      <p:sp>
+        <p:nvSpPr>
+          <p:cNvPr id="8" name="Text 6"/>
+          <p:cNvSpPr txBox="1"/>
+          <p:nvPr/>
+        </p:nvSpPr>
+        <p:spPr>
+          <a:xfrm>
+            <a:off x="4892040" y="1691640"/>
+            <a:ext cx="6035040" cy="749808"/>
+          </a:xfrm>
+          <a:prstGeom prst="rect">
+            <a:avLst/>
+          </a:prstGeom>
+          <a:noFill/>
+          <a:ln/>
+        </p:spPr>
+        <p:txBody>
+          <a:bodyPr wrap="square" lIns="0" tIns="0" rIns="0" bIns="0" rtlCol="0" anchor="ctr"/>
+          <a:lstStyle/>
+          <a:p>
+            <a:pPr indent="0" marL="0">
+              <a:buNone/>
+            </a:pPr>
+            <a:r>
+              <a:rPr lang="en-US" sz="1100" dirty="0">
+                <a:solidFill>
+                  <a:srgbClr val="AEB7C4"/>
+                </a:solidFill>
+                <a:latin typeface="Calibri" pitchFamily="34" charset="0"/>
+                <a:ea typeface="Calibri" pitchFamily="34" charset="-122"/>
+                <a:cs typeface="Calibri" pitchFamily="34" charset="-120"/>
+              </a:rPr>
+              <a:t>技術力より先に「需要があるか」が前提。既存の選択肢への不満が出発点になっているプロジェクトが伸びやすい</a:t>
+            </a:r>
+            <a:endParaRPr lang="en-US" sz="1100" dirty="0"/>
+          </a:p>
+        </p:txBody>
+      </p:sp>
+      <p:sp>
+        <p:nvSpPr>
+          <p:cNvPr id="9" name="Shape 7"/>
           <p:cNvSpPr/>
           <p:nvPr/>
         </p:nvSpPr>
         <p:spPr>
           <a:xfrm>
-            <a:off x="4343400" y="1554480"/>
-            <a:ext cx="3566160" cy="2468880"/>
+            <a:off x="548640" y="2606040"/>
+            <a:ext cx="10607040" cy="914400"/>
           </a:xfrm>
           <a:prstGeom prst="roundRect">
             <a:avLst>
-              <a:gd name="adj" fmla="val 4444"/>
+              <a:gd name="adj" fmla="val 10000"/>
             </a:avLst>
           </a:prstGeom>
           <a:solidFill>
-            <a:srgbClr val="FFFFFF"/>
+            <a:srgbClr val="232A34"/>
           </a:solidFill>
-          <a:ln w="12700">
-            <a:solidFill>
-              <a:srgbClr val="E3E6EA"/>
-            </a:solidFill>
-            <a:prstDash val="solid"/>
-          </a:ln>
-          <a:effectLst>
-            <a:outerShdw sx="100000" sy="100000" kx="0" ky="0" algn="bl" rotWithShape="0" blurRad="101600" dist="38100" dir="5400000">
-              <a:srgbClr val="000000">
-                <a:alpha val="12000"/>
-              </a:srgbClr>
-            </a:outerShdw>
-          </a:effectLst>
-        </p:spPr>
-      </p:sp>
-      <p:sp>
-        <p:nvSpPr>
-          <p:cNvPr id="9" name="Shape 7"/>
+          <a:ln/>
+        </p:spPr>
+      </p:sp>
+      <p:sp>
+        <p:nvSpPr>
+          <p:cNvPr id="10" name="Shape 8"/>
           <p:cNvSpPr/>
           <p:nvPr/>
         </p:nvSpPr>
         <p:spPr>
           <a:xfrm>
-            <a:off x="4617720" y="1828800"/>
-            <a:ext cx="548640" cy="548640"/>
+            <a:off x="822960" y="2834640"/>
+            <a:ext cx="457200" cy="457200"/>
+          </a:xfrm>
+          <a:prstGeom prst="ellipse">
+            <a:avLst/>
+          </a:prstGeom>
+          <a:solidFill>
+            <a:srgbClr val="58D68D"/>
+          </a:solidFill>
+          <a:ln/>
+        </p:spPr>
+      </p:sp>
+      <p:sp>
+        <p:nvSpPr>
+          <p:cNvPr id="11" name="Text 9"/>
+          <p:cNvSpPr txBox="1"/>
+          <p:nvPr/>
+        </p:nvSpPr>
+        <p:spPr>
+          <a:xfrm>
+            <a:off x="822960" y="2834640"/>
+            <a:ext cx="457200" cy="457200"/>
+          </a:xfrm>
+          <a:prstGeom prst="rect">
+            <a:avLst/>
+          </a:prstGeom>
+          <a:noFill/>
+          <a:ln/>
+        </p:spPr>
+        <p:txBody>
+          <a:bodyPr wrap="square" lIns="0" tIns="0" rIns="0" bIns="0" rtlCol="0" anchor="ctr"/>
+          <a:lstStyle/>
+          <a:p>
+            <a:pPr algn="ctr" indent="0" marL="0">
+              <a:buNone/>
+            </a:pPr>
+            <a:r>
+              <a:rPr lang="en-US" sz="1600" b="1" dirty="0">
+                <a:solidFill>
+                  <a:srgbClr val="1A1F26"/>
+                </a:solidFill>
+                <a:latin typeface="Calibri" pitchFamily="34" charset="0"/>
+                <a:ea typeface="Calibri" pitchFamily="34" charset="-122"/>
+                <a:cs typeface="Calibri" pitchFamily="34" charset="-120"/>
+              </a:rPr>
+              <a:t>2</a:t>
+            </a:r>
+            <a:endParaRPr lang="en-US" sz="1600" dirty="0"/>
+          </a:p>
+        </p:txBody>
+      </p:sp>
+      <p:sp>
+        <p:nvSpPr>
+          <p:cNvPr id="12" name="Text 10"/>
+          <p:cNvSpPr txBox="1"/>
+          <p:nvPr/>
+        </p:nvSpPr>
+        <p:spPr>
+          <a:xfrm>
+            <a:off x="1508760" y="2697480"/>
+            <a:ext cx="3291840" cy="731520"/>
+          </a:xfrm>
+          <a:prstGeom prst="rect">
+            <a:avLst/>
+          </a:prstGeom>
+          <a:noFill/>
+          <a:ln/>
+        </p:spPr>
+        <p:txBody>
+          <a:bodyPr wrap="square" lIns="0" tIns="0" rIns="0" bIns="0" rtlCol="0" anchor="t"/>
+          <a:lstStyle/>
+          <a:p>
+            <a:pPr indent="0" marL="0">
+              <a:buNone/>
+            </a:pPr>
+            <a:r>
+              <a:rPr lang="en-US" sz="1350" b="1" dirty="0">
+                <a:solidFill>
+                  <a:srgbClr val="FFFFFF"/>
+                </a:solidFill>
+                <a:latin typeface="Calibri" pitchFamily="34" charset="0"/>
+                <a:ea typeface="Calibri" pitchFamily="34" charset="-122"/>
+                <a:cs typeface="Calibri" pitchFamily="34" charset="-120"/>
+              </a:rPr>
+              <a:t>一点突破のディストリビューション</a:t>
+            </a:r>
+            <a:endParaRPr lang="en-US" sz="1350" dirty="0"/>
+          </a:p>
+        </p:txBody>
+      </p:sp>
+      <p:sp>
+        <p:nvSpPr>
+          <p:cNvPr id="13" name="Text 11"/>
+          <p:cNvSpPr txBox="1"/>
+          <p:nvPr/>
+        </p:nvSpPr>
+        <p:spPr>
+          <a:xfrm>
+            <a:off x="4892040" y="2697480"/>
+            <a:ext cx="6035040" cy="749808"/>
+          </a:xfrm>
+          <a:prstGeom prst="rect">
+            <a:avLst/>
+          </a:prstGeom>
+          <a:noFill/>
+          <a:ln/>
+        </p:spPr>
+        <p:txBody>
+          <a:bodyPr wrap="square" lIns="0" tIns="0" rIns="0" bIns="0" rtlCol="0" anchor="ctr"/>
+          <a:lstStyle/>
+          <a:p>
+            <a:pPr indent="0" marL="0">
+              <a:buNone/>
+            </a:pPr>
+            <a:r>
+              <a:rPr lang="en-US" sz="1100" dirty="0">
+                <a:solidFill>
+                  <a:srgbClr val="AEB7C4"/>
+                </a:solidFill>
+                <a:latin typeface="Calibri" pitchFamily="34" charset="0"/>
+                <a:ea typeface="Calibri" pitchFamily="34" charset="-122"/>
+                <a:cs typeface="Calibri" pitchFamily="34" charset="-120"/>
+              </a:rPr>
+              <a:t>チャネルを分散させるより、狙った層に刺さる場所(開発者ならHacker News)に絞って本気で当てる方が効く</a:t>
+            </a:r>
+            <a:endParaRPr lang="en-US" sz="1100" dirty="0"/>
+          </a:p>
+        </p:txBody>
+      </p:sp>
+      <p:sp>
+        <p:nvSpPr>
+          <p:cNvPr id="14" name="Shape 12"/>
+          <p:cNvSpPr/>
+          <p:nvPr/>
+        </p:nvSpPr>
+        <p:spPr>
+          <a:xfrm>
+            <a:off x="548640" y="3611880"/>
+            <a:ext cx="10607040" cy="914400"/>
           </a:xfrm>
           <a:prstGeom prst="roundRect">
             <a:avLst>
-              <a:gd name="adj" fmla="val 50000"/>
+              <a:gd name="adj" fmla="val 10000"/>
             </a:avLst>
+          </a:prstGeom>
+          <a:solidFill>
+            <a:srgbClr val="232A34"/>
+          </a:solidFill>
+          <a:ln/>
+        </p:spPr>
+      </p:sp>
+      <p:sp>
+        <p:nvSpPr>
+          <p:cNvPr id="15" name="Shape 13"/>
+          <p:cNvSpPr/>
+          <p:nvPr/>
+        </p:nvSpPr>
+        <p:spPr>
+          <a:xfrm>
+            <a:off x="822960" y="3840480"/>
+            <a:ext cx="457200" cy="457200"/>
+          </a:xfrm>
+          <a:prstGeom prst="ellipse">
+            <a:avLst/>
+          </a:prstGeom>
+          <a:solidFill>
+            <a:srgbClr val="F0A857"/>
+          </a:solidFill>
+          <a:ln/>
+        </p:spPr>
+      </p:sp>
+      <p:sp>
+        <p:nvSpPr>
+          <p:cNvPr id="16" name="Text 14"/>
+          <p:cNvSpPr txBox="1"/>
+          <p:nvPr/>
+        </p:nvSpPr>
+        <p:spPr>
+          <a:xfrm>
+            <a:off x="822960" y="3840480"/>
+            <a:ext cx="457200" cy="457200"/>
+          </a:xfrm>
+          <a:prstGeom prst="rect">
+            <a:avLst/>
+          </a:prstGeom>
+          <a:noFill/>
+          <a:ln/>
+        </p:spPr>
+        <p:txBody>
+          <a:bodyPr wrap="square" lIns="0" tIns="0" rIns="0" bIns="0" rtlCol="0" anchor="ctr"/>
+          <a:lstStyle/>
+          <a:p>
+            <a:pPr algn="ctr" indent="0" marL="0">
+              <a:buNone/>
+            </a:pPr>
+            <a:r>
+              <a:rPr lang="en-US" sz="1600" b="1" dirty="0">
+                <a:solidFill>
+                  <a:srgbClr val="1A1F26"/>
+                </a:solidFill>
+                <a:latin typeface="Calibri" pitchFamily="34" charset="0"/>
+                <a:ea typeface="Calibri" pitchFamily="34" charset="-122"/>
+                <a:cs typeface="Calibri" pitchFamily="34" charset="-120"/>
+              </a:rPr>
+              <a:t>3</a:t>
+            </a:r>
+            <a:endParaRPr lang="en-US" sz="1600" dirty="0"/>
+          </a:p>
+        </p:txBody>
+      </p:sp>
+      <p:sp>
+        <p:nvSpPr>
+          <p:cNvPr id="17" name="Text 15"/>
+          <p:cNvSpPr txBox="1"/>
+          <p:nvPr/>
+        </p:nvSpPr>
+        <p:spPr>
+          <a:xfrm>
+            <a:off x="1508760" y="3703320"/>
+            <a:ext cx="3291840" cy="731520"/>
+          </a:xfrm>
+          <a:prstGeom prst="rect">
+            <a:avLst/>
+          </a:prstGeom>
+          <a:noFill/>
+          <a:ln/>
+        </p:spPr>
+        <p:txBody>
+          <a:bodyPr wrap="square" lIns="0" tIns="0" rIns="0" bIns="0" rtlCol="0" anchor="t"/>
+          <a:lstStyle/>
+          <a:p>
+            <a:pPr indent="0" marL="0">
+              <a:buNone/>
+            </a:pPr>
+            <a:r>
+              <a:rPr lang="en-US" sz="1350" b="1" dirty="0">
+                <a:solidFill>
+                  <a:srgbClr val="FFFFFF"/>
+                </a:solidFill>
+                <a:latin typeface="Calibri" pitchFamily="34" charset="0"/>
+                <a:ea typeface="Calibri" pitchFamily="34" charset="-122"/>
+                <a:cs typeface="Calibri" pitchFamily="34" charset="-120"/>
+              </a:rPr>
+              <a:t>見た目の摩擦を減らす</a:t>
+            </a:r>
+            <a:endParaRPr lang="en-US" sz="1350" dirty="0"/>
+          </a:p>
+        </p:txBody>
+      </p:sp>
+      <p:sp>
+        <p:nvSpPr>
+          <p:cNvPr id="18" name="Text 16"/>
+          <p:cNvSpPr txBox="1"/>
+          <p:nvPr/>
+        </p:nvSpPr>
+        <p:spPr>
+          <a:xfrm>
+            <a:off x="4892040" y="3703320"/>
+            <a:ext cx="6035040" cy="749808"/>
+          </a:xfrm>
+          <a:prstGeom prst="rect">
+            <a:avLst/>
+          </a:prstGeom>
+          <a:noFill/>
+          <a:ln/>
+        </p:spPr>
+        <p:txBody>
+          <a:bodyPr wrap="square" lIns="0" tIns="0" rIns="0" bIns="0" rtlCol="0" anchor="ctr"/>
+          <a:lstStyle/>
+          <a:p>
+            <a:pPr indent="0" marL="0">
+              <a:buNone/>
+            </a:pPr>
+            <a:r>
+              <a:rPr lang="en-US" sz="1100" dirty="0">
+                <a:solidFill>
+                  <a:srgbClr val="AEB7C4"/>
+                </a:solidFill>
+                <a:latin typeface="Calibri" pitchFamily="34" charset="0"/>
+                <a:ea typeface="Calibri" pitchFamily="34" charset="-122"/>
+                <a:cs typeface="Calibri" pitchFamily="34" charset="-120"/>
+              </a:rPr>
+              <a:t>英語で書く、README/OGP画像を整えるなど「試してもらう前のハードルを下げる」地味な作業の効果が大きい</a:t>
+            </a:r>
+            <a:endParaRPr lang="en-US" sz="1100" dirty="0"/>
+          </a:p>
+        </p:txBody>
+      </p:sp>
+      <p:sp>
+        <p:nvSpPr>
+          <p:cNvPr id="19" name="Shape 17"/>
+          <p:cNvSpPr/>
+          <p:nvPr/>
+        </p:nvSpPr>
+        <p:spPr>
+          <a:xfrm>
+            <a:off x="548640" y="4617720"/>
+            <a:ext cx="10607040" cy="914400"/>
+          </a:xfrm>
+          <a:prstGeom prst="roundRect">
+            <a:avLst>
+              <a:gd name="adj" fmla="val 10000"/>
+            </a:avLst>
+          </a:prstGeom>
+          <a:solidFill>
+            <a:srgbClr val="232A34"/>
+          </a:solidFill>
+          <a:ln/>
+        </p:spPr>
+      </p:sp>
+      <p:sp>
+        <p:nvSpPr>
+          <p:cNvPr id="20" name="Shape 18"/>
+          <p:cNvSpPr/>
+          <p:nvPr/>
+        </p:nvSpPr>
+        <p:spPr>
+          <a:xfrm>
+            <a:off x="822960" y="4846320"/>
+            <a:ext cx="457200" cy="457200"/>
+          </a:xfrm>
+          <a:prstGeom prst="ellipse">
+            <a:avLst/>
           </a:prstGeom>
           <a:solidFill>
             <a:srgbClr val="B084F5"/>
@@ -6080,30 +7481,30 @@
       </p:sp>
       <p:sp>
         <p:nvSpPr>
-          <p:cNvPr id="10" name="Text 8"/>
-          <p:cNvSpPr txBox="1"/>
-          <p:nvPr/>
-        </p:nvSpPr>
-        <p:spPr>
-          <a:xfrm>
-            <a:off x="4617720" y="2560320"/>
-            <a:ext cx="3017520" cy="548640"/>
-          </a:xfrm>
-          <a:prstGeom prst="rect">
-            <a:avLst/>
-          </a:prstGeom>
-          <a:noFill/>
-          <a:ln/>
-        </p:spPr>
-        <p:txBody>
-          <a:bodyPr wrap="square" lIns="0" tIns="0" rIns="0" bIns="0" rtlCol="0" anchor="ctr"/>
-          <a:lstStyle/>
-          <a:p>
-            <a:pPr indent="0" marL="0">
-              <a:buNone/>
-            </a:pPr>
-            <a:r>
-              <a:rPr lang="en-US" sz="1500" b="1" dirty="0">
+          <p:cNvPr id="21" name="Text 19"/>
+          <p:cNvSpPr txBox="1"/>
+          <p:nvPr/>
+        </p:nvSpPr>
+        <p:spPr>
+          <a:xfrm>
+            <a:off x="822960" y="4846320"/>
+            <a:ext cx="457200" cy="457200"/>
+          </a:xfrm>
+          <a:prstGeom prst="rect">
+            <a:avLst/>
+          </a:prstGeom>
+          <a:noFill/>
+          <a:ln/>
+        </p:spPr>
+        <p:txBody>
+          <a:bodyPr wrap="square" lIns="0" tIns="0" rIns="0" bIns="0" rtlCol="0" anchor="ctr"/>
+          <a:lstStyle/>
+          <a:p>
+            <a:pPr algn="ctr" indent="0" marL="0">
+              <a:buNone/>
+            </a:pPr>
+            <a:r>
+              <a:rPr lang="en-US" sz="1600" b="1" dirty="0">
                 <a:solidFill>
                   <a:srgbClr val="1A1F26"/>
                 </a:solidFill>
@@ -6111,46 +7512,124 @@
                 <a:ea typeface="Calibri" pitchFamily="34" charset="-122"/>
                 <a:cs typeface="Calibri" pitchFamily="34" charset="-120"/>
               </a:rPr>
-              <a:t>ポートフォリオ化</a:t>
-            </a:r>
-            <a:endParaRPr lang="en-US" sz="1500" dirty="0"/>
-          </a:p>
-        </p:txBody>
-      </p:sp>
-      <p:sp>
-        <p:nvSpPr>
-          <p:cNvPr id="11" name="Text 9"/>
-          <p:cNvSpPr txBox="1"/>
-          <p:nvPr/>
-        </p:nvSpPr>
-        <p:spPr>
-          <a:xfrm>
-            <a:off x="4617720" y="3063240"/>
-            <a:ext cx="3017520" cy="914400"/>
-          </a:xfrm>
-          <a:prstGeom prst="rect">
-            <a:avLst/>
-          </a:prstGeom>
-          <a:noFill/>
-          <a:ln/>
-        </p:spPr>
-        <p:txBody>
-          <a:bodyPr wrap="square" lIns="0" tIns="0" rIns="0" bIns="0" rtlCol="0" anchor="ctr"/>
-          <a:lstStyle/>
-          <a:p>
-            <a:pPr indent="0" marL="0">
-              <a:buNone/>
-            </a:pPr>
-            <a:r>
-              <a:rPr lang="en-US" sz="1150" dirty="0">
-                <a:solidFill>
-                  <a:srgbClr val="5B6472"/>
-                </a:solidFill>
-                <a:latin typeface="Calibri" pitchFamily="34" charset="0"/>
-                <a:ea typeface="Calibri" pitchFamily="34" charset="-122"/>
-                <a:cs typeface="Calibri" pitchFamily="34" charset="-120"/>
-              </a:rPr>
-              <a:t>コミット履歴・READMEが、そのまま実績・継続力の証明になる</a:t>
+              <a:t>4</a:t>
+            </a:r>
+            <a:endParaRPr lang="en-US" sz="1600" dirty="0"/>
+          </a:p>
+        </p:txBody>
+      </p:sp>
+      <p:sp>
+        <p:nvSpPr>
+          <p:cNvPr id="22" name="Text 20"/>
+          <p:cNvSpPr txBox="1"/>
+          <p:nvPr/>
+        </p:nvSpPr>
+        <p:spPr>
+          <a:xfrm>
+            <a:off x="1508760" y="4709160"/>
+            <a:ext cx="3291840" cy="731520"/>
+          </a:xfrm>
+          <a:prstGeom prst="rect">
+            <a:avLst/>
+          </a:prstGeom>
+          <a:noFill/>
+          <a:ln/>
+        </p:spPr>
+        <p:txBody>
+          <a:bodyPr wrap="square" lIns="0" tIns="0" rIns="0" bIns="0" rtlCol="0" anchor="t"/>
+          <a:lstStyle/>
+          <a:p>
+            <a:pPr indent="0" marL="0">
+              <a:buNone/>
+            </a:pPr>
+            <a:r>
+              <a:rPr lang="en-US" sz="1350" b="1" dirty="0">
+                <a:solidFill>
+                  <a:srgbClr val="FFFFFF"/>
+                </a:solidFill>
+                <a:latin typeface="Calibri" pitchFamily="34" charset="0"/>
+                <a:ea typeface="Calibri" pitchFamily="34" charset="-122"/>
+                <a:cs typeface="Calibri" pitchFamily="34" charset="-120"/>
+              </a:rPr>
+              <a:t>継続すること自体が信用になる</a:t>
+            </a:r>
+            <a:endParaRPr lang="en-US" sz="1350" dirty="0"/>
+          </a:p>
+        </p:txBody>
+      </p:sp>
+      <p:sp>
+        <p:nvSpPr>
+          <p:cNvPr id="23" name="Text 21"/>
+          <p:cNvSpPr txBox="1"/>
+          <p:nvPr/>
+        </p:nvSpPr>
+        <p:spPr>
+          <a:xfrm>
+            <a:off x="4892040" y="4709160"/>
+            <a:ext cx="6035040" cy="749808"/>
+          </a:xfrm>
+          <a:prstGeom prst="rect">
+            <a:avLst/>
+          </a:prstGeom>
+          <a:noFill/>
+          <a:ln/>
+        </p:spPr>
+        <p:txBody>
+          <a:bodyPr wrap="square" lIns="0" tIns="0" rIns="0" bIns="0" rtlCol="0" anchor="ctr"/>
+          <a:lstStyle/>
+          <a:p>
+            <a:pPr indent="0" marL="0">
+              <a:buNone/>
+            </a:pPr>
+            <a:r>
+              <a:rPr lang="en-US" sz="1100" dirty="0">
+                <a:solidFill>
+                  <a:srgbClr val="AEB7C4"/>
+                </a:solidFill>
+                <a:latin typeface="Calibri" pitchFamily="34" charset="0"/>
+                <a:ea typeface="Calibri" pitchFamily="34" charset="-122"/>
+                <a:cs typeface="Calibri" pitchFamily="34" charset="-120"/>
+              </a:rPr>
+              <a:t>一発当てるより、コントリビューショングラフや継続メンテが本気度の証明になり、後からの流入に効いてくる</a:t>
+            </a:r>
+            <a:endParaRPr lang="en-US" sz="1100" dirty="0"/>
+          </a:p>
+        </p:txBody>
+      </p:sp>
+      <p:sp>
+        <p:nvSpPr>
+          <p:cNvPr id="24" name="Text 22"/>
+          <p:cNvSpPr txBox="1"/>
+          <p:nvPr/>
+        </p:nvSpPr>
+        <p:spPr>
+          <a:xfrm>
+            <a:off x="548640" y="5623560"/>
+            <a:ext cx="10607040" cy="548640"/>
+          </a:xfrm>
+          <a:prstGeom prst="rect">
+            <a:avLst/>
+          </a:prstGeom>
+          <a:noFill/>
+          <a:ln/>
+        </p:spPr>
+        <p:txBody>
+          <a:bodyPr wrap="square" lIns="0" tIns="0" rIns="0" bIns="0" rtlCol="0" anchor="ctr"/>
+          <a:lstStyle/>
+          <a:p>
+            <a:pPr indent="0" marL="0">
+              <a:buNone/>
+            </a:pPr>
+            <a:r>
+              <a:rPr lang="en-US" sz="1150" i="1" dirty="0">
+                <a:solidFill>
+                  <a:srgbClr val="B084F5"/>
+                </a:solidFill>
+                <a:latin typeface="Calibri" pitchFamily="34" charset="0"/>
+                <a:ea typeface="Calibri" pitchFamily="34" charset="-122"/>
+                <a:cs typeface="Calibri" pitchFamily="34" charset="-120"/>
+              </a:rPr>
+              <a:t>逆に言えば、単発の宣伝や小手先のバッジ装飾だけでは伸びない。スター獲得は「良いものを作り続けた結果」であり、逆算で操作しようとすると空回りしやすい</a:t>
             </a:r>
             <a:endParaRPr lang="en-US" sz="1150" dirty="0"/>
           </a:p>
@@ -6158,219 +7637,7 @@
       </p:sp>
       <p:sp>
         <p:nvSpPr>
-          <p:cNvPr id="12" name="Shape 10"/>
-          <p:cNvSpPr/>
-          <p:nvPr/>
-        </p:nvSpPr>
-        <p:spPr>
-          <a:xfrm>
-            <a:off x="8138160" y="1554480"/>
-            <a:ext cx="3566160" cy="2468880"/>
-          </a:xfrm>
-          <a:prstGeom prst="roundRect">
-            <a:avLst>
-              <a:gd name="adj" fmla="val 4444"/>
-            </a:avLst>
-          </a:prstGeom>
-          <a:solidFill>
-            <a:srgbClr val="FFFFFF"/>
-          </a:solidFill>
-          <a:ln w="12700">
-            <a:solidFill>
-              <a:srgbClr val="E3E6EA"/>
-            </a:solidFill>
-            <a:prstDash val="solid"/>
-          </a:ln>
-          <a:effectLst>
-            <a:outerShdw sx="100000" sy="100000" kx="0" ky="0" algn="bl" rotWithShape="0" blurRad="101600" dist="38100" dir="5400000">
-              <a:srgbClr val="000000">
-                <a:alpha val="12000"/>
-              </a:srgbClr>
-            </a:outerShdw>
-          </a:effectLst>
-        </p:spPr>
-      </p:sp>
-      <p:sp>
-        <p:nvSpPr>
-          <p:cNvPr id="13" name="Shape 11"/>
-          <p:cNvSpPr/>
-          <p:nvPr/>
-        </p:nvSpPr>
-        <p:spPr>
-          <a:xfrm>
-            <a:off x="8412480" y="1828800"/>
-            <a:ext cx="548640" cy="548640"/>
-          </a:xfrm>
-          <a:prstGeom prst="roundRect">
-            <a:avLst>
-              <a:gd name="adj" fmla="val 50000"/>
-            </a:avLst>
-          </a:prstGeom>
-          <a:solidFill>
-            <a:srgbClr val="B084F5"/>
-          </a:solidFill>
-          <a:ln/>
-        </p:spPr>
-      </p:sp>
-      <p:sp>
-        <p:nvSpPr>
-          <p:cNvPr id="14" name="Text 12"/>
-          <p:cNvSpPr txBox="1"/>
-          <p:nvPr/>
-        </p:nvSpPr>
-        <p:spPr>
-          <a:xfrm>
-            <a:off x="8412480" y="2560320"/>
-            <a:ext cx="3017520" cy="548640"/>
-          </a:xfrm>
-          <a:prstGeom prst="rect">
-            <a:avLst/>
-          </a:prstGeom>
-          <a:noFill/>
-          <a:ln/>
-        </p:spPr>
-        <p:txBody>
-          <a:bodyPr wrap="square" lIns="0" tIns="0" rIns="0" bIns="0" rtlCol="0" anchor="ctr"/>
-          <a:lstStyle/>
-          <a:p>
-            <a:pPr indent="0" marL="0">
-              <a:buNone/>
-            </a:pPr>
-            <a:r>
-              <a:rPr lang="en-US" sz="1500" b="1" dirty="0">
-                <a:solidFill>
-                  <a:srgbClr val="1A1F26"/>
-                </a:solidFill>
-                <a:latin typeface="Calibri" pitchFamily="34" charset="0"/>
-                <a:ea typeface="Calibri" pitchFamily="34" charset="-122"/>
-                <a:cs typeface="Calibri" pitchFamily="34" charset="-120"/>
-              </a:rPr>
-              <a:t>ネットワーキング</a:t>
-            </a:r>
-            <a:endParaRPr lang="en-US" sz="1500" dirty="0"/>
-          </a:p>
-        </p:txBody>
-      </p:sp>
-      <p:sp>
-        <p:nvSpPr>
-          <p:cNvPr id="15" name="Text 13"/>
-          <p:cNvSpPr txBox="1"/>
-          <p:nvPr/>
-        </p:nvSpPr>
-        <p:spPr>
-          <a:xfrm>
-            <a:off x="8412480" y="3063240"/>
-            <a:ext cx="3017520" cy="914400"/>
-          </a:xfrm>
-          <a:prstGeom prst="rect">
-            <a:avLst/>
-          </a:prstGeom>
-          <a:noFill/>
-          <a:ln/>
-        </p:spPr>
-        <p:txBody>
-          <a:bodyPr wrap="square" lIns="0" tIns="0" rIns="0" bIns="0" rtlCol="0" anchor="ctr"/>
-          <a:lstStyle/>
-          <a:p>
-            <a:pPr indent="0" marL="0">
-              <a:buNone/>
-            </a:pPr>
-            <a:r>
-              <a:rPr lang="en-US" sz="1150" dirty="0">
-                <a:solidFill>
-                  <a:srgbClr val="5B6472"/>
-                </a:solidFill>
-                <a:latin typeface="Calibri" pitchFamily="34" charset="0"/>
-                <a:ea typeface="Calibri" pitchFamily="34" charset="-122"/>
-                <a:cs typeface="Calibri" pitchFamily="34" charset="-120"/>
-              </a:rPr>
-              <a:t>Star・Follow・Issueでのやり取りを通じて、同じ分野の人とつながる</a:t>
-            </a:r>
-            <a:endParaRPr lang="en-US" sz="1150" dirty="0"/>
-          </a:p>
-        </p:txBody>
-      </p:sp>
-      <p:sp>
-        <p:nvSpPr>
-          <p:cNvPr id="16" name="Text 14"/>
-          <p:cNvSpPr txBox="1"/>
-          <p:nvPr/>
-        </p:nvSpPr>
-        <p:spPr>
-          <a:xfrm>
-            <a:off x="548640" y="4389120"/>
-            <a:ext cx="10607040" cy="365760"/>
-          </a:xfrm>
-          <a:prstGeom prst="rect">
-            <a:avLst/>
-          </a:prstGeom>
-          <a:noFill/>
-          <a:ln/>
-        </p:spPr>
-        <p:txBody>
-          <a:bodyPr wrap="square" lIns="0" tIns="0" rIns="0" bIns="0" rtlCol="0" anchor="ctr"/>
-          <a:lstStyle/>
-          <a:p>
-            <a:pPr indent="0" marL="0">
-              <a:buNone/>
-            </a:pPr>
-            <a:r>
-              <a:rPr lang="en-US" sz="1400" b="1" dirty="0">
-                <a:solidFill>
-                  <a:srgbClr val="1A1F26"/>
-                </a:solidFill>
-                <a:latin typeface="Calibri" pitchFamily="34" charset="0"/>
-                <a:ea typeface="Calibri" pitchFamily="34" charset="-122"/>
-                <a:cs typeface="Calibri" pitchFamily="34" charset="-120"/>
-              </a:rPr>
-              <a:t>このリポジトリ(tech-notes)の位置づけ</a:t>
-            </a:r>
-            <a:endParaRPr lang="en-US" sz="1400" dirty="0"/>
-          </a:p>
-        </p:txBody>
-      </p:sp>
-      <p:sp>
-        <p:nvSpPr>
-          <p:cNvPr id="17" name="Text 15"/>
-          <p:cNvSpPr txBox="1"/>
-          <p:nvPr/>
-        </p:nvSpPr>
-        <p:spPr>
-          <a:xfrm>
-            <a:off x="548640" y="4754880"/>
-            <a:ext cx="10607040" cy="822960"/>
-          </a:xfrm>
-          <a:prstGeom prst="rect">
-            <a:avLst/>
-          </a:prstGeom>
-          <a:noFill/>
-          <a:ln/>
-        </p:spPr>
-        <p:txBody>
-          <a:bodyPr wrap="square" lIns="0" tIns="0" rIns="0" bIns="0" rtlCol="0" anchor="ctr"/>
-          <a:lstStyle/>
-          <a:p>
-            <a:pPr indent="0" marL="0">
-              <a:buNone/>
-            </a:pPr>
-            <a:r>
-              <a:rPr lang="en-US" sz="1250" dirty="0">
-                <a:solidFill>
-                  <a:srgbClr val="5B6472"/>
-                </a:solidFill>
-                <a:latin typeface="Calibri" pitchFamily="34" charset="0"/>
-                <a:ea typeface="Calibri" pitchFamily="34" charset="-122"/>
-                <a:cs typeface="Calibri" pitchFamily="34" charset="-120"/>
-              </a:rPr>
-              <a:t>GitHubの成長Tips(フォロワー獲得など)と、Claude認定資格(CCA-F等)の学習メモの2本柱で運用する。中身が混ざらないよう、資格対策は別ファイル(cca-f-study-guide.pptx)に分離している。</a:t>
-            </a:r>
-            <a:endParaRPr lang="en-US" sz="1250" dirty="0"/>
-          </a:p>
-        </p:txBody>
-      </p:sp>
-      <p:sp>
-        <p:nvSpPr>
-          <p:cNvPr id="18" name="Text 16"/>
+          <p:cNvPr id="25" name="Text 23"/>
           <p:cNvSpPr txBox="1"/>
           <p:nvPr/>
         </p:nvSpPr>
@@ -6511,7 +7778,7 @@
                 <a:ea typeface="Cambria" pitchFamily="34" charset="-122"/>
                 <a:cs typeface="Cambria" pitchFamily="34" charset="-120"/>
               </a:rPr>
-              <a:t>初心者向け: まず慣れる4つの行動</a:t>
+              <a:t>なぜGitHubで“育てる”のか</a:t>
             </a:r>
             <a:endParaRPr lang="en-US" sz="2600" dirty="0"/>
           </a:p>
@@ -6525,56 +7792,53 @@
         </p:nvSpPr>
         <p:spPr>
           <a:xfrm>
-            <a:off x="640080" y="1554480"/>
-            <a:ext cx="457200" cy="457200"/>
-          </a:xfrm>
-          <a:prstGeom prst="ellipse">
-            <a:avLst/>
+            <a:off x="548640" y="1554480"/>
+            <a:ext cx="3566160" cy="2468880"/>
+          </a:xfrm>
+          <a:prstGeom prst="roundRect">
+            <a:avLst>
+              <a:gd name="adj" fmla="val 4444"/>
+            </a:avLst>
           </a:prstGeom>
           <a:solidFill>
-            <a:srgbClr val="58D68D"/>
+            <a:srgbClr val="FFFFFF"/>
           </a:solidFill>
-          <a:ln/>
-        </p:spPr>
-      </p:sp>
-      <p:sp>
-        <p:nvSpPr>
-          <p:cNvPr id="5" name="Text 3"/>
-          <p:cNvSpPr txBox="1"/>
-          <p:nvPr/>
-        </p:nvSpPr>
-        <p:spPr>
-          <a:xfrm>
-            <a:off x="640080" y="1554480"/>
-            <a:ext cx="457200" cy="457200"/>
-          </a:xfrm>
-          <a:prstGeom prst="rect">
-            <a:avLst/>
-          </a:prstGeom>
-          <a:noFill/>
-          <a:ln/>
-        </p:spPr>
-        <p:txBody>
-          <a:bodyPr wrap="square" lIns="0" tIns="0" rIns="0" bIns="0" rtlCol="0" anchor="ctr"/>
-          <a:lstStyle/>
-          <a:p>
-            <a:pPr algn="ctr" indent="0" marL="0">
-              <a:buNone/>
-            </a:pPr>
-            <a:r>
-              <a:rPr lang="en-US" sz="1400" b="1" dirty="0">
-                <a:solidFill>
-                  <a:srgbClr val="FFFFFF"/>
-                </a:solidFill>
-                <a:latin typeface="Calibri" pitchFamily="34" charset="0"/>
-                <a:ea typeface="Calibri" pitchFamily="34" charset="-122"/>
-                <a:cs typeface="Calibri" pitchFamily="34" charset="-120"/>
-              </a:rPr>
-              <a:t>1</a:t>
-            </a:r>
-            <a:endParaRPr lang="en-US" sz="1400" dirty="0"/>
-          </a:p>
-        </p:txBody>
+          <a:ln w="12700">
+            <a:solidFill>
+              <a:srgbClr val="E3E6EA"/>
+            </a:solidFill>
+            <a:prstDash val="solid"/>
+          </a:ln>
+          <a:effectLst>
+            <a:outerShdw sx="100000" sy="100000" kx="0" ky="0" algn="bl" rotWithShape="0" blurRad="101600" dist="38100" dir="5400000">
+              <a:srgbClr val="000000">
+                <a:alpha val="12000"/>
+              </a:srgbClr>
+            </a:outerShdw>
+          </a:effectLst>
+        </p:spPr>
+      </p:sp>
+      <p:sp>
+        <p:nvSpPr>
+          <p:cNvPr id="5" name="Shape 3"/>
+          <p:cNvSpPr/>
+          <p:nvPr/>
+        </p:nvSpPr>
+        <p:spPr>
+          <a:xfrm>
+            <a:off x="822960" y="1828800"/>
+            <a:ext cx="548640" cy="548640"/>
+          </a:xfrm>
+          <a:prstGeom prst="roundRect">
+            <a:avLst>
+              <a:gd name="adj" fmla="val 50000"/>
+            </a:avLst>
+          </a:prstGeom>
+          <a:solidFill>
+            <a:srgbClr val="B084F5"/>
+          </a:solidFill>
+          <a:ln/>
+        </p:spPr>
       </p:sp>
       <p:sp>
         <p:nvSpPr>
@@ -6584,24 +7848,24 @@
         </p:nvSpPr>
         <p:spPr>
           <a:xfrm>
-            <a:off x="1325880" y="1527048"/>
-            <a:ext cx="3108960" cy="502920"/>
-          </a:xfrm>
-          <a:prstGeom prst="rect">
-            <a:avLst/>
-          </a:prstGeom>
-          <a:noFill/>
-          <a:ln/>
-        </p:spPr>
-        <p:txBody>
-          <a:bodyPr wrap="square" lIns="0" tIns="0" rIns="0" bIns="0" rtlCol="0" anchor="t"/>
-          <a:lstStyle/>
-          <a:p>
-            <a:pPr indent="0" marL="0">
-              <a:buNone/>
-            </a:pPr>
-            <a:r>
-              <a:rPr lang="en-US" sz="1400" b="1" dirty="0">
+            <a:off x="822960" y="2560320"/>
+            <a:ext cx="3017520" cy="548640"/>
+          </a:xfrm>
+          <a:prstGeom prst="rect">
+            <a:avLst/>
+          </a:prstGeom>
+          <a:noFill/>
+          <a:ln/>
+        </p:spPr>
+        <p:txBody>
+          <a:bodyPr wrap="square" lIns="0" tIns="0" rIns="0" bIns="0" rtlCol="0" anchor="ctr"/>
+          <a:lstStyle/>
+          <a:p>
+            <a:pPr indent="0" marL="0">
+              <a:buNone/>
+            </a:pPr>
+            <a:r>
+              <a:rPr lang="en-US" sz="1500" b="1" dirty="0">
                 <a:solidFill>
                   <a:srgbClr val="1A1F26"/>
                 </a:solidFill>
@@ -6609,9 +7873,9 @@
                 <a:ea typeface="Calibri" pitchFamily="34" charset="-122"/>
                 <a:cs typeface="Calibri" pitchFamily="34" charset="-120"/>
               </a:rPr>
-              <a:t>アカウント作成</a:t>
-            </a:r>
-            <a:endParaRPr lang="en-US" sz="1400" dirty="0"/>
+              <a:t>学習ログの可視化</a:t>
+            </a:r>
+            <a:endParaRPr lang="en-US" sz="1500" dirty="0"/>
           </a:p>
         </p:txBody>
       </p:sp>
@@ -6623,8 +7887,8 @@
         </p:nvSpPr>
         <p:spPr>
           <a:xfrm>
-            <a:off x="4572000" y="1527048"/>
-            <a:ext cx="6583680" cy="960120"/>
+            <a:off x="822960" y="3063240"/>
+            <a:ext cx="3017520" cy="914400"/>
           </a:xfrm>
           <a:prstGeom prst="rect">
             <a:avLst/>
@@ -6648,7 +7912,7 @@
                 <a:ea typeface="Calibri" pitchFamily="34" charset="-122"/>
                 <a:cs typeface="Calibri" pitchFamily="34" charset="-120"/>
               </a:rPr>
-              <a:t>GitHubトップの Sign up からアカウントを作る。まずはこれがないと何も始まらない</a:t>
+              <a:t>資格勉強・技術メモをMarkdown/パワポで公開し、進捗を後から振り返れる形にする</a:t>
             </a:r>
             <a:endParaRPr lang="en-US" sz="1150" dirty="0"/>
           </a:p>
@@ -6662,56 +7926,53 @@
         </p:nvSpPr>
         <p:spPr>
           <a:xfrm>
-            <a:off x="640080" y="2606040"/>
-            <a:ext cx="457200" cy="457200"/>
-          </a:xfrm>
-          <a:prstGeom prst="ellipse">
-            <a:avLst/>
+            <a:off x="4343400" y="1554480"/>
+            <a:ext cx="3566160" cy="2468880"/>
+          </a:xfrm>
+          <a:prstGeom prst="roundRect">
+            <a:avLst>
+              <a:gd name="adj" fmla="val 4444"/>
+            </a:avLst>
           </a:prstGeom>
           <a:solidFill>
-            <a:srgbClr val="58D68D"/>
+            <a:srgbClr val="FFFFFF"/>
           </a:solidFill>
-          <a:ln/>
-        </p:spPr>
-      </p:sp>
-      <p:sp>
-        <p:nvSpPr>
-          <p:cNvPr id="9" name="Text 7"/>
-          <p:cNvSpPr txBox="1"/>
-          <p:nvPr/>
-        </p:nvSpPr>
-        <p:spPr>
-          <a:xfrm>
-            <a:off x="640080" y="2606040"/>
-            <a:ext cx="457200" cy="457200"/>
-          </a:xfrm>
-          <a:prstGeom prst="rect">
-            <a:avLst/>
-          </a:prstGeom>
-          <a:noFill/>
-          <a:ln/>
-        </p:spPr>
-        <p:txBody>
-          <a:bodyPr wrap="square" lIns="0" tIns="0" rIns="0" bIns="0" rtlCol="0" anchor="ctr"/>
-          <a:lstStyle/>
-          <a:p>
-            <a:pPr algn="ctr" indent="0" marL="0">
-              <a:buNone/>
-            </a:pPr>
-            <a:r>
-              <a:rPr lang="en-US" sz="1400" b="1" dirty="0">
-                <a:solidFill>
-                  <a:srgbClr val="FFFFFF"/>
-                </a:solidFill>
-                <a:latin typeface="Calibri" pitchFamily="34" charset="0"/>
-                <a:ea typeface="Calibri" pitchFamily="34" charset="-122"/>
-                <a:cs typeface="Calibri" pitchFamily="34" charset="-120"/>
-              </a:rPr>
-              <a:t>2</a:t>
-            </a:r>
-            <a:endParaRPr lang="en-US" sz="1400" dirty="0"/>
-          </a:p>
-        </p:txBody>
+          <a:ln w="12700">
+            <a:solidFill>
+              <a:srgbClr val="E3E6EA"/>
+            </a:solidFill>
+            <a:prstDash val="solid"/>
+          </a:ln>
+          <a:effectLst>
+            <a:outerShdw sx="100000" sy="100000" kx="0" ky="0" algn="bl" rotWithShape="0" blurRad="101600" dist="38100" dir="5400000">
+              <a:srgbClr val="000000">
+                <a:alpha val="12000"/>
+              </a:srgbClr>
+            </a:outerShdw>
+          </a:effectLst>
+        </p:spPr>
+      </p:sp>
+      <p:sp>
+        <p:nvSpPr>
+          <p:cNvPr id="9" name="Shape 7"/>
+          <p:cNvSpPr/>
+          <p:nvPr/>
+        </p:nvSpPr>
+        <p:spPr>
+          <a:xfrm>
+            <a:off x="4617720" y="1828800"/>
+            <a:ext cx="548640" cy="548640"/>
+          </a:xfrm>
+          <a:prstGeom prst="roundRect">
+            <a:avLst>
+              <a:gd name="adj" fmla="val 50000"/>
+            </a:avLst>
+          </a:prstGeom>
+          <a:solidFill>
+            <a:srgbClr val="B084F5"/>
+          </a:solidFill>
+          <a:ln/>
+        </p:spPr>
       </p:sp>
       <p:sp>
         <p:nvSpPr>
@@ -6721,24 +7982,24 @@
         </p:nvSpPr>
         <p:spPr>
           <a:xfrm>
-            <a:off x="1325880" y="2578608"/>
-            <a:ext cx="3108960" cy="502920"/>
-          </a:xfrm>
-          <a:prstGeom prst="rect">
-            <a:avLst/>
-          </a:prstGeom>
-          <a:noFill/>
-          <a:ln/>
-        </p:spPr>
-        <p:txBody>
-          <a:bodyPr wrap="square" lIns="0" tIns="0" rIns="0" bIns="0" rtlCol="0" anchor="t"/>
-          <a:lstStyle/>
-          <a:p>
-            <a:pPr indent="0" marL="0">
-              <a:buNone/>
-            </a:pPr>
-            <a:r>
-              <a:rPr lang="en-US" sz="1400" b="1" dirty="0">
+            <a:off x="4617720" y="2560320"/>
+            <a:ext cx="3017520" cy="548640"/>
+          </a:xfrm>
+          <a:prstGeom prst="rect">
+            <a:avLst/>
+          </a:prstGeom>
+          <a:noFill/>
+          <a:ln/>
+        </p:spPr>
+        <p:txBody>
+          <a:bodyPr wrap="square" lIns="0" tIns="0" rIns="0" bIns="0" rtlCol="0" anchor="ctr"/>
+          <a:lstStyle/>
+          <a:p>
+            <a:pPr indent="0" marL="0">
+              <a:buNone/>
+            </a:pPr>
+            <a:r>
+              <a:rPr lang="en-US" sz="1500" b="1" dirty="0">
                 <a:solidFill>
                   <a:srgbClr val="1A1F26"/>
                 </a:solidFill>
@@ -6746,9 +8007,9 @@
                 <a:ea typeface="Calibri" pitchFamily="34" charset="-122"/>
                 <a:cs typeface="Calibri" pitchFamily="34" charset="-120"/>
               </a:rPr>
-              <a:t>気になる人をフォロー</a:t>
-            </a:r>
-            <a:endParaRPr lang="en-US" sz="1400" dirty="0"/>
+              <a:t>ポートフォリオ化</a:t>
+            </a:r>
+            <a:endParaRPr lang="en-US" sz="1500" dirty="0"/>
           </a:p>
         </p:txBody>
       </p:sp>
@@ -6760,8 +8021,8 @@
         </p:nvSpPr>
         <p:spPr>
           <a:xfrm>
-            <a:off x="4572000" y="2578608"/>
-            <a:ext cx="6583680" cy="960120"/>
+            <a:off x="4617720" y="3063240"/>
+            <a:ext cx="3017520" cy="914400"/>
           </a:xfrm>
           <a:prstGeom prst="rect">
             <a:avLst/>
@@ -6785,7 +8046,7 @@
                 <a:ea typeface="Calibri" pitchFamily="34" charset="-122"/>
                 <a:cs typeface="Calibri" pitchFamily="34" charset="-120"/>
               </a:rPr>
-              <a:t>フォロー返しは気にしなくてよい。フォローすると相手の活動がNews Feedに流れるようになる</a:t>
+              <a:t>コミット履歴・READMEが、そのまま実績・継続力の証明になる</a:t>
             </a:r>
             <a:endParaRPr lang="en-US" sz="1150" dirty="0"/>
           </a:p>
@@ -6799,52 +8060,166 @@
         </p:nvSpPr>
         <p:spPr>
           <a:xfrm>
-            <a:off x="640080" y="3657600"/>
-            <a:ext cx="457200" cy="457200"/>
-          </a:xfrm>
-          <a:prstGeom prst="ellipse">
-            <a:avLst/>
+            <a:off x="8138160" y="1554480"/>
+            <a:ext cx="3566160" cy="2468880"/>
+          </a:xfrm>
+          <a:prstGeom prst="roundRect">
+            <a:avLst>
+              <a:gd name="adj" fmla="val 4444"/>
+            </a:avLst>
           </a:prstGeom>
           <a:solidFill>
-            <a:srgbClr val="58D68D"/>
+            <a:srgbClr val="FFFFFF"/>
           </a:solidFill>
-          <a:ln/>
-        </p:spPr>
-      </p:sp>
-      <p:sp>
-        <p:nvSpPr>
-          <p:cNvPr id="13" name="Text 11"/>
-          <p:cNvSpPr txBox="1"/>
-          <p:nvPr/>
-        </p:nvSpPr>
-        <p:spPr>
-          <a:xfrm>
-            <a:off x="640080" y="3657600"/>
-            <a:ext cx="457200" cy="457200"/>
-          </a:xfrm>
-          <a:prstGeom prst="rect">
-            <a:avLst/>
-          </a:prstGeom>
-          <a:noFill/>
-          <a:ln/>
-        </p:spPr>
-        <p:txBody>
-          <a:bodyPr wrap="square" lIns="0" tIns="0" rIns="0" bIns="0" rtlCol="0" anchor="ctr"/>
-          <a:lstStyle/>
-          <a:p>
-            <a:pPr algn="ctr" indent="0" marL="0">
+          <a:ln w="12700">
+            <a:solidFill>
+              <a:srgbClr val="E3E6EA"/>
+            </a:solidFill>
+            <a:prstDash val="solid"/>
+          </a:ln>
+          <a:effectLst>
+            <a:outerShdw sx="100000" sy="100000" kx="0" ky="0" algn="bl" rotWithShape="0" blurRad="101600" dist="38100" dir="5400000">
+              <a:srgbClr val="000000">
+                <a:alpha val="12000"/>
+              </a:srgbClr>
+            </a:outerShdw>
+          </a:effectLst>
+        </p:spPr>
+      </p:sp>
+      <p:sp>
+        <p:nvSpPr>
+          <p:cNvPr id="13" name="Shape 11"/>
+          <p:cNvSpPr/>
+          <p:nvPr/>
+        </p:nvSpPr>
+        <p:spPr>
+          <a:xfrm>
+            <a:off x="8412480" y="1828800"/>
+            <a:ext cx="548640" cy="548640"/>
+          </a:xfrm>
+          <a:prstGeom prst="roundRect">
+            <a:avLst>
+              <a:gd name="adj" fmla="val 50000"/>
+            </a:avLst>
+          </a:prstGeom>
+          <a:solidFill>
+            <a:srgbClr val="B084F5"/>
+          </a:solidFill>
+          <a:ln/>
+        </p:spPr>
+      </p:sp>
+      <p:sp>
+        <p:nvSpPr>
+          <p:cNvPr id="14" name="Text 12"/>
+          <p:cNvSpPr txBox="1"/>
+          <p:nvPr/>
+        </p:nvSpPr>
+        <p:spPr>
+          <a:xfrm>
+            <a:off x="8412480" y="2560320"/>
+            <a:ext cx="3017520" cy="548640"/>
+          </a:xfrm>
+          <a:prstGeom prst="rect">
+            <a:avLst/>
+          </a:prstGeom>
+          <a:noFill/>
+          <a:ln/>
+        </p:spPr>
+        <p:txBody>
+          <a:bodyPr wrap="square" lIns="0" tIns="0" rIns="0" bIns="0" rtlCol="0" anchor="ctr"/>
+          <a:lstStyle/>
+          <a:p>
+            <a:pPr indent="0" marL="0">
+              <a:buNone/>
+            </a:pPr>
+            <a:r>
+              <a:rPr lang="en-US" sz="1500" b="1" dirty="0">
+                <a:solidFill>
+                  <a:srgbClr val="1A1F26"/>
+                </a:solidFill>
+                <a:latin typeface="Calibri" pitchFamily="34" charset="0"/>
+                <a:ea typeface="Calibri" pitchFamily="34" charset="-122"/>
+                <a:cs typeface="Calibri" pitchFamily="34" charset="-120"/>
+              </a:rPr>
+              <a:t>ネットワーキング</a:t>
+            </a:r>
+            <a:endParaRPr lang="en-US" sz="1500" dirty="0"/>
+          </a:p>
+        </p:txBody>
+      </p:sp>
+      <p:sp>
+        <p:nvSpPr>
+          <p:cNvPr id="15" name="Text 13"/>
+          <p:cNvSpPr txBox="1"/>
+          <p:nvPr/>
+        </p:nvSpPr>
+        <p:spPr>
+          <a:xfrm>
+            <a:off x="8412480" y="3063240"/>
+            <a:ext cx="3017520" cy="914400"/>
+          </a:xfrm>
+          <a:prstGeom prst="rect">
+            <a:avLst/>
+          </a:prstGeom>
+          <a:noFill/>
+          <a:ln/>
+        </p:spPr>
+        <p:txBody>
+          <a:bodyPr wrap="square" lIns="0" tIns="0" rIns="0" bIns="0" rtlCol="0" anchor="ctr"/>
+          <a:lstStyle/>
+          <a:p>
+            <a:pPr indent="0" marL="0">
+              <a:buNone/>
+            </a:pPr>
+            <a:r>
+              <a:rPr lang="en-US" sz="1150" dirty="0">
+                <a:solidFill>
+                  <a:srgbClr val="5B6472"/>
+                </a:solidFill>
+                <a:latin typeface="Calibri" pitchFamily="34" charset="0"/>
+                <a:ea typeface="Calibri" pitchFamily="34" charset="-122"/>
+                <a:cs typeface="Calibri" pitchFamily="34" charset="-120"/>
+              </a:rPr>
+              <a:t>Star・Follow・Issueでのやり取りを通じて、同じ分野の人とつながる</a:t>
+            </a:r>
+            <a:endParaRPr lang="en-US" sz="1150" dirty="0"/>
+          </a:p>
+        </p:txBody>
+      </p:sp>
+      <p:sp>
+        <p:nvSpPr>
+          <p:cNvPr id="16" name="Text 14"/>
+          <p:cNvSpPr txBox="1"/>
+          <p:nvPr/>
+        </p:nvSpPr>
+        <p:spPr>
+          <a:xfrm>
+            <a:off x="548640" y="4389120"/>
+            <a:ext cx="10607040" cy="365760"/>
+          </a:xfrm>
+          <a:prstGeom prst="rect">
+            <a:avLst/>
+          </a:prstGeom>
+          <a:noFill/>
+          <a:ln/>
+        </p:spPr>
+        <p:txBody>
+          <a:bodyPr wrap="square" lIns="0" tIns="0" rIns="0" bIns="0" rtlCol="0" anchor="ctr"/>
+          <a:lstStyle/>
+          <a:p>
+            <a:pPr indent="0" marL="0">
               <a:buNone/>
             </a:pPr>
             <a:r>
               <a:rPr lang="en-US" sz="1400" b="1" dirty="0">
                 <a:solidFill>
-                  <a:srgbClr val="FFFFFF"/>
-                </a:solidFill>
-                <a:latin typeface="Calibri" pitchFamily="34" charset="0"/>
-                <a:ea typeface="Calibri" pitchFamily="34" charset="-122"/>
-                <a:cs typeface="Calibri" pitchFamily="34" charset="-120"/>
-              </a:rPr>
-              <a:t>3</a:t>
+                  <a:srgbClr val="1A1F26"/>
+                </a:solidFill>
+                <a:latin typeface="Calibri" pitchFamily="34" charset="0"/>
+                <a:ea typeface="Calibri" pitchFamily="34" charset="-122"/>
+                <a:cs typeface="Calibri" pitchFamily="34" charset="-120"/>
+              </a:rPr>
+              <a:t>このリポジトリ(tech-notes)の位置づけ</a:t>
             </a:r>
             <a:endParaRPr lang="en-US" sz="1400" dirty="0"/>
           </a:p>
@@ -6852,69 +8227,30 @@
       </p:sp>
       <p:sp>
         <p:nvSpPr>
-          <p:cNvPr id="14" name="Text 12"/>
-          <p:cNvSpPr txBox="1"/>
-          <p:nvPr/>
-        </p:nvSpPr>
-        <p:spPr>
-          <a:xfrm>
-            <a:off x="1325880" y="3630168"/>
-            <a:ext cx="3108960" cy="502920"/>
-          </a:xfrm>
-          <a:prstGeom prst="rect">
-            <a:avLst/>
-          </a:prstGeom>
-          <a:noFill/>
-          <a:ln/>
-        </p:spPr>
-        <p:txBody>
-          <a:bodyPr wrap="square" lIns="0" tIns="0" rIns="0" bIns="0" rtlCol="0" anchor="t"/>
-          <a:lstStyle/>
-          <a:p>
-            <a:pPr indent="0" marL="0">
-              <a:buNone/>
-            </a:pPr>
-            <a:r>
-              <a:rPr lang="en-US" sz="1400" b="1" dirty="0">
-                <a:solidFill>
-                  <a:srgbClr val="1A1F26"/>
-                </a:solidFill>
-                <a:latin typeface="Calibri" pitchFamily="34" charset="0"/>
-                <a:ea typeface="Calibri" pitchFamily="34" charset="-122"/>
-                <a:cs typeface="Calibri" pitchFamily="34" charset="-120"/>
-              </a:rPr>
-              <a:t>気になるリポジトリにStar</a:t>
-            </a:r>
-            <a:endParaRPr lang="en-US" sz="1400" dirty="0"/>
-          </a:p>
-        </p:txBody>
-      </p:sp>
-      <p:sp>
-        <p:nvSpPr>
-          <p:cNvPr id="15" name="Text 13"/>
-          <p:cNvSpPr txBox="1"/>
-          <p:nvPr/>
-        </p:nvSpPr>
-        <p:spPr>
-          <a:xfrm>
-            <a:off x="4572000" y="3630168"/>
-            <a:ext cx="6583680" cy="960120"/>
-          </a:xfrm>
-          <a:prstGeom prst="rect">
-            <a:avLst/>
-          </a:prstGeom>
-          <a:noFill/>
-          <a:ln/>
-        </p:spPr>
-        <p:txBody>
-          <a:bodyPr wrap="square" lIns="0" tIns="0" rIns="0" bIns="0" rtlCol="0" anchor="ctr"/>
-          <a:lstStyle/>
-          <a:p>
-            <a:pPr indent="0" marL="0">
-              <a:buNone/>
-            </a:pPr>
-            <a:r>
-              <a:rPr lang="en-US" sz="1150" dirty="0">
+          <p:cNvPr id="17" name="Text 15"/>
+          <p:cNvSpPr txBox="1"/>
+          <p:nvPr/>
+        </p:nvSpPr>
+        <p:spPr>
+          <a:xfrm>
+            <a:off x="548640" y="4754880"/>
+            <a:ext cx="10607040" cy="822960"/>
+          </a:xfrm>
+          <a:prstGeom prst="rect">
+            <a:avLst/>
+          </a:prstGeom>
+          <a:noFill/>
+          <a:ln/>
+        </p:spPr>
+        <p:txBody>
+          <a:bodyPr wrap="square" lIns="0" tIns="0" rIns="0" bIns="0" rtlCol="0" anchor="ctr"/>
+          <a:lstStyle/>
+          <a:p>
+            <a:pPr indent="0" marL="0">
+              <a:buNone/>
+            </a:pPr>
+            <a:r>
+              <a:rPr lang="en-US" sz="1250" dirty="0">
                 <a:solidFill>
                   <a:srgbClr val="5B6472"/>
                 </a:solidFill>
@@ -6922,191 +8258,15 @@
                 <a:ea typeface="Calibri" pitchFamily="34" charset="-122"/>
                 <a:cs typeface="Calibri" pitchFamily="34" charset="-120"/>
               </a:rPr>
-              <a:t>お気に入り登録のような機能。Starすると自分をフォローしている人の feed に流れ、そのリポジトリの露出が増える</a:t>
-            </a:r>
-            <a:endParaRPr lang="en-US" sz="1150" dirty="0"/>
-          </a:p>
-        </p:txBody>
-      </p:sp>
-      <p:sp>
-        <p:nvSpPr>
-          <p:cNvPr id="16" name="Shape 14"/>
-          <p:cNvSpPr/>
-          <p:nvPr/>
-        </p:nvSpPr>
-        <p:spPr>
-          <a:xfrm>
-            <a:off x="640080" y="4709160"/>
-            <a:ext cx="457200" cy="457200"/>
-          </a:xfrm>
-          <a:prstGeom prst="ellipse">
-            <a:avLst/>
-          </a:prstGeom>
-          <a:solidFill>
-            <a:srgbClr val="58D68D"/>
-          </a:solidFill>
-          <a:ln/>
-        </p:spPr>
-      </p:sp>
-      <p:sp>
-        <p:nvSpPr>
-          <p:cNvPr id="17" name="Text 15"/>
-          <p:cNvSpPr txBox="1"/>
-          <p:nvPr/>
-        </p:nvSpPr>
-        <p:spPr>
-          <a:xfrm>
-            <a:off x="640080" y="4709160"/>
-            <a:ext cx="457200" cy="457200"/>
-          </a:xfrm>
-          <a:prstGeom prst="rect">
-            <a:avLst/>
-          </a:prstGeom>
-          <a:noFill/>
-          <a:ln/>
-        </p:spPr>
-        <p:txBody>
-          <a:bodyPr wrap="square" lIns="0" tIns="0" rIns="0" bIns="0" rtlCol="0" anchor="ctr"/>
-          <a:lstStyle/>
-          <a:p>
-            <a:pPr algn="ctr" indent="0" marL="0">
-              <a:buNone/>
-            </a:pPr>
-            <a:r>
-              <a:rPr lang="en-US" sz="1400" b="1" dirty="0">
-                <a:solidFill>
-                  <a:srgbClr val="FFFFFF"/>
-                </a:solidFill>
-                <a:latin typeface="Calibri" pitchFamily="34" charset="0"/>
-                <a:ea typeface="Calibri" pitchFamily="34" charset="-122"/>
-                <a:cs typeface="Calibri" pitchFamily="34" charset="-120"/>
-              </a:rPr>
-              <a:t>4</a:t>
-            </a:r>
-            <a:endParaRPr lang="en-US" sz="1400" dirty="0"/>
+              <a:t>GitHubの成長Tips(フォロワー獲得など)と、Claude認定資格(CCA-F等)の学習メモの2本柱で運用する。中身が混ざらないよう、資格対策は別ファイル(cca-f-study-guide.pptx)に分離している。</a:t>
+            </a:r>
+            <a:endParaRPr lang="en-US" sz="1250" dirty="0"/>
           </a:p>
         </p:txBody>
       </p:sp>
       <p:sp>
         <p:nvSpPr>
           <p:cNvPr id="18" name="Text 16"/>
-          <p:cNvSpPr txBox="1"/>
-          <p:nvPr/>
-        </p:nvSpPr>
-        <p:spPr>
-          <a:xfrm>
-            <a:off x="1325880" y="4681728"/>
-            <a:ext cx="3108960" cy="502920"/>
-          </a:xfrm>
-          <a:prstGeom prst="rect">
-            <a:avLst/>
-          </a:prstGeom>
-          <a:noFill/>
-          <a:ln/>
-        </p:spPr>
-        <p:txBody>
-          <a:bodyPr wrap="square" lIns="0" tIns="0" rIns="0" bIns="0" rtlCol="0" anchor="t"/>
-          <a:lstStyle/>
-          <a:p>
-            <a:pPr indent="0" marL="0">
-              <a:buNone/>
-            </a:pPr>
-            <a:r>
-              <a:rPr lang="en-US" sz="1400" b="1" dirty="0">
-                <a:solidFill>
-                  <a:srgbClr val="1A1F26"/>
-                </a:solidFill>
-                <a:latin typeface="Calibri" pitchFamily="34" charset="0"/>
-                <a:ea typeface="Calibri" pitchFamily="34" charset="-122"/>
-                <a:cs typeface="Calibri" pitchFamily="34" charset="-120"/>
-              </a:rPr>
-              <a:t>News Feedを読む習慣</a:t>
-            </a:r>
-            <a:endParaRPr lang="en-US" sz="1400" dirty="0"/>
-          </a:p>
-        </p:txBody>
-      </p:sp>
-      <p:sp>
-        <p:nvSpPr>
-          <p:cNvPr id="19" name="Text 17"/>
-          <p:cNvSpPr txBox="1"/>
-          <p:nvPr/>
-        </p:nvSpPr>
-        <p:spPr>
-          <a:xfrm>
-            <a:off x="4572000" y="4681728"/>
-            <a:ext cx="6583680" cy="960120"/>
-          </a:xfrm>
-          <a:prstGeom prst="rect">
-            <a:avLst/>
-          </a:prstGeom>
-          <a:noFill/>
-          <a:ln/>
-        </p:spPr>
-        <p:txBody>
-          <a:bodyPr wrap="square" lIns="0" tIns="0" rIns="0" bIns="0" rtlCol="0" anchor="ctr"/>
-          <a:lstStyle/>
-          <a:p>
-            <a:pPr indent="0" marL="0">
-              <a:buNone/>
-            </a:pPr>
-            <a:r>
-              <a:rPr lang="en-US" sz="1150" dirty="0">
-                <a:solidFill>
-                  <a:srgbClr val="5B6472"/>
-                </a:solidFill>
-                <a:latin typeface="Calibri" pitchFamily="34" charset="0"/>
-                <a:ea typeface="Calibri" pitchFamily="34" charset="-122"/>
-                <a:cs typeface="Calibri" pitchFamily="34" charset="-120"/>
-              </a:rPr>
-              <a:t>ログイン状態でトップページを見ると、フォロー中の人の活動(Star・Push等)が流れてくる。ここから面白いプロジェクトや小さなIssue/PRに触れていくのが自然な入り口</a:t>
-            </a:r>
-            <a:endParaRPr lang="en-US" sz="1150" dirty="0"/>
-          </a:p>
-        </p:txBody>
-      </p:sp>
-      <p:sp>
-        <p:nvSpPr>
-          <p:cNvPr id="20" name="Text 18"/>
-          <p:cNvSpPr txBox="1"/>
-          <p:nvPr/>
-        </p:nvSpPr>
-        <p:spPr>
-          <a:xfrm>
-            <a:off x="548640" y="6400800"/>
-            <a:ext cx="10424160" cy="320040"/>
-          </a:xfrm>
-          <a:prstGeom prst="rect">
-            <a:avLst/>
-          </a:prstGeom>
-          <a:noFill/>
-          <a:ln/>
-        </p:spPr>
-        <p:txBody>
-          <a:bodyPr wrap="square" lIns="0" tIns="0" rIns="0" bIns="0" rtlCol="0" anchor="ctr"/>
-          <a:lstStyle/>
-          <a:p>
-            <a:pPr indent="0" marL="0">
-              <a:buNone/>
-            </a:pPr>
-            <a:r>
-              <a:rPr lang="en-US" sz="1000" i="1" dirty="0">
-                <a:solidFill>
-                  <a:srgbClr val="5B6472"/>
-                </a:solidFill>
-                <a:latin typeface="Calibri" pitchFamily="34" charset="0"/>
-                <a:ea typeface="Calibri" pitchFamily="34" charset="-122"/>
-                <a:cs typeface="Calibri" pitchFamily="34" charset="-120"/>
-              </a:rPr>
-              <a:t>出典: 個人ブログ記事(2013年)。Follow/Star/News Feedという基本メカニズム自体は現在も変わっていない</a:t>
-            </a:r>
-            <a:endParaRPr lang="en-US" sz="1000" dirty="0"/>
-          </a:p>
-        </p:txBody>
-      </p:sp>
-      <p:sp>
-        <p:nvSpPr>
-          <p:cNvPr id="21" name="Text 19"/>
           <p:cNvSpPr txBox="1"/>
           <p:nvPr/>
         </p:nvSpPr>
@@ -7154,6 +8314,742 @@
 <file path=ppt/slides/slide5.xml><?xml version="1.0" encoding="utf-8"?>
 <p:sld xmlns:a="http://schemas.openxmlformats.org/drawingml/2006/main" xmlns:r="http://schemas.openxmlformats.org/officeDocument/2006/relationships" xmlns:p="http://schemas.openxmlformats.org/presentationml/2006/main">
   <p:cSld name="Slide 5">
+    <p:bg>
+      <p:bgPr>
+        <a:solidFill>
+          <a:srgbClr val="F5F6F8"/>
+        </a:solidFill>
+      </p:bgPr>
+    </p:bg>
+    <p:spTree>
+      <p:nvGrpSpPr>
+        <p:cNvPr id="1" name=""/>
+        <p:cNvGrpSpPr/>
+        <p:nvPr/>
+      </p:nvGrpSpPr>
+      <p:grpSpPr>
+        <a:xfrm>
+          <a:off x="0" y="0"/>
+          <a:ext cx="0" cy="0"/>
+          <a:chOff x="0" y="0"/>
+          <a:chExt cx="0" cy="0"/>
+        </a:xfrm>
+      </p:grpSpPr>
+      <p:sp>
+        <p:nvSpPr>
+          <p:cNvPr id="2" name="Text 0"/>
+          <p:cNvSpPr txBox="1"/>
+          <p:nvPr/>
+        </p:nvSpPr>
+        <p:spPr>
+          <a:xfrm>
+            <a:off x="548640" y="457200"/>
+            <a:ext cx="731520" cy="731520"/>
+          </a:xfrm>
+          <a:prstGeom prst="rect">
+            <a:avLst/>
+          </a:prstGeom>
+          <a:noFill/>
+          <a:ln/>
+        </p:spPr>
+        <p:txBody>
+          <a:bodyPr wrap="square" lIns="0" tIns="0" rIns="0" bIns="0" rtlCol="0" anchor="ctr"/>
+          <a:lstStyle/>
+          <a:p>
+            <a:pPr indent="0" marL="0">
+              <a:buNone/>
+            </a:pPr>
+            <a:r>
+              <a:rPr lang="en-US" sz="2800" b="1" dirty="0">
+                <a:solidFill>
+                  <a:srgbClr val="B084F5"/>
+                </a:solidFill>
+                <a:latin typeface="Cambria" pitchFamily="34" charset="0"/>
+                <a:ea typeface="Cambria" pitchFamily="34" charset="-122"/>
+                <a:cs typeface="Cambria" pitchFamily="34" charset="-120"/>
+              </a:rPr>
+              <a:t>1</a:t>
+            </a:r>
+            <a:endParaRPr lang="en-US" sz="2800" dirty="0"/>
+          </a:p>
+        </p:txBody>
+      </p:sp>
+      <p:sp>
+        <p:nvSpPr>
+          <p:cNvPr id="3" name="Text 1"/>
+          <p:cNvSpPr txBox="1"/>
+          <p:nvPr/>
+        </p:nvSpPr>
+        <p:spPr>
+          <a:xfrm>
+            <a:off x="1280160" y="502920"/>
+            <a:ext cx="9784080" cy="640080"/>
+          </a:xfrm>
+          <a:prstGeom prst="rect">
+            <a:avLst/>
+          </a:prstGeom>
+          <a:noFill/>
+          <a:ln/>
+        </p:spPr>
+        <p:txBody>
+          <a:bodyPr wrap="square" lIns="0" tIns="0" rIns="0" bIns="0" rtlCol="0" anchor="ctr"/>
+          <a:lstStyle/>
+          <a:p>
+            <a:pPr indent="0" marL="0">
+              <a:buNone/>
+            </a:pPr>
+            <a:r>
+              <a:rPr lang="en-US" sz="2600" b="1" dirty="0">
+                <a:solidFill>
+                  <a:srgbClr val="1A1F26"/>
+                </a:solidFill>
+                <a:latin typeface="Cambria" pitchFamily="34" charset="0"/>
+                <a:ea typeface="Cambria" pitchFamily="34" charset="-122"/>
+                <a:cs typeface="Cambria" pitchFamily="34" charset="-120"/>
+              </a:rPr>
+              <a:t>初心者向け: まず慣れる4つの行動</a:t>
+            </a:r>
+            <a:endParaRPr lang="en-US" sz="2600" dirty="0"/>
+          </a:p>
+        </p:txBody>
+      </p:sp>
+      <p:sp>
+        <p:nvSpPr>
+          <p:cNvPr id="4" name="Shape 2"/>
+          <p:cNvSpPr/>
+          <p:nvPr/>
+        </p:nvSpPr>
+        <p:spPr>
+          <a:xfrm>
+            <a:off x="640080" y="1554480"/>
+            <a:ext cx="457200" cy="457200"/>
+          </a:xfrm>
+          <a:prstGeom prst="ellipse">
+            <a:avLst/>
+          </a:prstGeom>
+          <a:solidFill>
+            <a:srgbClr val="58D68D"/>
+          </a:solidFill>
+          <a:ln/>
+        </p:spPr>
+      </p:sp>
+      <p:sp>
+        <p:nvSpPr>
+          <p:cNvPr id="5" name="Text 3"/>
+          <p:cNvSpPr txBox="1"/>
+          <p:nvPr/>
+        </p:nvSpPr>
+        <p:spPr>
+          <a:xfrm>
+            <a:off x="640080" y="1554480"/>
+            <a:ext cx="457200" cy="457200"/>
+          </a:xfrm>
+          <a:prstGeom prst="rect">
+            <a:avLst/>
+          </a:prstGeom>
+          <a:noFill/>
+          <a:ln/>
+        </p:spPr>
+        <p:txBody>
+          <a:bodyPr wrap="square" lIns="0" tIns="0" rIns="0" bIns="0" rtlCol="0" anchor="ctr"/>
+          <a:lstStyle/>
+          <a:p>
+            <a:pPr algn="ctr" indent="0" marL="0">
+              <a:buNone/>
+            </a:pPr>
+            <a:r>
+              <a:rPr lang="en-US" sz="1400" b="1" dirty="0">
+                <a:solidFill>
+                  <a:srgbClr val="FFFFFF"/>
+                </a:solidFill>
+                <a:latin typeface="Calibri" pitchFamily="34" charset="0"/>
+                <a:ea typeface="Calibri" pitchFamily="34" charset="-122"/>
+                <a:cs typeface="Calibri" pitchFamily="34" charset="-120"/>
+              </a:rPr>
+              <a:t>1</a:t>
+            </a:r>
+            <a:endParaRPr lang="en-US" sz="1400" dirty="0"/>
+          </a:p>
+        </p:txBody>
+      </p:sp>
+      <p:sp>
+        <p:nvSpPr>
+          <p:cNvPr id="6" name="Text 4"/>
+          <p:cNvSpPr txBox="1"/>
+          <p:nvPr/>
+        </p:nvSpPr>
+        <p:spPr>
+          <a:xfrm>
+            <a:off x="1325880" y="1527048"/>
+            <a:ext cx="3108960" cy="502920"/>
+          </a:xfrm>
+          <a:prstGeom prst="rect">
+            <a:avLst/>
+          </a:prstGeom>
+          <a:noFill/>
+          <a:ln/>
+        </p:spPr>
+        <p:txBody>
+          <a:bodyPr wrap="square" lIns="0" tIns="0" rIns="0" bIns="0" rtlCol="0" anchor="t"/>
+          <a:lstStyle/>
+          <a:p>
+            <a:pPr indent="0" marL="0">
+              <a:buNone/>
+            </a:pPr>
+            <a:r>
+              <a:rPr lang="en-US" sz="1400" b="1" dirty="0">
+                <a:solidFill>
+                  <a:srgbClr val="1A1F26"/>
+                </a:solidFill>
+                <a:latin typeface="Calibri" pitchFamily="34" charset="0"/>
+                <a:ea typeface="Calibri" pitchFamily="34" charset="-122"/>
+                <a:cs typeface="Calibri" pitchFamily="34" charset="-120"/>
+              </a:rPr>
+              <a:t>アカウント作成</a:t>
+            </a:r>
+            <a:endParaRPr lang="en-US" sz="1400" dirty="0"/>
+          </a:p>
+        </p:txBody>
+      </p:sp>
+      <p:sp>
+        <p:nvSpPr>
+          <p:cNvPr id="7" name="Text 5"/>
+          <p:cNvSpPr txBox="1"/>
+          <p:nvPr/>
+        </p:nvSpPr>
+        <p:spPr>
+          <a:xfrm>
+            <a:off x="4572000" y="1527048"/>
+            <a:ext cx="6583680" cy="960120"/>
+          </a:xfrm>
+          <a:prstGeom prst="rect">
+            <a:avLst/>
+          </a:prstGeom>
+          <a:noFill/>
+          <a:ln/>
+        </p:spPr>
+        <p:txBody>
+          <a:bodyPr wrap="square" lIns="0" tIns="0" rIns="0" bIns="0" rtlCol="0" anchor="ctr"/>
+          <a:lstStyle/>
+          <a:p>
+            <a:pPr indent="0" marL="0">
+              <a:buNone/>
+            </a:pPr>
+            <a:r>
+              <a:rPr lang="en-US" sz="1150" dirty="0">
+                <a:solidFill>
+                  <a:srgbClr val="5B6472"/>
+                </a:solidFill>
+                <a:latin typeface="Calibri" pitchFamily="34" charset="0"/>
+                <a:ea typeface="Calibri" pitchFamily="34" charset="-122"/>
+                <a:cs typeface="Calibri" pitchFamily="34" charset="-120"/>
+              </a:rPr>
+              <a:t>GitHubトップの Sign up からアカウントを作る。まずはこれがないと何も始まらない</a:t>
+            </a:r>
+            <a:endParaRPr lang="en-US" sz="1150" dirty="0"/>
+          </a:p>
+        </p:txBody>
+      </p:sp>
+      <p:sp>
+        <p:nvSpPr>
+          <p:cNvPr id="8" name="Shape 6"/>
+          <p:cNvSpPr/>
+          <p:nvPr/>
+        </p:nvSpPr>
+        <p:spPr>
+          <a:xfrm>
+            <a:off x="640080" y="2606040"/>
+            <a:ext cx="457200" cy="457200"/>
+          </a:xfrm>
+          <a:prstGeom prst="ellipse">
+            <a:avLst/>
+          </a:prstGeom>
+          <a:solidFill>
+            <a:srgbClr val="58D68D"/>
+          </a:solidFill>
+          <a:ln/>
+        </p:spPr>
+      </p:sp>
+      <p:sp>
+        <p:nvSpPr>
+          <p:cNvPr id="9" name="Text 7"/>
+          <p:cNvSpPr txBox="1"/>
+          <p:nvPr/>
+        </p:nvSpPr>
+        <p:spPr>
+          <a:xfrm>
+            <a:off x="640080" y="2606040"/>
+            <a:ext cx="457200" cy="457200"/>
+          </a:xfrm>
+          <a:prstGeom prst="rect">
+            <a:avLst/>
+          </a:prstGeom>
+          <a:noFill/>
+          <a:ln/>
+        </p:spPr>
+        <p:txBody>
+          <a:bodyPr wrap="square" lIns="0" tIns="0" rIns="0" bIns="0" rtlCol="0" anchor="ctr"/>
+          <a:lstStyle/>
+          <a:p>
+            <a:pPr algn="ctr" indent="0" marL="0">
+              <a:buNone/>
+            </a:pPr>
+            <a:r>
+              <a:rPr lang="en-US" sz="1400" b="1" dirty="0">
+                <a:solidFill>
+                  <a:srgbClr val="FFFFFF"/>
+                </a:solidFill>
+                <a:latin typeface="Calibri" pitchFamily="34" charset="0"/>
+                <a:ea typeface="Calibri" pitchFamily="34" charset="-122"/>
+                <a:cs typeface="Calibri" pitchFamily="34" charset="-120"/>
+              </a:rPr>
+              <a:t>2</a:t>
+            </a:r>
+            <a:endParaRPr lang="en-US" sz="1400" dirty="0"/>
+          </a:p>
+        </p:txBody>
+      </p:sp>
+      <p:sp>
+        <p:nvSpPr>
+          <p:cNvPr id="10" name="Text 8"/>
+          <p:cNvSpPr txBox="1"/>
+          <p:nvPr/>
+        </p:nvSpPr>
+        <p:spPr>
+          <a:xfrm>
+            <a:off x="1325880" y="2578608"/>
+            <a:ext cx="3108960" cy="502920"/>
+          </a:xfrm>
+          <a:prstGeom prst="rect">
+            <a:avLst/>
+          </a:prstGeom>
+          <a:noFill/>
+          <a:ln/>
+        </p:spPr>
+        <p:txBody>
+          <a:bodyPr wrap="square" lIns="0" tIns="0" rIns="0" bIns="0" rtlCol="0" anchor="t"/>
+          <a:lstStyle/>
+          <a:p>
+            <a:pPr indent="0" marL="0">
+              <a:buNone/>
+            </a:pPr>
+            <a:r>
+              <a:rPr lang="en-US" sz="1400" b="1" dirty="0">
+                <a:solidFill>
+                  <a:srgbClr val="1A1F26"/>
+                </a:solidFill>
+                <a:latin typeface="Calibri" pitchFamily="34" charset="0"/>
+                <a:ea typeface="Calibri" pitchFamily="34" charset="-122"/>
+                <a:cs typeface="Calibri" pitchFamily="34" charset="-120"/>
+              </a:rPr>
+              <a:t>気になる人をフォロー</a:t>
+            </a:r>
+            <a:endParaRPr lang="en-US" sz="1400" dirty="0"/>
+          </a:p>
+        </p:txBody>
+      </p:sp>
+      <p:sp>
+        <p:nvSpPr>
+          <p:cNvPr id="11" name="Text 9"/>
+          <p:cNvSpPr txBox="1"/>
+          <p:nvPr/>
+        </p:nvSpPr>
+        <p:spPr>
+          <a:xfrm>
+            <a:off x="4572000" y="2578608"/>
+            <a:ext cx="6583680" cy="960120"/>
+          </a:xfrm>
+          <a:prstGeom prst="rect">
+            <a:avLst/>
+          </a:prstGeom>
+          <a:noFill/>
+          <a:ln/>
+        </p:spPr>
+        <p:txBody>
+          <a:bodyPr wrap="square" lIns="0" tIns="0" rIns="0" bIns="0" rtlCol="0" anchor="ctr"/>
+          <a:lstStyle/>
+          <a:p>
+            <a:pPr indent="0" marL="0">
+              <a:buNone/>
+            </a:pPr>
+            <a:r>
+              <a:rPr lang="en-US" sz="1150" dirty="0">
+                <a:solidFill>
+                  <a:srgbClr val="5B6472"/>
+                </a:solidFill>
+                <a:latin typeface="Calibri" pitchFamily="34" charset="0"/>
+                <a:ea typeface="Calibri" pitchFamily="34" charset="-122"/>
+                <a:cs typeface="Calibri" pitchFamily="34" charset="-120"/>
+              </a:rPr>
+              <a:t>フォロー返しは気にしなくてよい。フォローすると相手の活動がNews Feedに流れるようになる</a:t>
+            </a:r>
+            <a:endParaRPr lang="en-US" sz="1150" dirty="0"/>
+          </a:p>
+        </p:txBody>
+      </p:sp>
+      <p:sp>
+        <p:nvSpPr>
+          <p:cNvPr id="12" name="Shape 10"/>
+          <p:cNvSpPr/>
+          <p:nvPr/>
+        </p:nvSpPr>
+        <p:spPr>
+          <a:xfrm>
+            <a:off x="640080" y="3657600"/>
+            <a:ext cx="457200" cy="457200"/>
+          </a:xfrm>
+          <a:prstGeom prst="ellipse">
+            <a:avLst/>
+          </a:prstGeom>
+          <a:solidFill>
+            <a:srgbClr val="58D68D"/>
+          </a:solidFill>
+          <a:ln/>
+        </p:spPr>
+      </p:sp>
+      <p:sp>
+        <p:nvSpPr>
+          <p:cNvPr id="13" name="Text 11"/>
+          <p:cNvSpPr txBox="1"/>
+          <p:nvPr/>
+        </p:nvSpPr>
+        <p:spPr>
+          <a:xfrm>
+            <a:off x="640080" y="3657600"/>
+            <a:ext cx="457200" cy="457200"/>
+          </a:xfrm>
+          <a:prstGeom prst="rect">
+            <a:avLst/>
+          </a:prstGeom>
+          <a:noFill/>
+          <a:ln/>
+        </p:spPr>
+        <p:txBody>
+          <a:bodyPr wrap="square" lIns="0" tIns="0" rIns="0" bIns="0" rtlCol="0" anchor="ctr"/>
+          <a:lstStyle/>
+          <a:p>
+            <a:pPr algn="ctr" indent="0" marL="0">
+              <a:buNone/>
+            </a:pPr>
+            <a:r>
+              <a:rPr lang="en-US" sz="1400" b="1" dirty="0">
+                <a:solidFill>
+                  <a:srgbClr val="FFFFFF"/>
+                </a:solidFill>
+                <a:latin typeface="Calibri" pitchFamily="34" charset="0"/>
+                <a:ea typeface="Calibri" pitchFamily="34" charset="-122"/>
+                <a:cs typeface="Calibri" pitchFamily="34" charset="-120"/>
+              </a:rPr>
+              <a:t>3</a:t>
+            </a:r>
+            <a:endParaRPr lang="en-US" sz="1400" dirty="0"/>
+          </a:p>
+        </p:txBody>
+      </p:sp>
+      <p:sp>
+        <p:nvSpPr>
+          <p:cNvPr id="14" name="Text 12"/>
+          <p:cNvSpPr txBox="1"/>
+          <p:nvPr/>
+        </p:nvSpPr>
+        <p:spPr>
+          <a:xfrm>
+            <a:off x="1325880" y="3630168"/>
+            <a:ext cx="3108960" cy="502920"/>
+          </a:xfrm>
+          <a:prstGeom prst="rect">
+            <a:avLst/>
+          </a:prstGeom>
+          <a:noFill/>
+          <a:ln/>
+        </p:spPr>
+        <p:txBody>
+          <a:bodyPr wrap="square" lIns="0" tIns="0" rIns="0" bIns="0" rtlCol="0" anchor="t"/>
+          <a:lstStyle/>
+          <a:p>
+            <a:pPr indent="0" marL="0">
+              <a:buNone/>
+            </a:pPr>
+            <a:r>
+              <a:rPr lang="en-US" sz="1400" b="1" dirty="0">
+                <a:solidFill>
+                  <a:srgbClr val="1A1F26"/>
+                </a:solidFill>
+                <a:latin typeface="Calibri" pitchFamily="34" charset="0"/>
+                <a:ea typeface="Calibri" pitchFamily="34" charset="-122"/>
+                <a:cs typeface="Calibri" pitchFamily="34" charset="-120"/>
+              </a:rPr>
+              <a:t>気になるリポジトリにStar</a:t>
+            </a:r>
+            <a:endParaRPr lang="en-US" sz="1400" dirty="0"/>
+          </a:p>
+        </p:txBody>
+      </p:sp>
+      <p:sp>
+        <p:nvSpPr>
+          <p:cNvPr id="15" name="Text 13"/>
+          <p:cNvSpPr txBox="1"/>
+          <p:nvPr/>
+        </p:nvSpPr>
+        <p:spPr>
+          <a:xfrm>
+            <a:off x="4572000" y="3630168"/>
+            <a:ext cx="6583680" cy="960120"/>
+          </a:xfrm>
+          <a:prstGeom prst="rect">
+            <a:avLst/>
+          </a:prstGeom>
+          <a:noFill/>
+          <a:ln/>
+        </p:spPr>
+        <p:txBody>
+          <a:bodyPr wrap="square" lIns="0" tIns="0" rIns="0" bIns="0" rtlCol="0" anchor="ctr"/>
+          <a:lstStyle/>
+          <a:p>
+            <a:pPr indent="0" marL="0">
+              <a:buNone/>
+            </a:pPr>
+            <a:r>
+              <a:rPr lang="en-US" sz="1150" dirty="0">
+                <a:solidFill>
+                  <a:srgbClr val="5B6472"/>
+                </a:solidFill>
+                <a:latin typeface="Calibri" pitchFamily="34" charset="0"/>
+                <a:ea typeface="Calibri" pitchFamily="34" charset="-122"/>
+                <a:cs typeface="Calibri" pitchFamily="34" charset="-120"/>
+              </a:rPr>
+              <a:t>お気に入り登録のような機能。Starすると自分をフォローしている人の feed に流れ、そのリポジトリの露出が増える</a:t>
+            </a:r>
+            <a:endParaRPr lang="en-US" sz="1150" dirty="0"/>
+          </a:p>
+        </p:txBody>
+      </p:sp>
+      <p:sp>
+        <p:nvSpPr>
+          <p:cNvPr id="16" name="Shape 14"/>
+          <p:cNvSpPr/>
+          <p:nvPr/>
+        </p:nvSpPr>
+        <p:spPr>
+          <a:xfrm>
+            <a:off x="640080" y="4709160"/>
+            <a:ext cx="457200" cy="457200"/>
+          </a:xfrm>
+          <a:prstGeom prst="ellipse">
+            <a:avLst/>
+          </a:prstGeom>
+          <a:solidFill>
+            <a:srgbClr val="58D68D"/>
+          </a:solidFill>
+          <a:ln/>
+        </p:spPr>
+      </p:sp>
+      <p:sp>
+        <p:nvSpPr>
+          <p:cNvPr id="17" name="Text 15"/>
+          <p:cNvSpPr txBox="1"/>
+          <p:nvPr/>
+        </p:nvSpPr>
+        <p:spPr>
+          <a:xfrm>
+            <a:off x="640080" y="4709160"/>
+            <a:ext cx="457200" cy="457200"/>
+          </a:xfrm>
+          <a:prstGeom prst="rect">
+            <a:avLst/>
+          </a:prstGeom>
+          <a:noFill/>
+          <a:ln/>
+        </p:spPr>
+        <p:txBody>
+          <a:bodyPr wrap="square" lIns="0" tIns="0" rIns="0" bIns="0" rtlCol="0" anchor="ctr"/>
+          <a:lstStyle/>
+          <a:p>
+            <a:pPr algn="ctr" indent="0" marL="0">
+              <a:buNone/>
+            </a:pPr>
+            <a:r>
+              <a:rPr lang="en-US" sz="1400" b="1" dirty="0">
+                <a:solidFill>
+                  <a:srgbClr val="FFFFFF"/>
+                </a:solidFill>
+                <a:latin typeface="Calibri" pitchFamily="34" charset="0"/>
+                <a:ea typeface="Calibri" pitchFamily="34" charset="-122"/>
+                <a:cs typeface="Calibri" pitchFamily="34" charset="-120"/>
+              </a:rPr>
+              <a:t>4</a:t>
+            </a:r>
+            <a:endParaRPr lang="en-US" sz="1400" dirty="0"/>
+          </a:p>
+        </p:txBody>
+      </p:sp>
+      <p:sp>
+        <p:nvSpPr>
+          <p:cNvPr id="18" name="Text 16"/>
+          <p:cNvSpPr txBox="1"/>
+          <p:nvPr/>
+        </p:nvSpPr>
+        <p:spPr>
+          <a:xfrm>
+            <a:off x="1325880" y="4681728"/>
+            <a:ext cx="3108960" cy="502920"/>
+          </a:xfrm>
+          <a:prstGeom prst="rect">
+            <a:avLst/>
+          </a:prstGeom>
+          <a:noFill/>
+          <a:ln/>
+        </p:spPr>
+        <p:txBody>
+          <a:bodyPr wrap="square" lIns="0" tIns="0" rIns="0" bIns="0" rtlCol="0" anchor="t"/>
+          <a:lstStyle/>
+          <a:p>
+            <a:pPr indent="0" marL="0">
+              <a:buNone/>
+            </a:pPr>
+            <a:r>
+              <a:rPr lang="en-US" sz="1400" b="1" dirty="0">
+                <a:solidFill>
+                  <a:srgbClr val="1A1F26"/>
+                </a:solidFill>
+                <a:latin typeface="Calibri" pitchFamily="34" charset="0"/>
+                <a:ea typeface="Calibri" pitchFamily="34" charset="-122"/>
+                <a:cs typeface="Calibri" pitchFamily="34" charset="-120"/>
+              </a:rPr>
+              <a:t>News Feedを読む習慣</a:t>
+            </a:r>
+            <a:endParaRPr lang="en-US" sz="1400" dirty="0"/>
+          </a:p>
+        </p:txBody>
+      </p:sp>
+      <p:sp>
+        <p:nvSpPr>
+          <p:cNvPr id="19" name="Text 17"/>
+          <p:cNvSpPr txBox="1"/>
+          <p:nvPr/>
+        </p:nvSpPr>
+        <p:spPr>
+          <a:xfrm>
+            <a:off x="4572000" y="4681728"/>
+            <a:ext cx="6583680" cy="960120"/>
+          </a:xfrm>
+          <a:prstGeom prst="rect">
+            <a:avLst/>
+          </a:prstGeom>
+          <a:noFill/>
+          <a:ln/>
+        </p:spPr>
+        <p:txBody>
+          <a:bodyPr wrap="square" lIns="0" tIns="0" rIns="0" bIns="0" rtlCol="0" anchor="ctr"/>
+          <a:lstStyle/>
+          <a:p>
+            <a:pPr indent="0" marL="0">
+              <a:buNone/>
+            </a:pPr>
+            <a:r>
+              <a:rPr lang="en-US" sz="1150" dirty="0">
+                <a:solidFill>
+                  <a:srgbClr val="5B6472"/>
+                </a:solidFill>
+                <a:latin typeface="Calibri" pitchFamily="34" charset="0"/>
+                <a:ea typeface="Calibri" pitchFamily="34" charset="-122"/>
+                <a:cs typeface="Calibri" pitchFamily="34" charset="-120"/>
+              </a:rPr>
+              <a:t>ログイン状態でトップページを見ると、フォロー中の人の活動(Star・Push等)が流れてくる。ここから面白いプロジェクトや小さなIssue/PRに触れていくのが自然な入り口</a:t>
+            </a:r>
+            <a:endParaRPr lang="en-US" sz="1150" dirty="0"/>
+          </a:p>
+        </p:txBody>
+      </p:sp>
+      <p:sp>
+        <p:nvSpPr>
+          <p:cNvPr id="20" name="Text 18"/>
+          <p:cNvSpPr txBox="1"/>
+          <p:nvPr/>
+        </p:nvSpPr>
+        <p:spPr>
+          <a:xfrm>
+            <a:off x="548640" y="6400800"/>
+            <a:ext cx="10424160" cy="320040"/>
+          </a:xfrm>
+          <a:prstGeom prst="rect">
+            <a:avLst/>
+          </a:prstGeom>
+          <a:noFill/>
+          <a:ln/>
+        </p:spPr>
+        <p:txBody>
+          <a:bodyPr wrap="square" lIns="0" tIns="0" rIns="0" bIns="0" rtlCol="0" anchor="ctr"/>
+          <a:lstStyle/>
+          <a:p>
+            <a:pPr indent="0" marL="0">
+              <a:buNone/>
+            </a:pPr>
+            <a:r>
+              <a:rPr lang="en-US" sz="1000" i="1" dirty="0">
+                <a:solidFill>
+                  <a:srgbClr val="5B6472"/>
+                </a:solidFill>
+                <a:latin typeface="Calibri" pitchFamily="34" charset="0"/>
+                <a:ea typeface="Calibri" pitchFamily="34" charset="-122"/>
+                <a:cs typeface="Calibri" pitchFamily="34" charset="-120"/>
+              </a:rPr>
+              <a:t>出典: 個人ブログ記事(2013年)。Follow/Star/News Feedという基本メカニズム自体は現在も変わっていない</a:t>
+            </a:r>
+            <a:endParaRPr lang="en-US" sz="1000" dirty="0"/>
+          </a:p>
+        </p:txBody>
+      </p:sp>
+      <p:sp>
+        <p:nvSpPr>
+          <p:cNvPr id="21" name="Text 19"/>
+          <p:cNvSpPr txBox="1"/>
+          <p:nvPr/>
+        </p:nvSpPr>
+        <p:spPr>
+          <a:xfrm>
+            <a:off x="11521440" y="6492240"/>
+            <a:ext cx="457200" cy="274320"/>
+          </a:xfrm>
+          <a:prstGeom prst="rect">
+            <a:avLst/>
+          </a:prstGeom>
+          <a:noFill/>
+          <a:ln/>
+        </p:spPr>
+        <p:txBody>
+          <a:bodyPr wrap="square" lIns="0" tIns="0" rIns="0" bIns="0" rtlCol="0" anchor="ctr"/>
+          <a:lstStyle/>
+          <a:p>
+            <a:pPr algn="r" indent="0" marL="0">
+              <a:buNone/>
+            </a:pPr>
+            <a:r>
+              <a:rPr lang="en-US" sz="1000" dirty="0">
+                <a:solidFill>
+                  <a:srgbClr val="5B6472"/>
+                </a:solidFill>
+                <a:latin typeface="Calibri" pitchFamily="34" charset="0"/>
+                <a:ea typeface="Calibri" pitchFamily="34" charset="-122"/>
+                <a:cs typeface="Calibri" pitchFamily="34" charset="-120"/>
+              </a:rPr>
+              <a:t>5</a:t>
+            </a:r>
+            <a:endParaRPr lang="en-US" sz="1000" dirty="0"/>
+          </a:p>
+        </p:txBody>
+      </p:sp>
+    </p:spTree>
+  </p:cSld>
+  <p:clrMapOvr>
+    <a:masterClrMapping/>
+  </p:clrMapOvr>
+</p:sld>
+</file>
+
+<file path=ppt/slides/slide6.xml><?xml version="1.0" encoding="utf-8"?>
+<p:sld xmlns:a="http://schemas.openxmlformats.org/drawingml/2006/main" xmlns:r="http://schemas.openxmlformats.org/officeDocument/2006/relationships" xmlns:p="http://schemas.openxmlformats.org/presentationml/2006/main">
+  <p:cSld name="Slide 6">
     <p:bg>
       <p:bgPr>
         <a:solidFill>
@@ -7655,7 +9551,7 @@
                 <a:ea typeface="Calibri" pitchFamily="34" charset="-122"/>
                 <a:cs typeface="Calibri" pitchFamily="34" charset="-120"/>
               </a:rPr>
-              <a:t>5</a:t>
+              <a:t>6</a:t>
             </a:r>
             <a:endParaRPr lang="en-US" sz="1000" dirty="0"/>
           </a:p>
@@ -7669,9 +9565,9 @@
 </p:sld>
 </file>
 
-<file path=ppt/slides/slide6.xml><?xml version="1.0" encoding="utf-8"?>
+<file path=ppt/slides/slide7.xml><?xml version="1.0" encoding="utf-8"?>
 <p:sld xmlns:a="http://schemas.openxmlformats.org/drawingml/2006/main" xmlns:r="http://schemas.openxmlformats.org/officeDocument/2006/relationships" xmlns:p="http://schemas.openxmlformats.org/presentationml/2006/main">
-  <p:cSld name="Slide 6">
+  <p:cSld name="Slide 7">
     <p:bg>
       <p:bgPr>
         <a:solidFill>
@@ -8284,7 +10180,7 @@
                 <a:ea typeface="Calibri" pitchFamily="34" charset="-122"/>
                 <a:cs typeface="Calibri" pitchFamily="34" charset="-120"/>
               </a:rPr>
-              <a:t>6</a:t>
+              <a:t>7</a:t>
             </a:r>
             <a:endParaRPr lang="en-US" sz="1000" dirty="0"/>
           </a:p>
@@ -8298,9 +10194,9 @@
 </p:sld>
 </file>
 
-<file path=ppt/slides/slide7.xml><?xml version="1.0" encoding="utf-8"?>
+<file path=ppt/slides/slide8.xml><?xml version="1.0" encoding="utf-8"?>
 <p:sld xmlns:a="http://schemas.openxmlformats.org/drawingml/2006/main" xmlns:r="http://schemas.openxmlformats.org/officeDocument/2006/relationships" xmlns:p="http://schemas.openxmlformats.org/presentationml/2006/main">
-  <p:cSld name="Slide 7">
+  <p:cSld name="Slide 8">
     <p:bg>
       <p:bgPr>
         <a:solidFill>
@@ -8673,714 +10569,6 @@
       <p:sp>
         <p:nvSpPr>
           <p:cNvPr id="9" name="Text 7"/>
-          <p:cNvSpPr txBox="1"/>
-          <p:nvPr/>
-        </p:nvSpPr>
-        <p:spPr>
-          <a:xfrm>
-            <a:off x="11521440" y="6492240"/>
-            <a:ext cx="457200" cy="274320"/>
-          </a:xfrm>
-          <a:prstGeom prst="rect">
-            <a:avLst/>
-          </a:prstGeom>
-          <a:noFill/>
-          <a:ln/>
-        </p:spPr>
-        <p:txBody>
-          <a:bodyPr wrap="square" lIns="0" tIns="0" rIns="0" bIns="0" rtlCol="0" anchor="ctr"/>
-          <a:lstStyle/>
-          <a:p>
-            <a:pPr algn="r" indent="0" marL="0">
-              <a:buNone/>
-            </a:pPr>
-            <a:r>
-              <a:rPr lang="en-US" sz="1000" dirty="0">
-                <a:solidFill>
-                  <a:srgbClr val="5B6472"/>
-                </a:solidFill>
-                <a:latin typeface="Calibri" pitchFamily="34" charset="0"/>
-                <a:ea typeface="Calibri" pitchFamily="34" charset="-122"/>
-                <a:cs typeface="Calibri" pitchFamily="34" charset="-120"/>
-              </a:rPr>
-              <a:t>7</a:t>
-            </a:r>
-            <a:endParaRPr lang="en-US" sz="1000" dirty="0"/>
-          </a:p>
-        </p:txBody>
-      </p:sp>
-    </p:spTree>
-  </p:cSld>
-  <p:clrMapOvr>
-    <a:masterClrMapping/>
-  </p:clrMapOvr>
-</p:sld>
-</file>
-
-<file path=ppt/slides/slide8.xml><?xml version="1.0" encoding="utf-8"?>
-<p:sld xmlns:a="http://schemas.openxmlformats.org/drawingml/2006/main" xmlns:r="http://schemas.openxmlformats.org/officeDocument/2006/relationships" xmlns:p="http://schemas.openxmlformats.org/presentationml/2006/main">
-  <p:cSld name="Slide 8">
-    <p:bg>
-      <p:bgPr>
-        <a:solidFill>
-          <a:srgbClr val="F5F6F8"/>
-        </a:solidFill>
-      </p:bgPr>
-    </p:bg>
-    <p:spTree>
-      <p:nvGrpSpPr>
-        <p:cNvPr id="1" name=""/>
-        <p:cNvGrpSpPr/>
-        <p:nvPr/>
-      </p:nvGrpSpPr>
-      <p:grpSpPr>
-        <a:xfrm>
-          <a:off x="0" y="0"/>
-          <a:ext cx="0" cy="0"/>
-          <a:chOff x="0" y="0"/>
-          <a:chExt cx="0" cy="0"/>
-        </a:xfrm>
-      </p:grpSpPr>
-      <p:sp>
-        <p:nvSpPr>
-          <p:cNvPr id="2" name="Text 0"/>
-          <p:cNvSpPr txBox="1"/>
-          <p:nvPr/>
-        </p:nvSpPr>
-        <p:spPr>
-          <a:xfrm>
-            <a:off x="548640" y="457200"/>
-            <a:ext cx="731520" cy="731520"/>
-          </a:xfrm>
-          <a:prstGeom prst="rect">
-            <a:avLst/>
-          </a:prstGeom>
-          <a:noFill/>
-          <a:ln/>
-        </p:spPr>
-        <p:txBody>
-          <a:bodyPr wrap="square" lIns="0" tIns="0" rIns="0" bIns="0" rtlCol="0" anchor="ctr"/>
-          <a:lstStyle/>
-          <a:p>
-            <a:pPr indent="0" marL="0">
-              <a:buNone/>
-            </a:pPr>
-            <a:r>
-              <a:rPr lang="en-US" sz="2800" b="1" dirty="0">
-                <a:solidFill>
-                  <a:srgbClr val="B084F5"/>
-                </a:solidFill>
-                <a:latin typeface="Cambria" pitchFamily="34" charset="0"/>
-                <a:ea typeface="Cambria" pitchFamily="34" charset="-122"/>
-                <a:cs typeface="Cambria" pitchFamily="34" charset="-120"/>
-              </a:rPr>
-              <a:t>4</a:t>
-            </a:r>
-            <a:endParaRPr lang="en-US" sz="2800" dirty="0"/>
-          </a:p>
-        </p:txBody>
-      </p:sp>
-      <p:sp>
-        <p:nvSpPr>
-          <p:cNvPr id="3" name="Text 1"/>
-          <p:cNvSpPr txBox="1"/>
-          <p:nvPr/>
-        </p:nvSpPr>
-        <p:spPr>
-          <a:xfrm>
-            <a:off x="1280160" y="502920"/>
-            <a:ext cx="9784080" cy="640080"/>
-          </a:xfrm>
-          <a:prstGeom prst="rect">
-            <a:avLst/>
-          </a:prstGeom>
-          <a:noFill/>
-          <a:ln/>
-        </p:spPr>
-        <p:txBody>
-          <a:bodyPr wrap="square" lIns="0" tIns="0" rIns="0" bIns="0" rtlCol="0" anchor="ctr"/>
-          <a:lstStyle/>
-          <a:p>
-            <a:pPr indent="0" marL="0">
-              <a:buNone/>
-            </a:pPr>
-            <a:r>
-              <a:rPr lang="en-US" sz="2600" b="1" dirty="0">
-                <a:solidFill>
-                  <a:srgbClr val="1A1F26"/>
-                </a:solidFill>
-                <a:latin typeface="Cambria" pitchFamily="34" charset="0"/>
-                <a:ea typeface="Cambria" pitchFamily="34" charset="-122"/>
-                <a:cs typeface="Cambria" pitchFamily="34" charset="-120"/>
-              </a:rPr>
-              <a:t>貢献先の実例: badges/shields (shields.io)</a:t>
-            </a:r>
-            <a:endParaRPr lang="en-US" sz="2600" dirty="0"/>
-          </a:p>
-        </p:txBody>
-      </p:sp>
-      <p:sp>
-        <p:nvSpPr>
-          <p:cNvPr id="4" name="Text 2"/>
-          <p:cNvSpPr txBox="1"/>
-          <p:nvPr/>
-        </p:nvSpPr>
-        <p:spPr>
-          <a:xfrm>
-            <a:off x="548640" y="1417320"/>
-            <a:ext cx="10607040" cy="365760"/>
-          </a:xfrm>
-          <a:prstGeom prst="rect">
-            <a:avLst/>
-          </a:prstGeom>
-          <a:noFill/>
-          <a:ln/>
-        </p:spPr>
-        <p:txBody>
-          <a:bodyPr wrap="square" lIns="0" tIns="0" rIns="0" bIns="0" rtlCol="0" anchor="ctr"/>
-          <a:lstStyle/>
-          <a:p>
-            <a:pPr indent="0" marL="0">
-              <a:buNone/>
-            </a:pPr>
-            <a:r>
-              <a:rPr lang="en-US" sz="1250" i="1" dirty="0">
-                <a:solidFill>
-                  <a:srgbClr val="5B6472"/>
-                </a:solidFill>
-                <a:latin typeface="Calibri" pitchFamily="34" charset="0"/>
-                <a:ea typeface="Calibri" pitchFamily="34" charset="-122"/>
-                <a:cs typeface="Calibri" pitchFamily="34" charset="-120"/>
-              </a:rPr>
-              <a:t>READMEでよく見るバッジサービス「shields.io」も、実は誰でも貢献できるOSS</a:t>
-            </a:r>
-            <a:endParaRPr lang="en-US" sz="1250" dirty="0"/>
-          </a:p>
-        </p:txBody>
-      </p:sp>
-      <p:sp>
-        <p:nvSpPr>
-          <p:cNvPr id="5" name="Shape 3"/>
-          <p:cNvSpPr/>
-          <p:nvPr/>
-        </p:nvSpPr>
-        <p:spPr>
-          <a:xfrm>
-            <a:off x="548640" y="1920240"/>
-            <a:ext cx="3429000" cy="1371600"/>
-          </a:xfrm>
-          <a:prstGeom prst="roundRect">
-            <a:avLst>
-              <a:gd name="adj" fmla="val 6667"/>
-            </a:avLst>
-          </a:prstGeom>
-          <a:solidFill>
-            <a:srgbClr val="FFFFFF"/>
-          </a:solidFill>
-          <a:ln w="12700">
-            <a:solidFill>
-              <a:srgbClr val="E3E6EA"/>
-            </a:solidFill>
-            <a:prstDash val="solid"/>
-          </a:ln>
-          <a:effectLst>
-            <a:outerShdw sx="100000" sy="100000" kx="0" ky="0" algn="bl" rotWithShape="0" blurRad="76200" dist="25400" dir="5400000">
-              <a:srgbClr val="000000">
-                <a:alpha val="10000"/>
-              </a:srgbClr>
-            </a:outerShdw>
-          </a:effectLst>
-        </p:spPr>
-      </p:sp>
-      <p:sp>
-        <p:nvSpPr>
-          <p:cNvPr id="6" name="Text 4"/>
-          <p:cNvSpPr txBox="1"/>
-          <p:nvPr/>
-        </p:nvSpPr>
-        <p:spPr>
-          <a:xfrm>
-            <a:off x="731520" y="2057400"/>
-            <a:ext cx="3063240" cy="594360"/>
-          </a:xfrm>
-          <a:prstGeom prst="rect">
-            <a:avLst/>
-          </a:prstGeom>
-          <a:noFill/>
-          <a:ln/>
-        </p:spPr>
-        <p:txBody>
-          <a:bodyPr wrap="square" lIns="0" tIns="0" rIns="0" bIns="0" rtlCol="0" anchor="ctr"/>
-          <a:lstStyle/>
-          <a:p>
-            <a:pPr indent="0" marL="0">
-              <a:buNone/>
-            </a:pPr>
-            <a:r>
-              <a:rPr lang="en-US" sz="2400" b="1" dirty="0">
-                <a:solidFill>
-                  <a:srgbClr val="B084F5"/>
-                </a:solidFill>
-                <a:latin typeface="Calibri" pitchFamily="34" charset="0"/>
-                <a:ea typeface="Calibri" pitchFamily="34" charset="-122"/>
-                <a:cs typeface="Calibri" pitchFamily="34" charset="-120"/>
-              </a:rPr>
-              <a:t>27.2k</a:t>
-            </a:r>
-            <a:endParaRPr lang="en-US" sz="2400" dirty="0"/>
-          </a:p>
-        </p:txBody>
-      </p:sp>
-      <p:sp>
-        <p:nvSpPr>
-          <p:cNvPr id="7" name="Text 5"/>
-          <p:cNvSpPr txBox="1"/>
-          <p:nvPr/>
-        </p:nvSpPr>
-        <p:spPr>
-          <a:xfrm>
-            <a:off x="731520" y="2697480"/>
-            <a:ext cx="3063240" cy="457200"/>
-          </a:xfrm>
-          <a:prstGeom prst="rect">
-            <a:avLst/>
-          </a:prstGeom>
-          <a:noFill/>
-          <a:ln/>
-        </p:spPr>
-        <p:txBody>
-          <a:bodyPr wrap="square" lIns="0" tIns="0" rIns="0" bIns="0" rtlCol="0" anchor="ctr"/>
-          <a:lstStyle/>
-          <a:p>
-            <a:pPr indent="0" marL="0">
-              <a:buNone/>
-            </a:pPr>
-            <a:r>
-              <a:rPr lang="en-US" sz="1150" dirty="0">
-                <a:solidFill>
-                  <a:srgbClr val="5B6472"/>
-                </a:solidFill>
-                <a:latin typeface="Calibri" pitchFamily="34" charset="0"/>
-                <a:ea typeface="Calibri" pitchFamily="34" charset="-122"/>
-                <a:cs typeface="Calibri" pitchFamily="34" charset="-120"/>
-              </a:rPr>
-              <a:t>GitHub Stars</a:t>
-            </a:r>
-            <a:endParaRPr lang="en-US" sz="1150" dirty="0"/>
-          </a:p>
-        </p:txBody>
-      </p:sp>
-      <p:sp>
-        <p:nvSpPr>
-          <p:cNvPr id="8" name="Shape 6"/>
-          <p:cNvSpPr/>
-          <p:nvPr/>
-        </p:nvSpPr>
-        <p:spPr>
-          <a:xfrm>
-            <a:off x="4206240" y="1920240"/>
-            <a:ext cx="3429000" cy="1371600"/>
-          </a:xfrm>
-          <a:prstGeom prst="roundRect">
-            <a:avLst>
-              <a:gd name="adj" fmla="val 6667"/>
-            </a:avLst>
-          </a:prstGeom>
-          <a:solidFill>
-            <a:srgbClr val="FFFFFF"/>
-          </a:solidFill>
-          <a:ln w="12700">
-            <a:solidFill>
-              <a:srgbClr val="E3E6EA"/>
-            </a:solidFill>
-            <a:prstDash val="solid"/>
-          </a:ln>
-          <a:effectLst>
-            <a:outerShdw sx="100000" sy="100000" kx="0" ky="0" algn="bl" rotWithShape="0" blurRad="76200" dist="25400" dir="5400000">
-              <a:srgbClr val="000000">
-                <a:alpha val="10000"/>
-              </a:srgbClr>
-            </a:outerShdw>
-          </a:effectLst>
-        </p:spPr>
-      </p:sp>
-      <p:sp>
-        <p:nvSpPr>
-          <p:cNvPr id="9" name="Text 7"/>
-          <p:cNvSpPr txBox="1"/>
-          <p:nvPr/>
-        </p:nvSpPr>
-        <p:spPr>
-          <a:xfrm>
-            <a:off x="4389120" y="2057400"/>
-            <a:ext cx="3063240" cy="594360"/>
-          </a:xfrm>
-          <a:prstGeom prst="rect">
-            <a:avLst/>
-          </a:prstGeom>
-          <a:noFill/>
-          <a:ln/>
-        </p:spPr>
-        <p:txBody>
-          <a:bodyPr wrap="square" lIns="0" tIns="0" rIns="0" bIns="0" rtlCol="0" anchor="ctr"/>
-          <a:lstStyle/>
-          <a:p>
-            <a:pPr indent="0" marL="0">
-              <a:buNone/>
-            </a:pPr>
-            <a:r>
-              <a:rPr lang="en-US" sz="2400" b="1" dirty="0">
-                <a:solidFill>
-                  <a:srgbClr val="B084F5"/>
-                </a:solidFill>
-                <a:latin typeface="Calibri" pitchFamily="34" charset="0"/>
-                <a:ea typeface="Calibri" pitchFamily="34" charset="-122"/>
-                <a:cs typeface="Calibri" pitchFamily="34" charset="-120"/>
-              </a:rPr>
-              <a:t>1.6B+/月</a:t>
-            </a:r>
-            <a:endParaRPr lang="en-US" sz="2400" dirty="0"/>
-          </a:p>
-        </p:txBody>
-      </p:sp>
-      <p:sp>
-        <p:nvSpPr>
-          <p:cNvPr id="10" name="Text 8"/>
-          <p:cNvSpPr txBox="1"/>
-          <p:nvPr/>
-        </p:nvSpPr>
-        <p:spPr>
-          <a:xfrm>
-            <a:off x="4389120" y="2697480"/>
-            <a:ext cx="3063240" cy="457200"/>
-          </a:xfrm>
-          <a:prstGeom prst="rect">
-            <a:avLst/>
-          </a:prstGeom>
-          <a:noFill/>
-          <a:ln/>
-        </p:spPr>
-        <p:txBody>
-          <a:bodyPr wrap="square" lIns="0" tIns="0" rIns="0" bIns="0" rtlCol="0" anchor="ctr"/>
-          <a:lstStyle/>
-          <a:p>
-            <a:pPr indent="0" marL="0">
-              <a:buNone/>
-            </a:pPr>
-            <a:r>
-              <a:rPr lang="en-US" sz="1150" dirty="0">
-                <a:solidFill>
-                  <a:srgbClr val="5B6472"/>
-                </a:solidFill>
-                <a:latin typeface="Calibri" pitchFamily="34" charset="0"/>
-                <a:ea typeface="Calibri" pitchFamily="34" charset="-122"/>
-                <a:cs typeface="Calibri" pitchFamily="34" charset="-120"/>
-              </a:rPr>
-              <a:t>配信バッジ画像数</a:t>
-            </a:r>
-            <a:endParaRPr lang="en-US" sz="1150" dirty="0"/>
-          </a:p>
-        </p:txBody>
-      </p:sp>
-      <p:sp>
-        <p:nvSpPr>
-          <p:cNvPr id="11" name="Shape 9"/>
-          <p:cNvSpPr/>
-          <p:nvPr/>
-        </p:nvSpPr>
-        <p:spPr>
-          <a:xfrm>
-            <a:off x="7863840" y="1920240"/>
-            <a:ext cx="3429000" cy="1371600"/>
-          </a:xfrm>
-          <a:prstGeom prst="roundRect">
-            <a:avLst>
-              <a:gd name="adj" fmla="val 6667"/>
-            </a:avLst>
-          </a:prstGeom>
-          <a:solidFill>
-            <a:srgbClr val="FFFFFF"/>
-          </a:solidFill>
-          <a:ln w="12700">
-            <a:solidFill>
-              <a:srgbClr val="E3E6EA"/>
-            </a:solidFill>
-            <a:prstDash val="solid"/>
-          </a:ln>
-          <a:effectLst>
-            <a:outerShdw sx="100000" sy="100000" kx="0" ky="0" algn="bl" rotWithShape="0" blurRad="76200" dist="25400" dir="5400000">
-              <a:srgbClr val="000000">
-                <a:alpha val="10000"/>
-              </a:srgbClr>
-            </a:outerShdw>
-          </a:effectLst>
-        </p:spPr>
-      </p:sp>
-      <p:sp>
-        <p:nvSpPr>
-          <p:cNvPr id="12" name="Text 10"/>
-          <p:cNvSpPr txBox="1"/>
-          <p:nvPr/>
-        </p:nvSpPr>
-        <p:spPr>
-          <a:xfrm>
-            <a:off x="8046720" y="2057400"/>
-            <a:ext cx="3063240" cy="594360"/>
-          </a:xfrm>
-          <a:prstGeom prst="rect">
-            <a:avLst/>
-          </a:prstGeom>
-          <a:noFill/>
-          <a:ln/>
-        </p:spPr>
-        <p:txBody>
-          <a:bodyPr wrap="square" lIns="0" tIns="0" rIns="0" bIns="0" rtlCol="0" anchor="ctr"/>
-          <a:lstStyle/>
-          <a:p>
-            <a:pPr indent="0" marL="0">
-              <a:buNone/>
-            </a:pPr>
-            <a:r>
-              <a:rPr lang="en-US" sz="2400" b="1" dirty="0">
-                <a:solidFill>
-                  <a:srgbClr val="B084F5"/>
-                </a:solidFill>
-                <a:latin typeface="Calibri" pitchFamily="34" charset="0"/>
-                <a:ea typeface="Calibri" pitchFamily="34" charset="-122"/>
-                <a:cs typeface="Calibri" pitchFamily="34" charset="-120"/>
-              </a:rPr>
-              <a:t>MIT / Apache 2.0</a:t>
-            </a:r>
-            <a:endParaRPr lang="en-US" sz="2400" dirty="0"/>
-          </a:p>
-        </p:txBody>
-      </p:sp>
-      <p:sp>
-        <p:nvSpPr>
-          <p:cNvPr id="13" name="Text 11"/>
-          <p:cNvSpPr txBox="1"/>
-          <p:nvPr/>
-        </p:nvSpPr>
-        <p:spPr>
-          <a:xfrm>
-            <a:off x="8046720" y="2697480"/>
-            <a:ext cx="3063240" cy="457200"/>
-          </a:xfrm>
-          <a:prstGeom prst="rect">
-            <a:avLst/>
-          </a:prstGeom>
-          <a:noFill/>
-          <a:ln/>
-        </p:spPr>
-        <p:txBody>
-          <a:bodyPr wrap="square" lIns="0" tIns="0" rIns="0" bIns="0" rtlCol="0" anchor="ctr"/>
-          <a:lstStyle/>
-          <a:p>
-            <a:pPr indent="0" marL="0">
-              <a:buNone/>
-            </a:pPr>
-            <a:r>
-              <a:rPr lang="en-US" sz="1150" dirty="0">
-                <a:solidFill>
-                  <a:srgbClr val="5B6472"/>
-                </a:solidFill>
-                <a:latin typeface="Calibri" pitchFamily="34" charset="0"/>
-                <a:ea typeface="Calibri" pitchFamily="34" charset="-122"/>
-                <a:cs typeface="Calibri" pitchFamily="34" charset="-120"/>
-              </a:rPr>
-              <a:t>デュアルライセンス</a:t>
-            </a:r>
-            <a:endParaRPr lang="en-US" sz="1150" dirty="0"/>
-          </a:p>
-        </p:txBody>
-      </p:sp>
-      <p:sp>
-        <p:nvSpPr>
-          <p:cNvPr id="14" name="Text 12"/>
-          <p:cNvSpPr txBox="1"/>
-          <p:nvPr/>
-        </p:nvSpPr>
-        <p:spPr>
-          <a:xfrm>
-            <a:off x="548640" y="3566160"/>
-            <a:ext cx="10607040" cy="365760"/>
-          </a:xfrm>
-          <a:prstGeom prst="rect">
-            <a:avLst/>
-          </a:prstGeom>
-          <a:noFill/>
-          <a:ln/>
-        </p:spPr>
-        <p:txBody>
-          <a:bodyPr wrap="square" lIns="0" tIns="0" rIns="0" bIns="0" rtlCol="0" anchor="ctr"/>
-          <a:lstStyle/>
-          <a:p>
-            <a:pPr indent="0" marL="0">
-              <a:buNone/>
-            </a:pPr>
-            <a:r>
-              <a:rPr lang="en-US" sz="1400" b="1" dirty="0">
-                <a:solidFill>
-                  <a:srgbClr val="1A1F26"/>
-                </a:solidFill>
-                <a:latin typeface="Calibri" pitchFamily="34" charset="0"/>
-                <a:ea typeface="Calibri" pitchFamily="34" charset="-122"/>
-                <a:cs typeface="Calibri" pitchFamily="34" charset="-120"/>
-              </a:rPr>
-              <a:t>貢献のしやすさ(実際に確認できる情報)</a:t>
-            </a:r>
-            <a:endParaRPr lang="en-US" sz="1400" dirty="0"/>
-          </a:p>
-        </p:txBody>
-      </p:sp>
-      <p:sp>
-        <p:nvSpPr>
-          <p:cNvPr id="15" name="Text 13"/>
-          <p:cNvSpPr txBox="1"/>
-          <p:nvPr/>
-        </p:nvSpPr>
-        <p:spPr>
-          <a:xfrm>
-            <a:off x="548640" y="3977640"/>
-            <a:ext cx="10607040" cy="1737360"/>
-          </a:xfrm>
-          <a:prstGeom prst="rect">
-            <a:avLst/>
-          </a:prstGeom>
-          <a:noFill/>
-          <a:ln/>
-        </p:spPr>
-        <p:txBody>
-          <a:bodyPr wrap="square" lIns="0" tIns="0" rIns="0" bIns="0" rtlCol="0" anchor="ctr"/>
-          <a:lstStyle/>
-          <a:p>
-            <a:pPr marL="342900" indent="-342900">
-              <a:spcAft>
-                <a:spcPts val="600"/>
-              </a:spcAft>
-              <a:buSzPct val="100000"/>
-              <a:buChar char="•"/>
-            </a:pPr>
-            <a:r>
-              <a:rPr lang="en-US" sz="1250" dirty="0">
-                <a:solidFill>
-                  <a:srgbClr val="5B6472"/>
-                </a:solidFill>
-                <a:latin typeface="Calibri" pitchFamily="34" charset="0"/>
-                <a:ea typeface="Calibri" pitchFamily="34" charset="-122"/>
-                <a:cs typeface="Calibri" pitchFamily="34" charset="-120"/>
-              </a:rPr>
-              <a:t>CONTRIBUTING.md に貢献ガイドラインが整備されている</a:t>
-            </a:r>
-            <a:endParaRPr lang="en-US" sz="1250" dirty="0"/>
-          </a:p>
-          <a:p>
-            <a:pPr marL="342900" indent="-342900">
-              <a:spcAft>
-                <a:spcPts val="600"/>
-              </a:spcAft>
-              <a:buSzPct val="100000"/>
-              <a:buChar char="•"/>
-            </a:pPr>
-            <a:r>
-              <a:rPr lang="en-US" sz="1250" dirty="0">
-                <a:solidFill>
-                  <a:srgbClr val="5B6472"/>
-                </a:solidFill>
-                <a:latin typeface="Calibri" pitchFamily="34" charset="0"/>
-                <a:ea typeface="Calibri" pitchFamily="34" charset="-122"/>
-                <a:cs typeface="Calibri" pitchFamily="34" charset="-120"/>
-              </a:rPr>
-              <a:t>good-first-issue ラベルの付いた初心者向けタスクがある</a:t>
-            </a:r>
-            <a:endParaRPr lang="en-US" sz="1250" dirty="0"/>
-          </a:p>
-          <a:p>
-            <a:pPr marL="342900" indent="-342900">
-              <a:spcAft>
-                <a:spcPts val="600"/>
-              </a:spcAft>
-              <a:buSzPct val="100000"/>
-              <a:buChar char="•"/>
-            </a:pPr>
-            <a:r>
-              <a:rPr lang="en-US" sz="1250" dirty="0">
-                <a:solidFill>
-                  <a:srgbClr val="5B6472"/>
-                </a:solidFill>
-                <a:latin typeface="Calibri" pitchFamily="34" charset="0"/>
-                <a:ea typeface="Calibri" pitchFamily="34" charset="-122"/>
-                <a:cs typeface="Calibri" pitchFamily="34" charset="-120"/>
-              </a:rPr>
-              <a:t>新しいバッジ追加のチュートリアルも用意されている(VS Code・Vue.js・Bootstrap等の著名プロジェクトも利用)</a:t>
-            </a:r>
-            <a:endParaRPr lang="en-US" sz="1250" dirty="0"/>
-          </a:p>
-          <a:p>
-            <a:pPr marL="342900" indent="-342900">
-              <a:spcAft>
-                <a:spcPts val="600"/>
-              </a:spcAft>
-              <a:buSzPct val="100000"/>
-              <a:buChar char="•"/>
-            </a:pPr>
-            <a:r>
-              <a:rPr lang="en-US" sz="1250" dirty="0">
-                <a:solidFill>
-                  <a:srgbClr val="5B6472"/>
-                </a:solidFill>
-                <a:latin typeface="Calibri" pitchFamily="34" charset="0"/>
-                <a:ea typeface="Calibri" pitchFamily="34" charset="-122"/>
-                <a:cs typeface="Calibri" pitchFamily="34" charset="-120"/>
-              </a:rPr>
-              <a:t>SECURITY.md による脆弱性報告ポリシーも整備済み(セキュリティ関連の貢献も歓迎)</a:t>
-            </a:r>
-            <a:endParaRPr lang="en-US" sz="1250" dirty="0"/>
-          </a:p>
-        </p:txBody>
-      </p:sp>
-      <p:sp>
-        <p:nvSpPr>
-          <p:cNvPr id="16" name="Text 14"/>
-          <p:cNvSpPr txBox="1"/>
-          <p:nvPr/>
-        </p:nvSpPr>
-        <p:spPr>
-          <a:xfrm>
-            <a:off x="548640" y="6400800"/>
-            <a:ext cx="10424160" cy="320040"/>
-          </a:xfrm>
-          <a:prstGeom prst="rect">
-            <a:avLst/>
-          </a:prstGeom>
-          <a:noFill/>
-          <a:ln/>
-        </p:spPr>
-        <p:txBody>
-          <a:bodyPr wrap="square" lIns="0" tIns="0" rIns="0" bIns="0" rtlCol="0" anchor="ctr"/>
-          <a:lstStyle/>
-          <a:p>
-            <a:pPr indent="0" marL="0">
-              <a:buNone/>
-            </a:pPr>
-            <a:r>
-              <a:rPr lang="en-US" sz="1000" i="1" dirty="0">
-                <a:solidFill>
-                  <a:srgbClr val="5B6472"/>
-                </a:solidFill>
-                <a:latin typeface="Calibri" pitchFamily="34" charset="0"/>
-                <a:ea typeface="Calibri" pitchFamily="34" charset="-122"/>
-                <a:cs typeface="Calibri" pitchFamily="34" charset="-120"/>
-              </a:rPr>
-              <a:t>出典: github.com/badges/shields(取得時点のスター数。日々変動するため参考値)</a:t>
-            </a:r>
-            <a:endParaRPr lang="en-US" sz="1000" dirty="0"/>
-          </a:p>
-        </p:txBody>
-      </p:sp>
-      <p:sp>
-        <p:nvSpPr>
-          <p:cNvPr id="17" name="Text 15"/>
           <p:cNvSpPr txBox="1"/>
           <p:nvPr/>
         </p:nvSpPr>
@@ -9482,7 +10670,7 @@
                 <a:ea typeface="Cambria" pitchFamily="34" charset="-122"/>
                 <a:cs typeface="Cambria" pitchFamily="34" charset="-120"/>
               </a:rPr>
-              <a:t>5</a:t>
+              <a:t>4</a:t>
             </a:r>
             <a:endParaRPr lang="en-US" sz="2800" dirty="0"/>
           </a:p>
@@ -9521,7 +10709,7 @@
                 <a:ea typeface="Cambria" pitchFamily="34" charset="-122"/>
                 <a:cs typeface="Cambria" pitchFamily="34" charset="-120"/>
               </a:rPr>
-              <a:t>宣伝チャネルの効果(実例ケーススタディ)</a:t>
+              <a:t>貢献先の実例: badges/shields (shields.io)</a:t>
             </a:r>
             <a:endParaRPr lang="en-US" sz="2600" dirty="0"/>
           </a:p>
@@ -9560,7 +10748,7 @@
                 <a:ea typeface="Calibri" pitchFamily="34" charset="-122"/>
                 <a:cs typeface="Calibri" pitchFamily="34" charset="-120"/>
               </a:rPr>
-              <a:t>個人OSS開発者が、公開後数ヶ月で400+スターを集めた際の実測データ(1事例)</a:t>
+              <a:t>READMEでよく見るバッジサービス「shields.io」も、実は誰でも貢献できるOSS</a:t>
             </a:r>
             <a:endParaRPr lang="en-US" sz="1250" dirty="0"/>
           </a:p>
@@ -9575,11 +10763,11 @@
         <p:spPr>
           <a:xfrm>
             <a:off x="548640" y="1920240"/>
-            <a:ext cx="5212080" cy="3931920"/>
+            <a:ext cx="3429000" cy="1371600"/>
           </a:xfrm>
           <a:prstGeom prst="roundRect">
             <a:avLst>
-              <a:gd name="adj" fmla="val 2326"/>
+              <a:gd name="adj" fmla="val 6667"/>
             </a:avLst>
           </a:prstGeom>
           <a:solidFill>
@@ -9591,6 +10779,13 @@
             </a:solidFill>
             <a:prstDash val="solid"/>
           </a:ln>
+          <a:effectLst>
+            <a:outerShdw sx="100000" sy="100000" kx="0" ky="0" algn="bl" rotWithShape="0" blurRad="76200" dist="25400" dir="5400000">
+              <a:srgbClr val="000000">
+                <a:alpha val="10000"/>
+              </a:srgbClr>
+            </a:outerShdw>
+          </a:effectLst>
         </p:spPr>
       </p:sp>
       <p:sp>
@@ -9601,34 +10796,34 @@
         </p:nvSpPr>
         <p:spPr>
           <a:xfrm>
-            <a:off x="822960" y="2103120"/>
-            <a:ext cx="4754880" cy="365760"/>
-          </a:xfrm>
-          <a:prstGeom prst="rect">
-            <a:avLst/>
-          </a:prstGeom>
-          <a:noFill/>
-          <a:ln/>
-        </p:spPr>
-        <p:txBody>
-          <a:bodyPr wrap="square" lIns="0" tIns="0" rIns="0" bIns="0" rtlCol="0" anchor="ctr"/>
-          <a:lstStyle/>
-          <a:p>
-            <a:pPr indent="0" marL="0">
-              <a:buNone/>
-            </a:pPr>
-            <a:r>
-              <a:rPr lang="en-US" sz="1400" b="1" dirty="0">
-                <a:solidFill>
-                  <a:srgbClr val="58D68D"/>
-                </a:solidFill>
-                <a:latin typeface="Calibri" pitchFamily="34" charset="0"/>
-                <a:ea typeface="Calibri" pitchFamily="34" charset="-122"/>
-                <a:cs typeface="Calibri" pitchFamily="34" charset="-120"/>
-              </a:rPr>
-              <a:t>🚀 効果があったチャネル</a:t>
-            </a:r>
-            <a:endParaRPr lang="en-US" sz="1400" dirty="0"/>
+            <a:off x="731520" y="2057400"/>
+            <a:ext cx="3063240" cy="594360"/>
+          </a:xfrm>
+          <a:prstGeom prst="rect">
+            <a:avLst/>
+          </a:prstGeom>
+          <a:noFill/>
+          <a:ln/>
+        </p:spPr>
+        <p:txBody>
+          <a:bodyPr wrap="square" lIns="0" tIns="0" rIns="0" bIns="0" rtlCol="0" anchor="ctr"/>
+          <a:lstStyle/>
+          <a:p>
+            <a:pPr indent="0" marL="0">
+              <a:buNone/>
+            </a:pPr>
+            <a:r>
+              <a:rPr lang="en-US" sz="2400" b="1" dirty="0">
+                <a:solidFill>
+                  <a:srgbClr val="B084F5"/>
+                </a:solidFill>
+                <a:latin typeface="Calibri" pitchFamily="34" charset="0"/>
+                <a:ea typeface="Calibri" pitchFamily="34" charset="-122"/>
+                <a:cs typeface="Calibri" pitchFamily="34" charset="-120"/>
+              </a:rPr>
+              <a:t>27.2k</a:t>
+            </a:r>
+            <a:endParaRPr lang="en-US" sz="2400" dirty="0"/>
           </a:p>
         </p:txBody>
       </p:sp>
@@ -9640,63 +10835,24 @@
         </p:nvSpPr>
         <p:spPr>
           <a:xfrm>
-            <a:off x="822960" y="2560320"/>
-            <a:ext cx="4663440" cy="274320"/>
-          </a:xfrm>
-          <a:prstGeom prst="rect">
-            <a:avLst/>
-          </a:prstGeom>
-          <a:noFill/>
-          <a:ln/>
-        </p:spPr>
-        <p:txBody>
-          <a:bodyPr wrap="square" lIns="0" tIns="0" rIns="0" bIns="0" rtlCol="0" anchor="ctr"/>
-          <a:lstStyle/>
-          <a:p>
-            <a:pPr indent="0" marL="0">
-              <a:buNone/>
-            </a:pPr>
-            <a:r>
-              <a:rPr lang="en-US" sz="1250" b="1" dirty="0">
-                <a:solidFill>
-                  <a:srgbClr val="1A1F26"/>
-                </a:solidFill>
-                <a:latin typeface="Calibri" pitchFamily="34" charset="0"/>
-                <a:ea typeface="Calibri" pitchFamily="34" charset="-122"/>
-                <a:cs typeface="Calibri" pitchFamily="34" charset="-120"/>
-              </a:rPr>
-              <a:t>Hacker News</a:t>
-            </a:r>
-            <a:endParaRPr lang="en-US" sz="1250" dirty="0"/>
-          </a:p>
-        </p:txBody>
-      </p:sp>
-      <p:sp>
-        <p:nvSpPr>
-          <p:cNvPr id="8" name="Text 6"/>
-          <p:cNvSpPr txBox="1"/>
-          <p:nvPr/>
-        </p:nvSpPr>
-        <p:spPr>
-          <a:xfrm>
-            <a:off x="822960" y="2834640"/>
-            <a:ext cx="4663440" cy="640080"/>
-          </a:xfrm>
-          <a:prstGeom prst="rect">
-            <a:avLst/>
-          </a:prstGeom>
-          <a:noFill/>
-          <a:ln/>
-        </p:spPr>
-        <p:txBody>
-          <a:bodyPr wrap="square" lIns="0" tIns="0" rIns="0" bIns="0" rtlCol="0" anchor="ctr"/>
-          <a:lstStyle/>
-          <a:p>
-            <a:pPr indent="0" marL="0">
-              <a:buNone/>
-            </a:pPr>
-            <a:r>
-              <a:rPr lang="en-US" sz="1050" dirty="0">
+            <a:off x="731520" y="2697480"/>
+            <a:ext cx="3063240" cy="457200"/>
+          </a:xfrm>
+          <a:prstGeom prst="rect">
+            <a:avLst/>
+          </a:prstGeom>
+          <a:noFill/>
+          <a:ln/>
+        </p:spPr>
+        <p:txBody>
+          <a:bodyPr wrap="square" lIns="0" tIns="0" rIns="0" bIns="0" rtlCol="0" anchor="ctr"/>
+          <a:lstStyle/>
+          <a:p>
+            <a:pPr indent="0" marL="0">
+              <a:buNone/>
+            </a:pPr>
+            <a:r>
+              <a:rPr lang="en-US" sz="1150" dirty="0">
                 <a:solidFill>
                   <a:srgbClr val="5B6472"/>
                 </a:solidFill>
@@ -9704,260 +10860,26 @@
                 <a:ea typeface="Calibri" pitchFamily="34" charset="-122"/>
                 <a:cs typeface="Calibri" pitchFamily="34" charset="-120"/>
               </a:rPr>
-              <a:t>「Show HN:」プレフィックスを付けて投稿する文化があり、Showタブ・トップページに掲載。最も効果大</a:t>
-            </a:r>
-            <a:endParaRPr lang="en-US" sz="1050" dirty="0"/>
-          </a:p>
-        </p:txBody>
-      </p:sp>
-      <p:sp>
-        <p:nvSpPr>
-          <p:cNvPr id="9" name="Text 7"/>
-          <p:cNvSpPr txBox="1"/>
-          <p:nvPr/>
-        </p:nvSpPr>
-        <p:spPr>
-          <a:xfrm>
-            <a:off x="822960" y="3383280"/>
-            <a:ext cx="4663440" cy="274320"/>
-          </a:xfrm>
-          <a:prstGeom prst="rect">
-            <a:avLst/>
-          </a:prstGeom>
-          <a:noFill/>
-          <a:ln/>
-        </p:spPr>
-        <p:txBody>
-          <a:bodyPr wrap="square" lIns="0" tIns="0" rIns="0" bIns="0" rtlCol="0" anchor="ctr"/>
-          <a:lstStyle/>
-          <a:p>
-            <a:pPr indent="0" marL="0">
-              <a:buNone/>
-            </a:pPr>
-            <a:r>
-              <a:rPr lang="en-US" sz="1250" b="1" dirty="0">
-                <a:solidFill>
-                  <a:srgbClr val="1A1F26"/>
-                </a:solidFill>
-                <a:latin typeface="Calibri" pitchFamily="34" charset="0"/>
-                <a:ea typeface="Calibri" pitchFamily="34" charset="-122"/>
-                <a:cs typeface="Calibri" pitchFamily="34" charset="-120"/>
-              </a:rPr>
-              <a:t>Twitter/X</a:t>
-            </a:r>
-            <a:endParaRPr lang="en-US" sz="1250" dirty="0"/>
-          </a:p>
-        </p:txBody>
-      </p:sp>
-      <p:sp>
-        <p:nvSpPr>
-          <p:cNvPr id="10" name="Text 8"/>
-          <p:cNvSpPr txBox="1"/>
-          <p:nvPr/>
-        </p:nvSpPr>
-        <p:spPr>
-          <a:xfrm>
-            <a:off x="822960" y="3657600"/>
-            <a:ext cx="4663440" cy="640080"/>
-          </a:xfrm>
-          <a:prstGeom prst="rect">
-            <a:avLst/>
-          </a:prstGeom>
-          <a:noFill/>
-          <a:ln/>
-        </p:spPr>
-        <p:txBody>
-          <a:bodyPr wrap="square" lIns="0" tIns="0" rIns="0" bIns="0" rtlCol="0" anchor="ctr"/>
-          <a:lstStyle/>
-          <a:p>
-            <a:pPr indent="0" marL="0">
-              <a:buNone/>
-            </a:pPr>
-            <a:r>
-              <a:rPr lang="en-US" sz="1050" dirty="0">
-                <a:solidFill>
-                  <a:srgbClr val="5B6472"/>
-                </a:solidFill>
-                <a:latin typeface="Calibri" pitchFamily="34" charset="0"/>
-                <a:ea typeface="Calibri" pitchFamily="34" charset="-122"/>
-                <a:cs typeface="Calibri" pitchFamily="34" charset="-120"/>
-              </a:rPr>
-              <a:t>自分の発信単独では弱いが、フォロワーの多いインフルエンサーが拡散すると効果大</a:t>
-            </a:r>
-            <a:endParaRPr lang="en-US" sz="1050" dirty="0"/>
-          </a:p>
-        </p:txBody>
-      </p:sp>
-      <p:sp>
-        <p:nvSpPr>
-          <p:cNvPr id="11" name="Text 9"/>
-          <p:cNvSpPr txBox="1"/>
-          <p:nvPr/>
-        </p:nvSpPr>
-        <p:spPr>
-          <a:xfrm>
-            <a:off x="822960" y="4206240"/>
-            <a:ext cx="4663440" cy="274320"/>
-          </a:xfrm>
-          <a:prstGeom prst="rect">
-            <a:avLst/>
-          </a:prstGeom>
-          <a:noFill/>
-          <a:ln/>
-        </p:spPr>
-        <p:txBody>
-          <a:bodyPr wrap="square" lIns="0" tIns="0" rIns="0" bIns="0" rtlCol="0" anchor="ctr"/>
-          <a:lstStyle/>
-          <a:p>
-            <a:pPr indent="0" marL="0">
-              <a:buNone/>
-            </a:pPr>
-            <a:r>
-              <a:rPr lang="en-US" sz="1250" b="1" dirty="0">
-                <a:solidFill>
-                  <a:srgbClr val="1A1F26"/>
-                </a:solidFill>
-                <a:latin typeface="Calibri" pitchFamily="34" charset="0"/>
-                <a:ea typeface="Calibri" pitchFamily="34" charset="-122"/>
-                <a:cs typeface="Calibri" pitchFamily="34" charset="-120"/>
-              </a:rPr>
-              <a:t>GitHub内の連鎖</a:t>
-            </a:r>
-            <a:endParaRPr lang="en-US" sz="1250" dirty="0"/>
-          </a:p>
-        </p:txBody>
-      </p:sp>
-      <p:sp>
-        <p:nvSpPr>
-          <p:cNvPr id="12" name="Text 10"/>
-          <p:cNvSpPr txBox="1"/>
-          <p:nvPr/>
-        </p:nvSpPr>
-        <p:spPr>
-          <a:xfrm>
-            <a:off x="822960" y="4480560"/>
-            <a:ext cx="4663440" cy="640080"/>
-          </a:xfrm>
-          <a:prstGeom prst="rect">
-            <a:avLst/>
-          </a:prstGeom>
-          <a:noFill/>
-          <a:ln/>
-        </p:spPr>
-        <p:txBody>
-          <a:bodyPr wrap="square" lIns="0" tIns="0" rIns="0" bIns="0" rtlCol="0" anchor="ctr"/>
-          <a:lstStyle/>
-          <a:p>
-            <a:pPr indent="0" marL="0">
-              <a:buNone/>
-            </a:pPr>
-            <a:r>
-              <a:rPr lang="en-US" sz="1050" dirty="0">
-                <a:solidFill>
-                  <a:srgbClr val="5B6472"/>
-                </a:solidFill>
-                <a:latin typeface="Calibri" pitchFamily="34" charset="0"/>
-                <a:ea typeface="Calibri" pitchFamily="34" charset="-122"/>
-                <a:cs typeface="Calibri" pitchFamily="34" charset="-120"/>
-              </a:rPr>
-              <a:t>フォロー中ユーザーがStarしたリポジトリがフィードに流れる仕組みがあり、フォロワーの多い人がStarすると連鎖的に増える</a:t>
-            </a:r>
-            <a:endParaRPr lang="en-US" sz="1050" dirty="0"/>
-          </a:p>
-        </p:txBody>
-      </p:sp>
-      <p:sp>
-        <p:nvSpPr>
-          <p:cNvPr id="13" name="Text 11"/>
-          <p:cNvSpPr txBox="1"/>
-          <p:nvPr/>
-        </p:nvSpPr>
-        <p:spPr>
-          <a:xfrm>
-            <a:off x="822960" y="5029200"/>
-            <a:ext cx="4663440" cy="274320"/>
-          </a:xfrm>
-          <a:prstGeom prst="rect">
-            <a:avLst/>
-          </a:prstGeom>
-          <a:noFill/>
-          <a:ln/>
-        </p:spPr>
-        <p:txBody>
-          <a:bodyPr wrap="square" lIns="0" tIns="0" rIns="0" bIns="0" rtlCol="0" anchor="ctr"/>
-          <a:lstStyle/>
-          <a:p>
-            <a:pPr indent="0" marL="0">
-              <a:buNone/>
-            </a:pPr>
-            <a:r>
-              <a:rPr lang="en-US" sz="1250" b="1" dirty="0">
-                <a:solidFill>
-                  <a:srgbClr val="1A1F26"/>
-                </a:solidFill>
-                <a:latin typeface="Calibri" pitchFamily="34" charset="0"/>
-                <a:ea typeface="Calibri" pitchFamily="34" charset="-122"/>
-                <a:cs typeface="Calibri" pitchFamily="34" charset="-120"/>
-              </a:rPr>
-              <a:t>韓国版HN(news.hada.io)</a:t>
-            </a:r>
-            <a:endParaRPr lang="en-US" sz="1250" dirty="0"/>
-          </a:p>
-        </p:txBody>
-      </p:sp>
-      <p:sp>
-        <p:nvSpPr>
-          <p:cNvPr id="14" name="Text 12"/>
-          <p:cNvSpPr txBox="1"/>
-          <p:nvPr/>
-        </p:nvSpPr>
-        <p:spPr>
-          <a:xfrm>
-            <a:off x="822960" y="5303520"/>
-            <a:ext cx="4663440" cy="640080"/>
-          </a:xfrm>
-          <a:prstGeom prst="rect">
-            <a:avLst/>
-          </a:prstGeom>
-          <a:noFill/>
-          <a:ln/>
-        </p:spPr>
-        <p:txBody>
-          <a:bodyPr wrap="square" lIns="0" tIns="0" rIns="0" bIns="0" rtlCol="0" anchor="ctr"/>
-          <a:lstStyle/>
-          <a:p>
-            <a:pPr indent="0" marL="0">
-              <a:buNone/>
-            </a:pPr>
-            <a:r>
-              <a:rPr lang="en-US" sz="1050" dirty="0">
-                <a:solidFill>
-                  <a:srgbClr val="5B6472"/>
-                </a:solidFill>
-                <a:latin typeface="Calibri" pitchFamily="34" charset="0"/>
-                <a:ea typeface="Calibri" pitchFamily="34" charset="-122"/>
-                <a:cs typeface="Calibri" pitchFamily="34" charset="-120"/>
-              </a:rPr>
-              <a:t>現地の誰かが投稿したことで、そこから約40スターが集まった</a:t>
-            </a:r>
-            <a:endParaRPr lang="en-US" sz="1050" dirty="0"/>
-          </a:p>
-        </p:txBody>
-      </p:sp>
-      <p:sp>
-        <p:nvSpPr>
-          <p:cNvPr id="15" name="Shape 13"/>
+              <a:t>GitHub Stars</a:t>
+            </a:r>
+            <a:endParaRPr lang="en-US" sz="1150" dirty="0"/>
+          </a:p>
+        </p:txBody>
+      </p:sp>
+      <p:sp>
+        <p:nvSpPr>
+          <p:cNvPr id="8" name="Shape 6"/>
           <p:cNvSpPr/>
           <p:nvPr/>
         </p:nvSpPr>
         <p:spPr>
           <a:xfrm>
-            <a:off x="6035040" y="1920240"/>
-            <a:ext cx="5212080" cy="3931920"/>
+            <a:off x="4206240" y="1920240"/>
+            <a:ext cx="3429000" cy="1371600"/>
           </a:xfrm>
           <a:prstGeom prst="roundRect">
             <a:avLst>
-              <a:gd name="adj" fmla="val 2326"/>
+              <a:gd name="adj" fmla="val 6667"/>
             </a:avLst>
           </a:prstGeom>
           <a:solidFill>
@@ -9969,362 +10891,353 @@
             </a:solidFill>
             <a:prstDash val="solid"/>
           </a:ln>
-        </p:spPr>
+          <a:effectLst>
+            <a:outerShdw sx="100000" sy="100000" kx="0" ky="0" algn="bl" rotWithShape="0" blurRad="76200" dist="25400" dir="5400000">
+              <a:srgbClr val="000000">
+                <a:alpha val="10000"/>
+              </a:srgbClr>
+            </a:outerShdw>
+          </a:effectLst>
+        </p:spPr>
+      </p:sp>
+      <p:sp>
+        <p:nvSpPr>
+          <p:cNvPr id="9" name="Text 7"/>
+          <p:cNvSpPr txBox="1"/>
+          <p:nvPr/>
+        </p:nvSpPr>
+        <p:spPr>
+          <a:xfrm>
+            <a:off x="4389120" y="2057400"/>
+            <a:ext cx="3063240" cy="594360"/>
+          </a:xfrm>
+          <a:prstGeom prst="rect">
+            <a:avLst/>
+          </a:prstGeom>
+          <a:noFill/>
+          <a:ln/>
+        </p:spPr>
+        <p:txBody>
+          <a:bodyPr wrap="square" lIns="0" tIns="0" rIns="0" bIns="0" rtlCol="0" anchor="ctr"/>
+          <a:lstStyle/>
+          <a:p>
+            <a:pPr indent="0" marL="0">
+              <a:buNone/>
+            </a:pPr>
+            <a:r>
+              <a:rPr lang="en-US" sz="2400" b="1" dirty="0">
+                <a:solidFill>
+                  <a:srgbClr val="B084F5"/>
+                </a:solidFill>
+                <a:latin typeface="Calibri" pitchFamily="34" charset="0"/>
+                <a:ea typeface="Calibri" pitchFamily="34" charset="-122"/>
+                <a:cs typeface="Calibri" pitchFamily="34" charset="-120"/>
+              </a:rPr>
+              <a:t>1.6B+/月</a:t>
+            </a:r>
+            <a:endParaRPr lang="en-US" sz="2400" dirty="0"/>
+          </a:p>
+        </p:txBody>
+      </p:sp>
+      <p:sp>
+        <p:nvSpPr>
+          <p:cNvPr id="10" name="Text 8"/>
+          <p:cNvSpPr txBox="1"/>
+          <p:nvPr/>
+        </p:nvSpPr>
+        <p:spPr>
+          <a:xfrm>
+            <a:off x="4389120" y="2697480"/>
+            <a:ext cx="3063240" cy="457200"/>
+          </a:xfrm>
+          <a:prstGeom prst="rect">
+            <a:avLst/>
+          </a:prstGeom>
+          <a:noFill/>
+          <a:ln/>
+        </p:spPr>
+        <p:txBody>
+          <a:bodyPr wrap="square" lIns="0" tIns="0" rIns="0" bIns="0" rtlCol="0" anchor="ctr"/>
+          <a:lstStyle/>
+          <a:p>
+            <a:pPr indent="0" marL="0">
+              <a:buNone/>
+            </a:pPr>
+            <a:r>
+              <a:rPr lang="en-US" sz="1150" dirty="0">
+                <a:solidFill>
+                  <a:srgbClr val="5B6472"/>
+                </a:solidFill>
+                <a:latin typeface="Calibri" pitchFamily="34" charset="0"/>
+                <a:ea typeface="Calibri" pitchFamily="34" charset="-122"/>
+                <a:cs typeface="Calibri" pitchFamily="34" charset="-120"/>
+              </a:rPr>
+              <a:t>配信バッジ画像数</a:t>
+            </a:r>
+            <a:endParaRPr lang="en-US" sz="1150" dirty="0"/>
+          </a:p>
+        </p:txBody>
+      </p:sp>
+      <p:sp>
+        <p:nvSpPr>
+          <p:cNvPr id="11" name="Shape 9"/>
+          <p:cNvSpPr/>
+          <p:nvPr/>
+        </p:nvSpPr>
+        <p:spPr>
+          <a:xfrm>
+            <a:off x="7863840" y="1920240"/>
+            <a:ext cx="3429000" cy="1371600"/>
+          </a:xfrm>
+          <a:prstGeom prst="roundRect">
+            <a:avLst>
+              <a:gd name="adj" fmla="val 6667"/>
+            </a:avLst>
+          </a:prstGeom>
+          <a:solidFill>
+            <a:srgbClr val="FFFFFF"/>
+          </a:solidFill>
+          <a:ln w="12700">
+            <a:solidFill>
+              <a:srgbClr val="E3E6EA"/>
+            </a:solidFill>
+            <a:prstDash val="solid"/>
+          </a:ln>
+          <a:effectLst>
+            <a:outerShdw sx="100000" sy="100000" kx="0" ky="0" algn="bl" rotWithShape="0" blurRad="76200" dist="25400" dir="5400000">
+              <a:srgbClr val="000000">
+                <a:alpha val="10000"/>
+              </a:srgbClr>
+            </a:outerShdw>
+          </a:effectLst>
+        </p:spPr>
+      </p:sp>
+      <p:sp>
+        <p:nvSpPr>
+          <p:cNvPr id="12" name="Text 10"/>
+          <p:cNvSpPr txBox="1"/>
+          <p:nvPr/>
+        </p:nvSpPr>
+        <p:spPr>
+          <a:xfrm>
+            <a:off x="8046720" y="2057400"/>
+            <a:ext cx="3063240" cy="594360"/>
+          </a:xfrm>
+          <a:prstGeom prst="rect">
+            <a:avLst/>
+          </a:prstGeom>
+          <a:noFill/>
+          <a:ln/>
+        </p:spPr>
+        <p:txBody>
+          <a:bodyPr wrap="square" lIns="0" tIns="0" rIns="0" bIns="0" rtlCol="0" anchor="ctr"/>
+          <a:lstStyle/>
+          <a:p>
+            <a:pPr indent="0" marL="0">
+              <a:buNone/>
+            </a:pPr>
+            <a:r>
+              <a:rPr lang="en-US" sz="2400" b="1" dirty="0">
+                <a:solidFill>
+                  <a:srgbClr val="B084F5"/>
+                </a:solidFill>
+                <a:latin typeface="Calibri" pitchFamily="34" charset="0"/>
+                <a:ea typeface="Calibri" pitchFamily="34" charset="-122"/>
+                <a:cs typeface="Calibri" pitchFamily="34" charset="-120"/>
+              </a:rPr>
+              <a:t>MIT / Apache 2.0</a:t>
+            </a:r>
+            <a:endParaRPr lang="en-US" sz="2400" dirty="0"/>
+          </a:p>
+        </p:txBody>
+      </p:sp>
+      <p:sp>
+        <p:nvSpPr>
+          <p:cNvPr id="13" name="Text 11"/>
+          <p:cNvSpPr txBox="1"/>
+          <p:nvPr/>
+        </p:nvSpPr>
+        <p:spPr>
+          <a:xfrm>
+            <a:off x="8046720" y="2697480"/>
+            <a:ext cx="3063240" cy="457200"/>
+          </a:xfrm>
+          <a:prstGeom prst="rect">
+            <a:avLst/>
+          </a:prstGeom>
+          <a:noFill/>
+          <a:ln/>
+        </p:spPr>
+        <p:txBody>
+          <a:bodyPr wrap="square" lIns="0" tIns="0" rIns="0" bIns="0" rtlCol="0" anchor="ctr"/>
+          <a:lstStyle/>
+          <a:p>
+            <a:pPr indent="0" marL="0">
+              <a:buNone/>
+            </a:pPr>
+            <a:r>
+              <a:rPr lang="en-US" sz="1150" dirty="0">
+                <a:solidFill>
+                  <a:srgbClr val="5B6472"/>
+                </a:solidFill>
+                <a:latin typeface="Calibri" pitchFamily="34" charset="0"/>
+                <a:ea typeface="Calibri" pitchFamily="34" charset="-122"/>
+                <a:cs typeface="Calibri" pitchFamily="34" charset="-120"/>
+              </a:rPr>
+              <a:t>デュアルライセンス</a:t>
+            </a:r>
+            <a:endParaRPr lang="en-US" sz="1150" dirty="0"/>
+          </a:p>
+        </p:txBody>
+      </p:sp>
+      <p:sp>
+        <p:nvSpPr>
+          <p:cNvPr id="14" name="Text 12"/>
+          <p:cNvSpPr txBox="1"/>
+          <p:nvPr/>
+        </p:nvSpPr>
+        <p:spPr>
+          <a:xfrm>
+            <a:off x="548640" y="3566160"/>
+            <a:ext cx="10607040" cy="365760"/>
+          </a:xfrm>
+          <a:prstGeom prst="rect">
+            <a:avLst/>
+          </a:prstGeom>
+          <a:noFill/>
+          <a:ln/>
+        </p:spPr>
+        <p:txBody>
+          <a:bodyPr wrap="square" lIns="0" tIns="0" rIns="0" bIns="0" rtlCol="0" anchor="ctr"/>
+          <a:lstStyle/>
+          <a:p>
+            <a:pPr indent="0" marL="0">
+              <a:buNone/>
+            </a:pPr>
+            <a:r>
+              <a:rPr lang="en-US" sz="1400" b="1" dirty="0">
+                <a:solidFill>
+                  <a:srgbClr val="1A1F26"/>
+                </a:solidFill>
+                <a:latin typeface="Calibri" pitchFamily="34" charset="0"/>
+                <a:ea typeface="Calibri" pitchFamily="34" charset="-122"/>
+                <a:cs typeface="Calibri" pitchFamily="34" charset="-120"/>
+              </a:rPr>
+              <a:t>貢献のしやすさ(実際に確認できる情報)</a:t>
+            </a:r>
+            <a:endParaRPr lang="en-US" sz="1400" dirty="0"/>
+          </a:p>
+        </p:txBody>
+      </p:sp>
+      <p:sp>
+        <p:nvSpPr>
+          <p:cNvPr id="15" name="Text 13"/>
+          <p:cNvSpPr txBox="1"/>
+          <p:nvPr/>
+        </p:nvSpPr>
+        <p:spPr>
+          <a:xfrm>
+            <a:off x="548640" y="3977640"/>
+            <a:ext cx="10607040" cy="1737360"/>
+          </a:xfrm>
+          <a:prstGeom prst="rect">
+            <a:avLst/>
+          </a:prstGeom>
+          <a:noFill/>
+          <a:ln/>
+        </p:spPr>
+        <p:txBody>
+          <a:bodyPr wrap="square" lIns="0" tIns="0" rIns="0" bIns="0" rtlCol="0" anchor="ctr"/>
+          <a:lstStyle/>
+          <a:p>
+            <a:pPr marL="342900" indent="-342900">
+              <a:spcAft>
+                <a:spcPts val="600"/>
+              </a:spcAft>
+              <a:buSzPct val="100000"/>
+              <a:buChar char="•"/>
+            </a:pPr>
+            <a:r>
+              <a:rPr lang="en-US" sz="1250" dirty="0">
+                <a:solidFill>
+                  <a:srgbClr val="5B6472"/>
+                </a:solidFill>
+                <a:latin typeface="Calibri" pitchFamily="34" charset="0"/>
+                <a:ea typeface="Calibri" pitchFamily="34" charset="-122"/>
+                <a:cs typeface="Calibri" pitchFamily="34" charset="-120"/>
+              </a:rPr>
+              <a:t>CONTRIBUTING.md に貢献ガイドラインが整備されている</a:t>
+            </a:r>
+            <a:endParaRPr lang="en-US" sz="1250" dirty="0"/>
+          </a:p>
+          <a:p>
+            <a:pPr marL="342900" indent="-342900">
+              <a:spcAft>
+                <a:spcPts val="600"/>
+              </a:spcAft>
+              <a:buSzPct val="100000"/>
+              <a:buChar char="•"/>
+            </a:pPr>
+            <a:r>
+              <a:rPr lang="en-US" sz="1250" dirty="0">
+                <a:solidFill>
+                  <a:srgbClr val="5B6472"/>
+                </a:solidFill>
+                <a:latin typeface="Calibri" pitchFamily="34" charset="0"/>
+                <a:ea typeface="Calibri" pitchFamily="34" charset="-122"/>
+                <a:cs typeface="Calibri" pitchFamily="34" charset="-120"/>
+              </a:rPr>
+              <a:t>good-first-issue ラベルの付いた初心者向けタスクがある</a:t>
+            </a:r>
+            <a:endParaRPr lang="en-US" sz="1250" dirty="0"/>
+          </a:p>
+          <a:p>
+            <a:pPr marL="342900" indent="-342900">
+              <a:spcAft>
+                <a:spcPts val="600"/>
+              </a:spcAft>
+              <a:buSzPct val="100000"/>
+              <a:buChar char="•"/>
+            </a:pPr>
+            <a:r>
+              <a:rPr lang="en-US" sz="1250" dirty="0">
+                <a:solidFill>
+                  <a:srgbClr val="5B6472"/>
+                </a:solidFill>
+                <a:latin typeface="Calibri" pitchFamily="34" charset="0"/>
+                <a:ea typeface="Calibri" pitchFamily="34" charset="-122"/>
+                <a:cs typeface="Calibri" pitchFamily="34" charset="-120"/>
+              </a:rPr>
+              <a:t>新しいバッジ追加のチュートリアルも用意されている(VS Code・Vue.js・Bootstrap等の著名プロジェクトも利用)</a:t>
+            </a:r>
+            <a:endParaRPr lang="en-US" sz="1250" dirty="0"/>
+          </a:p>
+          <a:p>
+            <a:pPr marL="342900" indent="-342900">
+              <a:spcAft>
+                <a:spcPts val="600"/>
+              </a:spcAft>
+              <a:buSzPct val="100000"/>
+              <a:buChar char="•"/>
+            </a:pPr>
+            <a:r>
+              <a:rPr lang="en-US" sz="1250" dirty="0">
+                <a:solidFill>
+                  <a:srgbClr val="5B6472"/>
+                </a:solidFill>
+                <a:latin typeface="Calibri" pitchFamily="34" charset="0"/>
+                <a:ea typeface="Calibri" pitchFamily="34" charset="-122"/>
+                <a:cs typeface="Calibri" pitchFamily="34" charset="-120"/>
+              </a:rPr>
+              <a:t>SECURITY.md による脆弱性報告ポリシーも整備済み(セキュリティ関連の貢献も歓迎)</a:t>
+            </a:r>
+            <a:endParaRPr lang="en-US" sz="1250" dirty="0"/>
+          </a:p>
+        </p:txBody>
       </p:sp>
       <p:sp>
         <p:nvSpPr>
           <p:cNvPr id="16" name="Text 14"/>
-          <p:cNvSpPr txBox="1"/>
-          <p:nvPr/>
-        </p:nvSpPr>
-        <p:spPr>
-          <a:xfrm>
-            <a:off x="6309360" y="2103120"/>
-            <a:ext cx="4754880" cy="365760"/>
-          </a:xfrm>
-          <a:prstGeom prst="rect">
-            <a:avLst/>
-          </a:prstGeom>
-          <a:noFill/>
-          <a:ln/>
-        </p:spPr>
-        <p:txBody>
-          <a:bodyPr wrap="square" lIns="0" tIns="0" rIns="0" bIns="0" rtlCol="0" anchor="ctr"/>
-          <a:lstStyle/>
-          <a:p>
-            <a:pPr indent="0" marL="0">
-              <a:buNone/>
-            </a:pPr>
-            <a:r>
-              <a:rPr lang="en-US" sz="1400" b="1" dirty="0">
-                <a:solidFill>
-                  <a:srgbClr val="6B7280"/>
-                </a:solidFill>
-                <a:latin typeface="Calibri" pitchFamily="34" charset="0"/>
-                <a:ea typeface="Calibri" pitchFamily="34" charset="-122"/>
-                <a:cs typeface="Calibri" pitchFamily="34" charset="-120"/>
-              </a:rPr>
-              <a:t>🪦 効果が薄かったチャネル</a:t>
-            </a:r>
-            <a:endParaRPr lang="en-US" sz="1400" dirty="0"/>
-          </a:p>
-        </p:txBody>
-      </p:sp>
-      <p:sp>
-        <p:nvSpPr>
-          <p:cNvPr id="17" name="Text 15"/>
-          <p:cNvSpPr txBox="1"/>
-          <p:nvPr/>
-        </p:nvSpPr>
-        <p:spPr>
-          <a:xfrm>
-            <a:off x="6309360" y="2560320"/>
-            <a:ext cx="4663440" cy="274320"/>
-          </a:xfrm>
-          <a:prstGeom prst="rect">
-            <a:avLst/>
-          </a:prstGeom>
-          <a:noFill/>
-          <a:ln/>
-        </p:spPr>
-        <p:txBody>
-          <a:bodyPr wrap="square" lIns="0" tIns="0" rIns="0" bIns="0" rtlCol="0" anchor="ctr"/>
-          <a:lstStyle/>
-          <a:p>
-            <a:pPr indent="0" marL="0">
-              <a:buNone/>
-            </a:pPr>
-            <a:r>
-              <a:rPr lang="en-US" sz="1250" b="1" dirty="0">
-                <a:solidFill>
-                  <a:srgbClr val="1A1F26"/>
-                </a:solidFill>
-                <a:latin typeface="Calibri" pitchFamily="34" charset="0"/>
-                <a:ea typeface="Calibri" pitchFamily="34" charset="-122"/>
-                <a:cs typeface="Calibri" pitchFamily="34" charset="-120"/>
-              </a:rPr>
-              <a:t>Reddit</a:t>
-            </a:r>
-            <a:endParaRPr lang="en-US" sz="1250" dirty="0"/>
-          </a:p>
-        </p:txBody>
-      </p:sp>
-      <p:sp>
-        <p:nvSpPr>
-          <p:cNvPr id="18" name="Text 16"/>
-          <p:cNvSpPr txBox="1"/>
-          <p:nvPr/>
-        </p:nvSpPr>
-        <p:spPr>
-          <a:xfrm>
-            <a:off x="6309360" y="2834640"/>
-            <a:ext cx="4663440" cy="640080"/>
-          </a:xfrm>
-          <a:prstGeom prst="rect">
-            <a:avLst/>
-          </a:prstGeom>
-          <a:noFill/>
-          <a:ln/>
-        </p:spPr>
-        <p:txBody>
-          <a:bodyPr wrap="square" lIns="0" tIns="0" rIns="0" bIns="0" rtlCol="0" anchor="ctr"/>
-          <a:lstStyle/>
-          <a:p>
-            <a:pPr indent="0" marL="0">
-              <a:buNone/>
-            </a:pPr>
-            <a:r>
-              <a:rPr lang="en-US" sz="1050" dirty="0">
-                <a:solidFill>
-                  <a:srgbClr val="5B6472"/>
-                </a:solidFill>
-                <a:latin typeface="Calibri" pitchFamily="34" charset="0"/>
-                <a:ea typeface="Calibri" pitchFamily="34" charset="-122"/>
-                <a:cs typeface="Calibri" pitchFamily="34" charset="-120"/>
-              </a:rPr>
-              <a:t>投稿は伸びにくいことが多い(閲覧2.4kでUpvote6等)。ただしやり方次第で化ける可能性はある</a:t>
-            </a:r>
-            <a:endParaRPr lang="en-US" sz="1050" dirty="0"/>
-          </a:p>
-        </p:txBody>
-      </p:sp>
-      <p:sp>
-        <p:nvSpPr>
-          <p:cNvPr id="19" name="Text 17"/>
-          <p:cNvSpPr txBox="1"/>
-          <p:nvPr/>
-        </p:nvSpPr>
-        <p:spPr>
-          <a:xfrm>
-            <a:off x="6309360" y="3383280"/>
-            <a:ext cx="4663440" cy="274320"/>
-          </a:xfrm>
-          <a:prstGeom prst="rect">
-            <a:avLst/>
-          </a:prstGeom>
-          <a:noFill/>
-          <a:ln/>
-        </p:spPr>
-        <p:txBody>
-          <a:bodyPr wrap="square" lIns="0" tIns="0" rIns="0" bIns="0" rtlCol="0" anchor="ctr"/>
-          <a:lstStyle/>
-          <a:p>
-            <a:pPr indent="0" marL="0">
-              <a:buNone/>
-            </a:pPr>
-            <a:r>
-              <a:rPr lang="en-US" sz="1250" b="1" dirty="0">
-                <a:solidFill>
-                  <a:srgbClr val="1A1F26"/>
-                </a:solidFill>
-                <a:latin typeface="Calibri" pitchFamily="34" charset="0"/>
-                <a:ea typeface="Calibri" pitchFamily="34" charset="-122"/>
-                <a:cs typeface="Calibri" pitchFamily="34" charset="-120"/>
-              </a:rPr>
-              <a:t>Product Hunt</a:t>
-            </a:r>
-            <a:endParaRPr lang="en-US" sz="1250" dirty="0"/>
-          </a:p>
-        </p:txBody>
-      </p:sp>
-      <p:sp>
-        <p:nvSpPr>
-          <p:cNvPr id="20" name="Text 18"/>
-          <p:cNvSpPr txBox="1"/>
-          <p:nvPr/>
-        </p:nvSpPr>
-        <p:spPr>
-          <a:xfrm>
-            <a:off x="6309360" y="3657600"/>
-            <a:ext cx="4663440" cy="640080"/>
-          </a:xfrm>
-          <a:prstGeom prst="rect">
-            <a:avLst/>
-          </a:prstGeom>
-          <a:noFill/>
-          <a:ln/>
-        </p:spPr>
-        <p:txBody>
-          <a:bodyPr wrap="square" lIns="0" tIns="0" rIns="0" bIns="0" rtlCol="0" anchor="ctr"/>
-          <a:lstStyle/>
-          <a:p>
-            <a:pPr indent="0" marL="0">
-              <a:buNone/>
-            </a:pPr>
-            <a:r>
-              <a:rPr lang="en-US" sz="1050" dirty="0">
-                <a:solidFill>
-                  <a:srgbClr val="5B6472"/>
-                </a:solidFill>
-                <a:latin typeface="Calibri" pitchFamily="34" charset="0"/>
-                <a:ea typeface="Calibri" pitchFamily="34" charset="-122"/>
-                <a:cs typeface="Calibri" pitchFamily="34" charset="-120"/>
-              </a:rPr>
-              <a:t>AI関連プロダクトが多く、その他のプロダクトは埋もれやすい</a:t>
-            </a:r>
-            <a:endParaRPr lang="en-US" sz="1050" dirty="0"/>
-          </a:p>
-        </p:txBody>
-      </p:sp>
-      <p:sp>
-        <p:nvSpPr>
-          <p:cNvPr id="21" name="Text 19"/>
-          <p:cNvSpPr txBox="1"/>
-          <p:nvPr/>
-        </p:nvSpPr>
-        <p:spPr>
-          <a:xfrm>
-            <a:off x="6309360" y="4206240"/>
-            <a:ext cx="4663440" cy="274320"/>
-          </a:xfrm>
-          <a:prstGeom prst="rect">
-            <a:avLst/>
-          </a:prstGeom>
-          <a:noFill/>
-          <a:ln/>
-        </p:spPr>
-        <p:txBody>
-          <a:bodyPr wrap="square" lIns="0" tIns="0" rIns="0" bIns="0" rtlCol="0" anchor="ctr"/>
-          <a:lstStyle/>
-          <a:p>
-            <a:pPr indent="0" marL="0">
-              <a:buNone/>
-            </a:pPr>
-            <a:r>
-              <a:rPr lang="en-US" sz="1250" b="1" dirty="0">
-                <a:solidFill>
-                  <a:srgbClr val="1A1F26"/>
-                </a:solidFill>
-                <a:latin typeface="Calibri" pitchFamily="34" charset="0"/>
-                <a:ea typeface="Calibri" pitchFamily="34" charset="-122"/>
-                <a:cs typeface="Calibri" pitchFamily="34" charset="-120"/>
-              </a:rPr>
-              <a:t>Awesomeリストへの追加PR</a:t>
-            </a:r>
-            <a:endParaRPr lang="en-US" sz="1250" dirty="0"/>
-          </a:p>
-        </p:txBody>
-      </p:sp>
-      <p:sp>
-        <p:nvSpPr>
-          <p:cNvPr id="22" name="Text 20"/>
-          <p:cNvSpPr txBox="1"/>
-          <p:nvPr/>
-        </p:nvSpPr>
-        <p:spPr>
-          <a:xfrm>
-            <a:off x="6309360" y="4480560"/>
-            <a:ext cx="4663440" cy="640080"/>
-          </a:xfrm>
-          <a:prstGeom prst="rect">
-            <a:avLst/>
-          </a:prstGeom>
-          <a:noFill/>
-          <a:ln/>
-        </p:spPr>
-        <p:txBody>
-          <a:bodyPr wrap="square" lIns="0" tIns="0" rIns="0" bIns="0" rtlCol="0" anchor="ctr"/>
-          <a:lstStyle/>
-          <a:p>
-            <a:pPr indent="0" marL="0">
-              <a:buNone/>
-            </a:pPr>
-            <a:r>
-              <a:rPr lang="en-US" sz="1050" dirty="0">
-                <a:solidFill>
-                  <a:srgbClr val="5B6472"/>
-                </a:solidFill>
-                <a:latin typeface="Calibri" pitchFamily="34" charset="0"/>
-                <a:ea typeface="Calibri" pitchFamily="34" charset="-122"/>
-                <a:cs typeface="Calibri" pitchFamily="34" charset="-120"/>
-              </a:rPr>
-              <a:t>掲載されても閲覧者自体が少ない</a:t>
-            </a:r>
-            <a:endParaRPr lang="en-US" sz="1050" dirty="0"/>
-          </a:p>
-        </p:txBody>
-      </p:sp>
-      <p:sp>
-        <p:nvSpPr>
-          <p:cNvPr id="23" name="Text 21"/>
-          <p:cNvSpPr txBox="1"/>
-          <p:nvPr/>
-        </p:nvSpPr>
-        <p:spPr>
-          <a:xfrm>
-            <a:off x="6309360" y="5029200"/>
-            <a:ext cx="4663440" cy="274320"/>
-          </a:xfrm>
-          <a:prstGeom prst="rect">
-            <a:avLst/>
-          </a:prstGeom>
-          <a:noFill/>
-          <a:ln/>
-        </p:spPr>
-        <p:txBody>
-          <a:bodyPr wrap="square" lIns="0" tIns="0" rIns="0" bIns="0" rtlCol="0" anchor="ctr"/>
-          <a:lstStyle/>
-          <a:p>
-            <a:pPr indent="0" marL="0">
-              <a:buNone/>
-            </a:pPr>
-            <a:r>
-              <a:rPr lang="en-US" sz="1250" b="1" dirty="0">
-                <a:solidFill>
-                  <a:srgbClr val="1A1F26"/>
-                </a:solidFill>
-                <a:latin typeface="Calibri" pitchFamily="34" charset="0"/>
-                <a:ea typeface="Calibri" pitchFamily="34" charset="-122"/>
-                <a:cs typeface="Calibri" pitchFamily="34" charset="-120"/>
-              </a:rPr>
-              <a:t>個人ブログ</a:t>
-            </a:r>
-            <a:endParaRPr lang="en-US" sz="1250" dirty="0"/>
-          </a:p>
-        </p:txBody>
-      </p:sp>
-      <p:sp>
-        <p:nvSpPr>
-          <p:cNvPr id="24" name="Text 22"/>
-          <p:cNvSpPr txBox="1"/>
-          <p:nvPr/>
-        </p:nvSpPr>
-        <p:spPr>
-          <a:xfrm>
-            <a:off x="6309360" y="5303520"/>
-            <a:ext cx="4663440" cy="640080"/>
-          </a:xfrm>
-          <a:prstGeom prst="rect">
-            <a:avLst/>
-          </a:prstGeom>
-          <a:noFill/>
-          <a:ln/>
-        </p:spPr>
-        <p:txBody>
-          <a:bodyPr wrap="square" lIns="0" tIns="0" rIns="0" bIns="0" rtlCol="0" anchor="ctr"/>
-          <a:lstStyle/>
-          <a:p>
-            <a:pPr indent="0" marL="0">
-              <a:buNone/>
-            </a:pPr>
-            <a:r>
-              <a:rPr lang="en-US" sz="1050" dirty="0">
-                <a:solidFill>
-                  <a:srgbClr val="5B6472"/>
-                </a:solidFill>
-                <a:latin typeface="Calibri" pitchFamily="34" charset="0"/>
-                <a:ea typeface="Calibri" pitchFamily="34" charset="-122"/>
-                <a:cs typeface="Calibri" pitchFamily="34" charset="-120"/>
-              </a:rPr>
-              <a:t>Qiita/Zenn等の媒体力があるプラットフォームでないと、Twitter投稿とあまり変わらない手応え</a:t>
-            </a:r>
-            <a:endParaRPr lang="en-US" sz="1050" dirty="0"/>
-          </a:p>
-        </p:txBody>
-      </p:sp>
-      <p:sp>
-        <p:nvSpPr>
-          <p:cNvPr id="25" name="Text 23"/>
           <p:cNvSpPr txBox="1"/>
           <p:nvPr/>
         </p:nvSpPr>
@@ -10355,7 +11268,7 @@
                 <a:ea typeface="Calibri" pitchFamily="34" charset="-122"/>
                 <a:cs typeface="Calibri" pitchFamily="34" charset="-120"/>
               </a:rPr>
-              <a:t>出典: 個人開発者によるOSSプロジェクト「Ephe」のブログ記事(1事例の実測値。分野・タイミングにより結果は変動しうる)</a:t>
+              <a:t>出典: github.com/badges/shields(取得時点のスター数。日々変動するため参考値)</a:t>
             </a:r>
             <a:endParaRPr lang="en-US" sz="1000" dirty="0"/>
           </a:p>
@@ -10363,7 +11276,7 @@
       </p:sp>
       <p:sp>
         <p:nvSpPr>
-          <p:cNvPr id="26" name="Text 24"/>
+          <p:cNvPr id="17" name="Text 15"/>
           <p:cNvSpPr txBox="1"/>
           <p:nvPr/>
         </p:nvSpPr>

--- a/github-strategy-guide.pptx
+++ b/github-strategy-guide.pptx
@@ -19,9 +19,10 @@
     <p:sldId id="267" r:id="rId13"/>
     <p:sldId id="268" r:id="rId14"/>
     <p:sldId id="269" r:id="rId15"/>
+    <p:sldId id="270" r:id="rId16"/>
   </p:sldIdLst>
   <p:notesMasterIdLst>
-    <p:notesMasterId r:id="rId16"/>
+    <p:notesMasterId r:id="rId17"/>
   </p:notesMasterIdLst>
   <p:sldSz cx="12192000" cy="6858000"/>
   <p:notesSz cx="6858000" cy="12192000"/>
@@ -979,6 +980,94 @@
             <a:fld id="{F7021451-1387-4CA6-816F-3879F97B5CBC}" type="slidenum">
               <a:rPr lang="en-US"/>
               <a:t>14</a:t>
+            </a:fld>
+            <a:endParaRPr lang="en-US"/>
+          </a:p>
+        </p:txBody>
+      </p:sp>
+    </p:spTree>
+    <p:extLst>
+      <p:ext uri="{BB962C8B-B14F-4D97-AF65-F5344CB8AC3E}">
+        <p14:creationId xmlns:p14="http://schemas.microsoft.com/office/powerpoint/2010/main" val="1024086991"/>
+      </p:ext>
+    </p:extLst>
+  </p:cSld>
+  <p:clrMapOvr>
+    <a:masterClrMapping/>
+  </p:clrMapOvr>
+</p:notes>
+</file>
+
+<file path=ppt/notesSlides/notesSlide15.xml><?xml version="1.0" encoding="utf-8"?>
+<p:notes xmlns:a="http://schemas.openxmlformats.org/drawingml/2006/main" xmlns:r="http://schemas.openxmlformats.org/officeDocument/2006/relationships" xmlns:p="http://schemas.openxmlformats.org/presentationml/2006/main">
+  <p:cSld>
+    <p:spTree>
+      <p:nvGrpSpPr>
+        <p:cNvPr id="1" name=""/>
+        <p:cNvGrpSpPr/>
+        <p:nvPr/>
+      </p:nvGrpSpPr>
+      <p:grpSpPr>
+        <a:xfrm>
+          <a:off x="0" y="0"/>
+          <a:ext cx="0" cy="0"/>
+          <a:chOff x="0" y="0"/>
+          <a:chExt cx="0" cy="0"/>
+        </a:xfrm>
+      </p:grpSpPr>
+      <p:sp>
+        <p:nvSpPr>
+          <p:cNvPr id="2" name="Slide Image Placeholder 1"/>
+          <p:cNvSpPr>
+            <a:spLocks noGrp="1" noRot="1" noChangeAspect="1"/>
+          </p:cNvSpPr>
+          <p:nvPr>
+            <p:ph type="sldImg"/>
+          </p:nvPr>
+        </p:nvSpPr>
+        <p:spPr/>
+      </p:sp>
+      <p:sp>
+        <p:nvSpPr>
+          <p:cNvPr id="3" name="Notes Placeholder 2"/>
+          <p:cNvSpPr>
+            <a:spLocks noGrp="1"/>
+          </p:cNvSpPr>
+          <p:nvPr>
+            <p:ph type="body" idx="1"/>
+          </p:nvPr>
+        </p:nvSpPr>
+        <p:spPr/>
+        <p:txBody>
+          <a:bodyPr/>
+          <a:lstStyle/>
+          <a:p>
+            <a:r>
+              <a:rPr lang="en-US" dirty="0"/>
+              <a:t/>
+            </a:r>
+            <a:endParaRPr lang="en-US" dirty="0"/>
+          </a:p>
+        </p:txBody>
+      </p:sp>
+      <p:sp>
+        <p:nvSpPr>
+          <p:cNvPr id="4" name="Slide Number Placeholder 3"/>
+          <p:cNvSpPr>
+            <a:spLocks noGrp="1"/>
+          </p:cNvSpPr>
+          <p:nvPr>
+            <p:ph type="sldNum" sz="quarter" idx="10"/>
+          </p:nvPr>
+        </p:nvSpPr>
+        <p:spPr/>
+        <p:txBody>
+          <a:bodyPr/>
+          <a:lstStyle/>
+          <a:p>
+            <a:fld id="{F7021451-1387-4CA6-816F-3879F97B5CBC}" type="slidenum">
+              <a:rPr lang="en-US"/>
+              <a:t>15</a:t>
             </a:fld>
             <a:endParaRPr lang="en-US"/>
           </a:p>
@@ -2297,7 +2386,7 @@
                 <a:ea typeface="Cambria" pitchFamily="34" charset="-122"/>
                 <a:cs typeface="Cambria" pitchFamily="34" charset="-120"/>
               </a:rPr>
-              <a:t>5</a:t>
+              <a:t>4</a:t>
             </a:r>
             <a:endParaRPr lang="en-US" sz="2800" dirty="0"/>
           </a:p>
@@ -2336,7 +2425,7 @@
                 <a:ea typeface="Cambria" pitchFamily="34" charset="-122"/>
                 <a:cs typeface="Cambria" pitchFamily="34" charset="-120"/>
               </a:rPr>
-              <a:t>宣伝チャネルの効果(実例ケーススタディ)</a:t>
+              <a:t>貢献先の実例: badges/shields (shields.io)</a:t>
             </a:r>
             <a:endParaRPr lang="en-US" sz="2600" dirty="0"/>
           </a:p>
@@ -2375,7 +2464,7 @@
                 <a:ea typeface="Calibri" pitchFamily="34" charset="-122"/>
                 <a:cs typeface="Calibri" pitchFamily="34" charset="-120"/>
               </a:rPr>
-              <a:t>個人OSS開発者が、公開後数ヶ月で400+スターを集めた際の実測データ(1事例)</a:t>
+              <a:t>READMEでよく見るバッジサービス「shields.io」も、実は誰でも貢献できるOSS</a:t>
             </a:r>
             <a:endParaRPr lang="en-US" sz="1250" dirty="0"/>
           </a:p>
@@ -2390,11 +2479,11 @@
         <p:spPr>
           <a:xfrm>
             <a:off x="548640" y="1920240"/>
-            <a:ext cx="5212080" cy="3931920"/>
+            <a:ext cx="3429000" cy="1371600"/>
           </a:xfrm>
           <a:prstGeom prst="roundRect">
             <a:avLst>
-              <a:gd name="adj" fmla="val 2326"/>
+              <a:gd name="adj" fmla="val 6667"/>
             </a:avLst>
           </a:prstGeom>
           <a:solidFill>
@@ -2406,6 +2495,13 @@
             </a:solidFill>
             <a:prstDash val="solid"/>
           </a:ln>
+          <a:effectLst>
+            <a:outerShdw sx="100000" sy="100000" kx="0" ky="0" algn="bl" rotWithShape="0" blurRad="76200" dist="25400" dir="5400000">
+              <a:srgbClr val="000000">
+                <a:alpha val="10000"/>
+              </a:srgbClr>
+            </a:outerShdw>
+          </a:effectLst>
         </p:spPr>
       </p:sp>
       <p:sp>
@@ -2416,34 +2512,34 @@
         </p:nvSpPr>
         <p:spPr>
           <a:xfrm>
-            <a:off x="822960" y="2103120"/>
-            <a:ext cx="4754880" cy="365760"/>
-          </a:xfrm>
-          <a:prstGeom prst="rect">
-            <a:avLst/>
-          </a:prstGeom>
-          <a:noFill/>
-          <a:ln/>
-        </p:spPr>
-        <p:txBody>
-          <a:bodyPr wrap="square" lIns="0" tIns="0" rIns="0" bIns="0" rtlCol="0" anchor="ctr"/>
-          <a:lstStyle/>
-          <a:p>
-            <a:pPr indent="0" marL="0">
-              <a:buNone/>
-            </a:pPr>
-            <a:r>
-              <a:rPr lang="en-US" sz="1400" b="1" dirty="0">
-                <a:solidFill>
-                  <a:srgbClr val="58D68D"/>
-                </a:solidFill>
-                <a:latin typeface="Calibri" pitchFamily="34" charset="0"/>
-                <a:ea typeface="Calibri" pitchFamily="34" charset="-122"/>
-                <a:cs typeface="Calibri" pitchFamily="34" charset="-120"/>
-              </a:rPr>
-              <a:t>🚀 効果があったチャネル</a:t>
-            </a:r>
-            <a:endParaRPr lang="en-US" sz="1400" dirty="0"/>
+            <a:off x="731520" y="2057400"/>
+            <a:ext cx="3063240" cy="594360"/>
+          </a:xfrm>
+          <a:prstGeom prst="rect">
+            <a:avLst/>
+          </a:prstGeom>
+          <a:noFill/>
+          <a:ln/>
+        </p:spPr>
+        <p:txBody>
+          <a:bodyPr wrap="square" lIns="0" tIns="0" rIns="0" bIns="0" rtlCol="0" anchor="ctr"/>
+          <a:lstStyle/>
+          <a:p>
+            <a:pPr indent="0" marL="0">
+              <a:buNone/>
+            </a:pPr>
+            <a:r>
+              <a:rPr lang="en-US" sz="2400" b="1" dirty="0">
+                <a:solidFill>
+                  <a:srgbClr val="B084F5"/>
+                </a:solidFill>
+                <a:latin typeface="Calibri" pitchFamily="34" charset="0"/>
+                <a:ea typeface="Calibri" pitchFamily="34" charset="-122"/>
+                <a:cs typeface="Calibri" pitchFamily="34" charset="-120"/>
+              </a:rPr>
+              <a:t>27.2k</a:t>
+            </a:r>
+            <a:endParaRPr lang="en-US" sz="2400" dirty="0"/>
           </a:p>
         </p:txBody>
       </p:sp>
@@ -2455,63 +2551,24 @@
         </p:nvSpPr>
         <p:spPr>
           <a:xfrm>
-            <a:off x="822960" y="2560320"/>
-            <a:ext cx="4663440" cy="274320"/>
-          </a:xfrm>
-          <a:prstGeom prst="rect">
-            <a:avLst/>
-          </a:prstGeom>
-          <a:noFill/>
-          <a:ln/>
-        </p:spPr>
-        <p:txBody>
-          <a:bodyPr wrap="square" lIns="0" tIns="0" rIns="0" bIns="0" rtlCol="0" anchor="ctr"/>
-          <a:lstStyle/>
-          <a:p>
-            <a:pPr indent="0" marL="0">
-              <a:buNone/>
-            </a:pPr>
-            <a:r>
-              <a:rPr lang="en-US" sz="1250" b="1" dirty="0">
-                <a:solidFill>
-                  <a:srgbClr val="1A1F26"/>
-                </a:solidFill>
-                <a:latin typeface="Calibri" pitchFamily="34" charset="0"/>
-                <a:ea typeface="Calibri" pitchFamily="34" charset="-122"/>
-                <a:cs typeface="Calibri" pitchFamily="34" charset="-120"/>
-              </a:rPr>
-              <a:t>Hacker News</a:t>
-            </a:r>
-            <a:endParaRPr lang="en-US" sz="1250" dirty="0"/>
-          </a:p>
-        </p:txBody>
-      </p:sp>
-      <p:sp>
-        <p:nvSpPr>
-          <p:cNvPr id="8" name="Text 6"/>
-          <p:cNvSpPr txBox="1"/>
-          <p:nvPr/>
-        </p:nvSpPr>
-        <p:spPr>
-          <a:xfrm>
-            <a:off x="822960" y="2834640"/>
-            <a:ext cx="4663440" cy="640080"/>
-          </a:xfrm>
-          <a:prstGeom prst="rect">
-            <a:avLst/>
-          </a:prstGeom>
-          <a:noFill/>
-          <a:ln/>
-        </p:spPr>
-        <p:txBody>
-          <a:bodyPr wrap="square" lIns="0" tIns="0" rIns="0" bIns="0" rtlCol="0" anchor="ctr"/>
-          <a:lstStyle/>
-          <a:p>
-            <a:pPr indent="0" marL="0">
-              <a:buNone/>
-            </a:pPr>
-            <a:r>
-              <a:rPr lang="en-US" sz="1050" dirty="0">
+            <a:off x="731520" y="2697480"/>
+            <a:ext cx="3063240" cy="457200"/>
+          </a:xfrm>
+          <a:prstGeom prst="rect">
+            <a:avLst/>
+          </a:prstGeom>
+          <a:noFill/>
+          <a:ln/>
+        </p:spPr>
+        <p:txBody>
+          <a:bodyPr wrap="square" lIns="0" tIns="0" rIns="0" bIns="0" rtlCol="0" anchor="ctr"/>
+          <a:lstStyle/>
+          <a:p>
+            <a:pPr indent="0" marL="0">
+              <a:buNone/>
+            </a:pPr>
+            <a:r>
+              <a:rPr lang="en-US" sz="1150" dirty="0">
                 <a:solidFill>
                   <a:srgbClr val="5B6472"/>
                 </a:solidFill>
@@ -2519,260 +2576,26 @@
                 <a:ea typeface="Calibri" pitchFamily="34" charset="-122"/>
                 <a:cs typeface="Calibri" pitchFamily="34" charset="-120"/>
               </a:rPr>
-              <a:t>「Show HN:」プレフィックスを付けて投稿する文化があり、Showタブ・トップページに掲載。最も効果大</a:t>
-            </a:r>
-            <a:endParaRPr lang="en-US" sz="1050" dirty="0"/>
-          </a:p>
-        </p:txBody>
-      </p:sp>
-      <p:sp>
-        <p:nvSpPr>
-          <p:cNvPr id="9" name="Text 7"/>
-          <p:cNvSpPr txBox="1"/>
-          <p:nvPr/>
-        </p:nvSpPr>
-        <p:spPr>
-          <a:xfrm>
-            <a:off x="822960" y="3383280"/>
-            <a:ext cx="4663440" cy="274320"/>
-          </a:xfrm>
-          <a:prstGeom prst="rect">
-            <a:avLst/>
-          </a:prstGeom>
-          <a:noFill/>
-          <a:ln/>
-        </p:spPr>
-        <p:txBody>
-          <a:bodyPr wrap="square" lIns="0" tIns="0" rIns="0" bIns="0" rtlCol="0" anchor="ctr"/>
-          <a:lstStyle/>
-          <a:p>
-            <a:pPr indent="0" marL="0">
-              <a:buNone/>
-            </a:pPr>
-            <a:r>
-              <a:rPr lang="en-US" sz="1250" b="1" dirty="0">
-                <a:solidFill>
-                  <a:srgbClr val="1A1F26"/>
-                </a:solidFill>
-                <a:latin typeface="Calibri" pitchFamily="34" charset="0"/>
-                <a:ea typeface="Calibri" pitchFamily="34" charset="-122"/>
-                <a:cs typeface="Calibri" pitchFamily="34" charset="-120"/>
-              </a:rPr>
-              <a:t>Twitter/X</a:t>
-            </a:r>
-            <a:endParaRPr lang="en-US" sz="1250" dirty="0"/>
-          </a:p>
-        </p:txBody>
-      </p:sp>
-      <p:sp>
-        <p:nvSpPr>
-          <p:cNvPr id="10" name="Text 8"/>
-          <p:cNvSpPr txBox="1"/>
-          <p:nvPr/>
-        </p:nvSpPr>
-        <p:spPr>
-          <a:xfrm>
-            <a:off x="822960" y="3657600"/>
-            <a:ext cx="4663440" cy="640080"/>
-          </a:xfrm>
-          <a:prstGeom prst="rect">
-            <a:avLst/>
-          </a:prstGeom>
-          <a:noFill/>
-          <a:ln/>
-        </p:spPr>
-        <p:txBody>
-          <a:bodyPr wrap="square" lIns="0" tIns="0" rIns="0" bIns="0" rtlCol="0" anchor="ctr"/>
-          <a:lstStyle/>
-          <a:p>
-            <a:pPr indent="0" marL="0">
-              <a:buNone/>
-            </a:pPr>
-            <a:r>
-              <a:rPr lang="en-US" sz="1050" dirty="0">
-                <a:solidFill>
-                  <a:srgbClr val="5B6472"/>
-                </a:solidFill>
-                <a:latin typeface="Calibri" pitchFamily="34" charset="0"/>
-                <a:ea typeface="Calibri" pitchFamily="34" charset="-122"/>
-                <a:cs typeface="Calibri" pitchFamily="34" charset="-120"/>
-              </a:rPr>
-              <a:t>自分の発信単独では弱いが、フォロワーの多いインフルエンサーが拡散すると効果大</a:t>
-            </a:r>
-            <a:endParaRPr lang="en-US" sz="1050" dirty="0"/>
-          </a:p>
-        </p:txBody>
-      </p:sp>
-      <p:sp>
-        <p:nvSpPr>
-          <p:cNvPr id="11" name="Text 9"/>
-          <p:cNvSpPr txBox="1"/>
-          <p:nvPr/>
-        </p:nvSpPr>
-        <p:spPr>
-          <a:xfrm>
-            <a:off x="822960" y="4206240"/>
-            <a:ext cx="4663440" cy="274320"/>
-          </a:xfrm>
-          <a:prstGeom prst="rect">
-            <a:avLst/>
-          </a:prstGeom>
-          <a:noFill/>
-          <a:ln/>
-        </p:spPr>
-        <p:txBody>
-          <a:bodyPr wrap="square" lIns="0" tIns="0" rIns="0" bIns="0" rtlCol="0" anchor="ctr"/>
-          <a:lstStyle/>
-          <a:p>
-            <a:pPr indent="0" marL="0">
-              <a:buNone/>
-            </a:pPr>
-            <a:r>
-              <a:rPr lang="en-US" sz="1250" b="1" dirty="0">
-                <a:solidFill>
-                  <a:srgbClr val="1A1F26"/>
-                </a:solidFill>
-                <a:latin typeface="Calibri" pitchFamily="34" charset="0"/>
-                <a:ea typeface="Calibri" pitchFamily="34" charset="-122"/>
-                <a:cs typeface="Calibri" pitchFamily="34" charset="-120"/>
-              </a:rPr>
-              <a:t>GitHub内の連鎖</a:t>
-            </a:r>
-            <a:endParaRPr lang="en-US" sz="1250" dirty="0"/>
-          </a:p>
-        </p:txBody>
-      </p:sp>
-      <p:sp>
-        <p:nvSpPr>
-          <p:cNvPr id="12" name="Text 10"/>
-          <p:cNvSpPr txBox="1"/>
-          <p:nvPr/>
-        </p:nvSpPr>
-        <p:spPr>
-          <a:xfrm>
-            <a:off x="822960" y="4480560"/>
-            <a:ext cx="4663440" cy="640080"/>
-          </a:xfrm>
-          <a:prstGeom prst="rect">
-            <a:avLst/>
-          </a:prstGeom>
-          <a:noFill/>
-          <a:ln/>
-        </p:spPr>
-        <p:txBody>
-          <a:bodyPr wrap="square" lIns="0" tIns="0" rIns="0" bIns="0" rtlCol="0" anchor="ctr"/>
-          <a:lstStyle/>
-          <a:p>
-            <a:pPr indent="0" marL="0">
-              <a:buNone/>
-            </a:pPr>
-            <a:r>
-              <a:rPr lang="en-US" sz="1050" dirty="0">
-                <a:solidFill>
-                  <a:srgbClr val="5B6472"/>
-                </a:solidFill>
-                <a:latin typeface="Calibri" pitchFamily="34" charset="0"/>
-                <a:ea typeface="Calibri" pitchFamily="34" charset="-122"/>
-                <a:cs typeface="Calibri" pitchFamily="34" charset="-120"/>
-              </a:rPr>
-              <a:t>フォロー中ユーザーがStarしたリポジトリがフィードに流れる仕組みがあり、フォロワーの多い人がStarすると連鎖的に増える</a:t>
-            </a:r>
-            <a:endParaRPr lang="en-US" sz="1050" dirty="0"/>
-          </a:p>
-        </p:txBody>
-      </p:sp>
-      <p:sp>
-        <p:nvSpPr>
-          <p:cNvPr id="13" name="Text 11"/>
-          <p:cNvSpPr txBox="1"/>
-          <p:nvPr/>
-        </p:nvSpPr>
-        <p:spPr>
-          <a:xfrm>
-            <a:off x="822960" y="5029200"/>
-            <a:ext cx="4663440" cy="274320"/>
-          </a:xfrm>
-          <a:prstGeom prst="rect">
-            <a:avLst/>
-          </a:prstGeom>
-          <a:noFill/>
-          <a:ln/>
-        </p:spPr>
-        <p:txBody>
-          <a:bodyPr wrap="square" lIns="0" tIns="0" rIns="0" bIns="0" rtlCol="0" anchor="ctr"/>
-          <a:lstStyle/>
-          <a:p>
-            <a:pPr indent="0" marL="0">
-              <a:buNone/>
-            </a:pPr>
-            <a:r>
-              <a:rPr lang="en-US" sz="1250" b="1" dirty="0">
-                <a:solidFill>
-                  <a:srgbClr val="1A1F26"/>
-                </a:solidFill>
-                <a:latin typeface="Calibri" pitchFamily="34" charset="0"/>
-                <a:ea typeface="Calibri" pitchFamily="34" charset="-122"/>
-                <a:cs typeface="Calibri" pitchFamily="34" charset="-120"/>
-              </a:rPr>
-              <a:t>韓国版HN(news.hada.io)</a:t>
-            </a:r>
-            <a:endParaRPr lang="en-US" sz="1250" dirty="0"/>
-          </a:p>
-        </p:txBody>
-      </p:sp>
-      <p:sp>
-        <p:nvSpPr>
-          <p:cNvPr id="14" name="Text 12"/>
-          <p:cNvSpPr txBox="1"/>
-          <p:nvPr/>
-        </p:nvSpPr>
-        <p:spPr>
-          <a:xfrm>
-            <a:off x="822960" y="5303520"/>
-            <a:ext cx="4663440" cy="640080"/>
-          </a:xfrm>
-          <a:prstGeom prst="rect">
-            <a:avLst/>
-          </a:prstGeom>
-          <a:noFill/>
-          <a:ln/>
-        </p:spPr>
-        <p:txBody>
-          <a:bodyPr wrap="square" lIns="0" tIns="0" rIns="0" bIns="0" rtlCol="0" anchor="ctr"/>
-          <a:lstStyle/>
-          <a:p>
-            <a:pPr indent="0" marL="0">
-              <a:buNone/>
-            </a:pPr>
-            <a:r>
-              <a:rPr lang="en-US" sz="1050" dirty="0">
-                <a:solidFill>
-                  <a:srgbClr val="5B6472"/>
-                </a:solidFill>
-                <a:latin typeface="Calibri" pitchFamily="34" charset="0"/>
-                <a:ea typeface="Calibri" pitchFamily="34" charset="-122"/>
-                <a:cs typeface="Calibri" pitchFamily="34" charset="-120"/>
-              </a:rPr>
-              <a:t>現地の誰かが投稿したことで、そこから約40スターが集まった</a:t>
-            </a:r>
-            <a:endParaRPr lang="en-US" sz="1050" dirty="0"/>
-          </a:p>
-        </p:txBody>
-      </p:sp>
-      <p:sp>
-        <p:nvSpPr>
-          <p:cNvPr id="15" name="Shape 13"/>
+              <a:t>GitHub Stars</a:t>
+            </a:r>
+            <a:endParaRPr lang="en-US" sz="1150" dirty="0"/>
+          </a:p>
+        </p:txBody>
+      </p:sp>
+      <p:sp>
+        <p:nvSpPr>
+          <p:cNvPr id="8" name="Shape 6"/>
           <p:cNvSpPr/>
           <p:nvPr/>
         </p:nvSpPr>
         <p:spPr>
           <a:xfrm>
-            <a:off x="6035040" y="1920240"/>
-            <a:ext cx="5212080" cy="3931920"/>
+            <a:off x="4206240" y="1920240"/>
+            <a:ext cx="3429000" cy="1371600"/>
           </a:xfrm>
           <a:prstGeom prst="roundRect">
             <a:avLst>
-              <a:gd name="adj" fmla="val 2326"/>
+              <a:gd name="adj" fmla="val 6667"/>
             </a:avLst>
           </a:prstGeom>
           <a:solidFill>
@@ -2784,362 +2607,353 @@
             </a:solidFill>
             <a:prstDash val="solid"/>
           </a:ln>
-        </p:spPr>
+          <a:effectLst>
+            <a:outerShdw sx="100000" sy="100000" kx="0" ky="0" algn="bl" rotWithShape="0" blurRad="76200" dist="25400" dir="5400000">
+              <a:srgbClr val="000000">
+                <a:alpha val="10000"/>
+              </a:srgbClr>
+            </a:outerShdw>
+          </a:effectLst>
+        </p:spPr>
+      </p:sp>
+      <p:sp>
+        <p:nvSpPr>
+          <p:cNvPr id="9" name="Text 7"/>
+          <p:cNvSpPr txBox="1"/>
+          <p:nvPr/>
+        </p:nvSpPr>
+        <p:spPr>
+          <a:xfrm>
+            <a:off x="4389120" y="2057400"/>
+            <a:ext cx="3063240" cy="594360"/>
+          </a:xfrm>
+          <a:prstGeom prst="rect">
+            <a:avLst/>
+          </a:prstGeom>
+          <a:noFill/>
+          <a:ln/>
+        </p:spPr>
+        <p:txBody>
+          <a:bodyPr wrap="square" lIns="0" tIns="0" rIns="0" bIns="0" rtlCol="0" anchor="ctr"/>
+          <a:lstStyle/>
+          <a:p>
+            <a:pPr indent="0" marL="0">
+              <a:buNone/>
+            </a:pPr>
+            <a:r>
+              <a:rPr lang="en-US" sz="2400" b="1" dirty="0">
+                <a:solidFill>
+                  <a:srgbClr val="B084F5"/>
+                </a:solidFill>
+                <a:latin typeface="Calibri" pitchFamily="34" charset="0"/>
+                <a:ea typeface="Calibri" pitchFamily="34" charset="-122"/>
+                <a:cs typeface="Calibri" pitchFamily="34" charset="-120"/>
+              </a:rPr>
+              <a:t>1.6B+/月</a:t>
+            </a:r>
+            <a:endParaRPr lang="en-US" sz="2400" dirty="0"/>
+          </a:p>
+        </p:txBody>
+      </p:sp>
+      <p:sp>
+        <p:nvSpPr>
+          <p:cNvPr id="10" name="Text 8"/>
+          <p:cNvSpPr txBox="1"/>
+          <p:nvPr/>
+        </p:nvSpPr>
+        <p:spPr>
+          <a:xfrm>
+            <a:off x="4389120" y="2697480"/>
+            <a:ext cx="3063240" cy="457200"/>
+          </a:xfrm>
+          <a:prstGeom prst="rect">
+            <a:avLst/>
+          </a:prstGeom>
+          <a:noFill/>
+          <a:ln/>
+        </p:spPr>
+        <p:txBody>
+          <a:bodyPr wrap="square" lIns="0" tIns="0" rIns="0" bIns="0" rtlCol="0" anchor="ctr"/>
+          <a:lstStyle/>
+          <a:p>
+            <a:pPr indent="0" marL="0">
+              <a:buNone/>
+            </a:pPr>
+            <a:r>
+              <a:rPr lang="en-US" sz="1150" dirty="0">
+                <a:solidFill>
+                  <a:srgbClr val="5B6472"/>
+                </a:solidFill>
+                <a:latin typeface="Calibri" pitchFamily="34" charset="0"/>
+                <a:ea typeface="Calibri" pitchFamily="34" charset="-122"/>
+                <a:cs typeface="Calibri" pitchFamily="34" charset="-120"/>
+              </a:rPr>
+              <a:t>配信バッジ画像数</a:t>
+            </a:r>
+            <a:endParaRPr lang="en-US" sz="1150" dirty="0"/>
+          </a:p>
+        </p:txBody>
+      </p:sp>
+      <p:sp>
+        <p:nvSpPr>
+          <p:cNvPr id="11" name="Shape 9"/>
+          <p:cNvSpPr/>
+          <p:nvPr/>
+        </p:nvSpPr>
+        <p:spPr>
+          <a:xfrm>
+            <a:off x="7863840" y="1920240"/>
+            <a:ext cx="3429000" cy="1371600"/>
+          </a:xfrm>
+          <a:prstGeom prst="roundRect">
+            <a:avLst>
+              <a:gd name="adj" fmla="val 6667"/>
+            </a:avLst>
+          </a:prstGeom>
+          <a:solidFill>
+            <a:srgbClr val="FFFFFF"/>
+          </a:solidFill>
+          <a:ln w="12700">
+            <a:solidFill>
+              <a:srgbClr val="E3E6EA"/>
+            </a:solidFill>
+            <a:prstDash val="solid"/>
+          </a:ln>
+          <a:effectLst>
+            <a:outerShdw sx="100000" sy="100000" kx="0" ky="0" algn="bl" rotWithShape="0" blurRad="76200" dist="25400" dir="5400000">
+              <a:srgbClr val="000000">
+                <a:alpha val="10000"/>
+              </a:srgbClr>
+            </a:outerShdw>
+          </a:effectLst>
+        </p:spPr>
+      </p:sp>
+      <p:sp>
+        <p:nvSpPr>
+          <p:cNvPr id="12" name="Text 10"/>
+          <p:cNvSpPr txBox="1"/>
+          <p:nvPr/>
+        </p:nvSpPr>
+        <p:spPr>
+          <a:xfrm>
+            <a:off x="8046720" y="2057400"/>
+            <a:ext cx="3063240" cy="594360"/>
+          </a:xfrm>
+          <a:prstGeom prst="rect">
+            <a:avLst/>
+          </a:prstGeom>
+          <a:noFill/>
+          <a:ln/>
+        </p:spPr>
+        <p:txBody>
+          <a:bodyPr wrap="square" lIns="0" tIns="0" rIns="0" bIns="0" rtlCol="0" anchor="ctr"/>
+          <a:lstStyle/>
+          <a:p>
+            <a:pPr indent="0" marL="0">
+              <a:buNone/>
+            </a:pPr>
+            <a:r>
+              <a:rPr lang="en-US" sz="2400" b="1" dirty="0">
+                <a:solidFill>
+                  <a:srgbClr val="B084F5"/>
+                </a:solidFill>
+                <a:latin typeface="Calibri" pitchFamily="34" charset="0"/>
+                <a:ea typeface="Calibri" pitchFamily="34" charset="-122"/>
+                <a:cs typeface="Calibri" pitchFamily="34" charset="-120"/>
+              </a:rPr>
+              <a:t>MIT / Apache 2.0</a:t>
+            </a:r>
+            <a:endParaRPr lang="en-US" sz="2400" dirty="0"/>
+          </a:p>
+        </p:txBody>
+      </p:sp>
+      <p:sp>
+        <p:nvSpPr>
+          <p:cNvPr id="13" name="Text 11"/>
+          <p:cNvSpPr txBox="1"/>
+          <p:nvPr/>
+        </p:nvSpPr>
+        <p:spPr>
+          <a:xfrm>
+            <a:off x="8046720" y="2697480"/>
+            <a:ext cx="3063240" cy="457200"/>
+          </a:xfrm>
+          <a:prstGeom prst="rect">
+            <a:avLst/>
+          </a:prstGeom>
+          <a:noFill/>
+          <a:ln/>
+        </p:spPr>
+        <p:txBody>
+          <a:bodyPr wrap="square" lIns="0" tIns="0" rIns="0" bIns="0" rtlCol="0" anchor="ctr"/>
+          <a:lstStyle/>
+          <a:p>
+            <a:pPr indent="0" marL="0">
+              <a:buNone/>
+            </a:pPr>
+            <a:r>
+              <a:rPr lang="en-US" sz="1150" dirty="0">
+                <a:solidFill>
+                  <a:srgbClr val="5B6472"/>
+                </a:solidFill>
+                <a:latin typeface="Calibri" pitchFamily="34" charset="0"/>
+                <a:ea typeface="Calibri" pitchFamily="34" charset="-122"/>
+                <a:cs typeface="Calibri" pitchFamily="34" charset="-120"/>
+              </a:rPr>
+              <a:t>デュアルライセンス</a:t>
+            </a:r>
+            <a:endParaRPr lang="en-US" sz="1150" dirty="0"/>
+          </a:p>
+        </p:txBody>
+      </p:sp>
+      <p:sp>
+        <p:nvSpPr>
+          <p:cNvPr id="14" name="Text 12"/>
+          <p:cNvSpPr txBox="1"/>
+          <p:nvPr/>
+        </p:nvSpPr>
+        <p:spPr>
+          <a:xfrm>
+            <a:off x="548640" y="3566160"/>
+            <a:ext cx="10607040" cy="365760"/>
+          </a:xfrm>
+          <a:prstGeom prst="rect">
+            <a:avLst/>
+          </a:prstGeom>
+          <a:noFill/>
+          <a:ln/>
+        </p:spPr>
+        <p:txBody>
+          <a:bodyPr wrap="square" lIns="0" tIns="0" rIns="0" bIns="0" rtlCol="0" anchor="ctr"/>
+          <a:lstStyle/>
+          <a:p>
+            <a:pPr indent="0" marL="0">
+              <a:buNone/>
+            </a:pPr>
+            <a:r>
+              <a:rPr lang="en-US" sz="1400" b="1" dirty="0">
+                <a:solidFill>
+                  <a:srgbClr val="1A1F26"/>
+                </a:solidFill>
+                <a:latin typeface="Calibri" pitchFamily="34" charset="0"/>
+                <a:ea typeface="Calibri" pitchFamily="34" charset="-122"/>
+                <a:cs typeface="Calibri" pitchFamily="34" charset="-120"/>
+              </a:rPr>
+              <a:t>貢献のしやすさ(実際に確認できる情報)</a:t>
+            </a:r>
+            <a:endParaRPr lang="en-US" sz="1400" dirty="0"/>
+          </a:p>
+        </p:txBody>
+      </p:sp>
+      <p:sp>
+        <p:nvSpPr>
+          <p:cNvPr id="15" name="Text 13"/>
+          <p:cNvSpPr txBox="1"/>
+          <p:nvPr/>
+        </p:nvSpPr>
+        <p:spPr>
+          <a:xfrm>
+            <a:off x="548640" y="3977640"/>
+            <a:ext cx="10607040" cy="1737360"/>
+          </a:xfrm>
+          <a:prstGeom prst="rect">
+            <a:avLst/>
+          </a:prstGeom>
+          <a:noFill/>
+          <a:ln/>
+        </p:spPr>
+        <p:txBody>
+          <a:bodyPr wrap="square" lIns="0" tIns="0" rIns="0" bIns="0" rtlCol="0" anchor="ctr"/>
+          <a:lstStyle/>
+          <a:p>
+            <a:pPr marL="342900" indent="-342900">
+              <a:spcAft>
+                <a:spcPts val="600"/>
+              </a:spcAft>
+              <a:buSzPct val="100000"/>
+              <a:buChar char="•"/>
+            </a:pPr>
+            <a:r>
+              <a:rPr lang="en-US" sz="1250" dirty="0">
+                <a:solidFill>
+                  <a:srgbClr val="5B6472"/>
+                </a:solidFill>
+                <a:latin typeface="Calibri" pitchFamily="34" charset="0"/>
+                <a:ea typeface="Calibri" pitchFamily="34" charset="-122"/>
+                <a:cs typeface="Calibri" pitchFamily="34" charset="-120"/>
+              </a:rPr>
+              <a:t>CONTRIBUTING.md に貢献ガイドラインが整備されている</a:t>
+            </a:r>
+            <a:endParaRPr lang="en-US" sz="1250" dirty="0"/>
+          </a:p>
+          <a:p>
+            <a:pPr marL="342900" indent="-342900">
+              <a:spcAft>
+                <a:spcPts val="600"/>
+              </a:spcAft>
+              <a:buSzPct val="100000"/>
+              <a:buChar char="•"/>
+            </a:pPr>
+            <a:r>
+              <a:rPr lang="en-US" sz="1250" dirty="0">
+                <a:solidFill>
+                  <a:srgbClr val="5B6472"/>
+                </a:solidFill>
+                <a:latin typeface="Calibri" pitchFamily="34" charset="0"/>
+                <a:ea typeface="Calibri" pitchFamily="34" charset="-122"/>
+                <a:cs typeface="Calibri" pitchFamily="34" charset="-120"/>
+              </a:rPr>
+              <a:t>good-first-issue ラベルの付いた初心者向けタスクがある</a:t>
+            </a:r>
+            <a:endParaRPr lang="en-US" sz="1250" dirty="0"/>
+          </a:p>
+          <a:p>
+            <a:pPr marL="342900" indent="-342900">
+              <a:spcAft>
+                <a:spcPts val="600"/>
+              </a:spcAft>
+              <a:buSzPct val="100000"/>
+              <a:buChar char="•"/>
+            </a:pPr>
+            <a:r>
+              <a:rPr lang="en-US" sz="1250" dirty="0">
+                <a:solidFill>
+                  <a:srgbClr val="5B6472"/>
+                </a:solidFill>
+                <a:latin typeface="Calibri" pitchFamily="34" charset="0"/>
+                <a:ea typeface="Calibri" pitchFamily="34" charset="-122"/>
+                <a:cs typeface="Calibri" pitchFamily="34" charset="-120"/>
+              </a:rPr>
+              <a:t>新しいバッジ追加のチュートリアルも用意されている(VS Code・Vue.js・Bootstrap等の著名プロジェクトも利用)</a:t>
+            </a:r>
+            <a:endParaRPr lang="en-US" sz="1250" dirty="0"/>
+          </a:p>
+          <a:p>
+            <a:pPr marL="342900" indent="-342900">
+              <a:spcAft>
+                <a:spcPts val="600"/>
+              </a:spcAft>
+              <a:buSzPct val="100000"/>
+              <a:buChar char="•"/>
+            </a:pPr>
+            <a:r>
+              <a:rPr lang="en-US" sz="1250" dirty="0">
+                <a:solidFill>
+                  <a:srgbClr val="5B6472"/>
+                </a:solidFill>
+                <a:latin typeface="Calibri" pitchFamily="34" charset="0"/>
+                <a:ea typeface="Calibri" pitchFamily="34" charset="-122"/>
+                <a:cs typeface="Calibri" pitchFamily="34" charset="-120"/>
+              </a:rPr>
+              <a:t>SECURITY.md による脆弱性報告ポリシーも整備済み(セキュリティ関連の貢献も歓迎)</a:t>
+            </a:r>
+            <a:endParaRPr lang="en-US" sz="1250" dirty="0"/>
+          </a:p>
+        </p:txBody>
       </p:sp>
       <p:sp>
         <p:nvSpPr>
           <p:cNvPr id="16" name="Text 14"/>
-          <p:cNvSpPr txBox="1"/>
-          <p:nvPr/>
-        </p:nvSpPr>
-        <p:spPr>
-          <a:xfrm>
-            <a:off x="6309360" y="2103120"/>
-            <a:ext cx="4754880" cy="365760"/>
-          </a:xfrm>
-          <a:prstGeom prst="rect">
-            <a:avLst/>
-          </a:prstGeom>
-          <a:noFill/>
-          <a:ln/>
-        </p:spPr>
-        <p:txBody>
-          <a:bodyPr wrap="square" lIns="0" tIns="0" rIns="0" bIns="0" rtlCol="0" anchor="ctr"/>
-          <a:lstStyle/>
-          <a:p>
-            <a:pPr indent="0" marL="0">
-              <a:buNone/>
-            </a:pPr>
-            <a:r>
-              <a:rPr lang="en-US" sz="1400" b="1" dirty="0">
-                <a:solidFill>
-                  <a:srgbClr val="6B7280"/>
-                </a:solidFill>
-                <a:latin typeface="Calibri" pitchFamily="34" charset="0"/>
-                <a:ea typeface="Calibri" pitchFamily="34" charset="-122"/>
-                <a:cs typeface="Calibri" pitchFamily="34" charset="-120"/>
-              </a:rPr>
-              <a:t>🪦 効果が薄かったチャネル</a:t>
-            </a:r>
-            <a:endParaRPr lang="en-US" sz="1400" dirty="0"/>
-          </a:p>
-        </p:txBody>
-      </p:sp>
-      <p:sp>
-        <p:nvSpPr>
-          <p:cNvPr id="17" name="Text 15"/>
-          <p:cNvSpPr txBox="1"/>
-          <p:nvPr/>
-        </p:nvSpPr>
-        <p:spPr>
-          <a:xfrm>
-            <a:off x="6309360" y="2560320"/>
-            <a:ext cx="4663440" cy="274320"/>
-          </a:xfrm>
-          <a:prstGeom prst="rect">
-            <a:avLst/>
-          </a:prstGeom>
-          <a:noFill/>
-          <a:ln/>
-        </p:spPr>
-        <p:txBody>
-          <a:bodyPr wrap="square" lIns="0" tIns="0" rIns="0" bIns="0" rtlCol="0" anchor="ctr"/>
-          <a:lstStyle/>
-          <a:p>
-            <a:pPr indent="0" marL="0">
-              <a:buNone/>
-            </a:pPr>
-            <a:r>
-              <a:rPr lang="en-US" sz="1250" b="1" dirty="0">
-                <a:solidFill>
-                  <a:srgbClr val="1A1F26"/>
-                </a:solidFill>
-                <a:latin typeface="Calibri" pitchFamily="34" charset="0"/>
-                <a:ea typeface="Calibri" pitchFamily="34" charset="-122"/>
-                <a:cs typeface="Calibri" pitchFamily="34" charset="-120"/>
-              </a:rPr>
-              <a:t>Reddit</a:t>
-            </a:r>
-            <a:endParaRPr lang="en-US" sz="1250" dirty="0"/>
-          </a:p>
-        </p:txBody>
-      </p:sp>
-      <p:sp>
-        <p:nvSpPr>
-          <p:cNvPr id="18" name="Text 16"/>
-          <p:cNvSpPr txBox="1"/>
-          <p:nvPr/>
-        </p:nvSpPr>
-        <p:spPr>
-          <a:xfrm>
-            <a:off x="6309360" y="2834640"/>
-            <a:ext cx="4663440" cy="640080"/>
-          </a:xfrm>
-          <a:prstGeom prst="rect">
-            <a:avLst/>
-          </a:prstGeom>
-          <a:noFill/>
-          <a:ln/>
-        </p:spPr>
-        <p:txBody>
-          <a:bodyPr wrap="square" lIns="0" tIns="0" rIns="0" bIns="0" rtlCol="0" anchor="ctr"/>
-          <a:lstStyle/>
-          <a:p>
-            <a:pPr indent="0" marL="0">
-              <a:buNone/>
-            </a:pPr>
-            <a:r>
-              <a:rPr lang="en-US" sz="1050" dirty="0">
-                <a:solidFill>
-                  <a:srgbClr val="5B6472"/>
-                </a:solidFill>
-                <a:latin typeface="Calibri" pitchFamily="34" charset="0"/>
-                <a:ea typeface="Calibri" pitchFamily="34" charset="-122"/>
-                <a:cs typeface="Calibri" pitchFamily="34" charset="-120"/>
-              </a:rPr>
-              <a:t>投稿は伸びにくいことが多い(閲覧2.4kでUpvote6等)。ただしやり方次第で化ける可能性はある</a:t>
-            </a:r>
-            <a:endParaRPr lang="en-US" sz="1050" dirty="0"/>
-          </a:p>
-        </p:txBody>
-      </p:sp>
-      <p:sp>
-        <p:nvSpPr>
-          <p:cNvPr id="19" name="Text 17"/>
-          <p:cNvSpPr txBox="1"/>
-          <p:nvPr/>
-        </p:nvSpPr>
-        <p:spPr>
-          <a:xfrm>
-            <a:off x="6309360" y="3383280"/>
-            <a:ext cx="4663440" cy="274320"/>
-          </a:xfrm>
-          <a:prstGeom prst="rect">
-            <a:avLst/>
-          </a:prstGeom>
-          <a:noFill/>
-          <a:ln/>
-        </p:spPr>
-        <p:txBody>
-          <a:bodyPr wrap="square" lIns="0" tIns="0" rIns="0" bIns="0" rtlCol="0" anchor="ctr"/>
-          <a:lstStyle/>
-          <a:p>
-            <a:pPr indent="0" marL="0">
-              <a:buNone/>
-            </a:pPr>
-            <a:r>
-              <a:rPr lang="en-US" sz="1250" b="1" dirty="0">
-                <a:solidFill>
-                  <a:srgbClr val="1A1F26"/>
-                </a:solidFill>
-                <a:latin typeface="Calibri" pitchFamily="34" charset="0"/>
-                <a:ea typeface="Calibri" pitchFamily="34" charset="-122"/>
-                <a:cs typeface="Calibri" pitchFamily="34" charset="-120"/>
-              </a:rPr>
-              <a:t>Product Hunt</a:t>
-            </a:r>
-            <a:endParaRPr lang="en-US" sz="1250" dirty="0"/>
-          </a:p>
-        </p:txBody>
-      </p:sp>
-      <p:sp>
-        <p:nvSpPr>
-          <p:cNvPr id="20" name="Text 18"/>
-          <p:cNvSpPr txBox="1"/>
-          <p:nvPr/>
-        </p:nvSpPr>
-        <p:spPr>
-          <a:xfrm>
-            <a:off x="6309360" y="3657600"/>
-            <a:ext cx="4663440" cy="640080"/>
-          </a:xfrm>
-          <a:prstGeom prst="rect">
-            <a:avLst/>
-          </a:prstGeom>
-          <a:noFill/>
-          <a:ln/>
-        </p:spPr>
-        <p:txBody>
-          <a:bodyPr wrap="square" lIns="0" tIns="0" rIns="0" bIns="0" rtlCol="0" anchor="ctr"/>
-          <a:lstStyle/>
-          <a:p>
-            <a:pPr indent="0" marL="0">
-              <a:buNone/>
-            </a:pPr>
-            <a:r>
-              <a:rPr lang="en-US" sz="1050" dirty="0">
-                <a:solidFill>
-                  <a:srgbClr val="5B6472"/>
-                </a:solidFill>
-                <a:latin typeface="Calibri" pitchFamily="34" charset="0"/>
-                <a:ea typeface="Calibri" pitchFamily="34" charset="-122"/>
-                <a:cs typeface="Calibri" pitchFamily="34" charset="-120"/>
-              </a:rPr>
-              <a:t>AI関連プロダクトが多く、その他のプロダクトは埋もれやすい</a:t>
-            </a:r>
-            <a:endParaRPr lang="en-US" sz="1050" dirty="0"/>
-          </a:p>
-        </p:txBody>
-      </p:sp>
-      <p:sp>
-        <p:nvSpPr>
-          <p:cNvPr id="21" name="Text 19"/>
-          <p:cNvSpPr txBox="1"/>
-          <p:nvPr/>
-        </p:nvSpPr>
-        <p:spPr>
-          <a:xfrm>
-            <a:off x="6309360" y="4206240"/>
-            <a:ext cx="4663440" cy="274320"/>
-          </a:xfrm>
-          <a:prstGeom prst="rect">
-            <a:avLst/>
-          </a:prstGeom>
-          <a:noFill/>
-          <a:ln/>
-        </p:spPr>
-        <p:txBody>
-          <a:bodyPr wrap="square" lIns="0" tIns="0" rIns="0" bIns="0" rtlCol="0" anchor="ctr"/>
-          <a:lstStyle/>
-          <a:p>
-            <a:pPr indent="0" marL="0">
-              <a:buNone/>
-            </a:pPr>
-            <a:r>
-              <a:rPr lang="en-US" sz="1250" b="1" dirty="0">
-                <a:solidFill>
-                  <a:srgbClr val="1A1F26"/>
-                </a:solidFill>
-                <a:latin typeface="Calibri" pitchFamily="34" charset="0"/>
-                <a:ea typeface="Calibri" pitchFamily="34" charset="-122"/>
-                <a:cs typeface="Calibri" pitchFamily="34" charset="-120"/>
-              </a:rPr>
-              <a:t>Awesomeリストへの追加PR</a:t>
-            </a:r>
-            <a:endParaRPr lang="en-US" sz="1250" dirty="0"/>
-          </a:p>
-        </p:txBody>
-      </p:sp>
-      <p:sp>
-        <p:nvSpPr>
-          <p:cNvPr id="22" name="Text 20"/>
-          <p:cNvSpPr txBox="1"/>
-          <p:nvPr/>
-        </p:nvSpPr>
-        <p:spPr>
-          <a:xfrm>
-            <a:off x="6309360" y="4480560"/>
-            <a:ext cx="4663440" cy="640080"/>
-          </a:xfrm>
-          <a:prstGeom prst="rect">
-            <a:avLst/>
-          </a:prstGeom>
-          <a:noFill/>
-          <a:ln/>
-        </p:spPr>
-        <p:txBody>
-          <a:bodyPr wrap="square" lIns="0" tIns="0" rIns="0" bIns="0" rtlCol="0" anchor="ctr"/>
-          <a:lstStyle/>
-          <a:p>
-            <a:pPr indent="0" marL="0">
-              <a:buNone/>
-            </a:pPr>
-            <a:r>
-              <a:rPr lang="en-US" sz="1050" dirty="0">
-                <a:solidFill>
-                  <a:srgbClr val="5B6472"/>
-                </a:solidFill>
-                <a:latin typeface="Calibri" pitchFamily="34" charset="0"/>
-                <a:ea typeface="Calibri" pitchFamily="34" charset="-122"/>
-                <a:cs typeface="Calibri" pitchFamily="34" charset="-120"/>
-              </a:rPr>
-              <a:t>掲載されても閲覧者自体が少ない</a:t>
-            </a:r>
-            <a:endParaRPr lang="en-US" sz="1050" dirty="0"/>
-          </a:p>
-        </p:txBody>
-      </p:sp>
-      <p:sp>
-        <p:nvSpPr>
-          <p:cNvPr id="23" name="Text 21"/>
-          <p:cNvSpPr txBox="1"/>
-          <p:nvPr/>
-        </p:nvSpPr>
-        <p:spPr>
-          <a:xfrm>
-            <a:off x="6309360" y="5029200"/>
-            <a:ext cx="4663440" cy="274320"/>
-          </a:xfrm>
-          <a:prstGeom prst="rect">
-            <a:avLst/>
-          </a:prstGeom>
-          <a:noFill/>
-          <a:ln/>
-        </p:spPr>
-        <p:txBody>
-          <a:bodyPr wrap="square" lIns="0" tIns="0" rIns="0" bIns="0" rtlCol="0" anchor="ctr"/>
-          <a:lstStyle/>
-          <a:p>
-            <a:pPr indent="0" marL="0">
-              <a:buNone/>
-            </a:pPr>
-            <a:r>
-              <a:rPr lang="en-US" sz="1250" b="1" dirty="0">
-                <a:solidFill>
-                  <a:srgbClr val="1A1F26"/>
-                </a:solidFill>
-                <a:latin typeface="Calibri" pitchFamily="34" charset="0"/>
-                <a:ea typeface="Calibri" pitchFamily="34" charset="-122"/>
-                <a:cs typeface="Calibri" pitchFamily="34" charset="-120"/>
-              </a:rPr>
-              <a:t>個人ブログ</a:t>
-            </a:r>
-            <a:endParaRPr lang="en-US" sz="1250" dirty="0"/>
-          </a:p>
-        </p:txBody>
-      </p:sp>
-      <p:sp>
-        <p:nvSpPr>
-          <p:cNvPr id="24" name="Text 22"/>
-          <p:cNvSpPr txBox="1"/>
-          <p:nvPr/>
-        </p:nvSpPr>
-        <p:spPr>
-          <a:xfrm>
-            <a:off x="6309360" y="5303520"/>
-            <a:ext cx="4663440" cy="640080"/>
-          </a:xfrm>
-          <a:prstGeom prst="rect">
-            <a:avLst/>
-          </a:prstGeom>
-          <a:noFill/>
-          <a:ln/>
-        </p:spPr>
-        <p:txBody>
-          <a:bodyPr wrap="square" lIns="0" tIns="0" rIns="0" bIns="0" rtlCol="0" anchor="ctr"/>
-          <a:lstStyle/>
-          <a:p>
-            <a:pPr indent="0" marL="0">
-              <a:buNone/>
-            </a:pPr>
-            <a:r>
-              <a:rPr lang="en-US" sz="1050" dirty="0">
-                <a:solidFill>
-                  <a:srgbClr val="5B6472"/>
-                </a:solidFill>
-                <a:latin typeface="Calibri" pitchFamily="34" charset="0"/>
-                <a:ea typeface="Calibri" pitchFamily="34" charset="-122"/>
-                <a:cs typeface="Calibri" pitchFamily="34" charset="-120"/>
-              </a:rPr>
-              <a:t>Qiita/Zenn等の媒体力があるプラットフォームでないと、Twitter投稿とあまり変わらない手応え</a:t>
-            </a:r>
-            <a:endParaRPr lang="en-US" sz="1050" dirty="0"/>
-          </a:p>
-        </p:txBody>
-      </p:sp>
-      <p:sp>
-        <p:nvSpPr>
-          <p:cNvPr id="25" name="Text 23"/>
           <p:cNvSpPr txBox="1"/>
           <p:nvPr/>
         </p:nvSpPr>
@@ -3170,7 +2984,7 @@
                 <a:ea typeface="Calibri" pitchFamily="34" charset="-122"/>
                 <a:cs typeface="Calibri" pitchFamily="34" charset="-120"/>
               </a:rPr>
-              <a:t>出典: 個人開発者によるOSSプロジェクト「Ephe」のブログ記事(1事例の実測値。分野・タイミングにより結果は変動しうる)</a:t>
+              <a:t>出典: github.com/badges/shields(取得時点のスター数。日々変動するため参考値)</a:t>
             </a:r>
             <a:endParaRPr lang="en-US" sz="1000" dirty="0"/>
           </a:p>
@@ -3178,7 +2992,7 @@
       </p:sp>
       <p:sp>
         <p:nvSpPr>
-          <p:cNvPr id="26" name="Text 24"/>
+          <p:cNvPr id="17" name="Text 15"/>
           <p:cNvSpPr txBox="1"/>
           <p:nvPr/>
         </p:nvSpPr>
@@ -3226,6 +3040,989 @@
 <file path=ppt/slides/slide11.xml><?xml version="1.0" encoding="utf-8"?>
 <p:sld xmlns:a="http://schemas.openxmlformats.org/drawingml/2006/main" xmlns:r="http://schemas.openxmlformats.org/officeDocument/2006/relationships" xmlns:p="http://schemas.openxmlformats.org/presentationml/2006/main">
   <p:cSld name="Slide 11">
+    <p:bg>
+      <p:bgPr>
+        <a:solidFill>
+          <a:srgbClr val="F5F6F8"/>
+        </a:solidFill>
+      </p:bgPr>
+    </p:bg>
+    <p:spTree>
+      <p:nvGrpSpPr>
+        <p:cNvPr id="1" name=""/>
+        <p:cNvGrpSpPr/>
+        <p:nvPr/>
+      </p:nvGrpSpPr>
+      <p:grpSpPr>
+        <a:xfrm>
+          <a:off x="0" y="0"/>
+          <a:ext cx="0" cy="0"/>
+          <a:chOff x="0" y="0"/>
+          <a:chExt cx="0" cy="0"/>
+        </a:xfrm>
+      </p:grpSpPr>
+      <p:sp>
+        <p:nvSpPr>
+          <p:cNvPr id="2" name="Text 0"/>
+          <p:cNvSpPr txBox="1"/>
+          <p:nvPr/>
+        </p:nvSpPr>
+        <p:spPr>
+          <a:xfrm>
+            <a:off x="548640" y="457200"/>
+            <a:ext cx="731520" cy="731520"/>
+          </a:xfrm>
+          <a:prstGeom prst="rect">
+            <a:avLst/>
+          </a:prstGeom>
+          <a:noFill/>
+          <a:ln/>
+        </p:spPr>
+        <p:txBody>
+          <a:bodyPr wrap="square" lIns="0" tIns="0" rIns="0" bIns="0" rtlCol="0" anchor="ctr"/>
+          <a:lstStyle/>
+          <a:p>
+            <a:pPr indent="0" marL="0">
+              <a:buNone/>
+            </a:pPr>
+            <a:r>
+              <a:rPr lang="en-US" sz="2800" b="1" dirty="0">
+                <a:solidFill>
+                  <a:srgbClr val="B084F5"/>
+                </a:solidFill>
+                <a:latin typeface="Cambria" pitchFamily="34" charset="0"/>
+                <a:ea typeface="Cambria" pitchFamily="34" charset="-122"/>
+                <a:cs typeface="Cambria" pitchFamily="34" charset="-120"/>
+              </a:rPr>
+              <a:t>5</a:t>
+            </a:r>
+            <a:endParaRPr lang="en-US" sz="2800" dirty="0"/>
+          </a:p>
+        </p:txBody>
+      </p:sp>
+      <p:sp>
+        <p:nvSpPr>
+          <p:cNvPr id="3" name="Text 1"/>
+          <p:cNvSpPr txBox="1"/>
+          <p:nvPr/>
+        </p:nvSpPr>
+        <p:spPr>
+          <a:xfrm>
+            <a:off x="1280160" y="502920"/>
+            <a:ext cx="9784080" cy="640080"/>
+          </a:xfrm>
+          <a:prstGeom prst="rect">
+            <a:avLst/>
+          </a:prstGeom>
+          <a:noFill/>
+          <a:ln/>
+        </p:spPr>
+        <p:txBody>
+          <a:bodyPr wrap="square" lIns="0" tIns="0" rIns="0" bIns="0" rtlCol="0" anchor="ctr"/>
+          <a:lstStyle/>
+          <a:p>
+            <a:pPr indent="0" marL="0">
+              <a:buNone/>
+            </a:pPr>
+            <a:r>
+              <a:rPr lang="en-US" sz="2600" b="1" dirty="0">
+                <a:solidFill>
+                  <a:srgbClr val="1A1F26"/>
+                </a:solidFill>
+                <a:latin typeface="Cambria" pitchFamily="34" charset="0"/>
+                <a:ea typeface="Cambria" pitchFamily="34" charset="-122"/>
+                <a:cs typeface="Cambria" pitchFamily="34" charset="-120"/>
+              </a:rPr>
+              <a:t>宣伝チャネルの効果(実例ケーススタディ)</a:t>
+            </a:r>
+            <a:endParaRPr lang="en-US" sz="2600" dirty="0"/>
+          </a:p>
+        </p:txBody>
+      </p:sp>
+      <p:sp>
+        <p:nvSpPr>
+          <p:cNvPr id="4" name="Text 2"/>
+          <p:cNvSpPr txBox="1"/>
+          <p:nvPr/>
+        </p:nvSpPr>
+        <p:spPr>
+          <a:xfrm>
+            <a:off x="548640" y="1417320"/>
+            <a:ext cx="10607040" cy="365760"/>
+          </a:xfrm>
+          <a:prstGeom prst="rect">
+            <a:avLst/>
+          </a:prstGeom>
+          <a:noFill/>
+          <a:ln/>
+        </p:spPr>
+        <p:txBody>
+          <a:bodyPr wrap="square" lIns="0" tIns="0" rIns="0" bIns="0" rtlCol="0" anchor="ctr"/>
+          <a:lstStyle/>
+          <a:p>
+            <a:pPr indent="0" marL="0">
+              <a:buNone/>
+            </a:pPr>
+            <a:r>
+              <a:rPr lang="en-US" sz="1250" i="1" dirty="0">
+                <a:solidFill>
+                  <a:srgbClr val="5B6472"/>
+                </a:solidFill>
+                <a:latin typeface="Calibri" pitchFamily="34" charset="0"/>
+                <a:ea typeface="Calibri" pitchFamily="34" charset="-122"/>
+                <a:cs typeface="Calibri" pitchFamily="34" charset="-120"/>
+              </a:rPr>
+              <a:t>個人OSS開発者が、公開後数ヶ月で400+スターを集めた際の実測データ(1事例)</a:t>
+            </a:r>
+            <a:endParaRPr lang="en-US" sz="1250" dirty="0"/>
+          </a:p>
+        </p:txBody>
+      </p:sp>
+      <p:sp>
+        <p:nvSpPr>
+          <p:cNvPr id="5" name="Shape 3"/>
+          <p:cNvSpPr/>
+          <p:nvPr/>
+        </p:nvSpPr>
+        <p:spPr>
+          <a:xfrm>
+            <a:off x="548640" y="1920240"/>
+            <a:ext cx="5212080" cy="3931920"/>
+          </a:xfrm>
+          <a:prstGeom prst="roundRect">
+            <a:avLst>
+              <a:gd name="adj" fmla="val 2326"/>
+            </a:avLst>
+          </a:prstGeom>
+          <a:solidFill>
+            <a:srgbClr val="FFFFFF"/>
+          </a:solidFill>
+          <a:ln w="12700">
+            <a:solidFill>
+              <a:srgbClr val="E3E6EA"/>
+            </a:solidFill>
+            <a:prstDash val="solid"/>
+          </a:ln>
+        </p:spPr>
+      </p:sp>
+      <p:sp>
+        <p:nvSpPr>
+          <p:cNvPr id="6" name="Text 4"/>
+          <p:cNvSpPr txBox="1"/>
+          <p:nvPr/>
+        </p:nvSpPr>
+        <p:spPr>
+          <a:xfrm>
+            <a:off x="822960" y="2103120"/>
+            <a:ext cx="4754880" cy="365760"/>
+          </a:xfrm>
+          <a:prstGeom prst="rect">
+            <a:avLst/>
+          </a:prstGeom>
+          <a:noFill/>
+          <a:ln/>
+        </p:spPr>
+        <p:txBody>
+          <a:bodyPr wrap="square" lIns="0" tIns="0" rIns="0" bIns="0" rtlCol="0" anchor="ctr"/>
+          <a:lstStyle/>
+          <a:p>
+            <a:pPr indent="0" marL="0">
+              <a:buNone/>
+            </a:pPr>
+            <a:r>
+              <a:rPr lang="en-US" sz="1400" b="1" dirty="0">
+                <a:solidFill>
+                  <a:srgbClr val="58D68D"/>
+                </a:solidFill>
+                <a:latin typeface="Calibri" pitchFamily="34" charset="0"/>
+                <a:ea typeface="Calibri" pitchFamily="34" charset="-122"/>
+                <a:cs typeface="Calibri" pitchFamily="34" charset="-120"/>
+              </a:rPr>
+              <a:t>🚀 効果があったチャネル</a:t>
+            </a:r>
+            <a:endParaRPr lang="en-US" sz="1400" dirty="0"/>
+          </a:p>
+        </p:txBody>
+      </p:sp>
+      <p:sp>
+        <p:nvSpPr>
+          <p:cNvPr id="7" name="Text 5"/>
+          <p:cNvSpPr txBox="1"/>
+          <p:nvPr/>
+        </p:nvSpPr>
+        <p:spPr>
+          <a:xfrm>
+            <a:off x="822960" y="2560320"/>
+            <a:ext cx="4663440" cy="274320"/>
+          </a:xfrm>
+          <a:prstGeom prst="rect">
+            <a:avLst/>
+          </a:prstGeom>
+          <a:noFill/>
+          <a:ln/>
+        </p:spPr>
+        <p:txBody>
+          <a:bodyPr wrap="square" lIns="0" tIns="0" rIns="0" bIns="0" rtlCol="0" anchor="ctr"/>
+          <a:lstStyle/>
+          <a:p>
+            <a:pPr indent="0" marL="0">
+              <a:buNone/>
+            </a:pPr>
+            <a:r>
+              <a:rPr lang="en-US" sz="1250" b="1" dirty="0">
+                <a:solidFill>
+                  <a:srgbClr val="1A1F26"/>
+                </a:solidFill>
+                <a:latin typeface="Calibri" pitchFamily="34" charset="0"/>
+                <a:ea typeface="Calibri" pitchFamily="34" charset="-122"/>
+                <a:cs typeface="Calibri" pitchFamily="34" charset="-120"/>
+              </a:rPr>
+              <a:t>Hacker News</a:t>
+            </a:r>
+            <a:endParaRPr lang="en-US" sz="1250" dirty="0"/>
+          </a:p>
+        </p:txBody>
+      </p:sp>
+      <p:sp>
+        <p:nvSpPr>
+          <p:cNvPr id="8" name="Text 6"/>
+          <p:cNvSpPr txBox="1"/>
+          <p:nvPr/>
+        </p:nvSpPr>
+        <p:spPr>
+          <a:xfrm>
+            <a:off x="822960" y="2834640"/>
+            <a:ext cx="4663440" cy="640080"/>
+          </a:xfrm>
+          <a:prstGeom prst="rect">
+            <a:avLst/>
+          </a:prstGeom>
+          <a:noFill/>
+          <a:ln/>
+        </p:spPr>
+        <p:txBody>
+          <a:bodyPr wrap="square" lIns="0" tIns="0" rIns="0" bIns="0" rtlCol="0" anchor="ctr"/>
+          <a:lstStyle/>
+          <a:p>
+            <a:pPr indent="0" marL="0">
+              <a:buNone/>
+            </a:pPr>
+            <a:r>
+              <a:rPr lang="en-US" sz="1050" dirty="0">
+                <a:solidFill>
+                  <a:srgbClr val="5B6472"/>
+                </a:solidFill>
+                <a:latin typeface="Calibri" pitchFamily="34" charset="0"/>
+                <a:ea typeface="Calibri" pitchFamily="34" charset="-122"/>
+                <a:cs typeface="Calibri" pitchFamily="34" charset="-120"/>
+              </a:rPr>
+              <a:t>「Show HN:」プレフィックスを付けて投稿する文化があり、Showタブ・トップページに掲載。最も効果大</a:t>
+            </a:r>
+            <a:endParaRPr lang="en-US" sz="1050" dirty="0"/>
+          </a:p>
+        </p:txBody>
+      </p:sp>
+      <p:sp>
+        <p:nvSpPr>
+          <p:cNvPr id="9" name="Text 7"/>
+          <p:cNvSpPr txBox="1"/>
+          <p:nvPr/>
+        </p:nvSpPr>
+        <p:spPr>
+          <a:xfrm>
+            <a:off x="822960" y="3383280"/>
+            <a:ext cx="4663440" cy="274320"/>
+          </a:xfrm>
+          <a:prstGeom prst="rect">
+            <a:avLst/>
+          </a:prstGeom>
+          <a:noFill/>
+          <a:ln/>
+        </p:spPr>
+        <p:txBody>
+          <a:bodyPr wrap="square" lIns="0" tIns="0" rIns="0" bIns="0" rtlCol="0" anchor="ctr"/>
+          <a:lstStyle/>
+          <a:p>
+            <a:pPr indent="0" marL="0">
+              <a:buNone/>
+            </a:pPr>
+            <a:r>
+              <a:rPr lang="en-US" sz="1250" b="1" dirty="0">
+                <a:solidFill>
+                  <a:srgbClr val="1A1F26"/>
+                </a:solidFill>
+                <a:latin typeface="Calibri" pitchFamily="34" charset="0"/>
+                <a:ea typeface="Calibri" pitchFamily="34" charset="-122"/>
+                <a:cs typeface="Calibri" pitchFamily="34" charset="-120"/>
+              </a:rPr>
+              <a:t>Twitter/X</a:t>
+            </a:r>
+            <a:endParaRPr lang="en-US" sz="1250" dirty="0"/>
+          </a:p>
+        </p:txBody>
+      </p:sp>
+      <p:sp>
+        <p:nvSpPr>
+          <p:cNvPr id="10" name="Text 8"/>
+          <p:cNvSpPr txBox="1"/>
+          <p:nvPr/>
+        </p:nvSpPr>
+        <p:spPr>
+          <a:xfrm>
+            <a:off x="822960" y="3657600"/>
+            <a:ext cx="4663440" cy="640080"/>
+          </a:xfrm>
+          <a:prstGeom prst="rect">
+            <a:avLst/>
+          </a:prstGeom>
+          <a:noFill/>
+          <a:ln/>
+        </p:spPr>
+        <p:txBody>
+          <a:bodyPr wrap="square" lIns="0" tIns="0" rIns="0" bIns="0" rtlCol="0" anchor="ctr"/>
+          <a:lstStyle/>
+          <a:p>
+            <a:pPr indent="0" marL="0">
+              <a:buNone/>
+            </a:pPr>
+            <a:r>
+              <a:rPr lang="en-US" sz="1050" dirty="0">
+                <a:solidFill>
+                  <a:srgbClr val="5B6472"/>
+                </a:solidFill>
+                <a:latin typeface="Calibri" pitchFamily="34" charset="0"/>
+                <a:ea typeface="Calibri" pitchFamily="34" charset="-122"/>
+                <a:cs typeface="Calibri" pitchFamily="34" charset="-120"/>
+              </a:rPr>
+              <a:t>自分の発信単独では弱いが、フォロワーの多いインフルエンサーが拡散すると効果大</a:t>
+            </a:r>
+            <a:endParaRPr lang="en-US" sz="1050" dirty="0"/>
+          </a:p>
+        </p:txBody>
+      </p:sp>
+      <p:sp>
+        <p:nvSpPr>
+          <p:cNvPr id="11" name="Text 9"/>
+          <p:cNvSpPr txBox="1"/>
+          <p:nvPr/>
+        </p:nvSpPr>
+        <p:spPr>
+          <a:xfrm>
+            <a:off x="822960" y="4206240"/>
+            <a:ext cx="4663440" cy="274320"/>
+          </a:xfrm>
+          <a:prstGeom prst="rect">
+            <a:avLst/>
+          </a:prstGeom>
+          <a:noFill/>
+          <a:ln/>
+        </p:spPr>
+        <p:txBody>
+          <a:bodyPr wrap="square" lIns="0" tIns="0" rIns="0" bIns="0" rtlCol="0" anchor="ctr"/>
+          <a:lstStyle/>
+          <a:p>
+            <a:pPr indent="0" marL="0">
+              <a:buNone/>
+            </a:pPr>
+            <a:r>
+              <a:rPr lang="en-US" sz="1250" b="1" dirty="0">
+                <a:solidFill>
+                  <a:srgbClr val="1A1F26"/>
+                </a:solidFill>
+                <a:latin typeface="Calibri" pitchFamily="34" charset="0"/>
+                <a:ea typeface="Calibri" pitchFamily="34" charset="-122"/>
+                <a:cs typeface="Calibri" pitchFamily="34" charset="-120"/>
+              </a:rPr>
+              <a:t>GitHub内の連鎖</a:t>
+            </a:r>
+            <a:endParaRPr lang="en-US" sz="1250" dirty="0"/>
+          </a:p>
+        </p:txBody>
+      </p:sp>
+      <p:sp>
+        <p:nvSpPr>
+          <p:cNvPr id="12" name="Text 10"/>
+          <p:cNvSpPr txBox="1"/>
+          <p:nvPr/>
+        </p:nvSpPr>
+        <p:spPr>
+          <a:xfrm>
+            <a:off x="822960" y="4480560"/>
+            <a:ext cx="4663440" cy="640080"/>
+          </a:xfrm>
+          <a:prstGeom prst="rect">
+            <a:avLst/>
+          </a:prstGeom>
+          <a:noFill/>
+          <a:ln/>
+        </p:spPr>
+        <p:txBody>
+          <a:bodyPr wrap="square" lIns="0" tIns="0" rIns="0" bIns="0" rtlCol="0" anchor="ctr"/>
+          <a:lstStyle/>
+          <a:p>
+            <a:pPr indent="0" marL="0">
+              <a:buNone/>
+            </a:pPr>
+            <a:r>
+              <a:rPr lang="en-US" sz="1050" dirty="0">
+                <a:solidFill>
+                  <a:srgbClr val="5B6472"/>
+                </a:solidFill>
+                <a:latin typeface="Calibri" pitchFamily="34" charset="0"/>
+                <a:ea typeface="Calibri" pitchFamily="34" charset="-122"/>
+                <a:cs typeface="Calibri" pitchFamily="34" charset="-120"/>
+              </a:rPr>
+              <a:t>フォロー中ユーザーがStarしたリポジトリがフィードに流れる仕組みがあり、フォロワーの多い人がStarすると連鎖的に増える</a:t>
+            </a:r>
+            <a:endParaRPr lang="en-US" sz="1050" dirty="0"/>
+          </a:p>
+        </p:txBody>
+      </p:sp>
+      <p:sp>
+        <p:nvSpPr>
+          <p:cNvPr id="13" name="Text 11"/>
+          <p:cNvSpPr txBox="1"/>
+          <p:nvPr/>
+        </p:nvSpPr>
+        <p:spPr>
+          <a:xfrm>
+            <a:off x="822960" y="5029200"/>
+            <a:ext cx="4663440" cy="274320"/>
+          </a:xfrm>
+          <a:prstGeom prst="rect">
+            <a:avLst/>
+          </a:prstGeom>
+          <a:noFill/>
+          <a:ln/>
+        </p:spPr>
+        <p:txBody>
+          <a:bodyPr wrap="square" lIns="0" tIns="0" rIns="0" bIns="0" rtlCol="0" anchor="ctr"/>
+          <a:lstStyle/>
+          <a:p>
+            <a:pPr indent="0" marL="0">
+              <a:buNone/>
+            </a:pPr>
+            <a:r>
+              <a:rPr lang="en-US" sz="1250" b="1" dirty="0">
+                <a:solidFill>
+                  <a:srgbClr val="1A1F26"/>
+                </a:solidFill>
+                <a:latin typeface="Calibri" pitchFamily="34" charset="0"/>
+                <a:ea typeface="Calibri" pitchFamily="34" charset="-122"/>
+                <a:cs typeface="Calibri" pitchFamily="34" charset="-120"/>
+              </a:rPr>
+              <a:t>韓国版HN(news.hada.io)</a:t>
+            </a:r>
+            <a:endParaRPr lang="en-US" sz="1250" dirty="0"/>
+          </a:p>
+        </p:txBody>
+      </p:sp>
+      <p:sp>
+        <p:nvSpPr>
+          <p:cNvPr id="14" name="Text 12"/>
+          <p:cNvSpPr txBox="1"/>
+          <p:nvPr/>
+        </p:nvSpPr>
+        <p:spPr>
+          <a:xfrm>
+            <a:off x="822960" y="5303520"/>
+            <a:ext cx="4663440" cy="640080"/>
+          </a:xfrm>
+          <a:prstGeom prst="rect">
+            <a:avLst/>
+          </a:prstGeom>
+          <a:noFill/>
+          <a:ln/>
+        </p:spPr>
+        <p:txBody>
+          <a:bodyPr wrap="square" lIns="0" tIns="0" rIns="0" bIns="0" rtlCol="0" anchor="ctr"/>
+          <a:lstStyle/>
+          <a:p>
+            <a:pPr indent="0" marL="0">
+              <a:buNone/>
+            </a:pPr>
+            <a:r>
+              <a:rPr lang="en-US" sz="1050" dirty="0">
+                <a:solidFill>
+                  <a:srgbClr val="5B6472"/>
+                </a:solidFill>
+                <a:latin typeface="Calibri" pitchFamily="34" charset="0"/>
+                <a:ea typeface="Calibri" pitchFamily="34" charset="-122"/>
+                <a:cs typeface="Calibri" pitchFamily="34" charset="-120"/>
+              </a:rPr>
+              <a:t>現地の誰かが投稿したことで、そこから約40スターが集まった</a:t>
+            </a:r>
+            <a:endParaRPr lang="en-US" sz="1050" dirty="0"/>
+          </a:p>
+        </p:txBody>
+      </p:sp>
+      <p:sp>
+        <p:nvSpPr>
+          <p:cNvPr id="15" name="Shape 13"/>
+          <p:cNvSpPr/>
+          <p:nvPr/>
+        </p:nvSpPr>
+        <p:spPr>
+          <a:xfrm>
+            <a:off x="6035040" y="1920240"/>
+            <a:ext cx="5212080" cy="3931920"/>
+          </a:xfrm>
+          <a:prstGeom prst="roundRect">
+            <a:avLst>
+              <a:gd name="adj" fmla="val 2326"/>
+            </a:avLst>
+          </a:prstGeom>
+          <a:solidFill>
+            <a:srgbClr val="FFFFFF"/>
+          </a:solidFill>
+          <a:ln w="12700">
+            <a:solidFill>
+              <a:srgbClr val="E3E6EA"/>
+            </a:solidFill>
+            <a:prstDash val="solid"/>
+          </a:ln>
+        </p:spPr>
+      </p:sp>
+      <p:sp>
+        <p:nvSpPr>
+          <p:cNvPr id="16" name="Text 14"/>
+          <p:cNvSpPr txBox="1"/>
+          <p:nvPr/>
+        </p:nvSpPr>
+        <p:spPr>
+          <a:xfrm>
+            <a:off x="6309360" y="2103120"/>
+            <a:ext cx="4754880" cy="365760"/>
+          </a:xfrm>
+          <a:prstGeom prst="rect">
+            <a:avLst/>
+          </a:prstGeom>
+          <a:noFill/>
+          <a:ln/>
+        </p:spPr>
+        <p:txBody>
+          <a:bodyPr wrap="square" lIns="0" tIns="0" rIns="0" bIns="0" rtlCol="0" anchor="ctr"/>
+          <a:lstStyle/>
+          <a:p>
+            <a:pPr indent="0" marL="0">
+              <a:buNone/>
+            </a:pPr>
+            <a:r>
+              <a:rPr lang="en-US" sz="1400" b="1" dirty="0">
+                <a:solidFill>
+                  <a:srgbClr val="6B7280"/>
+                </a:solidFill>
+                <a:latin typeface="Calibri" pitchFamily="34" charset="0"/>
+                <a:ea typeface="Calibri" pitchFamily="34" charset="-122"/>
+                <a:cs typeface="Calibri" pitchFamily="34" charset="-120"/>
+              </a:rPr>
+              <a:t>🪦 効果が薄かったチャネル</a:t>
+            </a:r>
+            <a:endParaRPr lang="en-US" sz="1400" dirty="0"/>
+          </a:p>
+        </p:txBody>
+      </p:sp>
+      <p:sp>
+        <p:nvSpPr>
+          <p:cNvPr id="17" name="Text 15"/>
+          <p:cNvSpPr txBox="1"/>
+          <p:nvPr/>
+        </p:nvSpPr>
+        <p:spPr>
+          <a:xfrm>
+            <a:off x="6309360" y="2560320"/>
+            <a:ext cx="4663440" cy="274320"/>
+          </a:xfrm>
+          <a:prstGeom prst="rect">
+            <a:avLst/>
+          </a:prstGeom>
+          <a:noFill/>
+          <a:ln/>
+        </p:spPr>
+        <p:txBody>
+          <a:bodyPr wrap="square" lIns="0" tIns="0" rIns="0" bIns="0" rtlCol="0" anchor="ctr"/>
+          <a:lstStyle/>
+          <a:p>
+            <a:pPr indent="0" marL="0">
+              <a:buNone/>
+            </a:pPr>
+            <a:r>
+              <a:rPr lang="en-US" sz="1250" b="1" dirty="0">
+                <a:solidFill>
+                  <a:srgbClr val="1A1F26"/>
+                </a:solidFill>
+                <a:latin typeface="Calibri" pitchFamily="34" charset="0"/>
+                <a:ea typeface="Calibri" pitchFamily="34" charset="-122"/>
+                <a:cs typeface="Calibri" pitchFamily="34" charset="-120"/>
+              </a:rPr>
+              <a:t>Reddit</a:t>
+            </a:r>
+            <a:endParaRPr lang="en-US" sz="1250" dirty="0"/>
+          </a:p>
+        </p:txBody>
+      </p:sp>
+      <p:sp>
+        <p:nvSpPr>
+          <p:cNvPr id="18" name="Text 16"/>
+          <p:cNvSpPr txBox="1"/>
+          <p:nvPr/>
+        </p:nvSpPr>
+        <p:spPr>
+          <a:xfrm>
+            <a:off x="6309360" y="2834640"/>
+            <a:ext cx="4663440" cy="640080"/>
+          </a:xfrm>
+          <a:prstGeom prst="rect">
+            <a:avLst/>
+          </a:prstGeom>
+          <a:noFill/>
+          <a:ln/>
+        </p:spPr>
+        <p:txBody>
+          <a:bodyPr wrap="square" lIns="0" tIns="0" rIns="0" bIns="0" rtlCol="0" anchor="ctr"/>
+          <a:lstStyle/>
+          <a:p>
+            <a:pPr indent="0" marL="0">
+              <a:buNone/>
+            </a:pPr>
+            <a:r>
+              <a:rPr lang="en-US" sz="1050" dirty="0">
+                <a:solidFill>
+                  <a:srgbClr val="5B6472"/>
+                </a:solidFill>
+                <a:latin typeface="Calibri" pitchFamily="34" charset="0"/>
+                <a:ea typeface="Calibri" pitchFamily="34" charset="-122"/>
+                <a:cs typeface="Calibri" pitchFamily="34" charset="-120"/>
+              </a:rPr>
+              <a:t>投稿は伸びにくいことが多い(閲覧2.4kでUpvote6等)。ただしやり方次第で化ける可能性はある</a:t>
+            </a:r>
+            <a:endParaRPr lang="en-US" sz="1050" dirty="0"/>
+          </a:p>
+        </p:txBody>
+      </p:sp>
+      <p:sp>
+        <p:nvSpPr>
+          <p:cNvPr id="19" name="Text 17"/>
+          <p:cNvSpPr txBox="1"/>
+          <p:nvPr/>
+        </p:nvSpPr>
+        <p:spPr>
+          <a:xfrm>
+            <a:off x="6309360" y="3383280"/>
+            <a:ext cx="4663440" cy="274320"/>
+          </a:xfrm>
+          <a:prstGeom prst="rect">
+            <a:avLst/>
+          </a:prstGeom>
+          <a:noFill/>
+          <a:ln/>
+        </p:spPr>
+        <p:txBody>
+          <a:bodyPr wrap="square" lIns="0" tIns="0" rIns="0" bIns="0" rtlCol="0" anchor="ctr"/>
+          <a:lstStyle/>
+          <a:p>
+            <a:pPr indent="0" marL="0">
+              <a:buNone/>
+            </a:pPr>
+            <a:r>
+              <a:rPr lang="en-US" sz="1250" b="1" dirty="0">
+                <a:solidFill>
+                  <a:srgbClr val="1A1F26"/>
+                </a:solidFill>
+                <a:latin typeface="Calibri" pitchFamily="34" charset="0"/>
+                <a:ea typeface="Calibri" pitchFamily="34" charset="-122"/>
+                <a:cs typeface="Calibri" pitchFamily="34" charset="-120"/>
+              </a:rPr>
+              <a:t>Product Hunt</a:t>
+            </a:r>
+            <a:endParaRPr lang="en-US" sz="1250" dirty="0"/>
+          </a:p>
+        </p:txBody>
+      </p:sp>
+      <p:sp>
+        <p:nvSpPr>
+          <p:cNvPr id="20" name="Text 18"/>
+          <p:cNvSpPr txBox="1"/>
+          <p:nvPr/>
+        </p:nvSpPr>
+        <p:spPr>
+          <a:xfrm>
+            <a:off x="6309360" y="3657600"/>
+            <a:ext cx="4663440" cy="640080"/>
+          </a:xfrm>
+          <a:prstGeom prst="rect">
+            <a:avLst/>
+          </a:prstGeom>
+          <a:noFill/>
+          <a:ln/>
+        </p:spPr>
+        <p:txBody>
+          <a:bodyPr wrap="square" lIns="0" tIns="0" rIns="0" bIns="0" rtlCol="0" anchor="ctr"/>
+          <a:lstStyle/>
+          <a:p>
+            <a:pPr indent="0" marL="0">
+              <a:buNone/>
+            </a:pPr>
+            <a:r>
+              <a:rPr lang="en-US" sz="1050" dirty="0">
+                <a:solidFill>
+                  <a:srgbClr val="5B6472"/>
+                </a:solidFill>
+                <a:latin typeface="Calibri" pitchFamily="34" charset="0"/>
+                <a:ea typeface="Calibri" pitchFamily="34" charset="-122"/>
+                <a:cs typeface="Calibri" pitchFamily="34" charset="-120"/>
+              </a:rPr>
+              <a:t>AI関連プロダクトが多く、その他のプロダクトは埋もれやすい</a:t>
+            </a:r>
+            <a:endParaRPr lang="en-US" sz="1050" dirty="0"/>
+          </a:p>
+        </p:txBody>
+      </p:sp>
+      <p:sp>
+        <p:nvSpPr>
+          <p:cNvPr id="21" name="Text 19"/>
+          <p:cNvSpPr txBox="1"/>
+          <p:nvPr/>
+        </p:nvSpPr>
+        <p:spPr>
+          <a:xfrm>
+            <a:off x="6309360" y="4206240"/>
+            <a:ext cx="4663440" cy="274320"/>
+          </a:xfrm>
+          <a:prstGeom prst="rect">
+            <a:avLst/>
+          </a:prstGeom>
+          <a:noFill/>
+          <a:ln/>
+        </p:spPr>
+        <p:txBody>
+          <a:bodyPr wrap="square" lIns="0" tIns="0" rIns="0" bIns="0" rtlCol="0" anchor="ctr"/>
+          <a:lstStyle/>
+          <a:p>
+            <a:pPr indent="0" marL="0">
+              <a:buNone/>
+            </a:pPr>
+            <a:r>
+              <a:rPr lang="en-US" sz="1250" b="1" dirty="0">
+                <a:solidFill>
+                  <a:srgbClr val="1A1F26"/>
+                </a:solidFill>
+                <a:latin typeface="Calibri" pitchFamily="34" charset="0"/>
+                <a:ea typeface="Calibri" pitchFamily="34" charset="-122"/>
+                <a:cs typeface="Calibri" pitchFamily="34" charset="-120"/>
+              </a:rPr>
+              <a:t>Awesomeリストへの追加PR</a:t>
+            </a:r>
+            <a:endParaRPr lang="en-US" sz="1250" dirty="0"/>
+          </a:p>
+        </p:txBody>
+      </p:sp>
+      <p:sp>
+        <p:nvSpPr>
+          <p:cNvPr id="22" name="Text 20"/>
+          <p:cNvSpPr txBox="1"/>
+          <p:nvPr/>
+        </p:nvSpPr>
+        <p:spPr>
+          <a:xfrm>
+            <a:off x="6309360" y="4480560"/>
+            <a:ext cx="4663440" cy="640080"/>
+          </a:xfrm>
+          <a:prstGeom prst="rect">
+            <a:avLst/>
+          </a:prstGeom>
+          <a:noFill/>
+          <a:ln/>
+        </p:spPr>
+        <p:txBody>
+          <a:bodyPr wrap="square" lIns="0" tIns="0" rIns="0" bIns="0" rtlCol="0" anchor="ctr"/>
+          <a:lstStyle/>
+          <a:p>
+            <a:pPr indent="0" marL="0">
+              <a:buNone/>
+            </a:pPr>
+            <a:r>
+              <a:rPr lang="en-US" sz="1050" dirty="0">
+                <a:solidFill>
+                  <a:srgbClr val="5B6472"/>
+                </a:solidFill>
+                <a:latin typeface="Calibri" pitchFamily="34" charset="0"/>
+                <a:ea typeface="Calibri" pitchFamily="34" charset="-122"/>
+                <a:cs typeface="Calibri" pitchFamily="34" charset="-120"/>
+              </a:rPr>
+              <a:t>掲載されても閲覧者自体が少ない</a:t>
+            </a:r>
+            <a:endParaRPr lang="en-US" sz="1050" dirty="0"/>
+          </a:p>
+        </p:txBody>
+      </p:sp>
+      <p:sp>
+        <p:nvSpPr>
+          <p:cNvPr id="23" name="Text 21"/>
+          <p:cNvSpPr txBox="1"/>
+          <p:nvPr/>
+        </p:nvSpPr>
+        <p:spPr>
+          <a:xfrm>
+            <a:off x="6309360" y="5029200"/>
+            <a:ext cx="4663440" cy="274320"/>
+          </a:xfrm>
+          <a:prstGeom prst="rect">
+            <a:avLst/>
+          </a:prstGeom>
+          <a:noFill/>
+          <a:ln/>
+        </p:spPr>
+        <p:txBody>
+          <a:bodyPr wrap="square" lIns="0" tIns="0" rIns="0" bIns="0" rtlCol="0" anchor="ctr"/>
+          <a:lstStyle/>
+          <a:p>
+            <a:pPr indent="0" marL="0">
+              <a:buNone/>
+            </a:pPr>
+            <a:r>
+              <a:rPr lang="en-US" sz="1250" b="1" dirty="0">
+                <a:solidFill>
+                  <a:srgbClr val="1A1F26"/>
+                </a:solidFill>
+                <a:latin typeface="Calibri" pitchFamily="34" charset="0"/>
+                <a:ea typeface="Calibri" pitchFamily="34" charset="-122"/>
+                <a:cs typeface="Calibri" pitchFamily="34" charset="-120"/>
+              </a:rPr>
+              <a:t>個人ブログ</a:t>
+            </a:r>
+            <a:endParaRPr lang="en-US" sz="1250" dirty="0"/>
+          </a:p>
+        </p:txBody>
+      </p:sp>
+      <p:sp>
+        <p:nvSpPr>
+          <p:cNvPr id="24" name="Text 22"/>
+          <p:cNvSpPr txBox="1"/>
+          <p:nvPr/>
+        </p:nvSpPr>
+        <p:spPr>
+          <a:xfrm>
+            <a:off x="6309360" y="5303520"/>
+            <a:ext cx="4663440" cy="640080"/>
+          </a:xfrm>
+          <a:prstGeom prst="rect">
+            <a:avLst/>
+          </a:prstGeom>
+          <a:noFill/>
+          <a:ln/>
+        </p:spPr>
+        <p:txBody>
+          <a:bodyPr wrap="square" lIns="0" tIns="0" rIns="0" bIns="0" rtlCol="0" anchor="ctr"/>
+          <a:lstStyle/>
+          <a:p>
+            <a:pPr indent="0" marL="0">
+              <a:buNone/>
+            </a:pPr>
+            <a:r>
+              <a:rPr lang="en-US" sz="1050" dirty="0">
+                <a:solidFill>
+                  <a:srgbClr val="5B6472"/>
+                </a:solidFill>
+                <a:latin typeface="Calibri" pitchFamily="34" charset="0"/>
+                <a:ea typeface="Calibri" pitchFamily="34" charset="-122"/>
+                <a:cs typeface="Calibri" pitchFamily="34" charset="-120"/>
+              </a:rPr>
+              <a:t>Qiita/Zenn等の媒体力があるプラットフォームでないと、Twitter投稿とあまり変わらない手応え</a:t>
+            </a:r>
+            <a:endParaRPr lang="en-US" sz="1050" dirty="0"/>
+          </a:p>
+        </p:txBody>
+      </p:sp>
+      <p:sp>
+        <p:nvSpPr>
+          <p:cNvPr id="25" name="Text 23"/>
+          <p:cNvSpPr txBox="1"/>
+          <p:nvPr/>
+        </p:nvSpPr>
+        <p:spPr>
+          <a:xfrm>
+            <a:off x="548640" y="6400800"/>
+            <a:ext cx="10424160" cy="320040"/>
+          </a:xfrm>
+          <a:prstGeom prst="rect">
+            <a:avLst/>
+          </a:prstGeom>
+          <a:noFill/>
+          <a:ln/>
+        </p:spPr>
+        <p:txBody>
+          <a:bodyPr wrap="square" lIns="0" tIns="0" rIns="0" bIns="0" rtlCol="0" anchor="ctr"/>
+          <a:lstStyle/>
+          <a:p>
+            <a:pPr indent="0" marL="0">
+              <a:buNone/>
+            </a:pPr>
+            <a:r>
+              <a:rPr lang="en-US" sz="1000" i="1" dirty="0">
+                <a:solidFill>
+                  <a:srgbClr val="5B6472"/>
+                </a:solidFill>
+                <a:latin typeface="Calibri" pitchFamily="34" charset="0"/>
+                <a:ea typeface="Calibri" pitchFamily="34" charset="-122"/>
+                <a:cs typeface="Calibri" pitchFamily="34" charset="-120"/>
+              </a:rPr>
+              <a:t>出典: 個人開発者によるOSSプロジェクト「Ephe」のブログ記事(1事例の実測値。分野・タイミングにより結果は変動しうる)</a:t>
+            </a:r>
+            <a:endParaRPr lang="en-US" sz="1000" dirty="0"/>
+          </a:p>
+        </p:txBody>
+      </p:sp>
+      <p:sp>
+        <p:nvSpPr>
+          <p:cNvPr id="26" name="Text 24"/>
+          <p:cNvSpPr txBox="1"/>
+          <p:nvPr/>
+        </p:nvSpPr>
+        <p:spPr>
+          <a:xfrm>
+            <a:off x="11521440" y="6492240"/>
+            <a:ext cx="457200" cy="274320"/>
+          </a:xfrm>
+          <a:prstGeom prst="rect">
+            <a:avLst/>
+          </a:prstGeom>
+          <a:noFill/>
+          <a:ln/>
+        </p:spPr>
+        <p:txBody>
+          <a:bodyPr wrap="square" lIns="0" tIns="0" rIns="0" bIns="0" rtlCol="0" anchor="ctr"/>
+          <a:lstStyle/>
+          <a:p>
+            <a:pPr algn="r" indent="0" marL="0">
+              <a:buNone/>
+            </a:pPr>
+            <a:r>
+              <a:rPr lang="en-US" sz="1000" dirty="0">
+                <a:solidFill>
+                  <a:srgbClr val="5B6472"/>
+                </a:solidFill>
+                <a:latin typeface="Calibri" pitchFamily="34" charset="0"/>
+                <a:ea typeface="Calibri" pitchFamily="34" charset="-122"/>
+                <a:cs typeface="Calibri" pitchFamily="34" charset="-120"/>
+              </a:rPr>
+              <a:t>11</a:t>
+            </a:r>
+            <a:endParaRPr lang="en-US" sz="1000" dirty="0"/>
+          </a:p>
+        </p:txBody>
+      </p:sp>
+    </p:spTree>
+  </p:cSld>
+  <p:clrMapOvr>
+    <a:masterClrMapping/>
+  </p:clrMapOvr>
+</p:sld>
+</file>
+
+<file path=ppt/slides/slide12.xml><?xml version="1.0" encoding="utf-8"?>
+<p:sld xmlns:a="http://schemas.openxmlformats.org/drawingml/2006/main" xmlns:r="http://schemas.openxmlformats.org/officeDocument/2006/relationships" xmlns:p="http://schemas.openxmlformats.org/presentationml/2006/main">
+  <p:cSld name="Slide 12">
     <p:bg>
       <p:bgPr>
         <a:solidFill>
@@ -4121,7 +4918,7 @@
                 <a:ea typeface="Calibri" pitchFamily="34" charset="-122"/>
                 <a:cs typeface="Calibri" pitchFamily="34" charset="-120"/>
               </a:rPr>
-              <a:t>11</a:t>
+              <a:t>12</a:t>
             </a:r>
             <a:endParaRPr lang="en-US" sz="1000" dirty="0"/>
           </a:p>
@@ -4135,9 +4932,9 @@
 </p:sld>
 </file>
 
-<file path=ppt/slides/slide12.xml><?xml version="1.0" encoding="utf-8"?>
+<file path=ppt/slides/slide13.xml><?xml version="1.0" encoding="utf-8"?>
 <p:sld xmlns:a="http://schemas.openxmlformats.org/drawingml/2006/main" xmlns:r="http://schemas.openxmlformats.org/officeDocument/2006/relationships" xmlns:p="http://schemas.openxmlformats.org/presentationml/2006/main">
-  <p:cSld name="Slide 12">
+  <p:cSld name="Slide 13">
     <p:bg>
       <p:bgPr>
         <a:solidFill>
@@ -4831,7 +5628,7 @@
                 <a:ea typeface="Calibri" pitchFamily="34" charset="-122"/>
                 <a:cs typeface="Calibri" pitchFamily="34" charset="-120"/>
               </a:rPr>
-              <a:t>12</a:t>
+              <a:t>13</a:t>
             </a:r>
             <a:endParaRPr lang="en-US" sz="1000" dirty="0"/>
           </a:p>
@@ -4845,9 +5642,9 @@
 </p:sld>
 </file>
 
-<file path=ppt/slides/slide13.xml><?xml version="1.0" encoding="utf-8"?>
+<file path=ppt/slides/slide14.xml><?xml version="1.0" encoding="utf-8"?>
 <p:sld xmlns:a="http://schemas.openxmlformats.org/drawingml/2006/main" xmlns:r="http://schemas.openxmlformats.org/officeDocument/2006/relationships" xmlns:p="http://schemas.openxmlformats.org/presentationml/2006/main">
-  <p:cSld name="Slide 13">
+  <p:cSld name="Slide 14">
     <p:bg>
       <p:bgPr>
         <a:solidFill>
@@ -5280,7 +6077,7 @@
                 <a:ea typeface="Calibri" pitchFamily="34" charset="-122"/>
                 <a:cs typeface="Calibri" pitchFamily="34" charset="-120"/>
               </a:rPr>
-              <a:t>13</a:t>
+              <a:t>14</a:t>
             </a:r>
             <a:endParaRPr lang="en-US" sz="1000" dirty="0"/>
           </a:p>
@@ -5294,9 +6091,9 @@
 </p:sld>
 </file>
 
-<file path=ppt/slides/slide14.xml><?xml version="1.0" encoding="utf-8"?>
+<file path=ppt/slides/slide15.xml><?xml version="1.0" encoding="utf-8"?>
 <p:sld xmlns:a="http://schemas.openxmlformats.org/drawingml/2006/main" xmlns:r="http://schemas.openxmlformats.org/officeDocument/2006/relationships" xmlns:p="http://schemas.openxmlformats.org/presentationml/2006/main">
-  <p:cSld name="Slide 14">
+  <p:cSld name="Slide 15">
     <p:bg>
       <p:bgPr>
         <a:solidFill>
@@ -5775,7 +6572,7 @@
                 <a:ea typeface="Calibri" pitchFamily="34" charset="-122"/>
                 <a:cs typeface="Calibri" pitchFamily="34" charset="-120"/>
               </a:rPr>
-              <a:t>14</a:t>
+              <a:t>15</a:t>
             </a:r>
             <a:endParaRPr lang="en-US" sz="1000" dirty="0"/>
           </a:p>
@@ -7715,33 +8512,33 @@
         <p:spPr>
           <a:xfrm>
             <a:off x="548640" y="457200"/>
-            <a:ext cx="731520" cy="731520"/>
-          </a:xfrm>
-          <a:prstGeom prst="rect">
-            <a:avLst/>
-          </a:prstGeom>
-          <a:noFill/>
-          <a:ln/>
-        </p:spPr>
-        <p:txBody>
-          <a:bodyPr wrap="square" lIns="0" tIns="0" rIns="0" bIns="0" rtlCol="0" anchor="ctr"/>
-          <a:lstStyle/>
-          <a:p>
-            <a:pPr indent="0" marL="0">
-              <a:buNone/>
-            </a:pPr>
-            <a:r>
-              <a:rPr lang="en-US" sz="2800" b="1" dirty="0">
-                <a:solidFill>
-                  <a:srgbClr val="B084F5"/>
+            <a:ext cx="10607040" cy="640080"/>
+          </a:xfrm>
+          <a:prstGeom prst="rect">
+            <a:avLst/>
+          </a:prstGeom>
+          <a:noFill/>
+          <a:ln/>
+        </p:spPr>
+        <p:txBody>
+          <a:bodyPr wrap="square" lIns="0" tIns="0" rIns="0" bIns="0" rtlCol="0" anchor="ctr"/>
+          <a:lstStyle/>
+          <a:p>
+            <a:pPr indent="0" marL="0">
+              <a:buNone/>
+            </a:pPr>
+            <a:r>
+              <a:rPr lang="en-US" sz="2700" b="1" dirty="0">
+                <a:solidFill>
+                  <a:srgbClr val="1A1F26"/>
                 </a:solidFill>
                 <a:latin typeface="Cambria" pitchFamily="34" charset="0"/>
                 <a:ea typeface="Cambria" pitchFamily="34" charset="-122"/>
                 <a:cs typeface="Cambria" pitchFamily="34" charset="-120"/>
               </a:rPr>
-              <a:t>1</a:t>
-            </a:r>
-            <a:endParaRPr lang="en-US" sz="2800" dirty="0"/>
+              <a:t>補足: 機械学習(ML/AI)領域との相性</a:t>
+            </a:r>
+            <a:endParaRPr lang="en-US" sz="2700" dirty="0"/>
           </a:p>
         </p:txBody>
       </p:sp>
@@ -7753,34 +8550,34 @@
         </p:nvSpPr>
         <p:spPr>
           <a:xfrm>
-            <a:off x="1280160" y="502920"/>
-            <a:ext cx="9784080" cy="640080"/>
-          </a:xfrm>
-          <a:prstGeom prst="rect">
-            <a:avLst/>
-          </a:prstGeom>
-          <a:noFill/>
-          <a:ln/>
-        </p:spPr>
-        <p:txBody>
-          <a:bodyPr wrap="square" lIns="0" tIns="0" rIns="0" bIns="0" rtlCol="0" anchor="ctr"/>
-          <a:lstStyle/>
-          <a:p>
-            <a:pPr indent="0" marL="0">
-              <a:buNone/>
-            </a:pPr>
-            <a:r>
-              <a:rPr lang="en-US" sz="2600" b="1" dirty="0">
-                <a:solidFill>
-                  <a:srgbClr val="1A1F26"/>
-                </a:solidFill>
-                <a:latin typeface="Cambria" pitchFamily="34" charset="0"/>
-                <a:ea typeface="Cambria" pitchFamily="34" charset="-122"/>
-                <a:cs typeface="Cambria" pitchFamily="34" charset="-120"/>
-              </a:rPr>
-              <a:t>なぜGitHubで“育てる”のか</a:t>
-            </a:r>
-            <a:endParaRPr lang="en-US" sz="2600" dirty="0"/>
+            <a:off x="548640" y="1097280"/>
+            <a:ext cx="10607040" cy="365760"/>
+          </a:xfrm>
+          <a:prstGeom prst="rect">
+            <a:avLst/>
+          </a:prstGeom>
+          <a:noFill/>
+          <a:ln/>
+        </p:spPr>
+        <p:txBody>
+          <a:bodyPr wrap="square" lIns="0" tIns="0" rIns="0" bIns="0" rtlCol="0" anchor="ctr"/>
+          <a:lstStyle/>
+          <a:p>
+            <a:pPr indent="0" marL="0">
+              <a:buNone/>
+            </a:pPr>
+            <a:r>
+              <a:rPr lang="en-US" sz="1300" i="1" dirty="0">
+                <a:solidFill>
+                  <a:srgbClr val="5B6472"/>
+                </a:solidFill>
+                <a:latin typeface="Calibri" pitchFamily="34" charset="0"/>
+                <a:ea typeface="Calibri" pitchFamily="34" charset="-122"/>
+                <a:cs typeface="Calibri" pitchFamily="34" charset="-120"/>
+              </a:rPr>
+              <a:t>4パターンをMLプロジェクトに当てはめる時に効く/効かない点</a:t>
+            </a:r>
+            <a:endParaRPr lang="en-US" sz="1300" dirty="0"/>
           </a:p>
         </p:txBody>
       </p:sp>
@@ -7792,12 +8589,12 @@
         </p:nvSpPr>
         <p:spPr>
           <a:xfrm>
-            <a:off x="548640" y="1554480"/>
-            <a:ext cx="3566160" cy="2468880"/>
+            <a:off x="548640" y="1645920"/>
+            <a:ext cx="5212080" cy="2468880"/>
           </a:xfrm>
           <a:prstGeom prst="roundRect">
             <a:avLst>
-              <a:gd name="adj" fmla="val 4444"/>
+              <a:gd name="adj" fmla="val 3704"/>
             </a:avLst>
           </a:prstGeom>
           <a:solidFill>
@@ -7809,129 +8606,100 @@
             </a:solidFill>
             <a:prstDash val="solid"/>
           </a:ln>
-          <a:effectLst>
-            <a:outerShdw sx="100000" sy="100000" kx="0" ky="0" algn="bl" rotWithShape="0" blurRad="101600" dist="38100" dir="5400000">
-              <a:srgbClr val="000000">
-                <a:alpha val="12000"/>
-              </a:srgbClr>
-            </a:outerShdw>
-          </a:effectLst>
-        </p:spPr>
-      </p:sp>
-      <p:sp>
-        <p:nvSpPr>
-          <p:cNvPr id="5" name="Shape 3"/>
+        </p:spPr>
+      </p:sp>
+      <p:sp>
+        <p:nvSpPr>
+          <p:cNvPr id="5" name="Text 3"/>
+          <p:cNvSpPr txBox="1"/>
+          <p:nvPr/>
+        </p:nvSpPr>
+        <p:spPr>
+          <a:xfrm>
+            <a:off x="822960" y="1828800"/>
+            <a:ext cx="4754880" cy="365760"/>
+          </a:xfrm>
+          <a:prstGeom prst="rect">
+            <a:avLst/>
+          </a:prstGeom>
+          <a:noFill/>
+          <a:ln/>
+        </p:spPr>
+        <p:txBody>
+          <a:bodyPr wrap="square" lIns="0" tIns="0" rIns="0" bIns="0" rtlCol="0" anchor="ctr"/>
+          <a:lstStyle/>
+          <a:p>
+            <a:pPr indent="0" marL="0">
+              <a:buNone/>
+            </a:pPr>
+            <a:r>
+              <a:rPr lang="en-US" sz="1400" b="1" dirty="0">
+                <a:solidFill>
+                  <a:srgbClr val="58D68D"/>
+                </a:solidFill>
+                <a:latin typeface="Calibri" pitchFamily="34" charset="0"/>
+                <a:ea typeface="Calibri" pitchFamily="34" charset="-122"/>
+                <a:cs typeface="Calibri" pitchFamily="34" charset="-120"/>
+              </a:rPr>
+              <a:t>追い風になる面</a:t>
+            </a:r>
+            <a:endParaRPr lang="en-US" sz="1400" dirty="0"/>
+          </a:p>
+        </p:txBody>
+      </p:sp>
+      <p:sp>
+        <p:nvSpPr>
+          <p:cNvPr id="6" name="Text 4"/>
+          <p:cNvSpPr txBox="1"/>
+          <p:nvPr/>
+        </p:nvSpPr>
+        <p:spPr>
+          <a:xfrm>
+            <a:off x="822960" y="2240280"/>
+            <a:ext cx="4754880" cy="1737360"/>
+          </a:xfrm>
+          <a:prstGeom prst="rect">
+            <a:avLst/>
+          </a:prstGeom>
+          <a:noFill/>
+          <a:ln/>
+        </p:spPr>
+        <p:txBody>
+          <a:bodyPr wrap="square" lIns="0" tIns="0" rIns="0" bIns="0" rtlCol="0" anchor="ctr"/>
+          <a:lstStyle/>
+          <a:p>
+            <a:pPr indent="0" marL="0">
+              <a:buNone/>
+            </a:pPr>
+            <a:r>
+              <a:rPr lang="en-US" sz="1200" dirty="0">
+                <a:solidFill>
+                  <a:srgbClr val="5B6472"/>
+                </a:solidFill>
+                <a:latin typeface="Calibri" pitchFamily="34" charset="0"/>
+                <a:ea typeface="Calibri" pitchFamily="34" charset="-122"/>
+                <a:cs typeface="Calibri" pitchFamily="34" charset="-120"/>
+              </a:rPr>
+              <a:t>ML/AI領域は関心を持つ開発者の母数が圧倒的に大きく、話題性・検索流入の両面で有利になりやすい</a:t>
+            </a:r>
+            <a:endParaRPr lang="en-US" sz="1200" dirty="0"/>
+          </a:p>
+        </p:txBody>
+      </p:sp>
+      <p:sp>
+        <p:nvSpPr>
+          <p:cNvPr id="7" name="Shape 5"/>
           <p:cNvSpPr/>
           <p:nvPr/>
         </p:nvSpPr>
         <p:spPr>
           <a:xfrm>
-            <a:off x="822960" y="1828800"/>
-            <a:ext cx="548640" cy="548640"/>
+            <a:off x="6035040" y="1645920"/>
+            <a:ext cx="5212080" cy="2468880"/>
           </a:xfrm>
           <a:prstGeom prst="roundRect">
             <a:avLst>
-              <a:gd name="adj" fmla="val 50000"/>
-            </a:avLst>
-          </a:prstGeom>
-          <a:solidFill>
-            <a:srgbClr val="B084F5"/>
-          </a:solidFill>
-          <a:ln/>
-        </p:spPr>
-      </p:sp>
-      <p:sp>
-        <p:nvSpPr>
-          <p:cNvPr id="6" name="Text 4"/>
-          <p:cNvSpPr txBox="1"/>
-          <p:nvPr/>
-        </p:nvSpPr>
-        <p:spPr>
-          <a:xfrm>
-            <a:off x="822960" y="2560320"/>
-            <a:ext cx="3017520" cy="548640"/>
-          </a:xfrm>
-          <a:prstGeom prst="rect">
-            <a:avLst/>
-          </a:prstGeom>
-          <a:noFill/>
-          <a:ln/>
-        </p:spPr>
-        <p:txBody>
-          <a:bodyPr wrap="square" lIns="0" tIns="0" rIns="0" bIns="0" rtlCol="0" anchor="ctr"/>
-          <a:lstStyle/>
-          <a:p>
-            <a:pPr indent="0" marL="0">
-              <a:buNone/>
-            </a:pPr>
-            <a:r>
-              <a:rPr lang="en-US" sz="1500" b="1" dirty="0">
-                <a:solidFill>
-                  <a:srgbClr val="1A1F26"/>
-                </a:solidFill>
-                <a:latin typeface="Calibri" pitchFamily="34" charset="0"/>
-                <a:ea typeface="Calibri" pitchFamily="34" charset="-122"/>
-                <a:cs typeface="Calibri" pitchFamily="34" charset="-120"/>
-              </a:rPr>
-              <a:t>学習ログの可視化</a:t>
-            </a:r>
-            <a:endParaRPr lang="en-US" sz="1500" dirty="0"/>
-          </a:p>
-        </p:txBody>
-      </p:sp>
-      <p:sp>
-        <p:nvSpPr>
-          <p:cNvPr id="7" name="Text 5"/>
-          <p:cNvSpPr txBox="1"/>
-          <p:nvPr/>
-        </p:nvSpPr>
-        <p:spPr>
-          <a:xfrm>
-            <a:off x="822960" y="3063240"/>
-            <a:ext cx="3017520" cy="914400"/>
-          </a:xfrm>
-          <a:prstGeom prst="rect">
-            <a:avLst/>
-          </a:prstGeom>
-          <a:noFill/>
-          <a:ln/>
-        </p:spPr>
-        <p:txBody>
-          <a:bodyPr wrap="square" lIns="0" tIns="0" rIns="0" bIns="0" rtlCol="0" anchor="ctr"/>
-          <a:lstStyle/>
-          <a:p>
-            <a:pPr indent="0" marL="0">
-              <a:buNone/>
-            </a:pPr>
-            <a:r>
-              <a:rPr lang="en-US" sz="1150" dirty="0">
-                <a:solidFill>
-                  <a:srgbClr val="5B6472"/>
-                </a:solidFill>
-                <a:latin typeface="Calibri" pitchFamily="34" charset="0"/>
-                <a:ea typeface="Calibri" pitchFamily="34" charset="-122"/>
-                <a:cs typeface="Calibri" pitchFamily="34" charset="-120"/>
-              </a:rPr>
-              <a:t>資格勉強・技術メモをMarkdown/パワポで公開し、進捗を後から振り返れる形にする</a:t>
-            </a:r>
-            <a:endParaRPr lang="en-US" sz="1150" dirty="0"/>
-          </a:p>
-        </p:txBody>
-      </p:sp>
-      <p:sp>
-        <p:nvSpPr>
-          <p:cNvPr id="8" name="Shape 6"/>
-          <p:cNvSpPr/>
-          <p:nvPr/>
-        </p:nvSpPr>
-        <p:spPr>
-          <a:xfrm>
-            <a:off x="4343400" y="1554480"/>
-            <a:ext cx="3566160" cy="2468880"/>
-          </a:xfrm>
-          <a:prstGeom prst="roundRect">
-            <a:avLst>
-              <a:gd name="adj" fmla="val 4444"/>
+              <a:gd name="adj" fmla="val 3704"/>
             </a:avLst>
           </a:prstGeom>
           <a:solidFill>
@@ -7943,63 +8711,136 @@
             </a:solidFill>
             <a:prstDash val="solid"/>
           </a:ln>
-          <a:effectLst>
-            <a:outerShdw sx="100000" sy="100000" kx="0" ky="0" algn="bl" rotWithShape="0" blurRad="101600" dist="38100" dir="5400000">
-              <a:srgbClr val="000000">
-                <a:alpha val="12000"/>
-              </a:srgbClr>
-            </a:outerShdw>
-          </a:effectLst>
-        </p:spPr>
-      </p:sp>
-      <p:sp>
-        <p:nvSpPr>
-          <p:cNvPr id="9" name="Shape 7"/>
+        </p:spPr>
+      </p:sp>
+      <p:sp>
+        <p:nvSpPr>
+          <p:cNvPr id="8" name="Text 6"/>
+          <p:cNvSpPr txBox="1"/>
+          <p:nvPr/>
+        </p:nvSpPr>
+        <p:spPr>
+          <a:xfrm>
+            <a:off x="6309360" y="1828800"/>
+            <a:ext cx="4754880" cy="365760"/>
+          </a:xfrm>
+          <a:prstGeom prst="rect">
+            <a:avLst/>
+          </a:prstGeom>
+          <a:noFill/>
+          <a:ln/>
+        </p:spPr>
+        <p:txBody>
+          <a:bodyPr wrap="square" lIns="0" tIns="0" rIns="0" bIns="0" rtlCol="0" anchor="ctr"/>
+          <a:lstStyle/>
+          <a:p>
+            <a:pPr indent="0" marL="0">
+              <a:buNone/>
+            </a:pPr>
+            <a:r>
+              <a:rPr lang="en-US" sz="1400" b="1" dirty="0">
+                <a:solidFill>
+                  <a:srgbClr val="6B7280"/>
+                </a:solidFill>
+                <a:latin typeface="Calibri" pitchFamily="34" charset="0"/>
+                <a:ea typeface="Calibri" pitchFamily="34" charset="-122"/>
+                <a:cs typeface="Calibri" pitchFamily="34" charset="-120"/>
+              </a:rPr>
+              <a:t>逆風になる面</a:t>
+            </a:r>
+            <a:endParaRPr lang="en-US" sz="1400" dirty="0"/>
+          </a:p>
+        </p:txBody>
+      </p:sp>
+      <p:sp>
+        <p:nvSpPr>
+          <p:cNvPr id="9" name="Text 7"/>
+          <p:cNvSpPr txBox="1"/>
+          <p:nvPr/>
+        </p:nvSpPr>
+        <p:spPr>
+          <a:xfrm>
+            <a:off x="6309360" y="2240280"/>
+            <a:ext cx="4754880" cy="1737360"/>
+          </a:xfrm>
+          <a:prstGeom prst="rect">
+            <a:avLst/>
+          </a:prstGeom>
+          <a:noFill/>
+          <a:ln/>
+        </p:spPr>
+        <p:txBody>
+          <a:bodyPr wrap="square" lIns="0" tIns="0" rIns="0" bIns="0" rtlCol="0" anchor="ctr"/>
+          <a:lstStyle/>
+          <a:p>
+            <a:pPr indent="0" marL="0">
+              <a:buNone/>
+            </a:pPr>
+            <a:r>
+              <a:rPr lang="en-US" sz="1200" dirty="0">
+                <a:solidFill>
+                  <a:srgbClr val="5B6472"/>
+                </a:solidFill>
+                <a:latin typeface="Calibri" pitchFamily="34" charset="0"/>
+                <a:ea typeface="Calibri" pitchFamily="34" charset="-122"/>
+                <a:cs typeface="Calibri" pitchFamily="34" charset="-120"/>
+              </a:rPr>
+              <a:t>AI系リポジトリは既に供給過多気味。Product Huntの実例でも「AI関連プロダクトが多すぎて他が埋もれる」という声があった</a:t>
+            </a:r>
+            <a:endParaRPr lang="en-US" sz="1200" dirty="0"/>
+          </a:p>
+        </p:txBody>
+      </p:sp>
+      <p:sp>
+        <p:nvSpPr>
+          <p:cNvPr id="10" name="Shape 8"/>
           <p:cNvSpPr/>
           <p:nvPr/>
         </p:nvSpPr>
         <p:spPr>
           <a:xfrm>
-            <a:off x="4617720" y="1828800"/>
-            <a:ext cx="548640" cy="548640"/>
+            <a:off x="548640" y="4389120"/>
+            <a:ext cx="10607040" cy="1828800"/>
           </a:xfrm>
           <a:prstGeom prst="roundRect">
             <a:avLst>
-              <a:gd name="adj" fmla="val 50000"/>
+              <a:gd name="adj" fmla="val 5000"/>
             </a:avLst>
           </a:prstGeom>
           <a:solidFill>
-            <a:srgbClr val="B084F5"/>
+            <a:srgbClr val="B084F5">
+              <a:alpha val="10000"/>
+            </a:srgbClr>
           </a:solidFill>
           <a:ln/>
         </p:spPr>
       </p:sp>
       <p:sp>
         <p:nvSpPr>
-          <p:cNvPr id="10" name="Text 8"/>
-          <p:cNvSpPr txBox="1"/>
-          <p:nvPr/>
-        </p:nvSpPr>
-        <p:spPr>
-          <a:xfrm>
-            <a:off x="4617720" y="2560320"/>
-            <a:ext cx="3017520" cy="548640"/>
-          </a:xfrm>
-          <a:prstGeom prst="rect">
-            <a:avLst/>
-          </a:prstGeom>
-          <a:noFill/>
-          <a:ln/>
-        </p:spPr>
-        <p:txBody>
-          <a:bodyPr wrap="square" lIns="0" tIns="0" rIns="0" bIns="0" rtlCol="0" anchor="ctr"/>
-          <a:lstStyle/>
-          <a:p>
-            <a:pPr indent="0" marL="0">
-              <a:buNone/>
-            </a:pPr>
-            <a:r>
-              <a:rPr lang="en-US" sz="1500" b="1" dirty="0">
+          <p:cNvPr id="11" name="Text 9"/>
+          <p:cNvSpPr txBox="1"/>
+          <p:nvPr/>
+        </p:nvSpPr>
+        <p:spPr>
+          <a:xfrm>
+            <a:off x="822960" y="4572000"/>
+            <a:ext cx="10058400" cy="365760"/>
+          </a:xfrm>
+          <a:prstGeom prst="rect">
+            <a:avLst/>
+          </a:prstGeom>
+          <a:noFill/>
+          <a:ln/>
+        </p:spPr>
+        <p:txBody>
+          <a:bodyPr wrap="square" lIns="0" tIns="0" rIns="0" bIns="0" rtlCol="0" anchor="ctr"/>
+          <a:lstStyle/>
+          <a:p>
+            <a:pPr indent="0" marL="0">
+              <a:buNone/>
+            </a:pPr>
+            <a:r>
+              <a:rPr lang="en-US" sz="1350" b="1" dirty="0">
                 <a:solidFill>
                   <a:srgbClr val="1A1F26"/>
                 </a:solidFill>
@@ -8007,22 +8848,22 @@
                 <a:ea typeface="Calibri" pitchFamily="34" charset="-122"/>
                 <a:cs typeface="Calibri" pitchFamily="34" charset="-120"/>
               </a:rPr>
-              <a:t>ポートフォリオ化</a:t>
-            </a:r>
-            <a:endParaRPr lang="en-US" sz="1500" dirty="0"/>
-          </a:p>
-        </p:txBody>
-      </p:sp>
-      <p:sp>
-        <p:nvSpPr>
-          <p:cNvPr id="11" name="Text 9"/>
-          <p:cNvSpPr txBox="1"/>
-          <p:nvPr/>
-        </p:nvSpPr>
-        <p:spPr>
-          <a:xfrm>
-            <a:off x="4617720" y="3063240"/>
-            <a:ext cx="3017520" cy="914400"/>
+              <a:t>象徴的な実例: Epheの「あえてAI-less」戦略</a:t>
+            </a:r>
+            <a:endParaRPr lang="en-US" sz="1350" dirty="0"/>
+          </a:p>
+        </p:txBody>
+      </p:sp>
+      <p:sp>
+        <p:nvSpPr>
+          <p:cNvPr id="12" name="Text 10"/>
+          <p:cNvSpPr txBox="1"/>
+          <p:nvPr/>
+        </p:nvSpPr>
+        <p:spPr>
+          <a:xfrm>
+            <a:off x="822960" y="4937760"/>
+            <a:ext cx="10058400" cy="1188720"/>
           </a:xfrm>
           <a:prstGeom prst="rect">
             <a:avLst/>
@@ -8046,7 +8887,7 @@
                 <a:ea typeface="Calibri" pitchFamily="34" charset="-122"/>
                 <a:cs typeface="Calibri" pitchFamily="34" charset="-120"/>
               </a:rPr>
-              <a:t>コミット履歴・READMEが、そのまま実績・継続力の証明になる</a:t>
+              <a:t>Ephe(Markdownアプリ)の開発者は「あえてAI機能を入れない」という、今の時流とは真逆の方向で作ったと明言しており、それがHacker Newsでの評価につながった一因になっている。つまりMLをテーマにする場合、機能そのものの新規性だけでなく「なぜこのML系ツールが他の無数のAI系リポジトリと違うのか」を通常以上に鋭く打ち出す必要がある。差別化のハードルが上がる分、当たった時のリーチも大きい、という表裏一体の関係</a:t>
             </a:r>
             <a:endParaRPr lang="en-US" sz="1150" dirty="0"/>
           </a:p>
@@ -8054,219 +8895,46 @@
       </p:sp>
       <p:sp>
         <p:nvSpPr>
-          <p:cNvPr id="12" name="Shape 10"/>
-          <p:cNvSpPr/>
-          <p:nvPr/>
-        </p:nvSpPr>
-        <p:spPr>
-          <a:xfrm>
-            <a:off x="8138160" y="1554480"/>
-            <a:ext cx="3566160" cy="2468880"/>
-          </a:xfrm>
-          <a:prstGeom prst="roundRect">
-            <a:avLst>
-              <a:gd name="adj" fmla="val 4444"/>
-            </a:avLst>
-          </a:prstGeom>
-          <a:solidFill>
-            <a:srgbClr val="FFFFFF"/>
-          </a:solidFill>
-          <a:ln w="12700">
-            <a:solidFill>
-              <a:srgbClr val="E3E6EA"/>
-            </a:solidFill>
-            <a:prstDash val="solid"/>
-          </a:ln>
-          <a:effectLst>
-            <a:outerShdw sx="100000" sy="100000" kx="0" ky="0" algn="bl" rotWithShape="0" blurRad="101600" dist="38100" dir="5400000">
-              <a:srgbClr val="000000">
-                <a:alpha val="12000"/>
-              </a:srgbClr>
-            </a:outerShdw>
-          </a:effectLst>
-        </p:spPr>
-      </p:sp>
-      <p:sp>
-        <p:nvSpPr>
-          <p:cNvPr id="13" name="Shape 11"/>
-          <p:cNvSpPr/>
-          <p:nvPr/>
-        </p:nvSpPr>
-        <p:spPr>
-          <a:xfrm>
-            <a:off x="8412480" y="1828800"/>
-            <a:ext cx="548640" cy="548640"/>
-          </a:xfrm>
-          <a:prstGeom prst="roundRect">
-            <a:avLst>
-              <a:gd name="adj" fmla="val 50000"/>
-            </a:avLst>
-          </a:prstGeom>
-          <a:solidFill>
-            <a:srgbClr val="B084F5"/>
-          </a:solidFill>
-          <a:ln/>
-        </p:spPr>
+          <p:cNvPr id="13" name="Text 11"/>
+          <p:cNvSpPr txBox="1"/>
+          <p:nvPr/>
+        </p:nvSpPr>
+        <p:spPr>
+          <a:xfrm>
+            <a:off x="548640" y="6400800"/>
+            <a:ext cx="10424160" cy="320040"/>
+          </a:xfrm>
+          <a:prstGeom prst="rect">
+            <a:avLst/>
+          </a:prstGeom>
+          <a:noFill/>
+          <a:ln/>
+        </p:spPr>
+        <p:txBody>
+          <a:bodyPr wrap="square" lIns="0" tIns="0" rIns="0" bIns="0" rtlCol="0" anchor="ctr"/>
+          <a:lstStyle/>
+          <a:p>
+            <a:pPr indent="0" marL="0">
+              <a:buNone/>
+            </a:pPr>
+            <a:r>
+              <a:rPr lang="en-US" sz="1000" i="1" dirty="0">
+                <a:solidFill>
+                  <a:srgbClr val="5B6472"/>
+                </a:solidFill>
+                <a:latin typeface="Calibri" pitchFamily="34" charset="0"/>
+                <a:ea typeface="Calibri" pitchFamily="34" charset="-122"/>
+                <a:cs typeface="Calibri" pitchFamily="34" charset="-120"/>
+              </a:rPr>
+              <a:t>出典: labelmake開発者のブログ記事(Product Huntでの実感)、Epheアプリ開発者のブログ記事</a:t>
+            </a:r>
+            <a:endParaRPr lang="en-US" sz="1000" dirty="0"/>
+          </a:p>
+        </p:txBody>
       </p:sp>
       <p:sp>
         <p:nvSpPr>
           <p:cNvPr id="14" name="Text 12"/>
-          <p:cNvSpPr txBox="1"/>
-          <p:nvPr/>
-        </p:nvSpPr>
-        <p:spPr>
-          <a:xfrm>
-            <a:off x="8412480" y="2560320"/>
-            <a:ext cx="3017520" cy="548640"/>
-          </a:xfrm>
-          <a:prstGeom prst="rect">
-            <a:avLst/>
-          </a:prstGeom>
-          <a:noFill/>
-          <a:ln/>
-        </p:spPr>
-        <p:txBody>
-          <a:bodyPr wrap="square" lIns="0" tIns="0" rIns="0" bIns="0" rtlCol="0" anchor="ctr"/>
-          <a:lstStyle/>
-          <a:p>
-            <a:pPr indent="0" marL="0">
-              <a:buNone/>
-            </a:pPr>
-            <a:r>
-              <a:rPr lang="en-US" sz="1500" b="1" dirty="0">
-                <a:solidFill>
-                  <a:srgbClr val="1A1F26"/>
-                </a:solidFill>
-                <a:latin typeface="Calibri" pitchFamily="34" charset="0"/>
-                <a:ea typeface="Calibri" pitchFamily="34" charset="-122"/>
-                <a:cs typeface="Calibri" pitchFamily="34" charset="-120"/>
-              </a:rPr>
-              <a:t>ネットワーキング</a:t>
-            </a:r>
-            <a:endParaRPr lang="en-US" sz="1500" dirty="0"/>
-          </a:p>
-        </p:txBody>
-      </p:sp>
-      <p:sp>
-        <p:nvSpPr>
-          <p:cNvPr id="15" name="Text 13"/>
-          <p:cNvSpPr txBox="1"/>
-          <p:nvPr/>
-        </p:nvSpPr>
-        <p:spPr>
-          <a:xfrm>
-            <a:off x="8412480" y="3063240"/>
-            <a:ext cx="3017520" cy="914400"/>
-          </a:xfrm>
-          <a:prstGeom prst="rect">
-            <a:avLst/>
-          </a:prstGeom>
-          <a:noFill/>
-          <a:ln/>
-        </p:spPr>
-        <p:txBody>
-          <a:bodyPr wrap="square" lIns="0" tIns="0" rIns="0" bIns="0" rtlCol="0" anchor="ctr"/>
-          <a:lstStyle/>
-          <a:p>
-            <a:pPr indent="0" marL="0">
-              <a:buNone/>
-            </a:pPr>
-            <a:r>
-              <a:rPr lang="en-US" sz="1150" dirty="0">
-                <a:solidFill>
-                  <a:srgbClr val="5B6472"/>
-                </a:solidFill>
-                <a:latin typeface="Calibri" pitchFamily="34" charset="0"/>
-                <a:ea typeface="Calibri" pitchFamily="34" charset="-122"/>
-                <a:cs typeface="Calibri" pitchFamily="34" charset="-120"/>
-              </a:rPr>
-              <a:t>Star・Follow・Issueでのやり取りを通じて、同じ分野の人とつながる</a:t>
-            </a:r>
-            <a:endParaRPr lang="en-US" sz="1150" dirty="0"/>
-          </a:p>
-        </p:txBody>
-      </p:sp>
-      <p:sp>
-        <p:nvSpPr>
-          <p:cNvPr id="16" name="Text 14"/>
-          <p:cNvSpPr txBox="1"/>
-          <p:nvPr/>
-        </p:nvSpPr>
-        <p:spPr>
-          <a:xfrm>
-            <a:off x="548640" y="4389120"/>
-            <a:ext cx="10607040" cy="365760"/>
-          </a:xfrm>
-          <a:prstGeom prst="rect">
-            <a:avLst/>
-          </a:prstGeom>
-          <a:noFill/>
-          <a:ln/>
-        </p:spPr>
-        <p:txBody>
-          <a:bodyPr wrap="square" lIns="0" tIns="0" rIns="0" bIns="0" rtlCol="0" anchor="ctr"/>
-          <a:lstStyle/>
-          <a:p>
-            <a:pPr indent="0" marL="0">
-              <a:buNone/>
-            </a:pPr>
-            <a:r>
-              <a:rPr lang="en-US" sz="1400" b="1" dirty="0">
-                <a:solidFill>
-                  <a:srgbClr val="1A1F26"/>
-                </a:solidFill>
-                <a:latin typeface="Calibri" pitchFamily="34" charset="0"/>
-                <a:ea typeface="Calibri" pitchFamily="34" charset="-122"/>
-                <a:cs typeface="Calibri" pitchFamily="34" charset="-120"/>
-              </a:rPr>
-              <a:t>このリポジトリ(tech-notes)の位置づけ</a:t>
-            </a:r>
-            <a:endParaRPr lang="en-US" sz="1400" dirty="0"/>
-          </a:p>
-        </p:txBody>
-      </p:sp>
-      <p:sp>
-        <p:nvSpPr>
-          <p:cNvPr id="17" name="Text 15"/>
-          <p:cNvSpPr txBox="1"/>
-          <p:nvPr/>
-        </p:nvSpPr>
-        <p:spPr>
-          <a:xfrm>
-            <a:off x="548640" y="4754880"/>
-            <a:ext cx="10607040" cy="822960"/>
-          </a:xfrm>
-          <a:prstGeom prst="rect">
-            <a:avLst/>
-          </a:prstGeom>
-          <a:noFill/>
-          <a:ln/>
-        </p:spPr>
-        <p:txBody>
-          <a:bodyPr wrap="square" lIns="0" tIns="0" rIns="0" bIns="0" rtlCol="0" anchor="ctr"/>
-          <a:lstStyle/>
-          <a:p>
-            <a:pPr indent="0" marL="0">
-              <a:buNone/>
-            </a:pPr>
-            <a:r>
-              <a:rPr lang="en-US" sz="1250" dirty="0">
-                <a:solidFill>
-                  <a:srgbClr val="5B6472"/>
-                </a:solidFill>
-                <a:latin typeface="Calibri" pitchFamily="34" charset="0"/>
-                <a:ea typeface="Calibri" pitchFamily="34" charset="-122"/>
-                <a:cs typeface="Calibri" pitchFamily="34" charset="-120"/>
-              </a:rPr>
-              <a:t>GitHubの成長Tips(フォロワー獲得など)と、Claude認定資格(CCA-F等)の学習メモの2本柱で運用する。中身が混ざらないよう、資格対策は別ファイル(cca-f-study-guide.pptx)に分離している。</a:t>
-            </a:r>
-            <a:endParaRPr lang="en-US" sz="1250" dirty="0"/>
-          </a:p>
-        </p:txBody>
-      </p:sp>
-      <p:sp>
-        <p:nvSpPr>
-          <p:cNvPr id="18" name="Text 16"/>
           <p:cNvSpPr txBox="1"/>
           <p:nvPr/>
         </p:nvSpPr>
@@ -8407,7 +9075,7 @@
                 <a:ea typeface="Cambria" pitchFamily="34" charset="-122"/>
                 <a:cs typeface="Cambria" pitchFamily="34" charset="-120"/>
               </a:rPr>
-              <a:t>初心者向け: まず慣れる4つの行動</a:t>
+              <a:t>なぜGitHubで“育てる”のか</a:t>
             </a:r>
             <a:endParaRPr lang="en-US" sz="2600" dirty="0"/>
           </a:p>
@@ -8421,56 +9089,53 @@
         </p:nvSpPr>
         <p:spPr>
           <a:xfrm>
-            <a:off x="640080" y="1554480"/>
-            <a:ext cx="457200" cy="457200"/>
-          </a:xfrm>
-          <a:prstGeom prst="ellipse">
-            <a:avLst/>
+            <a:off x="548640" y="1554480"/>
+            <a:ext cx="3566160" cy="2468880"/>
+          </a:xfrm>
+          <a:prstGeom prst="roundRect">
+            <a:avLst>
+              <a:gd name="adj" fmla="val 4444"/>
+            </a:avLst>
           </a:prstGeom>
           <a:solidFill>
-            <a:srgbClr val="58D68D"/>
+            <a:srgbClr val="FFFFFF"/>
           </a:solidFill>
-          <a:ln/>
-        </p:spPr>
-      </p:sp>
-      <p:sp>
-        <p:nvSpPr>
-          <p:cNvPr id="5" name="Text 3"/>
-          <p:cNvSpPr txBox="1"/>
-          <p:nvPr/>
-        </p:nvSpPr>
-        <p:spPr>
-          <a:xfrm>
-            <a:off x="640080" y="1554480"/>
-            <a:ext cx="457200" cy="457200"/>
-          </a:xfrm>
-          <a:prstGeom prst="rect">
-            <a:avLst/>
-          </a:prstGeom>
-          <a:noFill/>
-          <a:ln/>
-        </p:spPr>
-        <p:txBody>
-          <a:bodyPr wrap="square" lIns="0" tIns="0" rIns="0" bIns="0" rtlCol="0" anchor="ctr"/>
-          <a:lstStyle/>
-          <a:p>
-            <a:pPr algn="ctr" indent="0" marL="0">
-              <a:buNone/>
-            </a:pPr>
-            <a:r>
-              <a:rPr lang="en-US" sz="1400" b="1" dirty="0">
-                <a:solidFill>
-                  <a:srgbClr val="FFFFFF"/>
-                </a:solidFill>
-                <a:latin typeface="Calibri" pitchFamily="34" charset="0"/>
-                <a:ea typeface="Calibri" pitchFamily="34" charset="-122"/>
-                <a:cs typeface="Calibri" pitchFamily="34" charset="-120"/>
-              </a:rPr>
-              <a:t>1</a:t>
-            </a:r>
-            <a:endParaRPr lang="en-US" sz="1400" dirty="0"/>
-          </a:p>
-        </p:txBody>
+          <a:ln w="12700">
+            <a:solidFill>
+              <a:srgbClr val="E3E6EA"/>
+            </a:solidFill>
+            <a:prstDash val="solid"/>
+          </a:ln>
+          <a:effectLst>
+            <a:outerShdw sx="100000" sy="100000" kx="0" ky="0" algn="bl" rotWithShape="0" blurRad="101600" dist="38100" dir="5400000">
+              <a:srgbClr val="000000">
+                <a:alpha val="12000"/>
+              </a:srgbClr>
+            </a:outerShdw>
+          </a:effectLst>
+        </p:spPr>
+      </p:sp>
+      <p:sp>
+        <p:nvSpPr>
+          <p:cNvPr id="5" name="Shape 3"/>
+          <p:cNvSpPr/>
+          <p:nvPr/>
+        </p:nvSpPr>
+        <p:spPr>
+          <a:xfrm>
+            <a:off x="822960" y="1828800"/>
+            <a:ext cx="548640" cy="548640"/>
+          </a:xfrm>
+          <a:prstGeom prst="roundRect">
+            <a:avLst>
+              <a:gd name="adj" fmla="val 50000"/>
+            </a:avLst>
+          </a:prstGeom>
+          <a:solidFill>
+            <a:srgbClr val="B084F5"/>
+          </a:solidFill>
+          <a:ln/>
+        </p:spPr>
       </p:sp>
       <p:sp>
         <p:nvSpPr>
@@ -8480,24 +9145,24 @@
         </p:nvSpPr>
         <p:spPr>
           <a:xfrm>
-            <a:off x="1325880" y="1527048"/>
-            <a:ext cx="3108960" cy="502920"/>
-          </a:xfrm>
-          <a:prstGeom prst="rect">
-            <a:avLst/>
-          </a:prstGeom>
-          <a:noFill/>
-          <a:ln/>
-        </p:spPr>
-        <p:txBody>
-          <a:bodyPr wrap="square" lIns="0" tIns="0" rIns="0" bIns="0" rtlCol="0" anchor="t"/>
-          <a:lstStyle/>
-          <a:p>
-            <a:pPr indent="0" marL="0">
-              <a:buNone/>
-            </a:pPr>
-            <a:r>
-              <a:rPr lang="en-US" sz="1400" b="1" dirty="0">
+            <a:off x="822960" y="2560320"/>
+            <a:ext cx="3017520" cy="548640"/>
+          </a:xfrm>
+          <a:prstGeom prst="rect">
+            <a:avLst/>
+          </a:prstGeom>
+          <a:noFill/>
+          <a:ln/>
+        </p:spPr>
+        <p:txBody>
+          <a:bodyPr wrap="square" lIns="0" tIns="0" rIns="0" bIns="0" rtlCol="0" anchor="ctr"/>
+          <a:lstStyle/>
+          <a:p>
+            <a:pPr indent="0" marL="0">
+              <a:buNone/>
+            </a:pPr>
+            <a:r>
+              <a:rPr lang="en-US" sz="1500" b="1" dirty="0">
                 <a:solidFill>
                   <a:srgbClr val="1A1F26"/>
                 </a:solidFill>
@@ -8505,9 +9170,9 @@
                 <a:ea typeface="Calibri" pitchFamily="34" charset="-122"/>
                 <a:cs typeface="Calibri" pitchFamily="34" charset="-120"/>
               </a:rPr>
-              <a:t>アカウント作成</a:t>
-            </a:r>
-            <a:endParaRPr lang="en-US" sz="1400" dirty="0"/>
+              <a:t>学習ログの可視化</a:t>
+            </a:r>
+            <a:endParaRPr lang="en-US" sz="1500" dirty="0"/>
           </a:p>
         </p:txBody>
       </p:sp>
@@ -8519,8 +9184,8 @@
         </p:nvSpPr>
         <p:spPr>
           <a:xfrm>
-            <a:off x="4572000" y="1527048"/>
-            <a:ext cx="6583680" cy="960120"/>
+            <a:off x="822960" y="3063240"/>
+            <a:ext cx="3017520" cy="914400"/>
           </a:xfrm>
           <a:prstGeom prst="rect">
             <a:avLst/>
@@ -8544,7 +9209,7 @@
                 <a:ea typeface="Calibri" pitchFamily="34" charset="-122"/>
                 <a:cs typeface="Calibri" pitchFamily="34" charset="-120"/>
               </a:rPr>
-              <a:t>GitHubトップの Sign up からアカウントを作る。まずはこれがないと何も始まらない</a:t>
+              <a:t>資格勉強・技術メモをMarkdown/パワポで公開し、進捗を後から振り返れる形にする</a:t>
             </a:r>
             <a:endParaRPr lang="en-US" sz="1150" dirty="0"/>
           </a:p>
@@ -8558,56 +9223,53 @@
         </p:nvSpPr>
         <p:spPr>
           <a:xfrm>
-            <a:off x="640080" y="2606040"/>
-            <a:ext cx="457200" cy="457200"/>
-          </a:xfrm>
-          <a:prstGeom prst="ellipse">
-            <a:avLst/>
+            <a:off x="4343400" y="1554480"/>
+            <a:ext cx="3566160" cy="2468880"/>
+          </a:xfrm>
+          <a:prstGeom prst="roundRect">
+            <a:avLst>
+              <a:gd name="adj" fmla="val 4444"/>
+            </a:avLst>
           </a:prstGeom>
           <a:solidFill>
-            <a:srgbClr val="58D68D"/>
+            <a:srgbClr val="FFFFFF"/>
           </a:solidFill>
-          <a:ln/>
-        </p:spPr>
-      </p:sp>
-      <p:sp>
-        <p:nvSpPr>
-          <p:cNvPr id="9" name="Text 7"/>
-          <p:cNvSpPr txBox="1"/>
-          <p:nvPr/>
-        </p:nvSpPr>
-        <p:spPr>
-          <a:xfrm>
-            <a:off x="640080" y="2606040"/>
-            <a:ext cx="457200" cy="457200"/>
-          </a:xfrm>
-          <a:prstGeom prst="rect">
-            <a:avLst/>
-          </a:prstGeom>
-          <a:noFill/>
-          <a:ln/>
-        </p:spPr>
-        <p:txBody>
-          <a:bodyPr wrap="square" lIns="0" tIns="0" rIns="0" bIns="0" rtlCol="0" anchor="ctr"/>
-          <a:lstStyle/>
-          <a:p>
-            <a:pPr algn="ctr" indent="0" marL="0">
-              <a:buNone/>
-            </a:pPr>
-            <a:r>
-              <a:rPr lang="en-US" sz="1400" b="1" dirty="0">
-                <a:solidFill>
-                  <a:srgbClr val="FFFFFF"/>
-                </a:solidFill>
-                <a:latin typeface="Calibri" pitchFamily="34" charset="0"/>
-                <a:ea typeface="Calibri" pitchFamily="34" charset="-122"/>
-                <a:cs typeface="Calibri" pitchFamily="34" charset="-120"/>
-              </a:rPr>
-              <a:t>2</a:t>
-            </a:r>
-            <a:endParaRPr lang="en-US" sz="1400" dirty="0"/>
-          </a:p>
-        </p:txBody>
+          <a:ln w="12700">
+            <a:solidFill>
+              <a:srgbClr val="E3E6EA"/>
+            </a:solidFill>
+            <a:prstDash val="solid"/>
+          </a:ln>
+          <a:effectLst>
+            <a:outerShdw sx="100000" sy="100000" kx="0" ky="0" algn="bl" rotWithShape="0" blurRad="101600" dist="38100" dir="5400000">
+              <a:srgbClr val="000000">
+                <a:alpha val="12000"/>
+              </a:srgbClr>
+            </a:outerShdw>
+          </a:effectLst>
+        </p:spPr>
+      </p:sp>
+      <p:sp>
+        <p:nvSpPr>
+          <p:cNvPr id="9" name="Shape 7"/>
+          <p:cNvSpPr/>
+          <p:nvPr/>
+        </p:nvSpPr>
+        <p:spPr>
+          <a:xfrm>
+            <a:off x="4617720" y="1828800"/>
+            <a:ext cx="548640" cy="548640"/>
+          </a:xfrm>
+          <a:prstGeom prst="roundRect">
+            <a:avLst>
+              <a:gd name="adj" fmla="val 50000"/>
+            </a:avLst>
+          </a:prstGeom>
+          <a:solidFill>
+            <a:srgbClr val="B084F5"/>
+          </a:solidFill>
+          <a:ln/>
+        </p:spPr>
       </p:sp>
       <p:sp>
         <p:nvSpPr>
@@ -8617,24 +9279,24 @@
         </p:nvSpPr>
         <p:spPr>
           <a:xfrm>
-            <a:off x="1325880" y="2578608"/>
-            <a:ext cx="3108960" cy="502920"/>
-          </a:xfrm>
-          <a:prstGeom prst="rect">
-            <a:avLst/>
-          </a:prstGeom>
-          <a:noFill/>
-          <a:ln/>
-        </p:spPr>
-        <p:txBody>
-          <a:bodyPr wrap="square" lIns="0" tIns="0" rIns="0" bIns="0" rtlCol="0" anchor="t"/>
-          <a:lstStyle/>
-          <a:p>
-            <a:pPr indent="0" marL="0">
-              <a:buNone/>
-            </a:pPr>
-            <a:r>
-              <a:rPr lang="en-US" sz="1400" b="1" dirty="0">
+            <a:off x="4617720" y="2560320"/>
+            <a:ext cx="3017520" cy="548640"/>
+          </a:xfrm>
+          <a:prstGeom prst="rect">
+            <a:avLst/>
+          </a:prstGeom>
+          <a:noFill/>
+          <a:ln/>
+        </p:spPr>
+        <p:txBody>
+          <a:bodyPr wrap="square" lIns="0" tIns="0" rIns="0" bIns="0" rtlCol="0" anchor="ctr"/>
+          <a:lstStyle/>
+          <a:p>
+            <a:pPr indent="0" marL="0">
+              <a:buNone/>
+            </a:pPr>
+            <a:r>
+              <a:rPr lang="en-US" sz="1500" b="1" dirty="0">
                 <a:solidFill>
                   <a:srgbClr val="1A1F26"/>
                 </a:solidFill>
@@ -8642,9 +9304,9 @@
                 <a:ea typeface="Calibri" pitchFamily="34" charset="-122"/>
                 <a:cs typeface="Calibri" pitchFamily="34" charset="-120"/>
               </a:rPr>
-              <a:t>気になる人をフォロー</a:t>
-            </a:r>
-            <a:endParaRPr lang="en-US" sz="1400" dirty="0"/>
+              <a:t>ポートフォリオ化</a:t>
+            </a:r>
+            <a:endParaRPr lang="en-US" sz="1500" dirty="0"/>
           </a:p>
         </p:txBody>
       </p:sp>
@@ -8656,8 +9318,8 @@
         </p:nvSpPr>
         <p:spPr>
           <a:xfrm>
-            <a:off x="4572000" y="2578608"/>
-            <a:ext cx="6583680" cy="960120"/>
+            <a:off x="4617720" y="3063240"/>
+            <a:ext cx="3017520" cy="914400"/>
           </a:xfrm>
           <a:prstGeom prst="rect">
             <a:avLst/>
@@ -8681,7 +9343,7 @@
                 <a:ea typeface="Calibri" pitchFamily="34" charset="-122"/>
                 <a:cs typeface="Calibri" pitchFamily="34" charset="-120"/>
               </a:rPr>
-              <a:t>フォロー返しは気にしなくてよい。フォローすると相手の活動がNews Feedに流れるようになる</a:t>
+              <a:t>コミット履歴・READMEが、そのまま実績・継続力の証明になる</a:t>
             </a:r>
             <a:endParaRPr lang="en-US" sz="1150" dirty="0"/>
           </a:p>
@@ -8695,52 +9357,166 @@
         </p:nvSpPr>
         <p:spPr>
           <a:xfrm>
-            <a:off x="640080" y="3657600"/>
-            <a:ext cx="457200" cy="457200"/>
-          </a:xfrm>
-          <a:prstGeom prst="ellipse">
-            <a:avLst/>
+            <a:off x="8138160" y="1554480"/>
+            <a:ext cx="3566160" cy="2468880"/>
+          </a:xfrm>
+          <a:prstGeom prst="roundRect">
+            <a:avLst>
+              <a:gd name="adj" fmla="val 4444"/>
+            </a:avLst>
           </a:prstGeom>
           <a:solidFill>
-            <a:srgbClr val="58D68D"/>
+            <a:srgbClr val="FFFFFF"/>
           </a:solidFill>
-          <a:ln/>
-        </p:spPr>
-      </p:sp>
-      <p:sp>
-        <p:nvSpPr>
-          <p:cNvPr id="13" name="Text 11"/>
-          <p:cNvSpPr txBox="1"/>
-          <p:nvPr/>
-        </p:nvSpPr>
-        <p:spPr>
-          <a:xfrm>
-            <a:off x="640080" y="3657600"/>
-            <a:ext cx="457200" cy="457200"/>
-          </a:xfrm>
-          <a:prstGeom prst="rect">
-            <a:avLst/>
-          </a:prstGeom>
-          <a:noFill/>
-          <a:ln/>
-        </p:spPr>
-        <p:txBody>
-          <a:bodyPr wrap="square" lIns="0" tIns="0" rIns="0" bIns="0" rtlCol="0" anchor="ctr"/>
-          <a:lstStyle/>
-          <a:p>
-            <a:pPr algn="ctr" indent="0" marL="0">
+          <a:ln w="12700">
+            <a:solidFill>
+              <a:srgbClr val="E3E6EA"/>
+            </a:solidFill>
+            <a:prstDash val="solid"/>
+          </a:ln>
+          <a:effectLst>
+            <a:outerShdw sx="100000" sy="100000" kx="0" ky="0" algn="bl" rotWithShape="0" blurRad="101600" dist="38100" dir="5400000">
+              <a:srgbClr val="000000">
+                <a:alpha val="12000"/>
+              </a:srgbClr>
+            </a:outerShdw>
+          </a:effectLst>
+        </p:spPr>
+      </p:sp>
+      <p:sp>
+        <p:nvSpPr>
+          <p:cNvPr id="13" name="Shape 11"/>
+          <p:cNvSpPr/>
+          <p:nvPr/>
+        </p:nvSpPr>
+        <p:spPr>
+          <a:xfrm>
+            <a:off x="8412480" y="1828800"/>
+            <a:ext cx="548640" cy="548640"/>
+          </a:xfrm>
+          <a:prstGeom prst="roundRect">
+            <a:avLst>
+              <a:gd name="adj" fmla="val 50000"/>
+            </a:avLst>
+          </a:prstGeom>
+          <a:solidFill>
+            <a:srgbClr val="B084F5"/>
+          </a:solidFill>
+          <a:ln/>
+        </p:spPr>
+      </p:sp>
+      <p:sp>
+        <p:nvSpPr>
+          <p:cNvPr id="14" name="Text 12"/>
+          <p:cNvSpPr txBox="1"/>
+          <p:nvPr/>
+        </p:nvSpPr>
+        <p:spPr>
+          <a:xfrm>
+            <a:off x="8412480" y="2560320"/>
+            <a:ext cx="3017520" cy="548640"/>
+          </a:xfrm>
+          <a:prstGeom prst="rect">
+            <a:avLst/>
+          </a:prstGeom>
+          <a:noFill/>
+          <a:ln/>
+        </p:spPr>
+        <p:txBody>
+          <a:bodyPr wrap="square" lIns="0" tIns="0" rIns="0" bIns="0" rtlCol="0" anchor="ctr"/>
+          <a:lstStyle/>
+          <a:p>
+            <a:pPr indent="0" marL="0">
+              <a:buNone/>
+            </a:pPr>
+            <a:r>
+              <a:rPr lang="en-US" sz="1500" b="1" dirty="0">
+                <a:solidFill>
+                  <a:srgbClr val="1A1F26"/>
+                </a:solidFill>
+                <a:latin typeface="Calibri" pitchFamily="34" charset="0"/>
+                <a:ea typeface="Calibri" pitchFamily="34" charset="-122"/>
+                <a:cs typeface="Calibri" pitchFamily="34" charset="-120"/>
+              </a:rPr>
+              <a:t>ネットワーキング</a:t>
+            </a:r>
+            <a:endParaRPr lang="en-US" sz="1500" dirty="0"/>
+          </a:p>
+        </p:txBody>
+      </p:sp>
+      <p:sp>
+        <p:nvSpPr>
+          <p:cNvPr id="15" name="Text 13"/>
+          <p:cNvSpPr txBox="1"/>
+          <p:nvPr/>
+        </p:nvSpPr>
+        <p:spPr>
+          <a:xfrm>
+            <a:off x="8412480" y="3063240"/>
+            <a:ext cx="3017520" cy="914400"/>
+          </a:xfrm>
+          <a:prstGeom prst="rect">
+            <a:avLst/>
+          </a:prstGeom>
+          <a:noFill/>
+          <a:ln/>
+        </p:spPr>
+        <p:txBody>
+          <a:bodyPr wrap="square" lIns="0" tIns="0" rIns="0" bIns="0" rtlCol="0" anchor="ctr"/>
+          <a:lstStyle/>
+          <a:p>
+            <a:pPr indent="0" marL="0">
+              <a:buNone/>
+            </a:pPr>
+            <a:r>
+              <a:rPr lang="en-US" sz="1150" dirty="0">
+                <a:solidFill>
+                  <a:srgbClr val="5B6472"/>
+                </a:solidFill>
+                <a:latin typeface="Calibri" pitchFamily="34" charset="0"/>
+                <a:ea typeface="Calibri" pitchFamily="34" charset="-122"/>
+                <a:cs typeface="Calibri" pitchFamily="34" charset="-120"/>
+              </a:rPr>
+              <a:t>Star・Follow・Issueでのやり取りを通じて、同じ分野の人とつながる</a:t>
+            </a:r>
+            <a:endParaRPr lang="en-US" sz="1150" dirty="0"/>
+          </a:p>
+        </p:txBody>
+      </p:sp>
+      <p:sp>
+        <p:nvSpPr>
+          <p:cNvPr id="16" name="Text 14"/>
+          <p:cNvSpPr txBox="1"/>
+          <p:nvPr/>
+        </p:nvSpPr>
+        <p:spPr>
+          <a:xfrm>
+            <a:off x="548640" y="4389120"/>
+            <a:ext cx="10607040" cy="365760"/>
+          </a:xfrm>
+          <a:prstGeom prst="rect">
+            <a:avLst/>
+          </a:prstGeom>
+          <a:noFill/>
+          <a:ln/>
+        </p:spPr>
+        <p:txBody>
+          <a:bodyPr wrap="square" lIns="0" tIns="0" rIns="0" bIns="0" rtlCol="0" anchor="ctr"/>
+          <a:lstStyle/>
+          <a:p>
+            <a:pPr indent="0" marL="0">
               <a:buNone/>
             </a:pPr>
             <a:r>
               <a:rPr lang="en-US" sz="1400" b="1" dirty="0">
                 <a:solidFill>
-                  <a:srgbClr val="FFFFFF"/>
-                </a:solidFill>
-                <a:latin typeface="Calibri" pitchFamily="34" charset="0"/>
-                <a:ea typeface="Calibri" pitchFamily="34" charset="-122"/>
-                <a:cs typeface="Calibri" pitchFamily="34" charset="-120"/>
-              </a:rPr>
-              <a:t>3</a:t>
+                  <a:srgbClr val="1A1F26"/>
+                </a:solidFill>
+                <a:latin typeface="Calibri" pitchFamily="34" charset="0"/>
+                <a:ea typeface="Calibri" pitchFamily="34" charset="-122"/>
+                <a:cs typeface="Calibri" pitchFamily="34" charset="-120"/>
+              </a:rPr>
+              <a:t>このリポジトリ(tech-notes)の位置づけ</a:t>
             </a:r>
             <a:endParaRPr lang="en-US" sz="1400" dirty="0"/>
           </a:p>
@@ -8748,69 +9524,30 @@
       </p:sp>
       <p:sp>
         <p:nvSpPr>
-          <p:cNvPr id="14" name="Text 12"/>
-          <p:cNvSpPr txBox="1"/>
-          <p:nvPr/>
-        </p:nvSpPr>
-        <p:spPr>
-          <a:xfrm>
-            <a:off x="1325880" y="3630168"/>
-            <a:ext cx="3108960" cy="502920"/>
-          </a:xfrm>
-          <a:prstGeom prst="rect">
-            <a:avLst/>
-          </a:prstGeom>
-          <a:noFill/>
-          <a:ln/>
-        </p:spPr>
-        <p:txBody>
-          <a:bodyPr wrap="square" lIns="0" tIns="0" rIns="0" bIns="0" rtlCol="0" anchor="t"/>
-          <a:lstStyle/>
-          <a:p>
-            <a:pPr indent="0" marL="0">
-              <a:buNone/>
-            </a:pPr>
-            <a:r>
-              <a:rPr lang="en-US" sz="1400" b="1" dirty="0">
-                <a:solidFill>
-                  <a:srgbClr val="1A1F26"/>
-                </a:solidFill>
-                <a:latin typeface="Calibri" pitchFamily="34" charset="0"/>
-                <a:ea typeface="Calibri" pitchFamily="34" charset="-122"/>
-                <a:cs typeface="Calibri" pitchFamily="34" charset="-120"/>
-              </a:rPr>
-              <a:t>気になるリポジトリにStar</a:t>
-            </a:r>
-            <a:endParaRPr lang="en-US" sz="1400" dirty="0"/>
-          </a:p>
-        </p:txBody>
-      </p:sp>
-      <p:sp>
-        <p:nvSpPr>
-          <p:cNvPr id="15" name="Text 13"/>
-          <p:cNvSpPr txBox="1"/>
-          <p:nvPr/>
-        </p:nvSpPr>
-        <p:spPr>
-          <a:xfrm>
-            <a:off x="4572000" y="3630168"/>
-            <a:ext cx="6583680" cy="960120"/>
-          </a:xfrm>
-          <a:prstGeom prst="rect">
-            <a:avLst/>
-          </a:prstGeom>
-          <a:noFill/>
-          <a:ln/>
-        </p:spPr>
-        <p:txBody>
-          <a:bodyPr wrap="square" lIns="0" tIns="0" rIns="0" bIns="0" rtlCol="0" anchor="ctr"/>
-          <a:lstStyle/>
-          <a:p>
-            <a:pPr indent="0" marL="0">
-              <a:buNone/>
-            </a:pPr>
-            <a:r>
-              <a:rPr lang="en-US" sz="1150" dirty="0">
+          <p:cNvPr id="17" name="Text 15"/>
+          <p:cNvSpPr txBox="1"/>
+          <p:nvPr/>
+        </p:nvSpPr>
+        <p:spPr>
+          <a:xfrm>
+            <a:off x="548640" y="4754880"/>
+            <a:ext cx="10607040" cy="822960"/>
+          </a:xfrm>
+          <a:prstGeom prst="rect">
+            <a:avLst/>
+          </a:prstGeom>
+          <a:noFill/>
+          <a:ln/>
+        </p:spPr>
+        <p:txBody>
+          <a:bodyPr wrap="square" lIns="0" tIns="0" rIns="0" bIns="0" rtlCol="0" anchor="ctr"/>
+          <a:lstStyle/>
+          <a:p>
+            <a:pPr indent="0" marL="0">
+              <a:buNone/>
+            </a:pPr>
+            <a:r>
+              <a:rPr lang="en-US" sz="1250" dirty="0">
                 <a:solidFill>
                   <a:srgbClr val="5B6472"/>
                 </a:solidFill>
@@ -8818,191 +9555,15 @@
                 <a:ea typeface="Calibri" pitchFamily="34" charset="-122"/>
                 <a:cs typeface="Calibri" pitchFamily="34" charset="-120"/>
               </a:rPr>
-              <a:t>お気に入り登録のような機能。Starすると自分をフォローしている人の feed に流れ、そのリポジトリの露出が増える</a:t>
-            </a:r>
-            <a:endParaRPr lang="en-US" sz="1150" dirty="0"/>
-          </a:p>
-        </p:txBody>
-      </p:sp>
-      <p:sp>
-        <p:nvSpPr>
-          <p:cNvPr id="16" name="Shape 14"/>
-          <p:cNvSpPr/>
-          <p:nvPr/>
-        </p:nvSpPr>
-        <p:spPr>
-          <a:xfrm>
-            <a:off x="640080" y="4709160"/>
-            <a:ext cx="457200" cy="457200"/>
-          </a:xfrm>
-          <a:prstGeom prst="ellipse">
-            <a:avLst/>
-          </a:prstGeom>
-          <a:solidFill>
-            <a:srgbClr val="58D68D"/>
-          </a:solidFill>
-          <a:ln/>
-        </p:spPr>
-      </p:sp>
-      <p:sp>
-        <p:nvSpPr>
-          <p:cNvPr id="17" name="Text 15"/>
-          <p:cNvSpPr txBox="1"/>
-          <p:nvPr/>
-        </p:nvSpPr>
-        <p:spPr>
-          <a:xfrm>
-            <a:off x="640080" y="4709160"/>
-            <a:ext cx="457200" cy="457200"/>
-          </a:xfrm>
-          <a:prstGeom prst="rect">
-            <a:avLst/>
-          </a:prstGeom>
-          <a:noFill/>
-          <a:ln/>
-        </p:spPr>
-        <p:txBody>
-          <a:bodyPr wrap="square" lIns="0" tIns="0" rIns="0" bIns="0" rtlCol="0" anchor="ctr"/>
-          <a:lstStyle/>
-          <a:p>
-            <a:pPr algn="ctr" indent="0" marL="0">
-              <a:buNone/>
-            </a:pPr>
-            <a:r>
-              <a:rPr lang="en-US" sz="1400" b="1" dirty="0">
-                <a:solidFill>
-                  <a:srgbClr val="FFFFFF"/>
-                </a:solidFill>
-                <a:latin typeface="Calibri" pitchFamily="34" charset="0"/>
-                <a:ea typeface="Calibri" pitchFamily="34" charset="-122"/>
-                <a:cs typeface="Calibri" pitchFamily="34" charset="-120"/>
-              </a:rPr>
-              <a:t>4</a:t>
-            </a:r>
-            <a:endParaRPr lang="en-US" sz="1400" dirty="0"/>
+              <a:t>GitHubの成長Tips(フォロワー獲得など)と、Claude認定資格(CCA-F等)の学習メモの2本柱で運用する。中身が混ざらないよう、資格対策は別ファイル(cca-f-study-guide.pptx)に分離している。</a:t>
+            </a:r>
+            <a:endParaRPr lang="en-US" sz="1250" dirty="0"/>
           </a:p>
         </p:txBody>
       </p:sp>
       <p:sp>
         <p:nvSpPr>
           <p:cNvPr id="18" name="Text 16"/>
-          <p:cNvSpPr txBox="1"/>
-          <p:nvPr/>
-        </p:nvSpPr>
-        <p:spPr>
-          <a:xfrm>
-            <a:off x="1325880" y="4681728"/>
-            <a:ext cx="3108960" cy="502920"/>
-          </a:xfrm>
-          <a:prstGeom prst="rect">
-            <a:avLst/>
-          </a:prstGeom>
-          <a:noFill/>
-          <a:ln/>
-        </p:spPr>
-        <p:txBody>
-          <a:bodyPr wrap="square" lIns="0" tIns="0" rIns="0" bIns="0" rtlCol="0" anchor="t"/>
-          <a:lstStyle/>
-          <a:p>
-            <a:pPr indent="0" marL="0">
-              <a:buNone/>
-            </a:pPr>
-            <a:r>
-              <a:rPr lang="en-US" sz="1400" b="1" dirty="0">
-                <a:solidFill>
-                  <a:srgbClr val="1A1F26"/>
-                </a:solidFill>
-                <a:latin typeface="Calibri" pitchFamily="34" charset="0"/>
-                <a:ea typeface="Calibri" pitchFamily="34" charset="-122"/>
-                <a:cs typeface="Calibri" pitchFamily="34" charset="-120"/>
-              </a:rPr>
-              <a:t>News Feedを読む習慣</a:t>
-            </a:r>
-            <a:endParaRPr lang="en-US" sz="1400" dirty="0"/>
-          </a:p>
-        </p:txBody>
-      </p:sp>
-      <p:sp>
-        <p:nvSpPr>
-          <p:cNvPr id="19" name="Text 17"/>
-          <p:cNvSpPr txBox="1"/>
-          <p:nvPr/>
-        </p:nvSpPr>
-        <p:spPr>
-          <a:xfrm>
-            <a:off x="4572000" y="4681728"/>
-            <a:ext cx="6583680" cy="960120"/>
-          </a:xfrm>
-          <a:prstGeom prst="rect">
-            <a:avLst/>
-          </a:prstGeom>
-          <a:noFill/>
-          <a:ln/>
-        </p:spPr>
-        <p:txBody>
-          <a:bodyPr wrap="square" lIns="0" tIns="0" rIns="0" bIns="0" rtlCol="0" anchor="ctr"/>
-          <a:lstStyle/>
-          <a:p>
-            <a:pPr indent="0" marL="0">
-              <a:buNone/>
-            </a:pPr>
-            <a:r>
-              <a:rPr lang="en-US" sz="1150" dirty="0">
-                <a:solidFill>
-                  <a:srgbClr val="5B6472"/>
-                </a:solidFill>
-                <a:latin typeface="Calibri" pitchFamily="34" charset="0"/>
-                <a:ea typeface="Calibri" pitchFamily="34" charset="-122"/>
-                <a:cs typeface="Calibri" pitchFamily="34" charset="-120"/>
-              </a:rPr>
-              <a:t>ログイン状態でトップページを見ると、フォロー中の人の活動(Star・Push等)が流れてくる。ここから面白いプロジェクトや小さなIssue/PRに触れていくのが自然な入り口</a:t>
-            </a:r>
-            <a:endParaRPr lang="en-US" sz="1150" dirty="0"/>
-          </a:p>
-        </p:txBody>
-      </p:sp>
-      <p:sp>
-        <p:nvSpPr>
-          <p:cNvPr id="20" name="Text 18"/>
-          <p:cNvSpPr txBox="1"/>
-          <p:nvPr/>
-        </p:nvSpPr>
-        <p:spPr>
-          <a:xfrm>
-            <a:off x="548640" y="6400800"/>
-            <a:ext cx="10424160" cy="320040"/>
-          </a:xfrm>
-          <a:prstGeom prst="rect">
-            <a:avLst/>
-          </a:prstGeom>
-          <a:noFill/>
-          <a:ln/>
-        </p:spPr>
-        <p:txBody>
-          <a:bodyPr wrap="square" lIns="0" tIns="0" rIns="0" bIns="0" rtlCol="0" anchor="ctr"/>
-          <a:lstStyle/>
-          <a:p>
-            <a:pPr indent="0" marL="0">
-              <a:buNone/>
-            </a:pPr>
-            <a:r>
-              <a:rPr lang="en-US" sz="1000" i="1" dirty="0">
-                <a:solidFill>
-                  <a:srgbClr val="5B6472"/>
-                </a:solidFill>
-                <a:latin typeface="Calibri" pitchFamily="34" charset="0"/>
-                <a:ea typeface="Calibri" pitchFamily="34" charset="-122"/>
-                <a:cs typeface="Calibri" pitchFamily="34" charset="-120"/>
-              </a:rPr>
-              <a:t>出典: 個人ブログ記事(2013年)。Follow/Star/News Feedという基本メカニズム自体は現在も変わっていない</a:t>
-            </a:r>
-            <a:endParaRPr lang="en-US" sz="1000" dirty="0"/>
-          </a:p>
-        </p:txBody>
-      </p:sp>
-      <p:sp>
-        <p:nvSpPr>
-          <p:cNvPr id="21" name="Text 19"/>
           <p:cNvSpPr txBox="1"/>
           <p:nvPr/>
         </p:nvSpPr>
@@ -9050,6 +9611,742 @@
 <file path=ppt/slides/slide6.xml><?xml version="1.0" encoding="utf-8"?>
 <p:sld xmlns:a="http://schemas.openxmlformats.org/drawingml/2006/main" xmlns:r="http://schemas.openxmlformats.org/officeDocument/2006/relationships" xmlns:p="http://schemas.openxmlformats.org/presentationml/2006/main">
   <p:cSld name="Slide 6">
+    <p:bg>
+      <p:bgPr>
+        <a:solidFill>
+          <a:srgbClr val="F5F6F8"/>
+        </a:solidFill>
+      </p:bgPr>
+    </p:bg>
+    <p:spTree>
+      <p:nvGrpSpPr>
+        <p:cNvPr id="1" name=""/>
+        <p:cNvGrpSpPr/>
+        <p:nvPr/>
+      </p:nvGrpSpPr>
+      <p:grpSpPr>
+        <a:xfrm>
+          <a:off x="0" y="0"/>
+          <a:ext cx="0" cy="0"/>
+          <a:chOff x="0" y="0"/>
+          <a:chExt cx="0" cy="0"/>
+        </a:xfrm>
+      </p:grpSpPr>
+      <p:sp>
+        <p:nvSpPr>
+          <p:cNvPr id="2" name="Text 0"/>
+          <p:cNvSpPr txBox="1"/>
+          <p:nvPr/>
+        </p:nvSpPr>
+        <p:spPr>
+          <a:xfrm>
+            <a:off x="548640" y="457200"/>
+            <a:ext cx="731520" cy="731520"/>
+          </a:xfrm>
+          <a:prstGeom prst="rect">
+            <a:avLst/>
+          </a:prstGeom>
+          <a:noFill/>
+          <a:ln/>
+        </p:spPr>
+        <p:txBody>
+          <a:bodyPr wrap="square" lIns="0" tIns="0" rIns="0" bIns="0" rtlCol="0" anchor="ctr"/>
+          <a:lstStyle/>
+          <a:p>
+            <a:pPr indent="0" marL="0">
+              <a:buNone/>
+            </a:pPr>
+            <a:r>
+              <a:rPr lang="en-US" sz="2800" b="1" dirty="0">
+                <a:solidFill>
+                  <a:srgbClr val="B084F5"/>
+                </a:solidFill>
+                <a:latin typeface="Cambria" pitchFamily="34" charset="0"/>
+                <a:ea typeface="Cambria" pitchFamily="34" charset="-122"/>
+                <a:cs typeface="Cambria" pitchFamily="34" charset="-120"/>
+              </a:rPr>
+              <a:t>1</a:t>
+            </a:r>
+            <a:endParaRPr lang="en-US" sz="2800" dirty="0"/>
+          </a:p>
+        </p:txBody>
+      </p:sp>
+      <p:sp>
+        <p:nvSpPr>
+          <p:cNvPr id="3" name="Text 1"/>
+          <p:cNvSpPr txBox="1"/>
+          <p:nvPr/>
+        </p:nvSpPr>
+        <p:spPr>
+          <a:xfrm>
+            <a:off x="1280160" y="502920"/>
+            <a:ext cx="9784080" cy="640080"/>
+          </a:xfrm>
+          <a:prstGeom prst="rect">
+            <a:avLst/>
+          </a:prstGeom>
+          <a:noFill/>
+          <a:ln/>
+        </p:spPr>
+        <p:txBody>
+          <a:bodyPr wrap="square" lIns="0" tIns="0" rIns="0" bIns="0" rtlCol="0" anchor="ctr"/>
+          <a:lstStyle/>
+          <a:p>
+            <a:pPr indent="0" marL="0">
+              <a:buNone/>
+            </a:pPr>
+            <a:r>
+              <a:rPr lang="en-US" sz="2600" b="1" dirty="0">
+                <a:solidFill>
+                  <a:srgbClr val="1A1F26"/>
+                </a:solidFill>
+                <a:latin typeface="Cambria" pitchFamily="34" charset="0"/>
+                <a:ea typeface="Cambria" pitchFamily="34" charset="-122"/>
+                <a:cs typeface="Cambria" pitchFamily="34" charset="-120"/>
+              </a:rPr>
+              <a:t>初心者向け: まず慣れる4つの行動</a:t>
+            </a:r>
+            <a:endParaRPr lang="en-US" sz="2600" dirty="0"/>
+          </a:p>
+        </p:txBody>
+      </p:sp>
+      <p:sp>
+        <p:nvSpPr>
+          <p:cNvPr id="4" name="Shape 2"/>
+          <p:cNvSpPr/>
+          <p:nvPr/>
+        </p:nvSpPr>
+        <p:spPr>
+          <a:xfrm>
+            <a:off x="640080" y="1554480"/>
+            <a:ext cx="457200" cy="457200"/>
+          </a:xfrm>
+          <a:prstGeom prst="ellipse">
+            <a:avLst/>
+          </a:prstGeom>
+          <a:solidFill>
+            <a:srgbClr val="58D68D"/>
+          </a:solidFill>
+          <a:ln/>
+        </p:spPr>
+      </p:sp>
+      <p:sp>
+        <p:nvSpPr>
+          <p:cNvPr id="5" name="Text 3"/>
+          <p:cNvSpPr txBox="1"/>
+          <p:nvPr/>
+        </p:nvSpPr>
+        <p:spPr>
+          <a:xfrm>
+            <a:off x="640080" y="1554480"/>
+            <a:ext cx="457200" cy="457200"/>
+          </a:xfrm>
+          <a:prstGeom prst="rect">
+            <a:avLst/>
+          </a:prstGeom>
+          <a:noFill/>
+          <a:ln/>
+        </p:spPr>
+        <p:txBody>
+          <a:bodyPr wrap="square" lIns="0" tIns="0" rIns="0" bIns="0" rtlCol="0" anchor="ctr"/>
+          <a:lstStyle/>
+          <a:p>
+            <a:pPr algn="ctr" indent="0" marL="0">
+              <a:buNone/>
+            </a:pPr>
+            <a:r>
+              <a:rPr lang="en-US" sz="1400" b="1" dirty="0">
+                <a:solidFill>
+                  <a:srgbClr val="FFFFFF"/>
+                </a:solidFill>
+                <a:latin typeface="Calibri" pitchFamily="34" charset="0"/>
+                <a:ea typeface="Calibri" pitchFamily="34" charset="-122"/>
+                <a:cs typeface="Calibri" pitchFamily="34" charset="-120"/>
+              </a:rPr>
+              <a:t>1</a:t>
+            </a:r>
+            <a:endParaRPr lang="en-US" sz="1400" dirty="0"/>
+          </a:p>
+        </p:txBody>
+      </p:sp>
+      <p:sp>
+        <p:nvSpPr>
+          <p:cNvPr id="6" name="Text 4"/>
+          <p:cNvSpPr txBox="1"/>
+          <p:nvPr/>
+        </p:nvSpPr>
+        <p:spPr>
+          <a:xfrm>
+            <a:off x="1325880" y="1527048"/>
+            <a:ext cx="3108960" cy="502920"/>
+          </a:xfrm>
+          <a:prstGeom prst="rect">
+            <a:avLst/>
+          </a:prstGeom>
+          <a:noFill/>
+          <a:ln/>
+        </p:spPr>
+        <p:txBody>
+          <a:bodyPr wrap="square" lIns="0" tIns="0" rIns="0" bIns="0" rtlCol="0" anchor="t"/>
+          <a:lstStyle/>
+          <a:p>
+            <a:pPr indent="0" marL="0">
+              <a:buNone/>
+            </a:pPr>
+            <a:r>
+              <a:rPr lang="en-US" sz="1400" b="1" dirty="0">
+                <a:solidFill>
+                  <a:srgbClr val="1A1F26"/>
+                </a:solidFill>
+                <a:latin typeface="Calibri" pitchFamily="34" charset="0"/>
+                <a:ea typeface="Calibri" pitchFamily="34" charset="-122"/>
+                <a:cs typeface="Calibri" pitchFamily="34" charset="-120"/>
+              </a:rPr>
+              <a:t>アカウント作成</a:t>
+            </a:r>
+            <a:endParaRPr lang="en-US" sz="1400" dirty="0"/>
+          </a:p>
+        </p:txBody>
+      </p:sp>
+      <p:sp>
+        <p:nvSpPr>
+          <p:cNvPr id="7" name="Text 5"/>
+          <p:cNvSpPr txBox="1"/>
+          <p:nvPr/>
+        </p:nvSpPr>
+        <p:spPr>
+          <a:xfrm>
+            <a:off x="4572000" y="1527048"/>
+            <a:ext cx="6583680" cy="960120"/>
+          </a:xfrm>
+          <a:prstGeom prst="rect">
+            <a:avLst/>
+          </a:prstGeom>
+          <a:noFill/>
+          <a:ln/>
+        </p:spPr>
+        <p:txBody>
+          <a:bodyPr wrap="square" lIns="0" tIns="0" rIns="0" bIns="0" rtlCol="0" anchor="ctr"/>
+          <a:lstStyle/>
+          <a:p>
+            <a:pPr indent="0" marL="0">
+              <a:buNone/>
+            </a:pPr>
+            <a:r>
+              <a:rPr lang="en-US" sz="1150" dirty="0">
+                <a:solidFill>
+                  <a:srgbClr val="5B6472"/>
+                </a:solidFill>
+                <a:latin typeface="Calibri" pitchFamily="34" charset="0"/>
+                <a:ea typeface="Calibri" pitchFamily="34" charset="-122"/>
+                <a:cs typeface="Calibri" pitchFamily="34" charset="-120"/>
+              </a:rPr>
+              <a:t>GitHubトップの Sign up からアカウントを作る。まずはこれがないと何も始まらない</a:t>
+            </a:r>
+            <a:endParaRPr lang="en-US" sz="1150" dirty="0"/>
+          </a:p>
+        </p:txBody>
+      </p:sp>
+      <p:sp>
+        <p:nvSpPr>
+          <p:cNvPr id="8" name="Shape 6"/>
+          <p:cNvSpPr/>
+          <p:nvPr/>
+        </p:nvSpPr>
+        <p:spPr>
+          <a:xfrm>
+            <a:off x="640080" y="2606040"/>
+            <a:ext cx="457200" cy="457200"/>
+          </a:xfrm>
+          <a:prstGeom prst="ellipse">
+            <a:avLst/>
+          </a:prstGeom>
+          <a:solidFill>
+            <a:srgbClr val="58D68D"/>
+          </a:solidFill>
+          <a:ln/>
+        </p:spPr>
+      </p:sp>
+      <p:sp>
+        <p:nvSpPr>
+          <p:cNvPr id="9" name="Text 7"/>
+          <p:cNvSpPr txBox="1"/>
+          <p:nvPr/>
+        </p:nvSpPr>
+        <p:spPr>
+          <a:xfrm>
+            <a:off x="640080" y="2606040"/>
+            <a:ext cx="457200" cy="457200"/>
+          </a:xfrm>
+          <a:prstGeom prst="rect">
+            <a:avLst/>
+          </a:prstGeom>
+          <a:noFill/>
+          <a:ln/>
+        </p:spPr>
+        <p:txBody>
+          <a:bodyPr wrap="square" lIns="0" tIns="0" rIns="0" bIns="0" rtlCol="0" anchor="ctr"/>
+          <a:lstStyle/>
+          <a:p>
+            <a:pPr algn="ctr" indent="0" marL="0">
+              <a:buNone/>
+            </a:pPr>
+            <a:r>
+              <a:rPr lang="en-US" sz="1400" b="1" dirty="0">
+                <a:solidFill>
+                  <a:srgbClr val="FFFFFF"/>
+                </a:solidFill>
+                <a:latin typeface="Calibri" pitchFamily="34" charset="0"/>
+                <a:ea typeface="Calibri" pitchFamily="34" charset="-122"/>
+                <a:cs typeface="Calibri" pitchFamily="34" charset="-120"/>
+              </a:rPr>
+              <a:t>2</a:t>
+            </a:r>
+            <a:endParaRPr lang="en-US" sz="1400" dirty="0"/>
+          </a:p>
+        </p:txBody>
+      </p:sp>
+      <p:sp>
+        <p:nvSpPr>
+          <p:cNvPr id="10" name="Text 8"/>
+          <p:cNvSpPr txBox="1"/>
+          <p:nvPr/>
+        </p:nvSpPr>
+        <p:spPr>
+          <a:xfrm>
+            <a:off x="1325880" y="2578608"/>
+            <a:ext cx="3108960" cy="502920"/>
+          </a:xfrm>
+          <a:prstGeom prst="rect">
+            <a:avLst/>
+          </a:prstGeom>
+          <a:noFill/>
+          <a:ln/>
+        </p:spPr>
+        <p:txBody>
+          <a:bodyPr wrap="square" lIns="0" tIns="0" rIns="0" bIns="0" rtlCol="0" anchor="t"/>
+          <a:lstStyle/>
+          <a:p>
+            <a:pPr indent="0" marL="0">
+              <a:buNone/>
+            </a:pPr>
+            <a:r>
+              <a:rPr lang="en-US" sz="1400" b="1" dirty="0">
+                <a:solidFill>
+                  <a:srgbClr val="1A1F26"/>
+                </a:solidFill>
+                <a:latin typeface="Calibri" pitchFamily="34" charset="0"/>
+                <a:ea typeface="Calibri" pitchFamily="34" charset="-122"/>
+                <a:cs typeface="Calibri" pitchFamily="34" charset="-120"/>
+              </a:rPr>
+              <a:t>気になる人をフォロー</a:t>
+            </a:r>
+            <a:endParaRPr lang="en-US" sz="1400" dirty="0"/>
+          </a:p>
+        </p:txBody>
+      </p:sp>
+      <p:sp>
+        <p:nvSpPr>
+          <p:cNvPr id="11" name="Text 9"/>
+          <p:cNvSpPr txBox="1"/>
+          <p:nvPr/>
+        </p:nvSpPr>
+        <p:spPr>
+          <a:xfrm>
+            <a:off x="4572000" y="2578608"/>
+            <a:ext cx="6583680" cy="960120"/>
+          </a:xfrm>
+          <a:prstGeom prst="rect">
+            <a:avLst/>
+          </a:prstGeom>
+          <a:noFill/>
+          <a:ln/>
+        </p:spPr>
+        <p:txBody>
+          <a:bodyPr wrap="square" lIns="0" tIns="0" rIns="0" bIns="0" rtlCol="0" anchor="ctr"/>
+          <a:lstStyle/>
+          <a:p>
+            <a:pPr indent="0" marL="0">
+              <a:buNone/>
+            </a:pPr>
+            <a:r>
+              <a:rPr lang="en-US" sz="1150" dirty="0">
+                <a:solidFill>
+                  <a:srgbClr val="5B6472"/>
+                </a:solidFill>
+                <a:latin typeface="Calibri" pitchFamily="34" charset="0"/>
+                <a:ea typeface="Calibri" pitchFamily="34" charset="-122"/>
+                <a:cs typeface="Calibri" pitchFamily="34" charset="-120"/>
+              </a:rPr>
+              <a:t>フォロー返しは気にしなくてよい。フォローすると相手の活動がNews Feedに流れるようになる</a:t>
+            </a:r>
+            <a:endParaRPr lang="en-US" sz="1150" dirty="0"/>
+          </a:p>
+        </p:txBody>
+      </p:sp>
+      <p:sp>
+        <p:nvSpPr>
+          <p:cNvPr id="12" name="Shape 10"/>
+          <p:cNvSpPr/>
+          <p:nvPr/>
+        </p:nvSpPr>
+        <p:spPr>
+          <a:xfrm>
+            <a:off x="640080" y="3657600"/>
+            <a:ext cx="457200" cy="457200"/>
+          </a:xfrm>
+          <a:prstGeom prst="ellipse">
+            <a:avLst/>
+          </a:prstGeom>
+          <a:solidFill>
+            <a:srgbClr val="58D68D"/>
+          </a:solidFill>
+          <a:ln/>
+        </p:spPr>
+      </p:sp>
+      <p:sp>
+        <p:nvSpPr>
+          <p:cNvPr id="13" name="Text 11"/>
+          <p:cNvSpPr txBox="1"/>
+          <p:nvPr/>
+        </p:nvSpPr>
+        <p:spPr>
+          <a:xfrm>
+            <a:off x="640080" y="3657600"/>
+            <a:ext cx="457200" cy="457200"/>
+          </a:xfrm>
+          <a:prstGeom prst="rect">
+            <a:avLst/>
+          </a:prstGeom>
+          <a:noFill/>
+          <a:ln/>
+        </p:spPr>
+        <p:txBody>
+          <a:bodyPr wrap="square" lIns="0" tIns="0" rIns="0" bIns="0" rtlCol="0" anchor="ctr"/>
+          <a:lstStyle/>
+          <a:p>
+            <a:pPr algn="ctr" indent="0" marL="0">
+              <a:buNone/>
+            </a:pPr>
+            <a:r>
+              <a:rPr lang="en-US" sz="1400" b="1" dirty="0">
+                <a:solidFill>
+                  <a:srgbClr val="FFFFFF"/>
+                </a:solidFill>
+                <a:latin typeface="Calibri" pitchFamily="34" charset="0"/>
+                <a:ea typeface="Calibri" pitchFamily="34" charset="-122"/>
+                <a:cs typeface="Calibri" pitchFamily="34" charset="-120"/>
+              </a:rPr>
+              <a:t>3</a:t>
+            </a:r>
+            <a:endParaRPr lang="en-US" sz="1400" dirty="0"/>
+          </a:p>
+        </p:txBody>
+      </p:sp>
+      <p:sp>
+        <p:nvSpPr>
+          <p:cNvPr id="14" name="Text 12"/>
+          <p:cNvSpPr txBox="1"/>
+          <p:nvPr/>
+        </p:nvSpPr>
+        <p:spPr>
+          <a:xfrm>
+            <a:off x="1325880" y="3630168"/>
+            <a:ext cx="3108960" cy="502920"/>
+          </a:xfrm>
+          <a:prstGeom prst="rect">
+            <a:avLst/>
+          </a:prstGeom>
+          <a:noFill/>
+          <a:ln/>
+        </p:spPr>
+        <p:txBody>
+          <a:bodyPr wrap="square" lIns="0" tIns="0" rIns="0" bIns="0" rtlCol="0" anchor="t"/>
+          <a:lstStyle/>
+          <a:p>
+            <a:pPr indent="0" marL="0">
+              <a:buNone/>
+            </a:pPr>
+            <a:r>
+              <a:rPr lang="en-US" sz="1400" b="1" dirty="0">
+                <a:solidFill>
+                  <a:srgbClr val="1A1F26"/>
+                </a:solidFill>
+                <a:latin typeface="Calibri" pitchFamily="34" charset="0"/>
+                <a:ea typeface="Calibri" pitchFamily="34" charset="-122"/>
+                <a:cs typeface="Calibri" pitchFamily="34" charset="-120"/>
+              </a:rPr>
+              <a:t>気になるリポジトリにStar</a:t>
+            </a:r>
+            <a:endParaRPr lang="en-US" sz="1400" dirty="0"/>
+          </a:p>
+        </p:txBody>
+      </p:sp>
+      <p:sp>
+        <p:nvSpPr>
+          <p:cNvPr id="15" name="Text 13"/>
+          <p:cNvSpPr txBox="1"/>
+          <p:nvPr/>
+        </p:nvSpPr>
+        <p:spPr>
+          <a:xfrm>
+            <a:off x="4572000" y="3630168"/>
+            <a:ext cx="6583680" cy="960120"/>
+          </a:xfrm>
+          <a:prstGeom prst="rect">
+            <a:avLst/>
+          </a:prstGeom>
+          <a:noFill/>
+          <a:ln/>
+        </p:spPr>
+        <p:txBody>
+          <a:bodyPr wrap="square" lIns="0" tIns="0" rIns="0" bIns="0" rtlCol="0" anchor="ctr"/>
+          <a:lstStyle/>
+          <a:p>
+            <a:pPr indent="0" marL="0">
+              <a:buNone/>
+            </a:pPr>
+            <a:r>
+              <a:rPr lang="en-US" sz="1150" dirty="0">
+                <a:solidFill>
+                  <a:srgbClr val="5B6472"/>
+                </a:solidFill>
+                <a:latin typeface="Calibri" pitchFamily="34" charset="0"/>
+                <a:ea typeface="Calibri" pitchFamily="34" charset="-122"/>
+                <a:cs typeface="Calibri" pitchFamily="34" charset="-120"/>
+              </a:rPr>
+              <a:t>お気に入り登録のような機能。Starすると自分をフォローしている人の feed に流れ、そのリポジトリの露出が増える</a:t>
+            </a:r>
+            <a:endParaRPr lang="en-US" sz="1150" dirty="0"/>
+          </a:p>
+        </p:txBody>
+      </p:sp>
+      <p:sp>
+        <p:nvSpPr>
+          <p:cNvPr id="16" name="Shape 14"/>
+          <p:cNvSpPr/>
+          <p:nvPr/>
+        </p:nvSpPr>
+        <p:spPr>
+          <a:xfrm>
+            <a:off x="640080" y="4709160"/>
+            <a:ext cx="457200" cy="457200"/>
+          </a:xfrm>
+          <a:prstGeom prst="ellipse">
+            <a:avLst/>
+          </a:prstGeom>
+          <a:solidFill>
+            <a:srgbClr val="58D68D"/>
+          </a:solidFill>
+          <a:ln/>
+        </p:spPr>
+      </p:sp>
+      <p:sp>
+        <p:nvSpPr>
+          <p:cNvPr id="17" name="Text 15"/>
+          <p:cNvSpPr txBox="1"/>
+          <p:nvPr/>
+        </p:nvSpPr>
+        <p:spPr>
+          <a:xfrm>
+            <a:off x="640080" y="4709160"/>
+            <a:ext cx="457200" cy="457200"/>
+          </a:xfrm>
+          <a:prstGeom prst="rect">
+            <a:avLst/>
+          </a:prstGeom>
+          <a:noFill/>
+          <a:ln/>
+        </p:spPr>
+        <p:txBody>
+          <a:bodyPr wrap="square" lIns="0" tIns="0" rIns="0" bIns="0" rtlCol="0" anchor="ctr"/>
+          <a:lstStyle/>
+          <a:p>
+            <a:pPr algn="ctr" indent="0" marL="0">
+              <a:buNone/>
+            </a:pPr>
+            <a:r>
+              <a:rPr lang="en-US" sz="1400" b="1" dirty="0">
+                <a:solidFill>
+                  <a:srgbClr val="FFFFFF"/>
+                </a:solidFill>
+                <a:latin typeface="Calibri" pitchFamily="34" charset="0"/>
+                <a:ea typeface="Calibri" pitchFamily="34" charset="-122"/>
+                <a:cs typeface="Calibri" pitchFamily="34" charset="-120"/>
+              </a:rPr>
+              <a:t>4</a:t>
+            </a:r>
+            <a:endParaRPr lang="en-US" sz="1400" dirty="0"/>
+          </a:p>
+        </p:txBody>
+      </p:sp>
+      <p:sp>
+        <p:nvSpPr>
+          <p:cNvPr id="18" name="Text 16"/>
+          <p:cNvSpPr txBox="1"/>
+          <p:nvPr/>
+        </p:nvSpPr>
+        <p:spPr>
+          <a:xfrm>
+            <a:off x="1325880" y="4681728"/>
+            <a:ext cx="3108960" cy="502920"/>
+          </a:xfrm>
+          <a:prstGeom prst="rect">
+            <a:avLst/>
+          </a:prstGeom>
+          <a:noFill/>
+          <a:ln/>
+        </p:spPr>
+        <p:txBody>
+          <a:bodyPr wrap="square" lIns="0" tIns="0" rIns="0" bIns="0" rtlCol="0" anchor="t"/>
+          <a:lstStyle/>
+          <a:p>
+            <a:pPr indent="0" marL="0">
+              <a:buNone/>
+            </a:pPr>
+            <a:r>
+              <a:rPr lang="en-US" sz="1400" b="1" dirty="0">
+                <a:solidFill>
+                  <a:srgbClr val="1A1F26"/>
+                </a:solidFill>
+                <a:latin typeface="Calibri" pitchFamily="34" charset="0"/>
+                <a:ea typeface="Calibri" pitchFamily="34" charset="-122"/>
+                <a:cs typeface="Calibri" pitchFamily="34" charset="-120"/>
+              </a:rPr>
+              <a:t>News Feedを読む習慣</a:t>
+            </a:r>
+            <a:endParaRPr lang="en-US" sz="1400" dirty="0"/>
+          </a:p>
+        </p:txBody>
+      </p:sp>
+      <p:sp>
+        <p:nvSpPr>
+          <p:cNvPr id="19" name="Text 17"/>
+          <p:cNvSpPr txBox="1"/>
+          <p:nvPr/>
+        </p:nvSpPr>
+        <p:spPr>
+          <a:xfrm>
+            <a:off x="4572000" y="4681728"/>
+            <a:ext cx="6583680" cy="960120"/>
+          </a:xfrm>
+          <a:prstGeom prst="rect">
+            <a:avLst/>
+          </a:prstGeom>
+          <a:noFill/>
+          <a:ln/>
+        </p:spPr>
+        <p:txBody>
+          <a:bodyPr wrap="square" lIns="0" tIns="0" rIns="0" bIns="0" rtlCol="0" anchor="ctr"/>
+          <a:lstStyle/>
+          <a:p>
+            <a:pPr indent="0" marL="0">
+              <a:buNone/>
+            </a:pPr>
+            <a:r>
+              <a:rPr lang="en-US" sz="1150" dirty="0">
+                <a:solidFill>
+                  <a:srgbClr val="5B6472"/>
+                </a:solidFill>
+                <a:latin typeface="Calibri" pitchFamily="34" charset="0"/>
+                <a:ea typeface="Calibri" pitchFamily="34" charset="-122"/>
+                <a:cs typeface="Calibri" pitchFamily="34" charset="-120"/>
+              </a:rPr>
+              <a:t>ログイン状態でトップページを見ると、フォロー中の人の活動(Star・Push等)が流れてくる。ここから面白いプロジェクトや小さなIssue/PRに触れていくのが自然な入り口</a:t>
+            </a:r>
+            <a:endParaRPr lang="en-US" sz="1150" dirty="0"/>
+          </a:p>
+        </p:txBody>
+      </p:sp>
+      <p:sp>
+        <p:nvSpPr>
+          <p:cNvPr id="20" name="Text 18"/>
+          <p:cNvSpPr txBox="1"/>
+          <p:nvPr/>
+        </p:nvSpPr>
+        <p:spPr>
+          <a:xfrm>
+            <a:off x="548640" y="6400800"/>
+            <a:ext cx="10424160" cy="320040"/>
+          </a:xfrm>
+          <a:prstGeom prst="rect">
+            <a:avLst/>
+          </a:prstGeom>
+          <a:noFill/>
+          <a:ln/>
+        </p:spPr>
+        <p:txBody>
+          <a:bodyPr wrap="square" lIns="0" tIns="0" rIns="0" bIns="0" rtlCol="0" anchor="ctr"/>
+          <a:lstStyle/>
+          <a:p>
+            <a:pPr indent="0" marL="0">
+              <a:buNone/>
+            </a:pPr>
+            <a:r>
+              <a:rPr lang="en-US" sz="1000" i="1" dirty="0">
+                <a:solidFill>
+                  <a:srgbClr val="5B6472"/>
+                </a:solidFill>
+                <a:latin typeface="Calibri" pitchFamily="34" charset="0"/>
+                <a:ea typeface="Calibri" pitchFamily="34" charset="-122"/>
+                <a:cs typeface="Calibri" pitchFamily="34" charset="-120"/>
+              </a:rPr>
+              <a:t>出典: 個人ブログ記事(2013年)。Follow/Star/News Feedという基本メカニズム自体は現在も変わっていない</a:t>
+            </a:r>
+            <a:endParaRPr lang="en-US" sz="1000" dirty="0"/>
+          </a:p>
+        </p:txBody>
+      </p:sp>
+      <p:sp>
+        <p:nvSpPr>
+          <p:cNvPr id="21" name="Text 19"/>
+          <p:cNvSpPr txBox="1"/>
+          <p:nvPr/>
+        </p:nvSpPr>
+        <p:spPr>
+          <a:xfrm>
+            <a:off x="11521440" y="6492240"/>
+            <a:ext cx="457200" cy="274320"/>
+          </a:xfrm>
+          <a:prstGeom prst="rect">
+            <a:avLst/>
+          </a:prstGeom>
+          <a:noFill/>
+          <a:ln/>
+        </p:spPr>
+        <p:txBody>
+          <a:bodyPr wrap="square" lIns="0" tIns="0" rIns="0" bIns="0" rtlCol="0" anchor="ctr"/>
+          <a:lstStyle/>
+          <a:p>
+            <a:pPr algn="r" indent="0" marL="0">
+              <a:buNone/>
+            </a:pPr>
+            <a:r>
+              <a:rPr lang="en-US" sz="1000" dirty="0">
+                <a:solidFill>
+                  <a:srgbClr val="5B6472"/>
+                </a:solidFill>
+                <a:latin typeface="Calibri" pitchFamily="34" charset="0"/>
+                <a:ea typeface="Calibri" pitchFamily="34" charset="-122"/>
+                <a:cs typeface="Calibri" pitchFamily="34" charset="-120"/>
+              </a:rPr>
+              <a:t>6</a:t>
+            </a:r>
+            <a:endParaRPr lang="en-US" sz="1000" dirty="0"/>
+          </a:p>
+        </p:txBody>
+      </p:sp>
+    </p:spTree>
+  </p:cSld>
+  <p:clrMapOvr>
+    <a:masterClrMapping/>
+  </p:clrMapOvr>
+</p:sld>
+</file>
+
+<file path=ppt/slides/slide7.xml><?xml version="1.0" encoding="utf-8"?>
+<p:sld xmlns:a="http://schemas.openxmlformats.org/drawingml/2006/main" xmlns:r="http://schemas.openxmlformats.org/officeDocument/2006/relationships" xmlns:p="http://schemas.openxmlformats.org/presentationml/2006/main">
+  <p:cSld name="Slide 7">
     <p:bg>
       <p:bgPr>
         <a:solidFill>
@@ -9551,7 +10848,7 @@
                 <a:ea typeface="Calibri" pitchFamily="34" charset="-122"/>
                 <a:cs typeface="Calibri" pitchFamily="34" charset="-120"/>
               </a:rPr>
-              <a:t>6</a:t>
+              <a:t>7</a:t>
             </a:r>
             <a:endParaRPr lang="en-US" sz="1000" dirty="0"/>
           </a:p>
@@ -9565,9 +10862,9 @@
 </p:sld>
 </file>
 
-<file path=ppt/slides/slide7.xml><?xml version="1.0" encoding="utf-8"?>
+<file path=ppt/slides/slide8.xml><?xml version="1.0" encoding="utf-8"?>
 <p:sld xmlns:a="http://schemas.openxmlformats.org/drawingml/2006/main" xmlns:r="http://schemas.openxmlformats.org/officeDocument/2006/relationships" xmlns:p="http://schemas.openxmlformats.org/presentationml/2006/main">
-  <p:cSld name="Slide 7">
+  <p:cSld name="Slide 8">
     <p:bg>
       <p:bgPr>
         <a:solidFill>
@@ -10180,7 +11477,7 @@
                 <a:ea typeface="Calibri" pitchFamily="34" charset="-122"/>
                 <a:cs typeface="Calibri" pitchFamily="34" charset="-120"/>
               </a:rPr>
-              <a:t>7</a:t>
+              <a:t>8</a:t>
             </a:r>
             <a:endParaRPr lang="en-US" sz="1000" dirty="0"/>
           </a:p>
@@ -10194,9 +11491,9 @@
 </p:sld>
 </file>
 
-<file path=ppt/slides/slide8.xml><?xml version="1.0" encoding="utf-8"?>
+<file path=ppt/slides/slide9.xml><?xml version="1.0" encoding="utf-8"?>
 <p:sld xmlns:a="http://schemas.openxmlformats.org/drawingml/2006/main" xmlns:r="http://schemas.openxmlformats.org/officeDocument/2006/relationships" xmlns:p="http://schemas.openxmlformats.org/presentationml/2006/main">
-  <p:cSld name="Slide 8">
+  <p:cSld name="Slide 9">
     <p:bg>
       <p:bgPr>
         <a:solidFill>
@@ -10569,714 +11866,6 @@
       <p:sp>
         <p:nvSpPr>
           <p:cNvPr id="9" name="Text 7"/>
-          <p:cNvSpPr txBox="1"/>
-          <p:nvPr/>
-        </p:nvSpPr>
-        <p:spPr>
-          <a:xfrm>
-            <a:off x="11521440" y="6492240"/>
-            <a:ext cx="457200" cy="274320"/>
-          </a:xfrm>
-          <a:prstGeom prst="rect">
-            <a:avLst/>
-          </a:prstGeom>
-          <a:noFill/>
-          <a:ln/>
-        </p:spPr>
-        <p:txBody>
-          <a:bodyPr wrap="square" lIns="0" tIns="0" rIns="0" bIns="0" rtlCol="0" anchor="ctr"/>
-          <a:lstStyle/>
-          <a:p>
-            <a:pPr algn="r" indent="0" marL="0">
-              <a:buNone/>
-            </a:pPr>
-            <a:r>
-              <a:rPr lang="en-US" sz="1000" dirty="0">
-                <a:solidFill>
-                  <a:srgbClr val="5B6472"/>
-                </a:solidFill>
-                <a:latin typeface="Calibri" pitchFamily="34" charset="0"/>
-                <a:ea typeface="Calibri" pitchFamily="34" charset="-122"/>
-                <a:cs typeface="Calibri" pitchFamily="34" charset="-120"/>
-              </a:rPr>
-              <a:t>8</a:t>
-            </a:r>
-            <a:endParaRPr lang="en-US" sz="1000" dirty="0"/>
-          </a:p>
-        </p:txBody>
-      </p:sp>
-    </p:spTree>
-  </p:cSld>
-  <p:clrMapOvr>
-    <a:masterClrMapping/>
-  </p:clrMapOvr>
-</p:sld>
-</file>
-
-<file path=ppt/slides/slide9.xml><?xml version="1.0" encoding="utf-8"?>
-<p:sld xmlns:a="http://schemas.openxmlformats.org/drawingml/2006/main" xmlns:r="http://schemas.openxmlformats.org/officeDocument/2006/relationships" xmlns:p="http://schemas.openxmlformats.org/presentationml/2006/main">
-  <p:cSld name="Slide 9">
-    <p:bg>
-      <p:bgPr>
-        <a:solidFill>
-          <a:srgbClr val="F5F6F8"/>
-        </a:solidFill>
-      </p:bgPr>
-    </p:bg>
-    <p:spTree>
-      <p:nvGrpSpPr>
-        <p:cNvPr id="1" name=""/>
-        <p:cNvGrpSpPr/>
-        <p:nvPr/>
-      </p:nvGrpSpPr>
-      <p:grpSpPr>
-        <a:xfrm>
-          <a:off x="0" y="0"/>
-          <a:ext cx="0" cy="0"/>
-          <a:chOff x="0" y="0"/>
-          <a:chExt cx="0" cy="0"/>
-        </a:xfrm>
-      </p:grpSpPr>
-      <p:sp>
-        <p:nvSpPr>
-          <p:cNvPr id="2" name="Text 0"/>
-          <p:cNvSpPr txBox="1"/>
-          <p:nvPr/>
-        </p:nvSpPr>
-        <p:spPr>
-          <a:xfrm>
-            <a:off x="548640" y="457200"/>
-            <a:ext cx="731520" cy="731520"/>
-          </a:xfrm>
-          <a:prstGeom prst="rect">
-            <a:avLst/>
-          </a:prstGeom>
-          <a:noFill/>
-          <a:ln/>
-        </p:spPr>
-        <p:txBody>
-          <a:bodyPr wrap="square" lIns="0" tIns="0" rIns="0" bIns="0" rtlCol="0" anchor="ctr"/>
-          <a:lstStyle/>
-          <a:p>
-            <a:pPr indent="0" marL="0">
-              <a:buNone/>
-            </a:pPr>
-            <a:r>
-              <a:rPr lang="en-US" sz="2800" b="1" dirty="0">
-                <a:solidFill>
-                  <a:srgbClr val="B084F5"/>
-                </a:solidFill>
-                <a:latin typeface="Cambria" pitchFamily="34" charset="0"/>
-                <a:ea typeface="Cambria" pitchFamily="34" charset="-122"/>
-                <a:cs typeface="Cambria" pitchFamily="34" charset="-120"/>
-              </a:rPr>
-              <a:t>4</a:t>
-            </a:r>
-            <a:endParaRPr lang="en-US" sz="2800" dirty="0"/>
-          </a:p>
-        </p:txBody>
-      </p:sp>
-      <p:sp>
-        <p:nvSpPr>
-          <p:cNvPr id="3" name="Text 1"/>
-          <p:cNvSpPr txBox="1"/>
-          <p:nvPr/>
-        </p:nvSpPr>
-        <p:spPr>
-          <a:xfrm>
-            <a:off x="1280160" y="502920"/>
-            <a:ext cx="9784080" cy="640080"/>
-          </a:xfrm>
-          <a:prstGeom prst="rect">
-            <a:avLst/>
-          </a:prstGeom>
-          <a:noFill/>
-          <a:ln/>
-        </p:spPr>
-        <p:txBody>
-          <a:bodyPr wrap="square" lIns="0" tIns="0" rIns="0" bIns="0" rtlCol="0" anchor="ctr"/>
-          <a:lstStyle/>
-          <a:p>
-            <a:pPr indent="0" marL="0">
-              <a:buNone/>
-            </a:pPr>
-            <a:r>
-              <a:rPr lang="en-US" sz="2600" b="1" dirty="0">
-                <a:solidFill>
-                  <a:srgbClr val="1A1F26"/>
-                </a:solidFill>
-                <a:latin typeface="Cambria" pitchFamily="34" charset="0"/>
-                <a:ea typeface="Cambria" pitchFamily="34" charset="-122"/>
-                <a:cs typeface="Cambria" pitchFamily="34" charset="-120"/>
-              </a:rPr>
-              <a:t>貢献先の実例: badges/shields (shields.io)</a:t>
-            </a:r>
-            <a:endParaRPr lang="en-US" sz="2600" dirty="0"/>
-          </a:p>
-        </p:txBody>
-      </p:sp>
-      <p:sp>
-        <p:nvSpPr>
-          <p:cNvPr id="4" name="Text 2"/>
-          <p:cNvSpPr txBox="1"/>
-          <p:nvPr/>
-        </p:nvSpPr>
-        <p:spPr>
-          <a:xfrm>
-            <a:off x="548640" y="1417320"/>
-            <a:ext cx="10607040" cy="365760"/>
-          </a:xfrm>
-          <a:prstGeom prst="rect">
-            <a:avLst/>
-          </a:prstGeom>
-          <a:noFill/>
-          <a:ln/>
-        </p:spPr>
-        <p:txBody>
-          <a:bodyPr wrap="square" lIns="0" tIns="0" rIns="0" bIns="0" rtlCol="0" anchor="ctr"/>
-          <a:lstStyle/>
-          <a:p>
-            <a:pPr indent="0" marL="0">
-              <a:buNone/>
-            </a:pPr>
-            <a:r>
-              <a:rPr lang="en-US" sz="1250" i="1" dirty="0">
-                <a:solidFill>
-                  <a:srgbClr val="5B6472"/>
-                </a:solidFill>
-                <a:latin typeface="Calibri" pitchFamily="34" charset="0"/>
-                <a:ea typeface="Calibri" pitchFamily="34" charset="-122"/>
-                <a:cs typeface="Calibri" pitchFamily="34" charset="-120"/>
-              </a:rPr>
-              <a:t>READMEでよく見るバッジサービス「shields.io」も、実は誰でも貢献できるOSS</a:t>
-            </a:r>
-            <a:endParaRPr lang="en-US" sz="1250" dirty="0"/>
-          </a:p>
-        </p:txBody>
-      </p:sp>
-      <p:sp>
-        <p:nvSpPr>
-          <p:cNvPr id="5" name="Shape 3"/>
-          <p:cNvSpPr/>
-          <p:nvPr/>
-        </p:nvSpPr>
-        <p:spPr>
-          <a:xfrm>
-            <a:off x="548640" y="1920240"/>
-            <a:ext cx="3429000" cy="1371600"/>
-          </a:xfrm>
-          <a:prstGeom prst="roundRect">
-            <a:avLst>
-              <a:gd name="adj" fmla="val 6667"/>
-            </a:avLst>
-          </a:prstGeom>
-          <a:solidFill>
-            <a:srgbClr val="FFFFFF"/>
-          </a:solidFill>
-          <a:ln w="12700">
-            <a:solidFill>
-              <a:srgbClr val="E3E6EA"/>
-            </a:solidFill>
-            <a:prstDash val="solid"/>
-          </a:ln>
-          <a:effectLst>
-            <a:outerShdw sx="100000" sy="100000" kx="0" ky="0" algn="bl" rotWithShape="0" blurRad="76200" dist="25400" dir="5400000">
-              <a:srgbClr val="000000">
-                <a:alpha val="10000"/>
-              </a:srgbClr>
-            </a:outerShdw>
-          </a:effectLst>
-        </p:spPr>
-      </p:sp>
-      <p:sp>
-        <p:nvSpPr>
-          <p:cNvPr id="6" name="Text 4"/>
-          <p:cNvSpPr txBox="1"/>
-          <p:nvPr/>
-        </p:nvSpPr>
-        <p:spPr>
-          <a:xfrm>
-            <a:off x="731520" y="2057400"/>
-            <a:ext cx="3063240" cy="594360"/>
-          </a:xfrm>
-          <a:prstGeom prst="rect">
-            <a:avLst/>
-          </a:prstGeom>
-          <a:noFill/>
-          <a:ln/>
-        </p:spPr>
-        <p:txBody>
-          <a:bodyPr wrap="square" lIns="0" tIns="0" rIns="0" bIns="0" rtlCol="0" anchor="ctr"/>
-          <a:lstStyle/>
-          <a:p>
-            <a:pPr indent="0" marL="0">
-              <a:buNone/>
-            </a:pPr>
-            <a:r>
-              <a:rPr lang="en-US" sz="2400" b="1" dirty="0">
-                <a:solidFill>
-                  <a:srgbClr val="B084F5"/>
-                </a:solidFill>
-                <a:latin typeface="Calibri" pitchFamily="34" charset="0"/>
-                <a:ea typeface="Calibri" pitchFamily="34" charset="-122"/>
-                <a:cs typeface="Calibri" pitchFamily="34" charset="-120"/>
-              </a:rPr>
-              <a:t>27.2k</a:t>
-            </a:r>
-            <a:endParaRPr lang="en-US" sz="2400" dirty="0"/>
-          </a:p>
-        </p:txBody>
-      </p:sp>
-      <p:sp>
-        <p:nvSpPr>
-          <p:cNvPr id="7" name="Text 5"/>
-          <p:cNvSpPr txBox="1"/>
-          <p:nvPr/>
-        </p:nvSpPr>
-        <p:spPr>
-          <a:xfrm>
-            <a:off x="731520" y="2697480"/>
-            <a:ext cx="3063240" cy="457200"/>
-          </a:xfrm>
-          <a:prstGeom prst="rect">
-            <a:avLst/>
-          </a:prstGeom>
-          <a:noFill/>
-          <a:ln/>
-        </p:spPr>
-        <p:txBody>
-          <a:bodyPr wrap="square" lIns="0" tIns="0" rIns="0" bIns="0" rtlCol="0" anchor="ctr"/>
-          <a:lstStyle/>
-          <a:p>
-            <a:pPr indent="0" marL="0">
-              <a:buNone/>
-            </a:pPr>
-            <a:r>
-              <a:rPr lang="en-US" sz="1150" dirty="0">
-                <a:solidFill>
-                  <a:srgbClr val="5B6472"/>
-                </a:solidFill>
-                <a:latin typeface="Calibri" pitchFamily="34" charset="0"/>
-                <a:ea typeface="Calibri" pitchFamily="34" charset="-122"/>
-                <a:cs typeface="Calibri" pitchFamily="34" charset="-120"/>
-              </a:rPr>
-              <a:t>GitHub Stars</a:t>
-            </a:r>
-            <a:endParaRPr lang="en-US" sz="1150" dirty="0"/>
-          </a:p>
-        </p:txBody>
-      </p:sp>
-      <p:sp>
-        <p:nvSpPr>
-          <p:cNvPr id="8" name="Shape 6"/>
-          <p:cNvSpPr/>
-          <p:nvPr/>
-        </p:nvSpPr>
-        <p:spPr>
-          <a:xfrm>
-            <a:off x="4206240" y="1920240"/>
-            <a:ext cx="3429000" cy="1371600"/>
-          </a:xfrm>
-          <a:prstGeom prst="roundRect">
-            <a:avLst>
-              <a:gd name="adj" fmla="val 6667"/>
-            </a:avLst>
-          </a:prstGeom>
-          <a:solidFill>
-            <a:srgbClr val="FFFFFF"/>
-          </a:solidFill>
-          <a:ln w="12700">
-            <a:solidFill>
-              <a:srgbClr val="E3E6EA"/>
-            </a:solidFill>
-            <a:prstDash val="solid"/>
-          </a:ln>
-          <a:effectLst>
-            <a:outerShdw sx="100000" sy="100000" kx="0" ky="0" algn="bl" rotWithShape="0" blurRad="76200" dist="25400" dir="5400000">
-              <a:srgbClr val="000000">
-                <a:alpha val="10000"/>
-              </a:srgbClr>
-            </a:outerShdw>
-          </a:effectLst>
-        </p:spPr>
-      </p:sp>
-      <p:sp>
-        <p:nvSpPr>
-          <p:cNvPr id="9" name="Text 7"/>
-          <p:cNvSpPr txBox="1"/>
-          <p:nvPr/>
-        </p:nvSpPr>
-        <p:spPr>
-          <a:xfrm>
-            <a:off x="4389120" y="2057400"/>
-            <a:ext cx="3063240" cy="594360"/>
-          </a:xfrm>
-          <a:prstGeom prst="rect">
-            <a:avLst/>
-          </a:prstGeom>
-          <a:noFill/>
-          <a:ln/>
-        </p:spPr>
-        <p:txBody>
-          <a:bodyPr wrap="square" lIns="0" tIns="0" rIns="0" bIns="0" rtlCol="0" anchor="ctr"/>
-          <a:lstStyle/>
-          <a:p>
-            <a:pPr indent="0" marL="0">
-              <a:buNone/>
-            </a:pPr>
-            <a:r>
-              <a:rPr lang="en-US" sz="2400" b="1" dirty="0">
-                <a:solidFill>
-                  <a:srgbClr val="B084F5"/>
-                </a:solidFill>
-                <a:latin typeface="Calibri" pitchFamily="34" charset="0"/>
-                <a:ea typeface="Calibri" pitchFamily="34" charset="-122"/>
-                <a:cs typeface="Calibri" pitchFamily="34" charset="-120"/>
-              </a:rPr>
-              <a:t>1.6B+/月</a:t>
-            </a:r>
-            <a:endParaRPr lang="en-US" sz="2400" dirty="0"/>
-          </a:p>
-        </p:txBody>
-      </p:sp>
-      <p:sp>
-        <p:nvSpPr>
-          <p:cNvPr id="10" name="Text 8"/>
-          <p:cNvSpPr txBox="1"/>
-          <p:nvPr/>
-        </p:nvSpPr>
-        <p:spPr>
-          <a:xfrm>
-            <a:off x="4389120" y="2697480"/>
-            <a:ext cx="3063240" cy="457200"/>
-          </a:xfrm>
-          <a:prstGeom prst="rect">
-            <a:avLst/>
-          </a:prstGeom>
-          <a:noFill/>
-          <a:ln/>
-        </p:spPr>
-        <p:txBody>
-          <a:bodyPr wrap="square" lIns="0" tIns="0" rIns="0" bIns="0" rtlCol="0" anchor="ctr"/>
-          <a:lstStyle/>
-          <a:p>
-            <a:pPr indent="0" marL="0">
-              <a:buNone/>
-            </a:pPr>
-            <a:r>
-              <a:rPr lang="en-US" sz="1150" dirty="0">
-                <a:solidFill>
-                  <a:srgbClr val="5B6472"/>
-                </a:solidFill>
-                <a:latin typeface="Calibri" pitchFamily="34" charset="0"/>
-                <a:ea typeface="Calibri" pitchFamily="34" charset="-122"/>
-                <a:cs typeface="Calibri" pitchFamily="34" charset="-120"/>
-              </a:rPr>
-              <a:t>配信バッジ画像数</a:t>
-            </a:r>
-            <a:endParaRPr lang="en-US" sz="1150" dirty="0"/>
-          </a:p>
-        </p:txBody>
-      </p:sp>
-      <p:sp>
-        <p:nvSpPr>
-          <p:cNvPr id="11" name="Shape 9"/>
-          <p:cNvSpPr/>
-          <p:nvPr/>
-        </p:nvSpPr>
-        <p:spPr>
-          <a:xfrm>
-            <a:off x="7863840" y="1920240"/>
-            <a:ext cx="3429000" cy="1371600"/>
-          </a:xfrm>
-          <a:prstGeom prst="roundRect">
-            <a:avLst>
-              <a:gd name="adj" fmla="val 6667"/>
-            </a:avLst>
-          </a:prstGeom>
-          <a:solidFill>
-            <a:srgbClr val="FFFFFF"/>
-          </a:solidFill>
-          <a:ln w="12700">
-            <a:solidFill>
-              <a:srgbClr val="E3E6EA"/>
-            </a:solidFill>
-            <a:prstDash val="solid"/>
-          </a:ln>
-          <a:effectLst>
-            <a:outerShdw sx="100000" sy="100000" kx="0" ky="0" algn="bl" rotWithShape="0" blurRad="76200" dist="25400" dir="5400000">
-              <a:srgbClr val="000000">
-                <a:alpha val="10000"/>
-              </a:srgbClr>
-            </a:outerShdw>
-          </a:effectLst>
-        </p:spPr>
-      </p:sp>
-      <p:sp>
-        <p:nvSpPr>
-          <p:cNvPr id="12" name="Text 10"/>
-          <p:cNvSpPr txBox="1"/>
-          <p:nvPr/>
-        </p:nvSpPr>
-        <p:spPr>
-          <a:xfrm>
-            <a:off x="8046720" y="2057400"/>
-            <a:ext cx="3063240" cy="594360"/>
-          </a:xfrm>
-          <a:prstGeom prst="rect">
-            <a:avLst/>
-          </a:prstGeom>
-          <a:noFill/>
-          <a:ln/>
-        </p:spPr>
-        <p:txBody>
-          <a:bodyPr wrap="square" lIns="0" tIns="0" rIns="0" bIns="0" rtlCol="0" anchor="ctr"/>
-          <a:lstStyle/>
-          <a:p>
-            <a:pPr indent="0" marL="0">
-              <a:buNone/>
-            </a:pPr>
-            <a:r>
-              <a:rPr lang="en-US" sz="2400" b="1" dirty="0">
-                <a:solidFill>
-                  <a:srgbClr val="B084F5"/>
-                </a:solidFill>
-                <a:latin typeface="Calibri" pitchFamily="34" charset="0"/>
-                <a:ea typeface="Calibri" pitchFamily="34" charset="-122"/>
-                <a:cs typeface="Calibri" pitchFamily="34" charset="-120"/>
-              </a:rPr>
-              <a:t>MIT / Apache 2.0</a:t>
-            </a:r>
-            <a:endParaRPr lang="en-US" sz="2400" dirty="0"/>
-          </a:p>
-        </p:txBody>
-      </p:sp>
-      <p:sp>
-        <p:nvSpPr>
-          <p:cNvPr id="13" name="Text 11"/>
-          <p:cNvSpPr txBox="1"/>
-          <p:nvPr/>
-        </p:nvSpPr>
-        <p:spPr>
-          <a:xfrm>
-            <a:off x="8046720" y="2697480"/>
-            <a:ext cx="3063240" cy="457200"/>
-          </a:xfrm>
-          <a:prstGeom prst="rect">
-            <a:avLst/>
-          </a:prstGeom>
-          <a:noFill/>
-          <a:ln/>
-        </p:spPr>
-        <p:txBody>
-          <a:bodyPr wrap="square" lIns="0" tIns="0" rIns="0" bIns="0" rtlCol="0" anchor="ctr"/>
-          <a:lstStyle/>
-          <a:p>
-            <a:pPr indent="0" marL="0">
-              <a:buNone/>
-            </a:pPr>
-            <a:r>
-              <a:rPr lang="en-US" sz="1150" dirty="0">
-                <a:solidFill>
-                  <a:srgbClr val="5B6472"/>
-                </a:solidFill>
-                <a:latin typeface="Calibri" pitchFamily="34" charset="0"/>
-                <a:ea typeface="Calibri" pitchFamily="34" charset="-122"/>
-                <a:cs typeface="Calibri" pitchFamily="34" charset="-120"/>
-              </a:rPr>
-              <a:t>デュアルライセンス</a:t>
-            </a:r>
-            <a:endParaRPr lang="en-US" sz="1150" dirty="0"/>
-          </a:p>
-        </p:txBody>
-      </p:sp>
-      <p:sp>
-        <p:nvSpPr>
-          <p:cNvPr id="14" name="Text 12"/>
-          <p:cNvSpPr txBox="1"/>
-          <p:nvPr/>
-        </p:nvSpPr>
-        <p:spPr>
-          <a:xfrm>
-            <a:off x="548640" y="3566160"/>
-            <a:ext cx="10607040" cy="365760"/>
-          </a:xfrm>
-          <a:prstGeom prst="rect">
-            <a:avLst/>
-          </a:prstGeom>
-          <a:noFill/>
-          <a:ln/>
-        </p:spPr>
-        <p:txBody>
-          <a:bodyPr wrap="square" lIns="0" tIns="0" rIns="0" bIns="0" rtlCol="0" anchor="ctr"/>
-          <a:lstStyle/>
-          <a:p>
-            <a:pPr indent="0" marL="0">
-              <a:buNone/>
-            </a:pPr>
-            <a:r>
-              <a:rPr lang="en-US" sz="1400" b="1" dirty="0">
-                <a:solidFill>
-                  <a:srgbClr val="1A1F26"/>
-                </a:solidFill>
-                <a:latin typeface="Calibri" pitchFamily="34" charset="0"/>
-                <a:ea typeface="Calibri" pitchFamily="34" charset="-122"/>
-                <a:cs typeface="Calibri" pitchFamily="34" charset="-120"/>
-              </a:rPr>
-              <a:t>貢献のしやすさ(実際に確認できる情報)</a:t>
-            </a:r>
-            <a:endParaRPr lang="en-US" sz="1400" dirty="0"/>
-          </a:p>
-        </p:txBody>
-      </p:sp>
-      <p:sp>
-        <p:nvSpPr>
-          <p:cNvPr id="15" name="Text 13"/>
-          <p:cNvSpPr txBox="1"/>
-          <p:nvPr/>
-        </p:nvSpPr>
-        <p:spPr>
-          <a:xfrm>
-            <a:off x="548640" y="3977640"/>
-            <a:ext cx="10607040" cy="1737360"/>
-          </a:xfrm>
-          <a:prstGeom prst="rect">
-            <a:avLst/>
-          </a:prstGeom>
-          <a:noFill/>
-          <a:ln/>
-        </p:spPr>
-        <p:txBody>
-          <a:bodyPr wrap="square" lIns="0" tIns="0" rIns="0" bIns="0" rtlCol="0" anchor="ctr"/>
-          <a:lstStyle/>
-          <a:p>
-            <a:pPr marL="342900" indent="-342900">
-              <a:spcAft>
-                <a:spcPts val="600"/>
-              </a:spcAft>
-              <a:buSzPct val="100000"/>
-              <a:buChar char="•"/>
-            </a:pPr>
-            <a:r>
-              <a:rPr lang="en-US" sz="1250" dirty="0">
-                <a:solidFill>
-                  <a:srgbClr val="5B6472"/>
-                </a:solidFill>
-                <a:latin typeface="Calibri" pitchFamily="34" charset="0"/>
-                <a:ea typeface="Calibri" pitchFamily="34" charset="-122"/>
-                <a:cs typeface="Calibri" pitchFamily="34" charset="-120"/>
-              </a:rPr>
-              <a:t>CONTRIBUTING.md に貢献ガイドラインが整備されている</a:t>
-            </a:r>
-            <a:endParaRPr lang="en-US" sz="1250" dirty="0"/>
-          </a:p>
-          <a:p>
-            <a:pPr marL="342900" indent="-342900">
-              <a:spcAft>
-                <a:spcPts val="600"/>
-              </a:spcAft>
-              <a:buSzPct val="100000"/>
-              <a:buChar char="•"/>
-            </a:pPr>
-            <a:r>
-              <a:rPr lang="en-US" sz="1250" dirty="0">
-                <a:solidFill>
-                  <a:srgbClr val="5B6472"/>
-                </a:solidFill>
-                <a:latin typeface="Calibri" pitchFamily="34" charset="0"/>
-                <a:ea typeface="Calibri" pitchFamily="34" charset="-122"/>
-                <a:cs typeface="Calibri" pitchFamily="34" charset="-120"/>
-              </a:rPr>
-              <a:t>good-first-issue ラベルの付いた初心者向けタスクがある</a:t>
-            </a:r>
-            <a:endParaRPr lang="en-US" sz="1250" dirty="0"/>
-          </a:p>
-          <a:p>
-            <a:pPr marL="342900" indent="-342900">
-              <a:spcAft>
-                <a:spcPts val="600"/>
-              </a:spcAft>
-              <a:buSzPct val="100000"/>
-              <a:buChar char="•"/>
-            </a:pPr>
-            <a:r>
-              <a:rPr lang="en-US" sz="1250" dirty="0">
-                <a:solidFill>
-                  <a:srgbClr val="5B6472"/>
-                </a:solidFill>
-                <a:latin typeface="Calibri" pitchFamily="34" charset="0"/>
-                <a:ea typeface="Calibri" pitchFamily="34" charset="-122"/>
-                <a:cs typeface="Calibri" pitchFamily="34" charset="-120"/>
-              </a:rPr>
-              <a:t>新しいバッジ追加のチュートリアルも用意されている(VS Code・Vue.js・Bootstrap等の著名プロジェクトも利用)</a:t>
-            </a:r>
-            <a:endParaRPr lang="en-US" sz="1250" dirty="0"/>
-          </a:p>
-          <a:p>
-            <a:pPr marL="342900" indent="-342900">
-              <a:spcAft>
-                <a:spcPts val="600"/>
-              </a:spcAft>
-              <a:buSzPct val="100000"/>
-              <a:buChar char="•"/>
-            </a:pPr>
-            <a:r>
-              <a:rPr lang="en-US" sz="1250" dirty="0">
-                <a:solidFill>
-                  <a:srgbClr val="5B6472"/>
-                </a:solidFill>
-                <a:latin typeface="Calibri" pitchFamily="34" charset="0"/>
-                <a:ea typeface="Calibri" pitchFamily="34" charset="-122"/>
-                <a:cs typeface="Calibri" pitchFamily="34" charset="-120"/>
-              </a:rPr>
-              <a:t>SECURITY.md による脆弱性報告ポリシーも整備済み(セキュリティ関連の貢献も歓迎)</a:t>
-            </a:r>
-            <a:endParaRPr lang="en-US" sz="1250" dirty="0"/>
-          </a:p>
-        </p:txBody>
-      </p:sp>
-      <p:sp>
-        <p:nvSpPr>
-          <p:cNvPr id="16" name="Text 14"/>
-          <p:cNvSpPr txBox="1"/>
-          <p:nvPr/>
-        </p:nvSpPr>
-        <p:spPr>
-          <a:xfrm>
-            <a:off x="548640" y="6400800"/>
-            <a:ext cx="10424160" cy="320040"/>
-          </a:xfrm>
-          <a:prstGeom prst="rect">
-            <a:avLst/>
-          </a:prstGeom>
-          <a:noFill/>
-          <a:ln/>
-        </p:spPr>
-        <p:txBody>
-          <a:bodyPr wrap="square" lIns="0" tIns="0" rIns="0" bIns="0" rtlCol="0" anchor="ctr"/>
-          <a:lstStyle/>
-          <a:p>
-            <a:pPr indent="0" marL="0">
-              <a:buNone/>
-            </a:pPr>
-            <a:r>
-              <a:rPr lang="en-US" sz="1000" i="1" dirty="0">
-                <a:solidFill>
-                  <a:srgbClr val="5B6472"/>
-                </a:solidFill>
-                <a:latin typeface="Calibri" pitchFamily="34" charset="0"/>
-                <a:ea typeface="Calibri" pitchFamily="34" charset="-122"/>
-                <a:cs typeface="Calibri" pitchFamily="34" charset="-120"/>
-              </a:rPr>
-              <a:t>出典: github.com/badges/shields(取得時点のスター数。日々変動するため参考値)</a:t>
-            </a:r>
-            <a:endParaRPr lang="en-US" sz="1000" dirty="0"/>
-          </a:p>
-        </p:txBody>
-      </p:sp>
-      <p:sp>
-        <p:nvSpPr>
-          <p:cNvPr id="17" name="Text 15"/>
           <p:cNvSpPr txBox="1"/>
           <p:nvPr/>
         </p:nvSpPr>
